--- a/figs/DIYfigures_pp.pptx
+++ b/figs/DIYfigures_pp.pptx
@@ -7,6 +7,9 @@
   <p:sldIdLst>
     <p:sldId id="256" r:id="rId2"/>
     <p:sldId id="257" r:id="rId3"/>
+    <p:sldId id="258" r:id="rId4"/>
+    <p:sldId id="259" r:id="rId5"/>
+    <p:sldId id="260" r:id="rId6"/>
   </p:sldIdLst>
   <p:sldSz cx="12801600" cy="9601200" type="A3"/>
   <p:notesSz cx="6858000" cy="9144000"/>
@@ -244,7 +247,7 @@
           <a:p>
             <a:fld id="{DBD89380-344E-284F-BE0F-D796858BF56F}" type="datetimeFigureOut">
               <a:rPr kumimoji="1" lang="ja-JP" altLang="en-US" smtClean="0"/>
-              <a:t>2026/2/2</a:t>
+              <a:t>2026/4/23</a:t>
             </a:fld>
             <a:endParaRPr kumimoji="1" lang="ja-JP" altLang="en-US"/>
           </a:p>
@@ -446,7 +449,7 @@
           <a:p>
             <a:fld id="{DBD89380-344E-284F-BE0F-D796858BF56F}" type="datetimeFigureOut">
               <a:rPr kumimoji="1" lang="ja-JP" altLang="en-US" smtClean="0"/>
-              <a:t>2026/2/2</a:t>
+              <a:t>2026/4/23</a:t>
             </a:fld>
             <a:endParaRPr kumimoji="1" lang="ja-JP" altLang="en-US"/>
           </a:p>
@@ -658,7 +661,7 @@
           <a:p>
             <a:fld id="{DBD89380-344E-284F-BE0F-D796858BF56F}" type="datetimeFigureOut">
               <a:rPr kumimoji="1" lang="ja-JP" altLang="en-US" smtClean="0"/>
-              <a:t>2026/2/2</a:t>
+              <a:t>2026/4/23</a:t>
             </a:fld>
             <a:endParaRPr kumimoji="1" lang="ja-JP" altLang="en-US"/>
           </a:p>
@@ -860,7 +863,7 @@
           <a:p>
             <a:fld id="{DBD89380-344E-284F-BE0F-D796858BF56F}" type="datetimeFigureOut">
               <a:rPr kumimoji="1" lang="ja-JP" altLang="en-US" smtClean="0"/>
-              <a:t>2026/2/2</a:t>
+              <a:t>2026/4/23</a:t>
             </a:fld>
             <a:endParaRPr kumimoji="1" lang="ja-JP" altLang="en-US"/>
           </a:p>
@@ -1104,7 +1107,7 @@
           <a:p>
             <a:fld id="{DBD89380-344E-284F-BE0F-D796858BF56F}" type="datetimeFigureOut">
               <a:rPr kumimoji="1" lang="ja-JP" altLang="en-US" smtClean="0"/>
-              <a:t>2026/2/2</a:t>
+              <a:t>2026/4/23</a:t>
             </a:fld>
             <a:endParaRPr kumimoji="1" lang="ja-JP" altLang="en-US"/>
           </a:p>
@@ -1400,7 +1403,7 @@
           <a:p>
             <a:fld id="{DBD89380-344E-284F-BE0F-D796858BF56F}" type="datetimeFigureOut">
               <a:rPr kumimoji="1" lang="ja-JP" altLang="en-US" smtClean="0"/>
-              <a:t>2026/2/2</a:t>
+              <a:t>2026/4/23</a:t>
             </a:fld>
             <a:endParaRPr kumimoji="1" lang="ja-JP" altLang="en-US"/>
           </a:p>
@@ -1831,7 +1834,7 @@
           <a:p>
             <a:fld id="{DBD89380-344E-284F-BE0F-D796858BF56F}" type="datetimeFigureOut">
               <a:rPr kumimoji="1" lang="ja-JP" altLang="en-US" smtClean="0"/>
-              <a:t>2026/2/2</a:t>
+              <a:t>2026/4/23</a:t>
             </a:fld>
             <a:endParaRPr kumimoji="1" lang="ja-JP" altLang="en-US"/>
           </a:p>
@@ -1949,7 +1952,7 @@
           <a:p>
             <a:fld id="{DBD89380-344E-284F-BE0F-D796858BF56F}" type="datetimeFigureOut">
               <a:rPr kumimoji="1" lang="ja-JP" altLang="en-US" smtClean="0"/>
-              <a:t>2026/2/2</a:t>
+              <a:t>2026/4/23</a:t>
             </a:fld>
             <a:endParaRPr kumimoji="1" lang="ja-JP" altLang="en-US"/>
           </a:p>
@@ -2044,7 +2047,7 @@
           <a:p>
             <a:fld id="{DBD89380-344E-284F-BE0F-D796858BF56F}" type="datetimeFigureOut">
               <a:rPr kumimoji="1" lang="ja-JP" altLang="en-US" smtClean="0"/>
-              <a:t>2026/2/2</a:t>
+              <a:t>2026/4/23</a:t>
             </a:fld>
             <a:endParaRPr kumimoji="1" lang="ja-JP" altLang="en-US"/>
           </a:p>
@@ -2353,7 +2356,7 @@
           <a:p>
             <a:fld id="{DBD89380-344E-284F-BE0F-D796858BF56F}" type="datetimeFigureOut">
               <a:rPr kumimoji="1" lang="ja-JP" altLang="en-US" smtClean="0"/>
-              <a:t>2026/2/2</a:t>
+              <a:t>2026/4/23</a:t>
             </a:fld>
             <a:endParaRPr kumimoji="1" lang="ja-JP" altLang="en-US"/>
           </a:p>
@@ -2610,7 +2613,7 @@
           <a:p>
             <a:fld id="{DBD89380-344E-284F-BE0F-D796858BF56F}" type="datetimeFigureOut">
               <a:rPr kumimoji="1" lang="ja-JP" altLang="en-US" smtClean="0"/>
-              <a:t>2026/2/2</a:t>
+              <a:t>2026/4/23</a:t>
             </a:fld>
             <a:endParaRPr kumimoji="1" lang="ja-JP" altLang="en-US"/>
           </a:p>
@@ -2855,7 +2858,7 @@
           <a:p>
             <a:fld id="{DBD89380-344E-284F-BE0F-D796858BF56F}" type="datetimeFigureOut">
               <a:rPr kumimoji="1" lang="ja-JP" altLang="en-US" smtClean="0"/>
-              <a:t>2026/2/2</a:t>
+              <a:t>2026/4/23</a:t>
             </a:fld>
             <a:endParaRPr kumimoji="1" lang="ja-JP" altLang="en-US"/>
           </a:p>
@@ -8698,6 +8701,2476 @@
 </p:sld>
 </file>
 
+<file path=ppt/slides/slide3.xml><?xml version="1.0" encoding="utf-8"?>
+<p:sld xmlns:a="http://schemas.openxmlformats.org/drawingml/2006/main" xmlns:r="http://schemas.openxmlformats.org/officeDocument/2006/relationships" xmlns:p="http://schemas.openxmlformats.org/presentationml/2006/main">
+  <p:cSld>
+    <p:spTree>
+      <p:nvGrpSpPr>
+        <p:cNvPr id="1" name=""/>
+        <p:cNvGrpSpPr/>
+        <p:nvPr/>
+      </p:nvGrpSpPr>
+      <p:grpSpPr>
+        <a:xfrm>
+          <a:off x="0" y="0"/>
+          <a:ext cx="0" cy="0"/>
+          <a:chOff x="0" y="0"/>
+          <a:chExt cx="0" cy="0"/>
+        </a:xfrm>
+      </p:grpSpPr>
+      <p:grpSp>
+        <p:nvGrpSpPr>
+          <p:cNvPr id="36" name="グループ化 35">
+            <a:extLst>
+              <a:ext uri="{FF2B5EF4-FFF2-40B4-BE49-F238E27FC236}">
+                <a16:creationId xmlns:a16="http://schemas.microsoft.com/office/drawing/2014/main" id="{67B2F218-CF48-A4FE-0926-7966C26D5D71}"/>
+              </a:ext>
+            </a:extLst>
+          </p:cNvPr>
+          <p:cNvGrpSpPr/>
+          <p:nvPr/>
+        </p:nvGrpSpPr>
+        <p:grpSpPr>
+          <a:xfrm>
+            <a:off x="178633" y="961086"/>
+            <a:ext cx="12338153" cy="6910369"/>
+            <a:chOff x="178633" y="961086"/>
+            <a:chExt cx="12338153" cy="6910369"/>
+          </a:xfrm>
+        </p:grpSpPr>
+        <p:sp>
+          <p:nvSpPr>
+            <p:cNvPr id="3" name="テキスト ボックス 2">
+              <a:extLst>
+                <a:ext uri="{FF2B5EF4-FFF2-40B4-BE49-F238E27FC236}">
+                  <a16:creationId xmlns:a16="http://schemas.microsoft.com/office/drawing/2014/main" id="{E3E9CCE8-934C-5797-F658-F8C156A06852}"/>
+                </a:ext>
+              </a:extLst>
+            </p:cNvPr>
+            <p:cNvSpPr txBox="1"/>
+            <p:nvPr/>
+          </p:nvSpPr>
+          <p:spPr>
+            <a:xfrm>
+              <a:off x="3964898" y="4321417"/>
+              <a:ext cx="3147936" cy="954107"/>
+            </a:xfrm>
+            <a:prstGeom prst="rect">
+              <a:avLst/>
+            </a:prstGeom>
+            <a:solidFill>
+              <a:schemeClr val="bg1"/>
+            </a:solidFill>
+            <a:ln w="47625">
+              <a:solidFill>
+                <a:schemeClr val="tx1"/>
+              </a:solidFill>
+            </a:ln>
+          </p:spPr>
+          <p:txBody>
+            <a:bodyPr wrap="square">
+              <a:spAutoFit/>
+            </a:bodyPr>
+            <a:lstStyle/>
+            <a:p>
+              <a:pPr algn="ctr"/>
+              <a:r>
+                <a:rPr kumimoji="1" lang="ja-JP" altLang="en-US" sz="3600">
+                  <a:latin typeface="Hiragino Kaku Gothic StdN W8" panose="020B0800000000000000" pitchFamily="34" charset="-128"/>
+                  <a:ea typeface="Hiragino Kaku Gothic StdN W8" panose="020B0800000000000000" pitchFamily="34" charset="-128"/>
+                </a:rPr>
+                <a:t>政党帰属意識</a:t>
+              </a:r>
+              <a:br>
+                <a:rPr kumimoji="1" lang="en-US" altLang="ja-JP" sz="3600" dirty="0">
+                  <a:latin typeface="Hiragino Kaku Gothic StdN W8" panose="020B0800000000000000" pitchFamily="34" charset="-128"/>
+                  <a:ea typeface="Hiragino Kaku Gothic StdN W8" panose="020B0800000000000000" pitchFamily="34" charset="-128"/>
+                </a:rPr>
+              </a:br>
+              <a:r>
+                <a:rPr kumimoji="1" lang="en-US" altLang="ja-JP" sz="2000" dirty="0">
+                  <a:latin typeface="Hiragino Kaku Gothic StdN W8" panose="020B0800000000000000" pitchFamily="34" charset="-128"/>
+                  <a:ea typeface="Hiragino Kaku Gothic StdN W8" panose="020B0800000000000000" pitchFamily="34" charset="-128"/>
+                </a:rPr>
+                <a:t>Party Identification</a:t>
+              </a:r>
+              <a:endParaRPr kumimoji="1" lang="en-US" altLang="ja-JP" sz="3600" dirty="0">
+                <a:latin typeface="Hiragino Kaku Gothic StdN W8" panose="020B0800000000000000" pitchFamily="34" charset="-128"/>
+                <a:ea typeface="Hiragino Kaku Gothic StdN W8" panose="020B0800000000000000" pitchFamily="34" charset="-128"/>
+              </a:endParaRPr>
+            </a:p>
+          </p:txBody>
+        </p:sp>
+        <p:sp>
+          <p:nvSpPr>
+            <p:cNvPr id="5" name="テキスト ボックス 4">
+              <a:extLst>
+                <a:ext uri="{FF2B5EF4-FFF2-40B4-BE49-F238E27FC236}">
+                  <a16:creationId xmlns:a16="http://schemas.microsoft.com/office/drawing/2014/main" id="{50FAC6CF-EE1D-0ABB-8044-737746F6E59E}"/>
+                </a:ext>
+              </a:extLst>
+            </p:cNvPr>
+            <p:cNvSpPr txBox="1"/>
+            <p:nvPr/>
+          </p:nvSpPr>
+          <p:spPr>
+            <a:xfrm>
+              <a:off x="7965083" y="6772629"/>
+              <a:ext cx="2284128" cy="707886"/>
+            </a:xfrm>
+            <a:prstGeom prst="rect">
+              <a:avLst/>
+            </a:prstGeom>
+            <a:solidFill>
+              <a:schemeClr val="bg1"/>
+            </a:solidFill>
+            <a:ln w="19050">
+              <a:solidFill>
+                <a:schemeClr val="tx1"/>
+              </a:solidFill>
+            </a:ln>
+          </p:spPr>
+          <p:txBody>
+            <a:bodyPr wrap="square">
+              <a:spAutoFit/>
+            </a:bodyPr>
+            <a:lstStyle/>
+            <a:p>
+              <a:pPr algn="ctr"/>
+              <a:r>
+                <a:rPr kumimoji="1" lang="ja-JP" altLang="en-US" sz="4000">
+                  <a:latin typeface="Hiragino Kaku Gothic StdN W8" panose="020B0800000000000000" pitchFamily="34" charset="-128"/>
+                  <a:ea typeface="Hiragino Kaku Gothic StdN W8" panose="020B0800000000000000" pitchFamily="34" charset="-128"/>
+                </a:rPr>
+                <a:t>争点態度</a:t>
+              </a:r>
+              <a:endParaRPr kumimoji="1" lang="en-US" altLang="ja-JP" sz="4000" dirty="0">
+                <a:latin typeface="Hiragino Kaku Gothic StdN W8" panose="020B0800000000000000" pitchFamily="34" charset="-128"/>
+                <a:ea typeface="Hiragino Kaku Gothic StdN W8" panose="020B0800000000000000" pitchFamily="34" charset="-128"/>
+              </a:endParaRPr>
+            </a:p>
+          </p:txBody>
+        </p:sp>
+        <p:sp>
+          <p:nvSpPr>
+            <p:cNvPr id="6" name="テキスト ボックス 5">
+              <a:extLst>
+                <a:ext uri="{FF2B5EF4-FFF2-40B4-BE49-F238E27FC236}">
+                  <a16:creationId xmlns:a16="http://schemas.microsoft.com/office/drawing/2014/main" id="{D328B354-126B-74B5-6D7A-D55D0585D06C}"/>
+                </a:ext>
+              </a:extLst>
+            </p:cNvPr>
+            <p:cNvSpPr txBox="1"/>
+            <p:nvPr/>
+          </p:nvSpPr>
+          <p:spPr>
+            <a:xfrm>
+              <a:off x="7792697" y="2320341"/>
+              <a:ext cx="2628901" cy="646331"/>
+            </a:xfrm>
+            <a:prstGeom prst="rect">
+              <a:avLst/>
+            </a:prstGeom>
+            <a:solidFill>
+              <a:schemeClr val="bg1"/>
+            </a:solidFill>
+            <a:ln w="31750">
+              <a:solidFill>
+                <a:schemeClr val="tx1"/>
+              </a:solidFill>
+            </a:ln>
+          </p:spPr>
+          <p:txBody>
+            <a:bodyPr wrap="square">
+              <a:spAutoFit/>
+            </a:bodyPr>
+            <a:lstStyle/>
+            <a:p>
+              <a:pPr algn="ctr"/>
+              <a:r>
+                <a:rPr kumimoji="1" lang="ja-JP" altLang="en-US" sz="3600">
+                  <a:latin typeface="Hiragino Kaku Gothic StdN W8" panose="020B0800000000000000" pitchFamily="34" charset="-128"/>
+                  <a:ea typeface="Hiragino Kaku Gothic StdN W8" panose="020B0800000000000000" pitchFamily="34" charset="-128"/>
+                </a:rPr>
+                <a:t>候補者属性</a:t>
+              </a:r>
+              <a:endParaRPr kumimoji="1" lang="en-US" altLang="ja-JP" sz="3600" dirty="0">
+                <a:latin typeface="Hiragino Kaku Gothic StdN W8" panose="020B0800000000000000" pitchFamily="34" charset="-128"/>
+                <a:ea typeface="Hiragino Kaku Gothic StdN W8" panose="020B0800000000000000" pitchFamily="34" charset="-128"/>
+              </a:endParaRPr>
+            </a:p>
+          </p:txBody>
+        </p:sp>
+        <p:sp>
+          <p:nvSpPr>
+            <p:cNvPr id="7" name="テキスト ボックス 6">
+              <a:extLst>
+                <a:ext uri="{FF2B5EF4-FFF2-40B4-BE49-F238E27FC236}">
+                  <a16:creationId xmlns:a16="http://schemas.microsoft.com/office/drawing/2014/main" id="{1D167309-68AF-0BC1-04E7-F5E1BA1AA59C}"/>
+                </a:ext>
+              </a:extLst>
+            </p:cNvPr>
+            <p:cNvSpPr txBox="1"/>
+            <p:nvPr/>
+          </p:nvSpPr>
+          <p:spPr>
+            <a:xfrm>
+              <a:off x="11047750" y="4413753"/>
+              <a:ext cx="1469036" cy="769441"/>
+            </a:xfrm>
+            <a:prstGeom prst="rect">
+              <a:avLst/>
+            </a:prstGeom>
+            <a:solidFill>
+              <a:schemeClr val="bg1"/>
+            </a:solidFill>
+            <a:ln w="25400">
+              <a:solidFill>
+                <a:schemeClr val="tx1"/>
+              </a:solidFill>
+            </a:ln>
+          </p:spPr>
+          <p:txBody>
+            <a:bodyPr wrap="square">
+              <a:spAutoFit/>
+            </a:bodyPr>
+            <a:lstStyle/>
+            <a:p>
+              <a:pPr algn="ctr"/>
+              <a:r>
+                <a:rPr kumimoji="1" lang="ja-JP" altLang="en-US" sz="4400">
+                  <a:latin typeface="Hiragino Kaku Gothic StdN W8" panose="020B0800000000000000" pitchFamily="34" charset="-128"/>
+                  <a:ea typeface="Hiragino Kaku Gothic StdN W8" panose="020B0800000000000000" pitchFamily="34" charset="-128"/>
+                </a:rPr>
+                <a:t>投票</a:t>
+              </a:r>
+              <a:endParaRPr kumimoji="1" lang="en-US" altLang="ja-JP" sz="4400" dirty="0">
+                <a:latin typeface="Hiragino Kaku Gothic StdN W8" panose="020B0800000000000000" pitchFamily="34" charset="-128"/>
+                <a:ea typeface="Hiragino Kaku Gothic StdN W8" panose="020B0800000000000000" pitchFamily="34" charset="-128"/>
+              </a:endParaRPr>
+            </a:p>
+          </p:txBody>
+        </p:sp>
+        <p:sp>
+          <p:nvSpPr>
+            <p:cNvPr id="8" name="テキスト ボックス 7">
+              <a:extLst>
+                <a:ext uri="{FF2B5EF4-FFF2-40B4-BE49-F238E27FC236}">
+                  <a16:creationId xmlns:a16="http://schemas.microsoft.com/office/drawing/2014/main" id="{AB1EEC84-0B87-50B1-CB9B-4020BAD1E782}"/>
+                </a:ext>
+              </a:extLst>
+            </p:cNvPr>
+            <p:cNvSpPr txBox="1"/>
+            <p:nvPr/>
+          </p:nvSpPr>
+          <p:spPr>
+            <a:xfrm>
+              <a:off x="418006" y="3048931"/>
+              <a:ext cx="1888762" cy="3970318"/>
+            </a:xfrm>
+            <a:prstGeom prst="rect">
+              <a:avLst/>
+            </a:prstGeom>
+            <a:solidFill>
+              <a:schemeClr val="bg1"/>
+            </a:solidFill>
+            <a:ln w="12700" cmpd="dbl">
+              <a:solidFill>
+                <a:schemeClr val="tx1"/>
+              </a:solidFill>
+              <a:prstDash val="solid"/>
+            </a:ln>
+          </p:spPr>
+          <p:txBody>
+            <a:bodyPr wrap="square">
+              <a:spAutoFit/>
+            </a:bodyPr>
+            <a:lstStyle/>
+            <a:p>
+              <a:r>
+                <a:rPr kumimoji="1" lang="ja-JP" altLang="en-US" sz="3600">
+                  <a:latin typeface="Hiragino Sans W4" panose="020B0400000000000000" pitchFamily="34" charset="-128"/>
+                  <a:ea typeface="Hiragino Sans W4" panose="020B0400000000000000" pitchFamily="34" charset="-128"/>
+                </a:rPr>
+                <a:t>年齢</a:t>
+              </a:r>
+              <a:endParaRPr kumimoji="1" lang="en-US" altLang="ja-JP" sz="3600" dirty="0">
+                <a:latin typeface="Hiragino Sans W4" panose="020B0400000000000000" pitchFamily="34" charset="-128"/>
+                <a:ea typeface="Hiragino Sans W4" panose="020B0400000000000000" pitchFamily="34" charset="-128"/>
+              </a:endParaRPr>
+            </a:p>
+            <a:p>
+              <a:r>
+                <a:rPr kumimoji="1" lang="ja-JP" altLang="en-US" sz="3600">
+                  <a:latin typeface="Hiragino Sans W4" panose="020B0400000000000000" pitchFamily="34" charset="-128"/>
+                  <a:ea typeface="Hiragino Sans W4" panose="020B0400000000000000" pitchFamily="34" charset="-128"/>
+                </a:rPr>
+                <a:t>学歴</a:t>
+              </a:r>
+              <a:endParaRPr kumimoji="1" lang="en-US" altLang="ja-JP" sz="3600" dirty="0">
+                <a:latin typeface="Hiragino Sans W4" panose="020B0400000000000000" pitchFamily="34" charset="-128"/>
+                <a:ea typeface="Hiragino Sans W4" panose="020B0400000000000000" pitchFamily="34" charset="-128"/>
+              </a:endParaRPr>
+            </a:p>
+            <a:p>
+              <a:r>
+                <a:rPr kumimoji="1" lang="ja-JP" altLang="en-US" sz="3600">
+                  <a:latin typeface="Hiragino Sans W4" panose="020B0400000000000000" pitchFamily="34" charset="-128"/>
+                  <a:ea typeface="Hiragino Sans W4" panose="020B0400000000000000" pitchFamily="34" charset="-128"/>
+                </a:rPr>
+                <a:t>職業</a:t>
+              </a:r>
+              <a:endParaRPr kumimoji="1" lang="en-US" altLang="ja-JP" sz="3600" dirty="0">
+                <a:latin typeface="Hiragino Sans W4" panose="020B0400000000000000" pitchFamily="34" charset="-128"/>
+                <a:ea typeface="Hiragino Sans W4" panose="020B0400000000000000" pitchFamily="34" charset="-128"/>
+              </a:endParaRPr>
+            </a:p>
+            <a:p>
+              <a:r>
+                <a:rPr kumimoji="1" lang="ja-JP" altLang="en-US" sz="3600">
+                  <a:latin typeface="Hiragino Sans W4" panose="020B0400000000000000" pitchFamily="34" charset="-128"/>
+                  <a:ea typeface="Hiragino Sans W4" panose="020B0400000000000000" pitchFamily="34" charset="-128"/>
+                </a:rPr>
+                <a:t>宗教</a:t>
+              </a:r>
+              <a:endParaRPr kumimoji="1" lang="en-US" altLang="ja-JP" sz="3600" dirty="0">
+                <a:latin typeface="Hiragino Sans W4" panose="020B0400000000000000" pitchFamily="34" charset="-128"/>
+                <a:ea typeface="Hiragino Sans W4" panose="020B0400000000000000" pitchFamily="34" charset="-128"/>
+              </a:endParaRPr>
+            </a:p>
+            <a:p>
+              <a:r>
+                <a:rPr kumimoji="1" lang="ja-JP" altLang="en-US" sz="3600">
+                  <a:latin typeface="Hiragino Sans W4" panose="020B0400000000000000" pitchFamily="34" charset="-128"/>
+                  <a:ea typeface="Hiragino Sans W4" panose="020B0400000000000000" pitchFamily="34" charset="-128"/>
+                </a:rPr>
+                <a:t>人種</a:t>
+              </a:r>
+              <a:endParaRPr kumimoji="1" lang="en-US" altLang="ja-JP" sz="3600" dirty="0">
+                <a:latin typeface="Hiragino Sans W4" panose="020B0400000000000000" pitchFamily="34" charset="-128"/>
+                <a:ea typeface="Hiragino Sans W4" panose="020B0400000000000000" pitchFamily="34" charset="-128"/>
+              </a:endParaRPr>
+            </a:p>
+            <a:p>
+              <a:r>
+                <a:rPr kumimoji="1" lang="ja-JP" altLang="en-US" sz="3600">
+                  <a:latin typeface="Hiragino Sans W4" panose="020B0400000000000000" pitchFamily="34" charset="-128"/>
+                  <a:ea typeface="Hiragino Sans W4" panose="020B0400000000000000" pitchFamily="34" charset="-128"/>
+                </a:rPr>
+                <a:t>階層</a:t>
+              </a:r>
+              <a:endParaRPr kumimoji="1" lang="en-US" altLang="ja-JP" sz="3600" dirty="0">
+                <a:latin typeface="Hiragino Sans W4" panose="020B0400000000000000" pitchFamily="34" charset="-128"/>
+                <a:ea typeface="Hiragino Sans W4" panose="020B0400000000000000" pitchFamily="34" charset="-128"/>
+              </a:endParaRPr>
+            </a:p>
+            <a:p>
+              <a:r>
+                <a:rPr kumimoji="1" lang="en-US" altLang="ja-JP" sz="3600" dirty="0">
+                  <a:latin typeface="Hiragino Sans W4" panose="020B0400000000000000" pitchFamily="34" charset="-128"/>
+                  <a:ea typeface="Hiragino Sans W4" panose="020B0400000000000000" pitchFamily="34" charset="-128"/>
+                </a:rPr>
+                <a:t>…</a:t>
+              </a:r>
+            </a:p>
+          </p:txBody>
+        </p:sp>
+        <p:sp>
+          <p:nvSpPr>
+            <p:cNvPr id="9" name="右矢印 8">
+              <a:extLst>
+                <a:ext uri="{FF2B5EF4-FFF2-40B4-BE49-F238E27FC236}">
+                  <a16:creationId xmlns:a16="http://schemas.microsoft.com/office/drawing/2014/main" id="{FCC049C9-AF1C-8DAB-658E-E05B289F5E96}"/>
+                </a:ext>
+              </a:extLst>
+            </p:cNvPr>
+            <p:cNvSpPr/>
+            <p:nvPr/>
+          </p:nvSpPr>
+          <p:spPr>
+            <a:xfrm>
+              <a:off x="2763966" y="3351922"/>
+              <a:ext cx="704537" cy="2893101"/>
+            </a:xfrm>
+            <a:prstGeom prst="rightArrow">
+              <a:avLst/>
+            </a:prstGeom>
+            <a:solidFill>
+              <a:schemeClr val="bg1"/>
+            </a:solidFill>
+            <a:ln w="38100">
+              <a:solidFill>
+                <a:schemeClr val="tx1"/>
+              </a:solidFill>
+            </a:ln>
+          </p:spPr>
+          <p:style>
+            <a:lnRef idx="2">
+              <a:schemeClr val="accent1">
+                <a:shade val="15000"/>
+              </a:schemeClr>
+            </a:lnRef>
+            <a:fillRef idx="1">
+              <a:schemeClr val="accent1"/>
+            </a:fillRef>
+            <a:effectRef idx="0">
+              <a:schemeClr val="accent1"/>
+            </a:effectRef>
+            <a:fontRef idx="minor">
+              <a:schemeClr val="lt1"/>
+            </a:fontRef>
+          </p:style>
+          <p:txBody>
+            <a:bodyPr rtlCol="0" anchor="ctr"/>
+            <a:lstStyle/>
+            <a:p>
+              <a:pPr algn="ctr"/>
+              <a:endParaRPr kumimoji="1" lang="ja-JP" altLang="en-US"/>
+            </a:p>
+          </p:txBody>
+        </p:sp>
+        <p:sp>
+          <p:nvSpPr>
+            <p:cNvPr id="11" name="テキスト ボックス 10">
+              <a:extLst>
+                <a:ext uri="{FF2B5EF4-FFF2-40B4-BE49-F238E27FC236}">
+                  <a16:creationId xmlns:a16="http://schemas.microsoft.com/office/drawing/2014/main" id="{2C4EB1B1-B4D1-17D1-FA21-1FA3DAAEF894}"/>
+                </a:ext>
+              </a:extLst>
+            </p:cNvPr>
+            <p:cNvSpPr txBox="1"/>
+            <p:nvPr/>
+          </p:nvSpPr>
+          <p:spPr>
+            <a:xfrm>
+              <a:off x="178633" y="2133814"/>
+              <a:ext cx="2367507" cy="707886"/>
+            </a:xfrm>
+            <a:prstGeom prst="rect">
+              <a:avLst/>
+            </a:prstGeom>
+            <a:solidFill>
+              <a:schemeClr val="bg1"/>
+            </a:solidFill>
+            <a:ln w="25400">
+              <a:solidFill>
+                <a:schemeClr val="tx1"/>
+              </a:solidFill>
+            </a:ln>
+          </p:spPr>
+          <p:txBody>
+            <a:bodyPr wrap="square">
+              <a:spAutoFit/>
+            </a:bodyPr>
+            <a:lstStyle/>
+            <a:p>
+              <a:pPr algn="ctr"/>
+              <a:r>
+                <a:rPr kumimoji="1" lang="ja-JP" altLang="en-US" sz="4000">
+                  <a:latin typeface="Hiragino Kaku Gothic StdN W8" panose="020B0800000000000000" pitchFamily="34" charset="-128"/>
+                  <a:ea typeface="Hiragino Kaku Gothic StdN W8" panose="020B0800000000000000" pitchFamily="34" charset="-128"/>
+                </a:rPr>
+                <a:t>社会属性</a:t>
+              </a:r>
+              <a:endParaRPr lang="ja-JP" altLang="en-US" sz="4000"/>
+            </a:p>
+          </p:txBody>
+        </p:sp>
+        <p:sp>
+          <p:nvSpPr>
+            <p:cNvPr id="12" name="正方形/長方形 11">
+              <a:extLst>
+                <a:ext uri="{FF2B5EF4-FFF2-40B4-BE49-F238E27FC236}">
+                  <a16:creationId xmlns:a16="http://schemas.microsoft.com/office/drawing/2014/main" id="{1F2C0FA0-BF40-0E37-1913-E910B861FBD1}"/>
+                </a:ext>
+              </a:extLst>
+            </p:cNvPr>
+            <p:cNvSpPr/>
+            <p:nvPr/>
+          </p:nvSpPr>
+          <p:spPr>
+            <a:xfrm>
+              <a:off x="3732552" y="1725488"/>
+              <a:ext cx="6760564" cy="6145967"/>
+            </a:xfrm>
+            <a:prstGeom prst="rect">
+              <a:avLst/>
+            </a:prstGeom>
+            <a:noFill/>
+            <a:ln w="25400">
+              <a:prstDash val="sysDot"/>
+            </a:ln>
+          </p:spPr>
+          <p:style>
+            <a:lnRef idx="2">
+              <a:schemeClr val="accent1">
+                <a:shade val="15000"/>
+              </a:schemeClr>
+            </a:lnRef>
+            <a:fillRef idx="1">
+              <a:schemeClr val="accent1"/>
+            </a:fillRef>
+            <a:effectRef idx="0">
+              <a:schemeClr val="accent1"/>
+            </a:effectRef>
+            <a:fontRef idx="minor">
+              <a:schemeClr val="lt1"/>
+            </a:fontRef>
+          </p:style>
+          <p:txBody>
+            <a:bodyPr rtlCol="0" anchor="ctr"/>
+            <a:lstStyle/>
+            <a:p>
+              <a:pPr algn="ctr"/>
+              <a:endParaRPr kumimoji="1" lang="ja-JP" altLang="en-US"/>
+            </a:p>
+          </p:txBody>
+        </p:sp>
+        <p:sp>
+          <p:nvSpPr>
+            <p:cNvPr id="13" name="テキスト ボックス 12">
+              <a:extLst>
+                <a:ext uri="{FF2B5EF4-FFF2-40B4-BE49-F238E27FC236}">
+                  <a16:creationId xmlns:a16="http://schemas.microsoft.com/office/drawing/2014/main" id="{D7F69185-AD4C-5B2E-3E3D-624BBB92FAA4}"/>
+                </a:ext>
+              </a:extLst>
+            </p:cNvPr>
+            <p:cNvSpPr txBox="1"/>
+            <p:nvPr/>
+          </p:nvSpPr>
+          <p:spPr>
+            <a:xfrm>
+              <a:off x="6067112" y="961086"/>
+              <a:ext cx="2367507" cy="707886"/>
+            </a:xfrm>
+            <a:prstGeom prst="rect">
+              <a:avLst/>
+            </a:prstGeom>
+            <a:solidFill>
+              <a:schemeClr val="bg1"/>
+            </a:solidFill>
+            <a:ln w="25400">
+              <a:solidFill>
+                <a:schemeClr val="tx1"/>
+              </a:solidFill>
+            </a:ln>
+          </p:spPr>
+          <p:txBody>
+            <a:bodyPr wrap="square">
+              <a:spAutoFit/>
+            </a:bodyPr>
+            <a:lstStyle/>
+            <a:p>
+              <a:pPr algn="ctr"/>
+              <a:r>
+                <a:rPr kumimoji="1" lang="ja-JP" altLang="en-US" sz="4000">
+                  <a:latin typeface="Hiragino Kaku Gothic StdN W8" panose="020B0800000000000000" pitchFamily="34" charset="-128"/>
+                  <a:ea typeface="Hiragino Kaku Gothic StdN W8" panose="020B0800000000000000" pitchFamily="34" charset="-128"/>
+                </a:rPr>
+                <a:t>心理変数</a:t>
+              </a:r>
+              <a:endParaRPr lang="ja-JP" altLang="en-US" sz="4000"/>
+            </a:p>
+          </p:txBody>
+        </p:sp>
+        <p:sp>
+          <p:nvSpPr>
+            <p:cNvPr id="15" name="テキスト ボックス 14">
+              <a:extLst>
+                <a:ext uri="{FF2B5EF4-FFF2-40B4-BE49-F238E27FC236}">
+                  <a16:creationId xmlns:a16="http://schemas.microsoft.com/office/drawing/2014/main" id="{DD5999A8-6731-7911-40FC-1983236AD614}"/>
+                </a:ext>
+              </a:extLst>
+            </p:cNvPr>
+            <p:cNvSpPr txBox="1"/>
+            <p:nvPr/>
+          </p:nvSpPr>
+          <p:spPr>
+            <a:xfrm>
+              <a:off x="3570076" y="1235565"/>
+              <a:ext cx="2182789" cy="461665"/>
+            </a:xfrm>
+            <a:prstGeom prst="rect">
+              <a:avLst/>
+            </a:prstGeom>
+            <a:noFill/>
+          </p:spPr>
+          <p:txBody>
+            <a:bodyPr wrap="square">
+              <a:spAutoFit/>
+            </a:bodyPr>
+            <a:lstStyle/>
+            <a:p>
+              <a:pPr algn="ctr"/>
+              <a:r>
+                <a:rPr lang="ja-JP" altLang="en-US" sz="2400">
+                  <a:latin typeface="Hiragino Sans W4" panose="020B0400000000000000" pitchFamily="34" charset="-128"/>
+                  <a:ea typeface="Hiragino Sans W4" panose="020B0400000000000000" pitchFamily="34" charset="-128"/>
+                </a:rPr>
+                <a:t>＜長期要因＞</a:t>
+              </a:r>
+            </a:p>
+          </p:txBody>
+        </p:sp>
+        <p:sp>
+          <p:nvSpPr>
+            <p:cNvPr id="16" name="テキスト ボックス 15">
+              <a:extLst>
+                <a:ext uri="{FF2B5EF4-FFF2-40B4-BE49-F238E27FC236}">
+                  <a16:creationId xmlns:a16="http://schemas.microsoft.com/office/drawing/2014/main" id="{973C2A8A-9893-96EF-2CFE-B8F8623C0D84}"/>
+                </a:ext>
+              </a:extLst>
+            </p:cNvPr>
+            <p:cNvSpPr txBox="1"/>
+            <p:nvPr/>
+          </p:nvSpPr>
+          <p:spPr>
+            <a:xfrm>
+              <a:off x="8434619" y="1235565"/>
+              <a:ext cx="2109081" cy="461665"/>
+            </a:xfrm>
+            <a:prstGeom prst="rect">
+              <a:avLst/>
+            </a:prstGeom>
+            <a:noFill/>
+          </p:spPr>
+          <p:txBody>
+            <a:bodyPr wrap="square">
+              <a:spAutoFit/>
+            </a:bodyPr>
+            <a:lstStyle/>
+            <a:p>
+              <a:pPr algn="ctr"/>
+              <a:r>
+                <a:rPr lang="ja-JP" altLang="en-US" sz="2400">
+                  <a:latin typeface="Hiragino Sans W4" panose="020B0400000000000000" pitchFamily="34" charset="-128"/>
+                  <a:ea typeface="Hiragino Sans W4" panose="020B0400000000000000" pitchFamily="34" charset="-128"/>
+                </a:rPr>
+                <a:t>＜短期要因＞</a:t>
+              </a:r>
+            </a:p>
+          </p:txBody>
+        </p:sp>
+        <p:cxnSp>
+          <p:nvCxnSpPr>
+            <p:cNvPr id="18" name="直線矢印コネクタ 17">
+              <a:extLst>
+                <a:ext uri="{FF2B5EF4-FFF2-40B4-BE49-F238E27FC236}">
+                  <a16:creationId xmlns:a16="http://schemas.microsoft.com/office/drawing/2014/main" id="{7F396013-598F-417B-1A76-F61F4C2F8E89}"/>
+                </a:ext>
+              </a:extLst>
+            </p:cNvPr>
+            <p:cNvCxnSpPr>
+              <a:stCxn id="3" idx="0"/>
+              <a:endCxn id="6" idx="1"/>
+            </p:cNvCxnSpPr>
+            <p:nvPr/>
+          </p:nvCxnSpPr>
+          <p:spPr>
+            <a:xfrm flipV="1">
+              <a:off x="5538866" y="2643507"/>
+              <a:ext cx="2253831" cy="1677910"/>
+            </a:xfrm>
+            <a:prstGeom prst="straightConnector1">
+              <a:avLst/>
+            </a:prstGeom>
+            <a:ln w="57150">
+              <a:solidFill>
+                <a:schemeClr val="tx1"/>
+              </a:solidFill>
+              <a:tailEnd type="triangle"/>
+            </a:ln>
+          </p:spPr>
+          <p:style>
+            <a:lnRef idx="1">
+              <a:schemeClr val="accent1"/>
+            </a:lnRef>
+            <a:fillRef idx="0">
+              <a:schemeClr val="accent1"/>
+            </a:fillRef>
+            <a:effectRef idx="0">
+              <a:schemeClr val="accent1"/>
+            </a:effectRef>
+            <a:fontRef idx="minor">
+              <a:schemeClr val="tx1"/>
+            </a:fontRef>
+          </p:style>
+        </p:cxnSp>
+        <p:cxnSp>
+          <p:nvCxnSpPr>
+            <p:cNvPr id="19" name="直線矢印コネクタ 18">
+              <a:extLst>
+                <a:ext uri="{FF2B5EF4-FFF2-40B4-BE49-F238E27FC236}">
+                  <a16:creationId xmlns:a16="http://schemas.microsoft.com/office/drawing/2014/main" id="{100B8955-454A-0AD8-AE5D-B2E376B8A962}"/>
+                </a:ext>
+              </a:extLst>
+            </p:cNvPr>
+            <p:cNvCxnSpPr>
+              <a:cxnSpLocks/>
+              <a:stCxn id="3" idx="2"/>
+              <a:endCxn id="5" idx="1"/>
+            </p:cNvCxnSpPr>
+            <p:nvPr/>
+          </p:nvCxnSpPr>
+          <p:spPr>
+            <a:xfrm>
+              <a:off x="5538866" y="5275524"/>
+              <a:ext cx="2426217" cy="1851048"/>
+            </a:xfrm>
+            <a:prstGeom prst="straightConnector1">
+              <a:avLst/>
+            </a:prstGeom>
+            <a:ln w="57150">
+              <a:solidFill>
+                <a:schemeClr val="tx1"/>
+              </a:solidFill>
+              <a:tailEnd type="triangle"/>
+            </a:ln>
+          </p:spPr>
+          <p:style>
+            <a:lnRef idx="1">
+              <a:schemeClr val="accent1"/>
+            </a:lnRef>
+            <a:fillRef idx="0">
+              <a:schemeClr val="accent1"/>
+            </a:fillRef>
+            <a:effectRef idx="0">
+              <a:schemeClr val="accent1"/>
+            </a:effectRef>
+            <a:fontRef idx="minor">
+              <a:schemeClr val="tx1"/>
+            </a:fontRef>
+          </p:style>
+        </p:cxnSp>
+        <p:cxnSp>
+          <p:nvCxnSpPr>
+            <p:cNvPr id="22" name="直線矢印コネクタ 21">
+              <a:extLst>
+                <a:ext uri="{FF2B5EF4-FFF2-40B4-BE49-F238E27FC236}">
+                  <a16:creationId xmlns:a16="http://schemas.microsoft.com/office/drawing/2014/main" id="{84991030-5A58-8AA2-14F5-A70A4F6F402E}"/>
+                </a:ext>
+              </a:extLst>
+            </p:cNvPr>
+            <p:cNvCxnSpPr>
+              <a:cxnSpLocks/>
+              <a:stCxn id="3" idx="3"/>
+              <a:endCxn id="7" idx="1"/>
+            </p:cNvCxnSpPr>
+            <p:nvPr/>
+          </p:nvCxnSpPr>
+          <p:spPr>
+            <a:xfrm>
+              <a:off x="7112834" y="4798471"/>
+              <a:ext cx="3934916" cy="3"/>
+            </a:xfrm>
+            <a:prstGeom prst="straightConnector1">
+              <a:avLst/>
+            </a:prstGeom>
+            <a:ln w="57150">
+              <a:solidFill>
+                <a:schemeClr val="tx1"/>
+              </a:solidFill>
+              <a:tailEnd type="triangle"/>
+            </a:ln>
+          </p:spPr>
+          <p:style>
+            <a:lnRef idx="1">
+              <a:schemeClr val="accent1"/>
+            </a:lnRef>
+            <a:fillRef idx="0">
+              <a:schemeClr val="accent1"/>
+            </a:fillRef>
+            <a:effectRef idx="0">
+              <a:schemeClr val="accent1"/>
+            </a:effectRef>
+            <a:fontRef idx="minor">
+              <a:schemeClr val="tx1"/>
+            </a:fontRef>
+          </p:style>
+        </p:cxnSp>
+        <p:cxnSp>
+          <p:nvCxnSpPr>
+            <p:cNvPr id="25" name="直線矢印コネクタ 24">
+              <a:extLst>
+                <a:ext uri="{FF2B5EF4-FFF2-40B4-BE49-F238E27FC236}">
+                  <a16:creationId xmlns:a16="http://schemas.microsoft.com/office/drawing/2014/main" id="{E23864B6-8D96-0708-70EC-259E4CDBA46F}"/>
+                </a:ext>
+              </a:extLst>
+            </p:cNvPr>
+            <p:cNvCxnSpPr>
+              <a:cxnSpLocks/>
+              <a:stCxn id="6" idx="3"/>
+              <a:endCxn id="7" idx="0"/>
+            </p:cNvCxnSpPr>
+            <p:nvPr/>
+          </p:nvCxnSpPr>
+          <p:spPr>
+            <a:xfrm>
+              <a:off x="10421598" y="2643507"/>
+              <a:ext cx="1360670" cy="1770246"/>
+            </a:xfrm>
+            <a:prstGeom prst="straightConnector1">
+              <a:avLst/>
+            </a:prstGeom>
+            <a:ln w="57150">
+              <a:solidFill>
+                <a:schemeClr val="tx1"/>
+              </a:solidFill>
+              <a:tailEnd type="triangle"/>
+            </a:ln>
+          </p:spPr>
+          <p:style>
+            <a:lnRef idx="1">
+              <a:schemeClr val="accent1"/>
+            </a:lnRef>
+            <a:fillRef idx="0">
+              <a:schemeClr val="accent1"/>
+            </a:fillRef>
+            <a:effectRef idx="0">
+              <a:schemeClr val="accent1"/>
+            </a:effectRef>
+            <a:fontRef idx="minor">
+              <a:schemeClr val="tx1"/>
+            </a:fontRef>
+          </p:style>
+        </p:cxnSp>
+        <p:cxnSp>
+          <p:nvCxnSpPr>
+            <p:cNvPr id="28" name="直線矢印コネクタ 27">
+              <a:extLst>
+                <a:ext uri="{FF2B5EF4-FFF2-40B4-BE49-F238E27FC236}">
+                  <a16:creationId xmlns:a16="http://schemas.microsoft.com/office/drawing/2014/main" id="{EBFC494F-A509-135E-DC81-182547F839B2}"/>
+                </a:ext>
+              </a:extLst>
+            </p:cNvPr>
+            <p:cNvCxnSpPr>
+              <a:cxnSpLocks/>
+              <a:stCxn id="5" idx="3"/>
+              <a:endCxn id="7" idx="2"/>
+            </p:cNvCxnSpPr>
+            <p:nvPr/>
+          </p:nvCxnSpPr>
+          <p:spPr>
+            <a:xfrm flipV="1">
+              <a:off x="10249211" y="5183194"/>
+              <a:ext cx="1533057" cy="1943378"/>
+            </a:xfrm>
+            <a:prstGeom prst="straightConnector1">
+              <a:avLst/>
+            </a:prstGeom>
+            <a:ln w="57150">
+              <a:solidFill>
+                <a:schemeClr val="tx1"/>
+              </a:solidFill>
+              <a:tailEnd type="triangle"/>
+            </a:ln>
+          </p:spPr>
+          <p:style>
+            <a:lnRef idx="1">
+              <a:schemeClr val="accent1"/>
+            </a:lnRef>
+            <a:fillRef idx="0">
+              <a:schemeClr val="accent1"/>
+            </a:fillRef>
+            <a:effectRef idx="0">
+              <a:schemeClr val="accent1"/>
+            </a:effectRef>
+            <a:fontRef idx="minor">
+              <a:schemeClr val="tx1"/>
+            </a:fontRef>
+          </p:style>
+        </p:cxnSp>
+        <p:sp>
+          <p:nvSpPr>
+            <p:cNvPr id="31" name="テキスト ボックス 30">
+              <a:extLst>
+                <a:ext uri="{FF2B5EF4-FFF2-40B4-BE49-F238E27FC236}">
+                  <a16:creationId xmlns:a16="http://schemas.microsoft.com/office/drawing/2014/main" id="{EE1ED944-BAAB-4624-9F47-75EB9A7C2C3D}"/>
+                </a:ext>
+              </a:extLst>
+            </p:cNvPr>
+            <p:cNvSpPr txBox="1"/>
+            <p:nvPr/>
+          </p:nvSpPr>
+          <p:spPr>
+            <a:xfrm rot="3141708">
+              <a:off x="10155279" y="3016118"/>
+              <a:ext cx="2182789" cy="461665"/>
+            </a:xfrm>
+            <a:prstGeom prst="rect">
+              <a:avLst/>
+            </a:prstGeom>
+            <a:noFill/>
+          </p:spPr>
+          <p:txBody>
+            <a:bodyPr wrap="square">
+              <a:spAutoFit/>
+            </a:bodyPr>
+            <a:lstStyle/>
+            <a:p>
+              <a:pPr algn="ctr"/>
+              <a:r>
+                <a:rPr lang="ja-JP" altLang="en-US" sz="2400">
+                  <a:latin typeface="Hiragino Sans W4" panose="020B0400000000000000" pitchFamily="34" charset="-128"/>
+                  <a:ea typeface="Hiragino Sans W4" panose="020B0400000000000000" pitchFamily="34" charset="-128"/>
+                </a:rPr>
+                <a:t>候補者投票</a:t>
+              </a:r>
+            </a:p>
+          </p:txBody>
+        </p:sp>
+        <p:sp>
+          <p:nvSpPr>
+            <p:cNvPr id="32" name="テキスト ボックス 31">
+              <a:extLst>
+                <a:ext uri="{FF2B5EF4-FFF2-40B4-BE49-F238E27FC236}">
+                  <a16:creationId xmlns:a16="http://schemas.microsoft.com/office/drawing/2014/main" id="{751F7D04-0BEB-19C1-2436-BF72E80BF0B0}"/>
+                </a:ext>
+              </a:extLst>
+            </p:cNvPr>
+            <p:cNvSpPr txBox="1"/>
+            <p:nvPr/>
+          </p:nvSpPr>
+          <p:spPr>
+            <a:xfrm rot="18439909">
+              <a:off x="10168718" y="6089721"/>
+              <a:ext cx="2182789" cy="461665"/>
+            </a:xfrm>
+            <a:prstGeom prst="rect">
+              <a:avLst/>
+            </a:prstGeom>
+            <a:noFill/>
+          </p:spPr>
+          <p:txBody>
+            <a:bodyPr wrap="square">
+              <a:spAutoFit/>
+            </a:bodyPr>
+            <a:lstStyle/>
+            <a:p>
+              <a:pPr algn="ctr"/>
+              <a:r>
+                <a:rPr lang="ja-JP" altLang="en-US" sz="2400">
+                  <a:latin typeface="Hiragino Sans W4" panose="020B0400000000000000" pitchFamily="34" charset="-128"/>
+                  <a:ea typeface="Hiragino Sans W4" panose="020B0400000000000000" pitchFamily="34" charset="-128"/>
+                </a:rPr>
+                <a:t>争点投票</a:t>
+              </a:r>
+            </a:p>
+          </p:txBody>
+        </p:sp>
+        <p:sp>
+          <p:nvSpPr>
+            <p:cNvPr id="35" name="テキスト ボックス 34">
+              <a:extLst>
+                <a:ext uri="{FF2B5EF4-FFF2-40B4-BE49-F238E27FC236}">
+                  <a16:creationId xmlns:a16="http://schemas.microsoft.com/office/drawing/2014/main" id="{8D8F90C3-1793-5AA6-38B6-2277BB899320}"/>
+                </a:ext>
+              </a:extLst>
+            </p:cNvPr>
+            <p:cNvSpPr txBox="1"/>
+            <p:nvPr/>
+          </p:nvSpPr>
+          <p:spPr>
+            <a:xfrm>
+              <a:off x="7925125" y="4323282"/>
+              <a:ext cx="2182789" cy="461665"/>
+            </a:xfrm>
+            <a:prstGeom prst="rect">
+              <a:avLst/>
+            </a:prstGeom>
+            <a:noFill/>
+          </p:spPr>
+          <p:txBody>
+            <a:bodyPr wrap="square">
+              <a:spAutoFit/>
+            </a:bodyPr>
+            <a:lstStyle/>
+            <a:p>
+              <a:pPr algn="ctr"/>
+              <a:r>
+                <a:rPr lang="ja-JP" altLang="en-US" sz="2400">
+                  <a:latin typeface="Hiragino Sans W4" panose="020B0400000000000000" pitchFamily="34" charset="-128"/>
+                  <a:ea typeface="Hiragino Sans W4" panose="020B0400000000000000" pitchFamily="34" charset="-128"/>
+                </a:rPr>
+                <a:t>政党投票</a:t>
+              </a:r>
+            </a:p>
+          </p:txBody>
+        </p:sp>
+      </p:grpSp>
+    </p:spTree>
+    <p:extLst>
+      <p:ext uri="{BB962C8B-B14F-4D97-AF65-F5344CB8AC3E}">
+        <p14:creationId xmlns:p14="http://schemas.microsoft.com/office/powerpoint/2010/main" val="160232529"/>
+      </p:ext>
+    </p:extLst>
+  </p:cSld>
+  <p:clrMapOvr>
+    <a:masterClrMapping/>
+  </p:clrMapOvr>
+</p:sld>
+</file>
+
+<file path=ppt/slides/slide4.xml><?xml version="1.0" encoding="utf-8"?>
+<p:sld xmlns:a="http://schemas.openxmlformats.org/drawingml/2006/main" xmlns:r="http://schemas.openxmlformats.org/officeDocument/2006/relationships" xmlns:p="http://schemas.openxmlformats.org/presentationml/2006/main">
+  <p:cSld>
+    <p:spTree>
+      <p:nvGrpSpPr>
+        <p:cNvPr id="1" name=""/>
+        <p:cNvGrpSpPr/>
+        <p:nvPr/>
+      </p:nvGrpSpPr>
+      <p:grpSpPr>
+        <a:xfrm>
+          <a:off x="0" y="0"/>
+          <a:ext cx="0" cy="0"/>
+          <a:chOff x="0" y="0"/>
+          <a:chExt cx="0" cy="0"/>
+        </a:xfrm>
+      </p:grpSpPr>
+      <p:grpSp>
+        <p:nvGrpSpPr>
+          <p:cNvPr id="49" name="グループ化 48">
+            <a:extLst>
+              <a:ext uri="{FF2B5EF4-FFF2-40B4-BE49-F238E27FC236}">
+                <a16:creationId xmlns:a16="http://schemas.microsoft.com/office/drawing/2014/main" id="{55E4A298-FAE9-BB3A-54EC-32A59A72542A}"/>
+              </a:ext>
+            </a:extLst>
+          </p:cNvPr>
+          <p:cNvGrpSpPr/>
+          <p:nvPr/>
+        </p:nvGrpSpPr>
+        <p:grpSpPr>
+          <a:xfrm>
+            <a:off x="727023" y="2136553"/>
+            <a:ext cx="11347554" cy="4527793"/>
+            <a:chOff x="727023" y="2136553"/>
+            <a:chExt cx="11347554" cy="4527793"/>
+          </a:xfrm>
+        </p:grpSpPr>
+        <p:cxnSp>
+          <p:nvCxnSpPr>
+            <p:cNvPr id="2" name="直線矢印コネクタ 1">
+              <a:extLst>
+                <a:ext uri="{FF2B5EF4-FFF2-40B4-BE49-F238E27FC236}">
+                  <a16:creationId xmlns:a16="http://schemas.microsoft.com/office/drawing/2014/main" id="{DE0A01AA-223B-0937-3BA8-420048EB4195}"/>
+                </a:ext>
+              </a:extLst>
+            </p:cNvPr>
+            <p:cNvCxnSpPr>
+              <a:cxnSpLocks/>
+            </p:cNvCxnSpPr>
+            <p:nvPr/>
+          </p:nvCxnSpPr>
+          <p:spPr>
+            <a:xfrm>
+              <a:off x="2548329" y="5278156"/>
+              <a:ext cx="9526248" cy="0"/>
+            </a:xfrm>
+            <a:prstGeom prst="straightConnector1">
+              <a:avLst/>
+            </a:prstGeom>
+            <a:ln w="69850">
+              <a:solidFill>
+                <a:schemeClr val="tx1"/>
+              </a:solidFill>
+              <a:tailEnd type="triangle"/>
+            </a:ln>
+          </p:spPr>
+          <p:style>
+            <a:lnRef idx="1">
+              <a:schemeClr val="accent1"/>
+            </a:lnRef>
+            <a:fillRef idx="0">
+              <a:schemeClr val="accent1"/>
+            </a:fillRef>
+            <a:effectRef idx="0">
+              <a:schemeClr val="accent1"/>
+            </a:effectRef>
+            <a:fontRef idx="minor">
+              <a:schemeClr val="tx1"/>
+            </a:fontRef>
+          </p:style>
+        </p:cxnSp>
+        <p:sp>
+          <p:nvSpPr>
+            <p:cNvPr id="4" name="テキスト ボックス 3">
+              <a:extLst>
+                <a:ext uri="{FF2B5EF4-FFF2-40B4-BE49-F238E27FC236}">
+                  <a16:creationId xmlns:a16="http://schemas.microsoft.com/office/drawing/2014/main" id="{1A9BD77A-BB90-88A9-6922-913C329B6103}"/>
+                </a:ext>
+              </a:extLst>
+            </p:cNvPr>
+            <p:cNvSpPr txBox="1"/>
+            <p:nvPr/>
+          </p:nvSpPr>
+          <p:spPr>
+            <a:xfrm>
+              <a:off x="727023" y="4985768"/>
+              <a:ext cx="2182789" cy="584775"/>
+            </a:xfrm>
+            <a:prstGeom prst="rect">
+              <a:avLst/>
+            </a:prstGeom>
+            <a:noFill/>
+          </p:spPr>
+          <p:txBody>
+            <a:bodyPr wrap="square">
+              <a:spAutoFit/>
+            </a:bodyPr>
+            <a:lstStyle/>
+            <a:p>
+              <a:pPr algn="ctr"/>
+              <a:r>
+                <a:rPr lang="ja-JP" altLang="en-US" sz="3200">
+                  <a:latin typeface="Hiragino Sans W4" panose="020B0400000000000000" pitchFamily="34" charset="-128"/>
+                  <a:ea typeface="Hiragino Sans W4" panose="020B0400000000000000" pitchFamily="34" charset="-128"/>
+                </a:rPr>
+                <a:t>増税率</a:t>
+              </a:r>
+            </a:p>
+          </p:txBody>
+        </p:sp>
+        <p:cxnSp>
+          <p:nvCxnSpPr>
+            <p:cNvPr id="5" name="直線矢印コネクタ 4">
+              <a:extLst>
+                <a:ext uri="{FF2B5EF4-FFF2-40B4-BE49-F238E27FC236}">
+                  <a16:creationId xmlns:a16="http://schemas.microsoft.com/office/drawing/2014/main" id="{5A89AB2D-44F6-30E8-77A0-045605532980}"/>
+                </a:ext>
+              </a:extLst>
+            </p:cNvPr>
+            <p:cNvCxnSpPr>
+              <a:cxnSpLocks/>
+              <a:stCxn id="11" idx="2"/>
+            </p:cNvCxnSpPr>
+            <p:nvPr/>
+          </p:nvCxnSpPr>
+          <p:spPr>
+            <a:xfrm>
+              <a:off x="4001207" y="3213771"/>
+              <a:ext cx="0" cy="2064384"/>
+            </a:xfrm>
+            <a:prstGeom prst="straightConnector1">
+              <a:avLst/>
+            </a:prstGeom>
+            <a:ln w="38100">
+              <a:solidFill>
+                <a:schemeClr val="tx1"/>
+              </a:solidFill>
+              <a:tailEnd type="triangle"/>
+            </a:ln>
+          </p:spPr>
+          <p:style>
+            <a:lnRef idx="1">
+              <a:schemeClr val="accent1"/>
+            </a:lnRef>
+            <a:fillRef idx="0">
+              <a:schemeClr val="accent1"/>
+            </a:fillRef>
+            <a:effectRef idx="0">
+              <a:schemeClr val="accent1"/>
+            </a:effectRef>
+            <a:fontRef idx="minor">
+              <a:schemeClr val="tx1"/>
+            </a:fontRef>
+          </p:style>
+        </p:cxnSp>
+        <p:sp>
+          <p:nvSpPr>
+            <p:cNvPr id="11" name="テキスト ボックス 10">
+              <a:extLst>
+                <a:ext uri="{FF2B5EF4-FFF2-40B4-BE49-F238E27FC236}">
+                  <a16:creationId xmlns:a16="http://schemas.microsoft.com/office/drawing/2014/main" id="{1AEF5D39-F83C-6499-7B65-158847CF26B7}"/>
+                </a:ext>
+              </a:extLst>
+            </p:cNvPr>
+            <p:cNvSpPr txBox="1"/>
+            <p:nvPr/>
+          </p:nvSpPr>
+          <p:spPr>
+            <a:xfrm>
+              <a:off x="2909812" y="2136553"/>
+              <a:ext cx="2182790" cy="1077218"/>
+            </a:xfrm>
+            <a:prstGeom prst="rect">
+              <a:avLst/>
+            </a:prstGeom>
+            <a:noFill/>
+          </p:spPr>
+          <p:txBody>
+            <a:bodyPr wrap="square">
+              <a:spAutoFit/>
+            </a:bodyPr>
+            <a:lstStyle/>
+            <a:p>
+              <a:pPr algn="ctr"/>
+              <a:r>
+                <a:rPr kumimoji="1" lang="ja-JP" altLang="en-US" sz="3200">
+                  <a:latin typeface="Hiragino Kaku Gothic StdN W8" panose="020B0800000000000000" pitchFamily="34" charset="-128"/>
+                  <a:ea typeface="Hiragino Kaku Gothic StdN W8" panose="020B0800000000000000" pitchFamily="34" charset="-128"/>
+                </a:rPr>
+                <a:t>候補者</a:t>
+              </a:r>
+              <a:r>
+                <a:rPr kumimoji="1" lang="en-US" altLang="ja-JP" sz="3200" dirty="0">
+                  <a:latin typeface="Hiragino Kaku Gothic StdN W8" panose="020B0800000000000000" pitchFamily="34" charset="-128"/>
+                  <a:ea typeface="Hiragino Kaku Gothic StdN W8" panose="020B0800000000000000" pitchFamily="34" charset="-128"/>
+                </a:rPr>
+                <a:t>A</a:t>
+              </a:r>
+            </a:p>
+            <a:p>
+              <a:pPr algn="ctr"/>
+              <a:r>
+                <a:rPr kumimoji="1" lang="en-US" altLang="ja-JP" sz="3200" dirty="0">
+                  <a:latin typeface="Hiragino Sans W4" panose="020B0400000000000000" pitchFamily="34" charset="-128"/>
+                  <a:ea typeface="Hiragino Sans W4" panose="020B0400000000000000" pitchFamily="34" charset="-128"/>
+                </a:rPr>
+                <a:t>2%</a:t>
+              </a:r>
+              <a:endParaRPr lang="ja-JP" altLang="en-US" sz="3200">
+                <a:latin typeface="Hiragino Sans W4" panose="020B0400000000000000" pitchFamily="34" charset="-128"/>
+                <a:ea typeface="Hiragino Sans W4" panose="020B0400000000000000" pitchFamily="34" charset="-128"/>
+              </a:endParaRPr>
+            </a:p>
+          </p:txBody>
+        </p:sp>
+        <p:cxnSp>
+          <p:nvCxnSpPr>
+            <p:cNvPr id="12" name="直線矢印コネクタ 11">
+              <a:extLst>
+                <a:ext uri="{FF2B5EF4-FFF2-40B4-BE49-F238E27FC236}">
+                  <a16:creationId xmlns:a16="http://schemas.microsoft.com/office/drawing/2014/main" id="{351CA1BD-89F2-C557-346D-6569E935292B}"/>
+                </a:ext>
+              </a:extLst>
+            </p:cNvPr>
+            <p:cNvCxnSpPr>
+              <a:cxnSpLocks/>
+              <a:stCxn id="13" idx="2"/>
+            </p:cNvCxnSpPr>
+            <p:nvPr/>
+          </p:nvCxnSpPr>
+          <p:spPr>
+            <a:xfrm>
+              <a:off x="10854210" y="3213772"/>
+              <a:ext cx="0" cy="2064384"/>
+            </a:xfrm>
+            <a:prstGeom prst="straightConnector1">
+              <a:avLst/>
+            </a:prstGeom>
+            <a:ln w="38100">
+              <a:solidFill>
+                <a:schemeClr val="tx1"/>
+              </a:solidFill>
+              <a:tailEnd type="triangle"/>
+            </a:ln>
+          </p:spPr>
+          <p:style>
+            <a:lnRef idx="1">
+              <a:schemeClr val="accent1"/>
+            </a:lnRef>
+            <a:fillRef idx="0">
+              <a:schemeClr val="accent1"/>
+            </a:fillRef>
+            <a:effectRef idx="0">
+              <a:schemeClr val="accent1"/>
+            </a:effectRef>
+            <a:fontRef idx="minor">
+              <a:schemeClr val="tx1"/>
+            </a:fontRef>
+          </p:style>
+        </p:cxnSp>
+        <p:sp>
+          <p:nvSpPr>
+            <p:cNvPr id="13" name="テキスト ボックス 12">
+              <a:extLst>
+                <a:ext uri="{FF2B5EF4-FFF2-40B4-BE49-F238E27FC236}">
+                  <a16:creationId xmlns:a16="http://schemas.microsoft.com/office/drawing/2014/main" id="{4D8BAB6E-650B-FA05-7018-973F9C27DAA8}"/>
+                </a:ext>
+              </a:extLst>
+            </p:cNvPr>
+            <p:cNvSpPr txBox="1"/>
+            <p:nvPr/>
+          </p:nvSpPr>
+          <p:spPr>
+            <a:xfrm>
+              <a:off x="9762815" y="2136554"/>
+              <a:ext cx="2182790" cy="1077218"/>
+            </a:xfrm>
+            <a:prstGeom prst="rect">
+              <a:avLst/>
+            </a:prstGeom>
+            <a:noFill/>
+          </p:spPr>
+          <p:txBody>
+            <a:bodyPr wrap="square">
+              <a:spAutoFit/>
+            </a:bodyPr>
+            <a:lstStyle/>
+            <a:p>
+              <a:pPr algn="ctr"/>
+              <a:r>
+                <a:rPr kumimoji="1" lang="ja-JP" altLang="en-US" sz="3200">
+                  <a:latin typeface="Hiragino Kaku Gothic StdN W8" panose="020B0800000000000000" pitchFamily="34" charset="-128"/>
+                  <a:ea typeface="Hiragino Kaku Gothic StdN W8" panose="020B0800000000000000" pitchFamily="34" charset="-128"/>
+                </a:rPr>
+                <a:t>候補者</a:t>
+              </a:r>
+              <a:r>
+                <a:rPr kumimoji="1" lang="en-US" altLang="ja-JP" sz="3200" dirty="0">
+                  <a:latin typeface="Hiragino Kaku Gothic StdN W8" panose="020B0800000000000000" pitchFamily="34" charset="-128"/>
+                  <a:ea typeface="Hiragino Kaku Gothic StdN W8" panose="020B0800000000000000" pitchFamily="34" charset="-128"/>
+                </a:rPr>
+                <a:t>B</a:t>
+              </a:r>
+            </a:p>
+            <a:p>
+              <a:pPr algn="ctr"/>
+              <a:r>
+                <a:rPr kumimoji="1" lang="en-US" altLang="ja-JP" sz="3200" dirty="0">
+                  <a:latin typeface="Hiragino Sans W4" panose="020B0400000000000000" pitchFamily="34" charset="-128"/>
+                  <a:ea typeface="Hiragino Sans W4" panose="020B0400000000000000" pitchFamily="34" charset="-128"/>
+                </a:rPr>
+                <a:t>20%</a:t>
+              </a:r>
+              <a:endParaRPr lang="ja-JP" altLang="en-US" sz="3200">
+                <a:latin typeface="Hiragino Sans W4" panose="020B0400000000000000" pitchFamily="34" charset="-128"/>
+                <a:ea typeface="Hiragino Sans W4" panose="020B0400000000000000" pitchFamily="34" charset="-128"/>
+              </a:endParaRPr>
+            </a:p>
+          </p:txBody>
+        </p:sp>
+        <p:cxnSp>
+          <p:nvCxnSpPr>
+            <p:cNvPr id="14" name="直線矢印コネクタ 13">
+              <a:extLst>
+                <a:ext uri="{FF2B5EF4-FFF2-40B4-BE49-F238E27FC236}">
+                  <a16:creationId xmlns:a16="http://schemas.microsoft.com/office/drawing/2014/main" id="{34A96AD2-1764-3E57-5A74-641A6443E21C}"/>
+                </a:ext>
+              </a:extLst>
+            </p:cNvPr>
+            <p:cNvCxnSpPr>
+              <a:cxnSpLocks/>
+              <a:stCxn id="15" idx="2"/>
+            </p:cNvCxnSpPr>
+            <p:nvPr/>
+          </p:nvCxnSpPr>
+          <p:spPr>
+            <a:xfrm>
+              <a:off x="6183997" y="3213771"/>
+              <a:ext cx="0" cy="2064384"/>
+            </a:xfrm>
+            <a:prstGeom prst="straightConnector1">
+              <a:avLst/>
+            </a:prstGeom>
+            <a:ln w="38100">
+              <a:solidFill>
+                <a:schemeClr val="tx1"/>
+              </a:solidFill>
+              <a:tailEnd type="triangle"/>
+            </a:ln>
+          </p:spPr>
+          <p:style>
+            <a:lnRef idx="1">
+              <a:schemeClr val="accent1"/>
+            </a:lnRef>
+            <a:fillRef idx="0">
+              <a:schemeClr val="accent1"/>
+            </a:fillRef>
+            <a:effectRef idx="0">
+              <a:schemeClr val="accent1"/>
+            </a:effectRef>
+            <a:fontRef idx="minor">
+              <a:schemeClr val="tx1"/>
+            </a:fontRef>
+          </p:style>
+        </p:cxnSp>
+        <p:sp>
+          <p:nvSpPr>
+            <p:cNvPr id="15" name="テキスト ボックス 14">
+              <a:extLst>
+                <a:ext uri="{FF2B5EF4-FFF2-40B4-BE49-F238E27FC236}">
+                  <a16:creationId xmlns:a16="http://schemas.microsoft.com/office/drawing/2014/main" id="{741E8AD4-F3BE-4524-EF4A-E84DC00166D5}"/>
+                </a:ext>
+              </a:extLst>
+            </p:cNvPr>
+            <p:cNvSpPr txBox="1"/>
+            <p:nvPr/>
+          </p:nvSpPr>
+          <p:spPr>
+            <a:xfrm>
+              <a:off x="5092602" y="2136553"/>
+              <a:ext cx="2182790" cy="1077218"/>
+            </a:xfrm>
+            <a:prstGeom prst="rect">
+              <a:avLst/>
+            </a:prstGeom>
+            <a:noFill/>
+          </p:spPr>
+          <p:txBody>
+            <a:bodyPr wrap="square">
+              <a:spAutoFit/>
+            </a:bodyPr>
+            <a:lstStyle/>
+            <a:p>
+              <a:pPr algn="ctr"/>
+              <a:r>
+                <a:rPr kumimoji="1" lang="ja-JP" altLang="en-US" sz="3200">
+                  <a:solidFill>
+                    <a:srgbClr val="FF0000"/>
+                  </a:solidFill>
+                  <a:latin typeface="Hiragino Kaku Gothic StdN W8" panose="020B0800000000000000" pitchFamily="34" charset="-128"/>
+                  <a:ea typeface="Hiragino Kaku Gothic StdN W8" panose="020B0800000000000000" pitchFamily="34" charset="-128"/>
+                </a:rPr>
+                <a:t>有権者</a:t>
+              </a:r>
+              <a:endParaRPr kumimoji="1" lang="en-US" altLang="ja-JP" sz="3200" dirty="0">
+                <a:solidFill>
+                  <a:srgbClr val="FF0000"/>
+                </a:solidFill>
+                <a:latin typeface="Hiragino Sans W4" panose="020B0400000000000000" pitchFamily="34" charset="-128"/>
+                <a:ea typeface="Hiragino Sans W4" panose="020B0400000000000000" pitchFamily="34" charset="-128"/>
+              </a:endParaRPr>
+            </a:p>
+            <a:p>
+              <a:pPr algn="ctr"/>
+              <a:r>
+                <a:rPr kumimoji="1" lang="en-US" altLang="ja-JP" sz="3200" dirty="0">
+                  <a:solidFill>
+                    <a:srgbClr val="FF0000"/>
+                  </a:solidFill>
+                  <a:latin typeface="Hiragino Sans W4" panose="020B0400000000000000" pitchFamily="34" charset="-128"/>
+                  <a:ea typeface="Hiragino Sans W4" panose="020B0400000000000000" pitchFamily="34" charset="-128"/>
+                </a:rPr>
+                <a:t>5%</a:t>
+              </a:r>
+              <a:endParaRPr lang="ja-JP" altLang="en-US" sz="3200">
+                <a:solidFill>
+                  <a:srgbClr val="FF0000"/>
+                </a:solidFill>
+                <a:latin typeface="Hiragino Sans W4" panose="020B0400000000000000" pitchFamily="34" charset="-128"/>
+                <a:ea typeface="Hiragino Sans W4" panose="020B0400000000000000" pitchFamily="34" charset="-128"/>
+              </a:endParaRPr>
+            </a:p>
+          </p:txBody>
+        </p:sp>
+        <p:sp>
+          <p:nvSpPr>
+            <p:cNvPr id="16" name="右中かっこ 15">
+              <a:extLst>
+                <a:ext uri="{FF2B5EF4-FFF2-40B4-BE49-F238E27FC236}">
+                  <a16:creationId xmlns:a16="http://schemas.microsoft.com/office/drawing/2014/main" id="{D26296EE-4C4C-CD64-18F9-D193FA7E468B}"/>
+                </a:ext>
+              </a:extLst>
+            </p:cNvPr>
+            <p:cNvSpPr/>
+            <p:nvPr/>
+          </p:nvSpPr>
+          <p:spPr>
+            <a:xfrm rot="5400000">
+              <a:off x="8205921" y="3374535"/>
+              <a:ext cx="626364" cy="4670213"/>
+            </a:xfrm>
+            <a:prstGeom prst="rightBrace">
+              <a:avLst>
+                <a:gd name="adj1" fmla="val 8333"/>
+                <a:gd name="adj2" fmla="val 49264"/>
+              </a:avLst>
+            </a:prstGeom>
+            <a:ln w="38100">
+              <a:solidFill>
+                <a:schemeClr val="tx1"/>
+              </a:solidFill>
+            </a:ln>
+          </p:spPr>
+          <p:style>
+            <a:lnRef idx="1">
+              <a:schemeClr val="accent1"/>
+            </a:lnRef>
+            <a:fillRef idx="0">
+              <a:schemeClr val="accent1"/>
+            </a:fillRef>
+            <a:effectRef idx="0">
+              <a:schemeClr val="accent1"/>
+            </a:effectRef>
+            <a:fontRef idx="minor">
+              <a:schemeClr val="tx1"/>
+            </a:fontRef>
+          </p:style>
+          <p:txBody>
+            <a:bodyPr rtlCol="0" anchor="ctr"/>
+            <a:lstStyle/>
+            <a:p>
+              <a:pPr algn="ctr"/>
+              <a:endParaRPr kumimoji="1" lang="ja-JP" altLang="en-US"/>
+            </a:p>
+          </p:txBody>
+        </p:sp>
+        <p:sp>
+          <p:nvSpPr>
+            <p:cNvPr id="18" name="テキスト ボックス 17">
+              <a:extLst>
+                <a:ext uri="{FF2B5EF4-FFF2-40B4-BE49-F238E27FC236}">
+                  <a16:creationId xmlns:a16="http://schemas.microsoft.com/office/drawing/2014/main" id="{B42D2180-B1A2-D467-FE50-FC5D748430C9}"/>
+                </a:ext>
+              </a:extLst>
+            </p:cNvPr>
+            <p:cNvSpPr txBox="1"/>
+            <p:nvPr/>
+          </p:nvSpPr>
+          <p:spPr>
+            <a:xfrm>
+              <a:off x="7973641" y="6141126"/>
+              <a:ext cx="1217600" cy="523220"/>
+            </a:xfrm>
+            <a:prstGeom prst="rect">
+              <a:avLst/>
+            </a:prstGeom>
+            <a:noFill/>
+          </p:spPr>
+          <p:txBody>
+            <a:bodyPr wrap="square">
+              <a:spAutoFit/>
+            </a:bodyPr>
+            <a:lstStyle/>
+            <a:p>
+              <a:pPr algn="ctr"/>
+              <a:r>
+                <a:rPr kumimoji="1" lang="en-US" altLang="ja-JP" sz="2800" dirty="0">
+                  <a:latin typeface="Hiragino Sans W4" panose="020B0400000000000000" pitchFamily="34" charset="-128"/>
+                  <a:ea typeface="Hiragino Sans W4" panose="020B0400000000000000" pitchFamily="34" charset="-128"/>
+                </a:rPr>
+                <a:t>15pp</a:t>
+              </a:r>
+              <a:endParaRPr lang="ja-JP" altLang="en-US" sz="2800"/>
+            </a:p>
+          </p:txBody>
+        </p:sp>
+        <p:sp>
+          <p:nvSpPr>
+            <p:cNvPr id="29" name="右中かっこ 28">
+              <a:extLst>
+                <a:ext uri="{FF2B5EF4-FFF2-40B4-BE49-F238E27FC236}">
+                  <a16:creationId xmlns:a16="http://schemas.microsoft.com/office/drawing/2014/main" id="{AD028ECA-9ECD-7B44-8CD2-9C576768961F}"/>
+                </a:ext>
+              </a:extLst>
+            </p:cNvPr>
+            <p:cNvSpPr/>
+            <p:nvPr/>
+          </p:nvSpPr>
+          <p:spPr>
+            <a:xfrm rot="5400000">
+              <a:off x="4779420" y="4618248"/>
+              <a:ext cx="626364" cy="2182790"/>
+            </a:xfrm>
+            <a:prstGeom prst="rightBrace">
+              <a:avLst>
+                <a:gd name="adj1" fmla="val 8333"/>
+                <a:gd name="adj2" fmla="val 49264"/>
+              </a:avLst>
+            </a:prstGeom>
+            <a:ln w="38100">
+              <a:solidFill>
+                <a:schemeClr val="tx1"/>
+              </a:solidFill>
+            </a:ln>
+          </p:spPr>
+          <p:style>
+            <a:lnRef idx="1">
+              <a:schemeClr val="accent1"/>
+            </a:lnRef>
+            <a:fillRef idx="0">
+              <a:schemeClr val="accent1"/>
+            </a:fillRef>
+            <a:effectRef idx="0">
+              <a:schemeClr val="accent1"/>
+            </a:effectRef>
+            <a:fontRef idx="minor">
+              <a:schemeClr val="tx1"/>
+            </a:fontRef>
+          </p:style>
+          <p:txBody>
+            <a:bodyPr rtlCol="0" anchor="ctr"/>
+            <a:lstStyle/>
+            <a:p>
+              <a:pPr algn="ctr"/>
+              <a:endParaRPr kumimoji="1" lang="ja-JP" altLang="en-US"/>
+            </a:p>
+          </p:txBody>
+        </p:sp>
+        <p:sp>
+          <p:nvSpPr>
+            <p:cNvPr id="30" name="テキスト ボックス 29">
+              <a:extLst>
+                <a:ext uri="{FF2B5EF4-FFF2-40B4-BE49-F238E27FC236}">
+                  <a16:creationId xmlns:a16="http://schemas.microsoft.com/office/drawing/2014/main" id="{EDEC6F89-6AF4-FE52-3301-3BDB897B8872}"/>
+                </a:ext>
+              </a:extLst>
+            </p:cNvPr>
+            <p:cNvSpPr txBox="1"/>
+            <p:nvPr/>
+          </p:nvSpPr>
+          <p:spPr>
+            <a:xfrm>
+              <a:off x="4483802" y="6141126"/>
+              <a:ext cx="1217600" cy="523220"/>
+            </a:xfrm>
+            <a:prstGeom prst="rect">
+              <a:avLst/>
+            </a:prstGeom>
+            <a:noFill/>
+          </p:spPr>
+          <p:txBody>
+            <a:bodyPr wrap="square">
+              <a:spAutoFit/>
+            </a:bodyPr>
+            <a:lstStyle/>
+            <a:p>
+              <a:pPr algn="ctr"/>
+              <a:r>
+                <a:rPr kumimoji="1" lang="en-US" altLang="ja-JP" sz="2800" dirty="0">
+                  <a:latin typeface="Hiragino Sans W4" panose="020B0400000000000000" pitchFamily="34" charset="-128"/>
+                  <a:ea typeface="Hiragino Sans W4" panose="020B0400000000000000" pitchFamily="34" charset="-128"/>
+                </a:rPr>
+                <a:t>3pp</a:t>
+              </a:r>
+              <a:endParaRPr lang="ja-JP" altLang="en-US" sz="2800"/>
+            </a:p>
+          </p:txBody>
+        </p:sp>
+        <p:cxnSp>
+          <p:nvCxnSpPr>
+            <p:cNvPr id="47" name="直線コネクタ 46">
+              <a:extLst>
+                <a:ext uri="{FF2B5EF4-FFF2-40B4-BE49-F238E27FC236}">
+                  <a16:creationId xmlns:a16="http://schemas.microsoft.com/office/drawing/2014/main" id="{ACC7B1B6-5A80-2E5E-461F-E558857E6F0A}"/>
+                </a:ext>
+              </a:extLst>
+            </p:cNvPr>
+            <p:cNvCxnSpPr/>
+            <p:nvPr/>
+          </p:nvCxnSpPr>
+          <p:spPr>
+            <a:xfrm>
+              <a:off x="2920749" y="5018499"/>
+              <a:ext cx="0" cy="584775"/>
+            </a:xfrm>
+            <a:prstGeom prst="line">
+              <a:avLst/>
+            </a:prstGeom>
+            <a:ln w="63500">
+              <a:solidFill>
+                <a:schemeClr val="tx1"/>
+              </a:solidFill>
+            </a:ln>
+          </p:spPr>
+          <p:style>
+            <a:lnRef idx="1">
+              <a:schemeClr val="accent1"/>
+            </a:lnRef>
+            <a:fillRef idx="0">
+              <a:schemeClr val="accent1"/>
+            </a:fillRef>
+            <a:effectRef idx="0">
+              <a:schemeClr val="accent1"/>
+            </a:effectRef>
+            <a:fontRef idx="minor">
+              <a:schemeClr val="tx1"/>
+            </a:fontRef>
+          </p:style>
+        </p:cxnSp>
+        <p:sp>
+          <p:nvSpPr>
+            <p:cNvPr id="48" name="テキスト ボックス 47">
+              <a:extLst>
+                <a:ext uri="{FF2B5EF4-FFF2-40B4-BE49-F238E27FC236}">
+                  <a16:creationId xmlns:a16="http://schemas.microsoft.com/office/drawing/2014/main" id="{EF3ABFCC-AEC3-FCD5-6EA6-357583D54C59}"/>
+                </a:ext>
+              </a:extLst>
+            </p:cNvPr>
+            <p:cNvSpPr txBox="1"/>
+            <p:nvPr/>
+          </p:nvSpPr>
+          <p:spPr>
+            <a:xfrm>
+              <a:off x="2311949" y="4431772"/>
+              <a:ext cx="1217600" cy="523220"/>
+            </a:xfrm>
+            <a:prstGeom prst="rect">
+              <a:avLst/>
+            </a:prstGeom>
+            <a:noFill/>
+          </p:spPr>
+          <p:txBody>
+            <a:bodyPr wrap="square">
+              <a:spAutoFit/>
+            </a:bodyPr>
+            <a:lstStyle/>
+            <a:p>
+              <a:pPr algn="ctr"/>
+              <a:r>
+                <a:rPr kumimoji="1" lang="en-US" altLang="ja-JP" sz="2800" dirty="0">
+                  <a:latin typeface="Hiragino Sans W4" panose="020B0400000000000000" pitchFamily="34" charset="-128"/>
+                  <a:ea typeface="Hiragino Sans W4" panose="020B0400000000000000" pitchFamily="34" charset="-128"/>
+                </a:rPr>
+                <a:t>0%</a:t>
+              </a:r>
+              <a:endParaRPr lang="ja-JP" altLang="en-US" sz="2800"/>
+            </a:p>
+          </p:txBody>
+        </p:sp>
+      </p:grpSp>
+    </p:spTree>
+    <p:extLst>
+      <p:ext uri="{BB962C8B-B14F-4D97-AF65-F5344CB8AC3E}">
+        <p14:creationId xmlns:p14="http://schemas.microsoft.com/office/powerpoint/2010/main" val="1163431819"/>
+      </p:ext>
+    </p:extLst>
+  </p:cSld>
+  <p:clrMapOvr>
+    <a:masterClrMapping/>
+  </p:clrMapOvr>
+</p:sld>
+</file>
+
+<file path=ppt/slides/slide5.xml><?xml version="1.0" encoding="utf-8"?>
+<p:sld xmlns:a="http://schemas.openxmlformats.org/drawingml/2006/main" xmlns:r="http://schemas.openxmlformats.org/officeDocument/2006/relationships" xmlns:p="http://schemas.openxmlformats.org/presentationml/2006/main">
+  <p:cSld>
+    <p:spTree>
+      <p:nvGrpSpPr>
+        <p:cNvPr id="1" name=""/>
+        <p:cNvGrpSpPr/>
+        <p:nvPr/>
+      </p:nvGrpSpPr>
+      <p:grpSpPr>
+        <a:xfrm>
+          <a:off x="0" y="0"/>
+          <a:ext cx="0" cy="0"/>
+          <a:chOff x="0" y="0"/>
+          <a:chExt cx="0" cy="0"/>
+        </a:xfrm>
+      </p:grpSpPr>
+      <p:grpSp>
+        <p:nvGrpSpPr>
+          <p:cNvPr id="18" name="グループ化 17">
+            <a:extLst>
+              <a:ext uri="{FF2B5EF4-FFF2-40B4-BE49-F238E27FC236}">
+                <a16:creationId xmlns:a16="http://schemas.microsoft.com/office/drawing/2014/main" id="{183292DC-F4C0-FDB8-60C0-79F8BA659ABC}"/>
+              </a:ext>
+            </a:extLst>
+          </p:cNvPr>
+          <p:cNvGrpSpPr/>
+          <p:nvPr/>
+        </p:nvGrpSpPr>
+        <p:grpSpPr>
+          <a:xfrm>
+            <a:off x="727023" y="2136553"/>
+            <a:ext cx="11638306" cy="4536506"/>
+            <a:chOff x="727023" y="2136553"/>
+            <a:chExt cx="11638306" cy="4536506"/>
+          </a:xfrm>
+        </p:grpSpPr>
+        <p:cxnSp>
+          <p:nvCxnSpPr>
+            <p:cNvPr id="3" name="直線矢印コネクタ 2">
+              <a:extLst>
+                <a:ext uri="{FF2B5EF4-FFF2-40B4-BE49-F238E27FC236}">
+                  <a16:creationId xmlns:a16="http://schemas.microsoft.com/office/drawing/2014/main" id="{4BDD96B7-98D8-3FA0-004A-F19F2D8BAF92}"/>
+                </a:ext>
+              </a:extLst>
+            </p:cNvPr>
+            <p:cNvCxnSpPr>
+              <a:cxnSpLocks/>
+            </p:cNvCxnSpPr>
+            <p:nvPr/>
+          </p:nvCxnSpPr>
+          <p:spPr>
+            <a:xfrm>
+              <a:off x="2548329" y="5278156"/>
+              <a:ext cx="9526248" cy="0"/>
+            </a:xfrm>
+            <a:prstGeom prst="straightConnector1">
+              <a:avLst/>
+            </a:prstGeom>
+            <a:ln w="69850">
+              <a:solidFill>
+                <a:schemeClr val="tx1"/>
+              </a:solidFill>
+              <a:tailEnd type="triangle"/>
+            </a:ln>
+          </p:spPr>
+          <p:style>
+            <a:lnRef idx="1">
+              <a:schemeClr val="accent1"/>
+            </a:lnRef>
+            <a:fillRef idx="0">
+              <a:schemeClr val="accent1"/>
+            </a:fillRef>
+            <a:effectRef idx="0">
+              <a:schemeClr val="accent1"/>
+            </a:effectRef>
+            <a:fontRef idx="minor">
+              <a:schemeClr val="tx1"/>
+            </a:fontRef>
+          </p:style>
+        </p:cxnSp>
+        <p:sp>
+          <p:nvSpPr>
+            <p:cNvPr id="4" name="テキスト ボックス 3">
+              <a:extLst>
+                <a:ext uri="{FF2B5EF4-FFF2-40B4-BE49-F238E27FC236}">
+                  <a16:creationId xmlns:a16="http://schemas.microsoft.com/office/drawing/2014/main" id="{92B43085-ADC3-9C51-06E2-375C0B88634E}"/>
+                </a:ext>
+              </a:extLst>
+            </p:cNvPr>
+            <p:cNvSpPr txBox="1"/>
+            <p:nvPr/>
+          </p:nvSpPr>
+          <p:spPr>
+            <a:xfrm>
+              <a:off x="727023" y="4985768"/>
+              <a:ext cx="2182789" cy="584775"/>
+            </a:xfrm>
+            <a:prstGeom prst="rect">
+              <a:avLst/>
+            </a:prstGeom>
+            <a:noFill/>
+          </p:spPr>
+          <p:txBody>
+            <a:bodyPr wrap="square">
+              <a:spAutoFit/>
+            </a:bodyPr>
+            <a:lstStyle/>
+            <a:p>
+              <a:pPr algn="ctr"/>
+              <a:r>
+                <a:rPr lang="ja-JP" altLang="en-US" sz="3200">
+                  <a:latin typeface="Hiragino Sans W4" panose="020B0400000000000000" pitchFamily="34" charset="-128"/>
+                  <a:ea typeface="Hiragino Sans W4" panose="020B0400000000000000" pitchFamily="34" charset="-128"/>
+                </a:rPr>
+                <a:t>増税率</a:t>
+              </a:r>
+            </a:p>
+          </p:txBody>
+        </p:sp>
+        <p:cxnSp>
+          <p:nvCxnSpPr>
+            <p:cNvPr id="5" name="直線矢印コネクタ 4">
+              <a:extLst>
+                <a:ext uri="{FF2B5EF4-FFF2-40B4-BE49-F238E27FC236}">
+                  <a16:creationId xmlns:a16="http://schemas.microsoft.com/office/drawing/2014/main" id="{0D85D6DC-1754-3DF0-E8B6-762B6E899425}"/>
+                </a:ext>
+              </a:extLst>
+            </p:cNvPr>
+            <p:cNvCxnSpPr>
+              <a:cxnSpLocks/>
+              <a:stCxn id="6" idx="2"/>
+            </p:cNvCxnSpPr>
+            <p:nvPr/>
+          </p:nvCxnSpPr>
+          <p:spPr>
+            <a:xfrm>
+              <a:off x="3433577" y="3213771"/>
+              <a:ext cx="0" cy="2064384"/>
+            </a:xfrm>
+            <a:prstGeom prst="straightConnector1">
+              <a:avLst/>
+            </a:prstGeom>
+            <a:ln w="38100">
+              <a:solidFill>
+                <a:schemeClr val="tx1"/>
+              </a:solidFill>
+              <a:tailEnd type="triangle"/>
+            </a:ln>
+          </p:spPr>
+          <p:style>
+            <a:lnRef idx="1">
+              <a:schemeClr val="accent1"/>
+            </a:lnRef>
+            <a:fillRef idx="0">
+              <a:schemeClr val="accent1"/>
+            </a:fillRef>
+            <a:effectRef idx="0">
+              <a:schemeClr val="accent1"/>
+            </a:effectRef>
+            <a:fontRef idx="minor">
+              <a:schemeClr val="tx1"/>
+            </a:fontRef>
+          </p:style>
+        </p:cxnSp>
+        <p:sp>
+          <p:nvSpPr>
+            <p:cNvPr id="6" name="テキスト ボックス 5">
+              <a:extLst>
+                <a:ext uri="{FF2B5EF4-FFF2-40B4-BE49-F238E27FC236}">
+                  <a16:creationId xmlns:a16="http://schemas.microsoft.com/office/drawing/2014/main" id="{8C09F65C-22D9-DDA1-F199-1A17F0363D59}"/>
+                </a:ext>
+              </a:extLst>
+            </p:cNvPr>
+            <p:cNvSpPr txBox="1"/>
+            <p:nvPr/>
+          </p:nvSpPr>
+          <p:spPr>
+            <a:xfrm>
+              <a:off x="2342182" y="2136553"/>
+              <a:ext cx="2182790" cy="1077218"/>
+            </a:xfrm>
+            <a:prstGeom prst="rect">
+              <a:avLst/>
+            </a:prstGeom>
+            <a:noFill/>
+          </p:spPr>
+          <p:txBody>
+            <a:bodyPr wrap="square">
+              <a:spAutoFit/>
+            </a:bodyPr>
+            <a:lstStyle/>
+            <a:p>
+              <a:pPr algn="ctr"/>
+              <a:r>
+                <a:rPr kumimoji="1" lang="ja-JP" altLang="en-US" sz="3200">
+                  <a:latin typeface="Hiragino Kaku Gothic StdN W8" panose="020B0800000000000000" pitchFamily="34" charset="-128"/>
+                  <a:ea typeface="Hiragino Kaku Gothic StdN W8" panose="020B0800000000000000" pitchFamily="34" charset="-128"/>
+                </a:rPr>
+                <a:t>候補者</a:t>
+              </a:r>
+              <a:r>
+                <a:rPr kumimoji="1" lang="en-US" altLang="ja-JP" sz="3200" dirty="0">
+                  <a:latin typeface="Hiragino Kaku Gothic StdN W8" panose="020B0800000000000000" pitchFamily="34" charset="-128"/>
+                  <a:ea typeface="Hiragino Kaku Gothic StdN W8" panose="020B0800000000000000" pitchFamily="34" charset="-128"/>
+                </a:rPr>
+                <a:t>A</a:t>
+              </a:r>
+            </a:p>
+            <a:p>
+              <a:pPr algn="ctr"/>
+              <a:r>
+                <a:rPr kumimoji="1" lang="en-US" altLang="ja-JP" sz="3200" dirty="0">
+                  <a:latin typeface="Hiragino Sans W4" panose="020B0400000000000000" pitchFamily="34" charset="-128"/>
+                  <a:ea typeface="Hiragino Sans W4" panose="020B0400000000000000" pitchFamily="34" charset="-128"/>
+                </a:rPr>
+                <a:t>-</a:t>
+              </a:r>
+              <a:r>
+                <a:rPr kumimoji="1" lang="ja-JP" altLang="en-US" sz="3200">
+                  <a:latin typeface="Hiragino Sans W4" panose="020B0400000000000000" pitchFamily="34" charset="-128"/>
+                  <a:ea typeface="Hiragino Sans W4" panose="020B0400000000000000" pitchFamily="34" charset="-128"/>
+                </a:rPr>
+                <a:t>５</a:t>
+              </a:r>
+              <a:r>
+                <a:rPr kumimoji="1" lang="en-US" altLang="ja-JP" sz="3200" dirty="0">
+                  <a:latin typeface="Hiragino Sans W4" panose="020B0400000000000000" pitchFamily="34" charset="-128"/>
+                  <a:ea typeface="Hiragino Sans W4" panose="020B0400000000000000" pitchFamily="34" charset="-128"/>
+                </a:rPr>
+                <a:t>%</a:t>
+              </a:r>
+              <a:endParaRPr lang="ja-JP" altLang="en-US" sz="3200">
+                <a:latin typeface="Hiragino Sans W4" panose="020B0400000000000000" pitchFamily="34" charset="-128"/>
+                <a:ea typeface="Hiragino Sans W4" panose="020B0400000000000000" pitchFamily="34" charset="-128"/>
+              </a:endParaRPr>
+            </a:p>
+          </p:txBody>
+        </p:sp>
+        <p:cxnSp>
+          <p:nvCxnSpPr>
+            <p:cNvPr id="7" name="直線矢印コネクタ 6">
+              <a:extLst>
+                <a:ext uri="{FF2B5EF4-FFF2-40B4-BE49-F238E27FC236}">
+                  <a16:creationId xmlns:a16="http://schemas.microsoft.com/office/drawing/2014/main" id="{67009853-3BE5-58E4-F1AC-38659D39231E}"/>
+                </a:ext>
+              </a:extLst>
+            </p:cNvPr>
+            <p:cNvCxnSpPr>
+              <a:cxnSpLocks/>
+              <a:stCxn id="8" idx="2"/>
+            </p:cNvCxnSpPr>
+            <p:nvPr/>
+          </p:nvCxnSpPr>
+          <p:spPr>
+            <a:xfrm>
+              <a:off x="11273934" y="3213772"/>
+              <a:ext cx="0" cy="2064384"/>
+            </a:xfrm>
+            <a:prstGeom prst="straightConnector1">
+              <a:avLst/>
+            </a:prstGeom>
+            <a:ln w="38100">
+              <a:solidFill>
+                <a:schemeClr val="tx1"/>
+              </a:solidFill>
+              <a:tailEnd type="triangle"/>
+            </a:ln>
+          </p:spPr>
+          <p:style>
+            <a:lnRef idx="1">
+              <a:schemeClr val="accent1"/>
+            </a:lnRef>
+            <a:fillRef idx="0">
+              <a:schemeClr val="accent1"/>
+            </a:fillRef>
+            <a:effectRef idx="0">
+              <a:schemeClr val="accent1"/>
+            </a:effectRef>
+            <a:fontRef idx="minor">
+              <a:schemeClr val="tx1"/>
+            </a:fontRef>
+          </p:style>
+        </p:cxnSp>
+        <p:sp>
+          <p:nvSpPr>
+            <p:cNvPr id="8" name="テキスト ボックス 7">
+              <a:extLst>
+                <a:ext uri="{FF2B5EF4-FFF2-40B4-BE49-F238E27FC236}">
+                  <a16:creationId xmlns:a16="http://schemas.microsoft.com/office/drawing/2014/main" id="{0B3A595C-AEDC-DECE-EB0F-CFC7BCA1028E}"/>
+                </a:ext>
+              </a:extLst>
+            </p:cNvPr>
+            <p:cNvSpPr txBox="1"/>
+            <p:nvPr/>
+          </p:nvSpPr>
+          <p:spPr>
+            <a:xfrm>
+              <a:off x="10182539" y="2136554"/>
+              <a:ext cx="2182790" cy="1077218"/>
+            </a:xfrm>
+            <a:prstGeom prst="rect">
+              <a:avLst/>
+            </a:prstGeom>
+            <a:noFill/>
+          </p:spPr>
+          <p:txBody>
+            <a:bodyPr wrap="square">
+              <a:spAutoFit/>
+            </a:bodyPr>
+            <a:lstStyle/>
+            <a:p>
+              <a:pPr algn="ctr"/>
+              <a:r>
+                <a:rPr kumimoji="1" lang="ja-JP" altLang="en-US" sz="3200">
+                  <a:latin typeface="Hiragino Kaku Gothic StdN W8" panose="020B0800000000000000" pitchFamily="34" charset="-128"/>
+                  <a:ea typeface="Hiragino Kaku Gothic StdN W8" panose="020B0800000000000000" pitchFamily="34" charset="-128"/>
+                </a:rPr>
+                <a:t>候補者</a:t>
+              </a:r>
+              <a:r>
+                <a:rPr kumimoji="1" lang="en-US" altLang="ja-JP" sz="3200" dirty="0">
+                  <a:latin typeface="Hiragino Kaku Gothic StdN W8" panose="020B0800000000000000" pitchFamily="34" charset="-128"/>
+                  <a:ea typeface="Hiragino Kaku Gothic StdN W8" panose="020B0800000000000000" pitchFamily="34" charset="-128"/>
+                </a:rPr>
+                <a:t>B</a:t>
+              </a:r>
+            </a:p>
+            <a:p>
+              <a:pPr algn="ctr"/>
+              <a:r>
+                <a:rPr kumimoji="1" lang="en-US" altLang="ja-JP" sz="3200" dirty="0">
+                  <a:latin typeface="Hiragino Sans W4" panose="020B0400000000000000" pitchFamily="34" charset="-128"/>
+                  <a:ea typeface="Hiragino Sans W4" panose="020B0400000000000000" pitchFamily="34" charset="-128"/>
+                </a:rPr>
+                <a:t>20%</a:t>
+              </a:r>
+              <a:endParaRPr lang="ja-JP" altLang="en-US" sz="3200">
+                <a:latin typeface="Hiragino Sans W4" panose="020B0400000000000000" pitchFamily="34" charset="-128"/>
+                <a:ea typeface="Hiragino Sans W4" panose="020B0400000000000000" pitchFamily="34" charset="-128"/>
+              </a:endParaRPr>
+            </a:p>
+          </p:txBody>
+        </p:sp>
+        <p:cxnSp>
+          <p:nvCxnSpPr>
+            <p:cNvPr id="9" name="直線矢印コネクタ 8">
+              <a:extLst>
+                <a:ext uri="{FF2B5EF4-FFF2-40B4-BE49-F238E27FC236}">
+                  <a16:creationId xmlns:a16="http://schemas.microsoft.com/office/drawing/2014/main" id="{491D384A-EA43-D1BF-EB4E-B5283DF9BDF4}"/>
+                </a:ext>
+              </a:extLst>
+            </p:cNvPr>
+            <p:cNvCxnSpPr>
+              <a:cxnSpLocks/>
+              <a:stCxn id="10" idx="2"/>
+            </p:cNvCxnSpPr>
+            <p:nvPr/>
+          </p:nvCxnSpPr>
+          <p:spPr>
+            <a:xfrm>
+              <a:off x="6183997" y="3213771"/>
+              <a:ext cx="0" cy="2064384"/>
+            </a:xfrm>
+            <a:prstGeom prst="straightConnector1">
+              <a:avLst/>
+            </a:prstGeom>
+            <a:ln w="38100">
+              <a:solidFill>
+                <a:schemeClr val="tx1"/>
+              </a:solidFill>
+              <a:tailEnd type="triangle"/>
+            </a:ln>
+          </p:spPr>
+          <p:style>
+            <a:lnRef idx="1">
+              <a:schemeClr val="accent1"/>
+            </a:lnRef>
+            <a:fillRef idx="0">
+              <a:schemeClr val="accent1"/>
+            </a:fillRef>
+            <a:effectRef idx="0">
+              <a:schemeClr val="accent1"/>
+            </a:effectRef>
+            <a:fontRef idx="minor">
+              <a:schemeClr val="tx1"/>
+            </a:fontRef>
+          </p:style>
+        </p:cxnSp>
+        <p:sp>
+          <p:nvSpPr>
+            <p:cNvPr id="10" name="テキスト ボックス 9">
+              <a:extLst>
+                <a:ext uri="{FF2B5EF4-FFF2-40B4-BE49-F238E27FC236}">
+                  <a16:creationId xmlns:a16="http://schemas.microsoft.com/office/drawing/2014/main" id="{B6E6F00F-5332-1652-32FD-5A55630D1ED6}"/>
+                </a:ext>
+              </a:extLst>
+            </p:cNvPr>
+            <p:cNvSpPr txBox="1"/>
+            <p:nvPr/>
+          </p:nvSpPr>
+          <p:spPr>
+            <a:xfrm>
+              <a:off x="5092602" y="2136553"/>
+              <a:ext cx="2182790" cy="1077218"/>
+            </a:xfrm>
+            <a:prstGeom prst="rect">
+              <a:avLst/>
+            </a:prstGeom>
+            <a:noFill/>
+          </p:spPr>
+          <p:txBody>
+            <a:bodyPr wrap="square">
+              <a:spAutoFit/>
+            </a:bodyPr>
+            <a:lstStyle/>
+            <a:p>
+              <a:pPr algn="ctr"/>
+              <a:r>
+                <a:rPr kumimoji="1" lang="ja-JP" altLang="en-US" sz="3200">
+                  <a:solidFill>
+                    <a:srgbClr val="FF0000"/>
+                  </a:solidFill>
+                  <a:latin typeface="Hiragino Kaku Gothic StdN W8" panose="020B0800000000000000" pitchFamily="34" charset="-128"/>
+                  <a:ea typeface="Hiragino Kaku Gothic StdN W8" panose="020B0800000000000000" pitchFamily="34" charset="-128"/>
+                </a:rPr>
+                <a:t>有権者</a:t>
+              </a:r>
+              <a:endParaRPr kumimoji="1" lang="en-US" altLang="ja-JP" sz="3200" dirty="0">
+                <a:solidFill>
+                  <a:srgbClr val="FF0000"/>
+                </a:solidFill>
+                <a:latin typeface="Hiragino Sans W4" panose="020B0400000000000000" pitchFamily="34" charset="-128"/>
+                <a:ea typeface="Hiragino Sans W4" panose="020B0400000000000000" pitchFamily="34" charset="-128"/>
+              </a:endParaRPr>
+            </a:p>
+            <a:p>
+              <a:pPr algn="ctr"/>
+              <a:r>
+                <a:rPr kumimoji="1" lang="en-US" altLang="ja-JP" sz="3200" dirty="0">
+                  <a:solidFill>
+                    <a:srgbClr val="FF0000"/>
+                  </a:solidFill>
+                  <a:latin typeface="Hiragino Sans W4" panose="020B0400000000000000" pitchFamily="34" charset="-128"/>
+                  <a:ea typeface="Hiragino Sans W4" panose="020B0400000000000000" pitchFamily="34" charset="-128"/>
+                </a:rPr>
+                <a:t>5%</a:t>
+              </a:r>
+              <a:endParaRPr lang="ja-JP" altLang="en-US" sz="3200">
+                <a:solidFill>
+                  <a:srgbClr val="FF0000"/>
+                </a:solidFill>
+                <a:latin typeface="Hiragino Sans W4" panose="020B0400000000000000" pitchFamily="34" charset="-128"/>
+                <a:ea typeface="Hiragino Sans W4" panose="020B0400000000000000" pitchFamily="34" charset="-128"/>
+              </a:endParaRPr>
+            </a:p>
+          </p:txBody>
+        </p:sp>
+        <p:sp>
+          <p:nvSpPr>
+            <p:cNvPr id="11" name="右中かっこ 10">
+              <a:extLst>
+                <a:ext uri="{FF2B5EF4-FFF2-40B4-BE49-F238E27FC236}">
+                  <a16:creationId xmlns:a16="http://schemas.microsoft.com/office/drawing/2014/main" id="{61DF06EC-C4BA-D327-D30F-D4C59855C664}"/>
+                </a:ext>
+              </a:extLst>
+            </p:cNvPr>
+            <p:cNvSpPr/>
+            <p:nvPr/>
+          </p:nvSpPr>
+          <p:spPr>
+            <a:xfrm rot="5400000">
+              <a:off x="8415783" y="3164673"/>
+              <a:ext cx="626364" cy="5089937"/>
+            </a:xfrm>
+            <a:prstGeom prst="rightBrace">
+              <a:avLst>
+                <a:gd name="adj1" fmla="val 8333"/>
+                <a:gd name="adj2" fmla="val 49264"/>
+              </a:avLst>
+            </a:prstGeom>
+            <a:ln w="38100">
+              <a:solidFill>
+                <a:schemeClr val="tx1"/>
+              </a:solidFill>
+            </a:ln>
+          </p:spPr>
+          <p:style>
+            <a:lnRef idx="1">
+              <a:schemeClr val="accent1"/>
+            </a:lnRef>
+            <a:fillRef idx="0">
+              <a:schemeClr val="accent1"/>
+            </a:fillRef>
+            <a:effectRef idx="0">
+              <a:schemeClr val="accent1"/>
+            </a:effectRef>
+            <a:fontRef idx="minor">
+              <a:schemeClr val="tx1"/>
+            </a:fontRef>
+          </p:style>
+          <p:txBody>
+            <a:bodyPr rtlCol="0" anchor="ctr"/>
+            <a:lstStyle/>
+            <a:p>
+              <a:pPr algn="ctr"/>
+              <a:endParaRPr kumimoji="1" lang="ja-JP" altLang="en-US"/>
+            </a:p>
+          </p:txBody>
+        </p:sp>
+        <p:sp>
+          <p:nvSpPr>
+            <p:cNvPr id="12" name="テキスト ボックス 11">
+              <a:extLst>
+                <a:ext uri="{FF2B5EF4-FFF2-40B4-BE49-F238E27FC236}">
+                  <a16:creationId xmlns:a16="http://schemas.microsoft.com/office/drawing/2014/main" id="{C9B377D7-DB8E-4BCF-F19D-348A1A9709E6}"/>
+                </a:ext>
+              </a:extLst>
+            </p:cNvPr>
+            <p:cNvSpPr txBox="1"/>
+            <p:nvPr/>
+          </p:nvSpPr>
+          <p:spPr>
+            <a:xfrm>
+              <a:off x="8120165" y="6141126"/>
+              <a:ext cx="1217600" cy="523220"/>
+            </a:xfrm>
+            <a:prstGeom prst="rect">
+              <a:avLst/>
+            </a:prstGeom>
+            <a:noFill/>
+          </p:spPr>
+          <p:txBody>
+            <a:bodyPr wrap="square">
+              <a:spAutoFit/>
+            </a:bodyPr>
+            <a:lstStyle/>
+            <a:p>
+              <a:pPr algn="ctr"/>
+              <a:r>
+                <a:rPr kumimoji="1" lang="en-US" altLang="ja-JP" sz="2800" dirty="0">
+                  <a:latin typeface="Hiragino Sans W4" panose="020B0400000000000000" pitchFamily="34" charset="-128"/>
+                  <a:ea typeface="Hiragino Sans W4" panose="020B0400000000000000" pitchFamily="34" charset="-128"/>
+                </a:rPr>
+                <a:t>15pp</a:t>
+              </a:r>
+              <a:endParaRPr lang="ja-JP" altLang="en-US" sz="2800"/>
+            </a:p>
+          </p:txBody>
+        </p:sp>
+        <p:sp>
+          <p:nvSpPr>
+            <p:cNvPr id="13" name="右中かっこ 12">
+              <a:extLst>
+                <a:ext uri="{FF2B5EF4-FFF2-40B4-BE49-F238E27FC236}">
+                  <a16:creationId xmlns:a16="http://schemas.microsoft.com/office/drawing/2014/main" id="{ED5C94DA-1CEE-70CE-270C-AFCB100D8409}"/>
+                </a:ext>
+              </a:extLst>
+            </p:cNvPr>
+            <p:cNvSpPr/>
+            <p:nvPr/>
+          </p:nvSpPr>
+          <p:spPr>
+            <a:xfrm rot="5400000">
+              <a:off x="4495605" y="4334433"/>
+              <a:ext cx="626364" cy="2750420"/>
+            </a:xfrm>
+            <a:prstGeom prst="rightBrace">
+              <a:avLst>
+                <a:gd name="adj1" fmla="val 8333"/>
+                <a:gd name="adj2" fmla="val 49264"/>
+              </a:avLst>
+            </a:prstGeom>
+            <a:ln w="38100">
+              <a:solidFill>
+                <a:schemeClr val="tx1"/>
+              </a:solidFill>
+            </a:ln>
+          </p:spPr>
+          <p:style>
+            <a:lnRef idx="1">
+              <a:schemeClr val="accent1"/>
+            </a:lnRef>
+            <a:fillRef idx="0">
+              <a:schemeClr val="accent1"/>
+            </a:fillRef>
+            <a:effectRef idx="0">
+              <a:schemeClr val="accent1"/>
+            </a:effectRef>
+            <a:fontRef idx="minor">
+              <a:schemeClr val="tx1"/>
+            </a:fontRef>
+          </p:style>
+          <p:txBody>
+            <a:bodyPr rtlCol="0" anchor="ctr"/>
+            <a:lstStyle/>
+            <a:p>
+              <a:pPr algn="ctr"/>
+              <a:endParaRPr kumimoji="1" lang="ja-JP" altLang="en-US"/>
+            </a:p>
+          </p:txBody>
+        </p:sp>
+        <p:sp>
+          <p:nvSpPr>
+            <p:cNvPr id="14" name="テキスト ボックス 13">
+              <a:extLst>
+                <a:ext uri="{FF2B5EF4-FFF2-40B4-BE49-F238E27FC236}">
+                  <a16:creationId xmlns:a16="http://schemas.microsoft.com/office/drawing/2014/main" id="{60746537-8608-CC7F-FD95-F75CB3384B74}"/>
+                </a:ext>
+              </a:extLst>
+            </p:cNvPr>
+            <p:cNvSpPr txBox="1"/>
+            <p:nvPr/>
+          </p:nvSpPr>
+          <p:spPr>
+            <a:xfrm>
+              <a:off x="4199987" y="6149839"/>
+              <a:ext cx="1217600" cy="523220"/>
+            </a:xfrm>
+            <a:prstGeom prst="rect">
+              <a:avLst/>
+            </a:prstGeom>
+            <a:noFill/>
+          </p:spPr>
+          <p:txBody>
+            <a:bodyPr wrap="square">
+              <a:spAutoFit/>
+            </a:bodyPr>
+            <a:lstStyle/>
+            <a:p>
+              <a:pPr algn="ctr"/>
+              <a:r>
+                <a:rPr kumimoji="1" lang="en-US" altLang="ja-JP" sz="2800" dirty="0">
+                  <a:latin typeface="Hiragino Sans W4" panose="020B0400000000000000" pitchFamily="34" charset="-128"/>
+                  <a:ea typeface="Hiragino Sans W4" panose="020B0400000000000000" pitchFamily="34" charset="-128"/>
+                </a:rPr>
+                <a:t>10pp</a:t>
+              </a:r>
+              <a:endParaRPr lang="ja-JP" altLang="en-US" sz="2800"/>
+            </a:p>
+          </p:txBody>
+        </p:sp>
+        <p:cxnSp>
+          <p:nvCxnSpPr>
+            <p:cNvPr id="16" name="直線コネクタ 15">
+              <a:extLst>
+                <a:ext uri="{FF2B5EF4-FFF2-40B4-BE49-F238E27FC236}">
+                  <a16:creationId xmlns:a16="http://schemas.microsoft.com/office/drawing/2014/main" id="{4CCA7A60-3609-C0AB-8E2C-9412877C68C0}"/>
+                </a:ext>
+              </a:extLst>
+            </p:cNvPr>
+            <p:cNvCxnSpPr/>
+            <p:nvPr/>
+          </p:nvCxnSpPr>
+          <p:spPr>
+            <a:xfrm>
+              <a:off x="4808787" y="4985768"/>
+              <a:ext cx="0" cy="584775"/>
+            </a:xfrm>
+            <a:prstGeom prst="line">
+              <a:avLst/>
+            </a:prstGeom>
+            <a:ln w="63500">
+              <a:solidFill>
+                <a:schemeClr val="tx1"/>
+              </a:solidFill>
+            </a:ln>
+          </p:spPr>
+          <p:style>
+            <a:lnRef idx="1">
+              <a:schemeClr val="accent1"/>
+            </a:lnRef>
+            <a:fillRef idx="0">
+              <a:schemeClr val="accent1"/>
+            </a:fillRef>
+            <a:effectRef idx="0">
+              <a:schemeClr val="accent1"/>
+            </a:effectRef>
+            <a:fontRef idx="minor">
+              <a:schemeClr val="tx1"/>
+            </a:fontRef>
+          </p:style>
+        </p:cxnSp>
+        <p:sp>
+          <p:nvSpPr>
+            <p:cNvPr id="17" name="テキスト ボックス 16">
+              <a:extLst>
+                <a:ext uri="{FF2B5EF4-FFF2-40B4-BE49-F238E27FC236}">
+                  <a16:creationId xmlns:a16="http://schemas.microsoft.com/office/drawing/2014/main" id="{308D332A-66D1-694A-BA5F-0BD103FFD8D3}"/>
+                </a:ext>
+              </a:extLst>
+            </p:cNvPr>
+            <p:cNvSpPr txBox="1"/>
+            <p:nvPr/>
+          </p:nvSpPr>
+          <p:spPr>
+            <a:xfrm>
+              <a:off x="4199987" y="4399041"/>
+              <a:ext cx="1217600" cy="523220"/>
+            </a:xfrm>
+            <a:prstGeom prst="rect">
+              <a:avLst/>
+            </a:prstGeom>
+            <a:noFill/>
+          </p:spPr>
+          <p:txBody>
+            <a:bodyPr wrap="square">
+              <a:spAutoFit/>
+            </a:bodyPr>
+            <a:lstStyle/>
+            <a:p>
+              <a:pPr algn="ctr"/>
+              <a:r>
+                <a:rPr kumimoji="1" lang="en-US" altLang="ja-JP" sz="2800" dirty="0">
+                  <a:latin typeface="Hiragino Sans W4" panose="020B0400000000000000" pitchFamily="34" charset="-128"/>
+                  <a:ea typeface="Hiragino Sans W4" panose="020B0400000000000000" pitchFamily="34" charset="-128"/>
+                </a:rPr>
+                <a:t>0%</a:t>
+              </a:r>
+              <a:endParaRPr lang="ja-JP" altLang="en-US" sz="2800"/>
+            </a:p>
+          </p:txBody>
+        </p:sp>
+      </p:grpSp>
+    </p:spTree>
+    <p:extLst>
+      <p:ext uri="{BB962C8B-B14F-4D97-AF65-F5344CB8AC3E}">
+        <p14:creationId xmlns:p14="http://schemas.microsoft.com/office/powerpoint/2010/main" val="1260619511"/>
+      </p:ext>
+    </p:extLst>
+  </p:cSld>
+  <p:clrMapOvr>
+    <a:masterClrMapping/>
+  </p:clrMapOvr>
+</p:sld>
+</file>
+
 <file path=ppt/theme/theme1.xml><?xml version="1.0" encoding="utf-8"?>
 <a:theme xmlns:a="http://schemas.openxmlformats.org/drawingml/2006/main" name="Office テーマ">
   <a:themeElements>

--- a/figs/DIYfigures_pp.pptx
+++ b/figs/DIYfigures_pp.pptx
@@ -10,6 +10,11 @@
     <p:sldId id="258" r:id="rId4"/>
     <p:sldId id="259" r:id="rId5"/>
     <p:sldId id="260" r:id="rId6"/>
+    <p:sldId id="264" r:id="rId7"/>
+    <p:sldId id="261" r:id="rId8"/>
+    <p:sldId id="265" r:id="rId9"/>
+    <p:sldId id="262" r:id="rId10"/>
+    <p:sldId id="263" r:id="rId11"/>
   </p:sldIdLst>
   <p:sldSz cx="12801600" cy="9601200" type="A3"/>
   <p:notesSz cx="6858000" cy="9144000"/>
@@ -247,7 +252,7 @@
           <a:p>
             <a:fld id="{DBD89380-344E-284F-BE0F-D796858BF56F}" type="datetimeFigureOut">
               <a:rPr kumimoji="1" lang="ja-JP" altLang="en-US" smtClean="0"/>
-              <a:t>2026/4/23</a:t>
+              <a:t>2026/5/23</a:t>
             </a:fld>
             <a:endParaRPr kumimoji="1" lang="ja-JP" altLang="en-US"/>
           </a:p>
@@ -449,7 +454,7 @@
           <a:p>
             <a:fld id="{DBD89380-344E-284F-BE0F-D796858BF56F}" type="datetimeFigureOut">
               <a:rPr kumimoji="1" lang="ja-JP" altLang="en-US" smtClean="0"/>
-              <a:t>2026/4/23</a:t>
+              <a:t>2026/5/23</a:t>
             </a:fld>
             <a:endParaRPr kumimoji="1" lang="ja-JP" altLang="en-US"/>
           </a:p>
@@ -661,7 +666,7 @@
           <a:p>
             <a:fld id="{DBD89380-344E-284F-BE0F-D796858BF56F}" type="datetimeFigureOut">
               <a:rPr kumimoji="1" lang="ja-JP" altLang="en-US" smtClean="0"/>
-              <a:t>2026/4/23</a:t>
+              <a:t>2026/5/23</a:t>
             </a:fld>
             <a:endParaRPr kumimoji="1" lang="ja-JP" altLang="en-US"/>
           </a:p>
@@ -863,7 +868,7 @@
           <a:p>
             <a:fld id="{DBD89380-344E-284F-BE0F-D796858BF56F}" type="datetimeFigureOut">
               <a:rPr kumimoji="1" lang="ja-JP" altLang="en-US" smtClean="0"/>
-              <a:t>2026/4/23</a:t>
+              <a:t>2026/5/23</a:t>
             </a:fld>
             <a:endParaRPr kumimoji="1" lang="ja-JP" altLang="en-US"/>
           </a:p>
@@ -1107,7 +1112,7 @@
           <a:p>
             <a:fld id="{DBD89380-344E-284F-BE0F-D796858BF56F}" type="datetimeFigureOut">
               <a:rPr kumimoji="1" lang="ja-JP" altLang="en-US" smtClean="0"/>
-              <a:t>2026/4/23</a:t>
+              <a:t>2026/5/23</a:t>
             </a:fld>
             <a:endParaRPr kumimoji="1" lang="ja-JP" altLang="en-US"/>
           </a:p>
@@ -1403,7 +1408,7 @@
           <a:p>
             <a:fld id="{DBD89380-344E-284F-BE0F-D796858BF56F}" type="datetimeFigureOut">
               <a:rPr kumimoji="1" lang="ja-JP" altLang="en-US" smtClean="0"/>
-              <a:t>2026/4/23</a:t>
+              <a:t>2026/5/23</a:t>
             </a:fld>
             <a:endParaRPr kumimoji="1" lang="ja-JP" altLang="en-US"/>
           </a:p>
@@ -1834,7 +1839,7 @@
           <a:p>
             <a:fld id="{DBD89380-344E-284F-BE0F-D796858BF56F}" type="datetimeFigureOut">
               <a:rPr kumimoji="1" lang="ja-JP" altLang="en-US" smtClean="0"/>
-              <a:t>2026/4/23</a:t>
+              <a:t>2026/5/23</a:t>
             </a:fld>
             <a:endParaRPr kumimoji="1" lang="ja-JP" altLang="en-US"/>
           </a:p>
@@ -1952,7 +1957,7 @@
           <a:p>
             <a:fld id="{DBD89380-344E-284F-BE0F-D796858BF56F}" type="datetimeFigureOut">
               <a:rPr kumimoji="1" lang="ja-JP" altLang="en-US" smtClean="0"/>
-              <a:t>2026/4/23</a:t>
+              <a:t>2026/5/23</a:t>
             </a:fld>
             <a:endParaRPr kumimoji="1" lang="ja-JP" altLang="en-US"/>
           </a:p>
@@ -2047,7 +2052,7 @@
           <a:p>
             <a:fld id="{DBD89380-344E-284F-BE0F-D796858BF56F}" type="datetimeFigureOut">
               <a:rPr kumimoji="1" lang="ja-JP" altLang="en-US" smtClean="0"/>
-              <a:t>2026/4/23</a:t>
+              <a:t>2026/5/23</a:t>
             </a:fld>
             <a:endParaRPr kumimoji="1" lang="ja-JP" altLang="en-US"/>
           </a:p>
@@ -2356,7 +2361,7 @@
           <a:p>
             <a:fld id="{DBD89380-344E-284F-BE0F-D796858BF56F}" type="datetimeFigureOut">
               <a:rPr kumimoji="1" lang="ja-JP" altLang="en-US" smtClean="0"/>
-              <a:t>2026/4/23</a:t>
+              <a:t>2026/5/23</a:t>
             </a:fld>
             <a:endParaRPr kumimoji="1" lang="ja-JP" altLang="en-US"/>
           </a:p>
@@ -2613,7 +2618,7 @@
           <a:p>
             <a:fld id="{DBD89380-344E-284F-BE0F-D796858BF56F}" type="datetimeFigureOut">
               <a:rPr kumimoji="1" lang="ja-JP" altLang="en-US" smtClean="0"/>
-              <a:t>2026/4/23</a:t>
+              <a:t>2026/5/23</a:t>
             </a:fld>
             <a:endParaRPr kumimoji="1" lang="ja-JP" altLang="en-US"/>
           </a:p>
@@ -2858,7 +2863,7 @@
           <a:p>
             <a:fld id="{DBD89380-344E-284F-BE0F-D796858BF56F}" type="datetimeFigureOut">
               <a:rPr kumimoji="1" lang="ja-JP" altLang="en-US" smtClean="0"/>
-              <a:t>2026/4/23</a:t>
+              <a:t>2026/5/23</a:t>
             </a:fld>
             <a:endParaRPr kumimoji="1" lang="ja-JP" altLang="en-US"/>
           </a:p>
@@ -4554,7 +4559,37 @@
                   <a:latin typeface="HGPGothicE" panose="020B0900000000000000" pitchFamily="34" charset="-128"/>
                   <a:ea typeface="HGPGothicE" panose="020B0900000000000000" pitchFamily="34" charset="-128"/>
                 </a:rPr>
-                <a:t>連立政権</a:t>
+                <a:t>政党間競争</a:t>
+              </a:r>
+              <a:r>
+                <a:rPr kumimoji="1" lang="ja-JP" altLang="en-US" sz="1400">
+                  <a:solidFill>
+                    <a:schemeClr val="tx1"/>
+                  </a:solidFill>
+                  <a:latin typeface="HGPGothicE" panose="020B0900000000000000" pitchFamily="34" charset="-128"/>
+                  <a:ea typeface="HGPGothicE" panose="020B0900000000000000" pitchFamily="34" charset="-128"/>
+                </a:rPr>
+                <a:t>と</a:t>
+              </a:r>
+              <a:endParaRPr kumimoji="1" lang="en-US" altLang="ja-JP" sz="1400">
+                <a:solidFill>
+                  <a:schemeClr val="tx1"/>
+                </a:solidFill>
+                <a:latin typeface="HGPGothicE" panose="020B0900000000000000" pitchFamily="34" charset="-128"/>
+                <a:ea typeface="HGPGothicE" panose="020B0900000000000000" pitchFamily="34" charset="-128"/>
+              </a:endParaRPr>
+            </a:p>
+            <a:p>
+              <a:pPr algn="ctr"/>
+              <a:r>
+                <a:rPr kumimoji="1" lang="ja-JP" altLang="en-US" sz="1600">
+                  <a:solidFill>
+                    <a:schemeClr val="tx1"/>
+                  </a:solidFill>
+                  <a:latin typeface="HGPGothicE" panose="020B0900000000000000" pitchFamily="34" charset="-128"/>
+                  <a:ea typeface="HGPGothicE" panose="020B0900000000000000" pitchFamily="34" charset="-128"/>
+                </a:rPr>
+                <a:t>協力</a:t>
               </a:r>
             </a:p>
           </p:txBody>
@@ -7616,6 +7651,1031 @@
     <p:extLst>
       <p:ext uri="{BB962C8B-B14F-4D97-AF65-F5344CB8AC3E}">
         <p14:creationId xmlns:p14="http://schemas.microsoft.com/office/powerpoint/2010/main" val="3009941675"/>
+      </p:ext>
+    </p:extLst>
+  </p:cSld>
+  <p:clrMapOvr>
+    <a:masterClrMapping/>
+  </p:clrMapOvr>
+</p:sld>
+</file>
+
+<file path=ppt/slides/slide10.xml><?xml version="1.0" encoding="utf-8"?>
+<p:sld xmlns:a="http://schemas.openxmlformats.org/drawingml/2006/main" xmlns:r="http://schemas.openxmlformats.org/officeDocument/2006/relationships" xmlns:p="http://schemas.openxmlformats.org/presentationml/2006/main">
+  <p:cSld>
+    <p:spTree>
+      <p:nvGrpSpPr>
+        <p:cNvPr id="1" name=""/>
+        <p:cNvGrpSpPr/>
+        <p:nvPr/>
+      </p:nvGrpSpPr>
+      <p:grpSpPr>
+        <a:xfrm>
+          <a:off x="0" y="0"/>
+          <a:ext cx="0" cy="0"/>
+          <a:chOff x="0" y="0"/>
+          <a:chExt cx="0" cy="0"/>
+        </a:xfrm>
+      </p:grpSpPr>
+      <p:grpSp>
+        <p:nvGrpSpPr>
+          <p:cNvPr id="59" name="グループ化 58">
+            <a:extLst>
+              <a:ext uri="{FF2B5EF4-FFF2-40B4-BE49-F238E27FC236}">
+                <a16:creationId xmlns:a16="http://schemas.microsoft.com/office/drawing/2014/main" id="{006E8A9F-D814-836F-3AA7-ED3DE5350AFE}"/>
+              </a:ext>
+            </a:extLst>
+          </p:cNvPr>
+          <p:cNvGrpSpPr/>
+          <p:nvPr/>
+        </p:nvGrpSpPr>
+        <p:grpSpPr>
+          <a:xfrm>
+            <a:off x="163905" y="2667201"/>
+            <a:ext cx="12473790" cy="5290803"/>
+            <a:chOff x="-159870" y="2545281"/>
+            <a:chExt cx="13144344" cy="5575221"/>
+          </a:xfrm>
+        </p:grpSpPr>
+        <p:pic>
+          <p:nvPicPr>
+            <p:cNvPr id="5" name="図 4">
+              <a:extLst>
+                <a:ext uri="{FF2B5EF4-FFF2-40B4-BE49-F238E27FC236}">
+                  <a16:creationId xmlns:a16="http://schemas.microsoft.com/office/drawing/2014/main" id="{A6A5DD93-333C-794A-0E7C-DA7E2DC03417}"/>
+                </a:ext>
+              </a:extLst>
+            </p:cNvPr>
+            <p:cNvPicPr>
+              <a:picLocks noChangeAspect="1"/>
+            </p:cNvPicPr>
+            <p:nvPr/>
+          </p:nvPicPr>
+          <p:blipFill>
+            <a:blip r:embed="rId2"/>
+            <a:stretch>
+              <a:fillRect/>
+            </a:stretch>
+          </p:blipFill>
+          <p:spPr>
+            <a:xfrm>
+              <a:off x="10834233" y="3469764"/>
+              <a:ext cx="2150241" cy="2150241"/>
+            </a:xfrm>
+            <a:prstGeom prst="rect">
+              <a:avLst/>
+            </a:prstGeom>
+          </p:spPr>
+        </p:pic>
+        <p:pic>
+          <p:nvPicPr>
+            <p:cNvPr id="7" name="図 6">
+              <a:extLst>
+                <a:ext uri="{FF2B5EF4-FFF2-40B4-BE49-F238E27FC236}">
+                  <a16:creationId xmlns:a16="http://schemas.microsoft.com/office/drawing/2014/main" id="{8EB90E74-EDD4-5120-1C51-0D5B92AF4E4B}"/>
+                </a:ext>
+              </a:extLst>
+            </p:cNvPr>
+            <p:cNvPicPr>
+              <a:picLocks noChangeAspect="1"/>
+            </p:cNvPicPr>
+            <p:nvPr/>
+          </p:nvPicPr>
+          <p:blipFill>
+            <a:blip r:embed="rId3"/>
+            <a:stretch>
+              <a:fillRect/>
+            </a:stretch>
+          </p:blipFill>
+          <p:spPr>
+            <a:xfrm>
+              <a:off x="-159870" y="3469765"/>
+              <a:ext cx="2150241" cy="2150241"/>
+            </a:xfrm>
+            <a:prstGeom prst="rect">
+              <a:avLst/>
+            </a:prstGeom>
+          </p:spPr>
+        </p:pic>
+        <p:grpSp>
+          <p:nvGrpSpPr>
+            <p:cNvPr id="47" name="グループ化 46">
+              <a:extLst>
+                <a:ext uri="{FF2B5EF4-FFF2-40B4-BE49-F238E27FC236}">
+                  <a16:creationId xmlns:a16="http://schemas.microsoft.com/office/drawing/2014/main" id="{F3D9561A-70D4-CBC4-9B48-C0461EE32F14}"/>
+                </a:ext>
+              </a:extLst>
+            </p:cNvPr>
+            <p:cNvGrpSpPr/>
+            <p:nvPr/>
+          </p:nvGrpSpPr>
+          <p:grpSpPr>
+            <a:xfrm>
+              <a:off x="3183410" y="2545281"/>
+              <a:ext cx="6720447" cy="3759034"/>
+              <a:chOff x="2698959" y="686302"/>
+              <a:chExt cx="7403682" cy="4141197"/>
+            </a:xfrm>
+          </p:grpSpPr>
+          <p:pic>
+            <p:nvPicPr>
+              <p:cNvPr id="3" name="図 2">
+                <a:extLst>
+                  <a:ext uri="{FF2B5EF4-FFF2-40B4-BE49-F238E27FC236}">
+                    <a16:creationId xmlns:a16="http://schemas.microsoft.com/office/drawing/2014/main" id="{40B5E5C9-1957-04B8-1891-00832B1EC104}"/>
+                  </a:ext>
+                </a:extLst>
+              </p:cNvPr>
+              <p:cNvPicPr>
+                <a:picLocks noChangeAspect="1"/>
+              </p:cNvPicPr>
+              <p:nvPr/>
+            </p:nvPicPr>
+            <p:blipFill>
+              <a:blip r:embed="rId4"/>
+              <a:stretch>
+                <a:fillRect/>
+              </a:stretch>
+            </p:blipFill>
+            <p:spPr>
+              <a:xfrm>
+                <a:off x="5258838" y="1235622"/>
+                <a:ext cx="2279858" cy="2837998"/>
+              </a:xfrm>
+              <a:prstGeom prst="rect">
+                <a:avLst/>
+              </a:prstGeom>
+            </p:spPr>
+          </p:pic>
+          <p:pic>
+            <p:nvPicPr>
+              <p:cNvPr id="9" name="図 8">
+                <a:extLst>
+                  <a:ext uri="{FF2B5EF4-FFF2-40B4-BE49-F238E27FC236}">
+                    <a16:creationId xmlns:a16="http://schemas.microsoft.com/office/drawing/2014/main" id="{B711A6FA-42E9-08CE-AB49-EEC8F02F7D05}"/>
+                  </a:ext>
+                </a:extLst>
+              </p:cNvPr>
+              <p:cNvPicPr>
+                <a:picLocks noChangeAspect="1"/>
+              </p:cNvPicPr>
+              <p:nvPr/>
+            </p:nvPicPr>
+            <p:blipFill>
+              <a:blip r:embed="rId5"/>
+              <a:stretch>
+                <a:fillRect/>
+              </a:stretch>
+            </p:blipFill>
+            <p:spPr>
+              <a:xfrm>
+                <a:off x="8297159" y="3022017"/>
+                <a:ext cx="1805482" cy="1805482"/>
+              </a:xfrm>
+              <a:prstGeom prst="rect">
+                <a:avLst/>
+              </a:prstGeom>
+            </p:spPr>
+          </p:pic>
+          <p:pic>
+            <p:nvPicPr>
+              <p:cNvPr id="11" name="図 10">
+                <a:extLst>
+                  <a:ext uri="{FF2B5EF4-FFF2-40B4-BE49-F238E27FC236}">
+                    <a16:creationId xmlns:a16="http://schemas.microsoft.com/office/drawing/2014/main" id="{068E3096-8E9A-4E7C-E77C-3B0D7DBD67DD}"/>
+                  </a:ext>
+                </a:extLst>
+              </p:cNvPr>
+              <p:cNvPicPr>
+                <a:picLocks noChangeAspect="1"/>
+              </p:cNvPicPr>
+              <p:nvPr/>
+            </p:nvPicPr>
+            <p:blipFill>
+              <a:blip r:embed="rId6"/>
+              <a:stretch>
+                <a:fillRect/>
+              </a:stretch>
+            </p:blipFill>
+            <p:spPr>
+              <a:xfrm>
+                <a:off x="8293093" y="686302"/>
+                <a:ext cx="1805482" cy="1805482"/>
+              </a:xfrm>
+              <a:prstGeom prst="rect">
+                <a:avLst/>
+              </a:prstGeom>
+            </p:spPr>
+          </p:pic>
+          <p:pic>
+            <p:nvPicPr>
+              <p:cNvPr id="13" name="図 12">
+                <a:extLst>
+                  <a:ext uri="{FF2B5EF4-FFF2-40B4-BE49-F238E27FC236}">
+                    <a16:creationId xmlns:a16="http://schemas.microsoft.com/office/drawing/2014/main" id="{6EFE1DD9-9E9F-0310-B7E2-05FDDEC06C05}"/>
+                  </a:ext>
+                </a:extLst>
+              </p:cNvPr>
+              <p:cNvPicPr>
+                <a:picLocks noChangeAspect="1"/>
+              </p:cNvPicPr>
+              <p:nvPr/>
+            </p:nvPicPr>
+            <p:blipFill>
+              <a:blip r:embed="rId7"/>
+              <a:stretch>
+                <a:fillRect/>
+              </a:stretch>
+            </p:blipFill>
+            <p:spPr>
+              <a:xfrm>
+                <a:off x="2698959" y="686302"/>
+                <a:ext cx="1805482" cy="1805482"/>
+              </a:xfrm>
+              <a:prstGeom prst="rect">
+                <a:avLst/>
+              </a:prstGeom>
+            </p:spPr>
+          </p:pic>
+          <p:pic>
+            <p:nvPicPr>
+              <p:cNvPr id="15" name="図 14">
+                <a:extLst>
+                  <a:ext uri="{FF2B5EF4-FFF2-40B4-BE49-F238E27FC236}">
+                    <a16:creationId xmlns:a16="http://schemas.microsoft.com/office/drawing/2014/main" id="{BDACC4AB-D322-95AC-1FB5-214BB0D87166}"/>
+                  </a:ext>
+                </a:extLst>
+              </p:cNvPr>
+              <p:cNvPicPr>
+                <a:picLocks noChangeAspect="1"/>
+              </p:cNvPicPr>
+              <p:nvPr/>
+            </p:nvPicPr>
+            <p:blipFill>
+              <a:blip r:embed="rId8"/>
+              <a:stretch>
+                <a:fillRect/>
+              </a:stretch>
+            </p:blipFill>
+            <p:spPr>
+              <a:xfrm>
+                <a:off x="2698959" y="3022017"/>
+                <a:ext cx="1805482" cy="1805482"/>
+              </a:xfrm>
+              <a:prstGeom prst="rect">
+                <a:avLst/>
+              </a:prstGeom>
+            </p:spPr>
+          </p:pic>
+          <p:grpSp>
+            <p:nvGrpSpPr>
+              <p:cNvPr id="17" name="グループ化 16">
+                <a:extLst>
+                  <a:ext uri="{FF2B5EF4-FFF2-40B4-BE49-F238E27FC236}">
+                    <a16:creationId xmlns:a16="http://schemas.microsoft.com/office/drawing/2014/main" id="{84628CB2-D313-7334-C973-3A641E9162E7}"/>
+                  </a:ext>
+                </a:extLst>
+              </p:cNvPr>
+              <p:cNvGrpSpPr/>
+              <p:nvPr/>
+            </p:nvGrpSpPr>
+            <p:grpSpPr>
+              <a:xfrm rot="19714876">
+                <a:off x="4512288" y="3047752"/>
+                <a:ext cx="897769" cy="917340"/>
+                <a:chOff x="4602268" y="3181912"/>
+                <a:chExt cx="934691" cy="774368"/>
+              </a:xfrm>
+            </p:grpSpPr>
+            <p:pic>
+              <p:nvPicPr>
+                <p:cNvPr id="18" name="グラフィックス 17" descr="手のひら 枠線">
+                  <a:extLst>
+                    <a:ext uri="{FF2B5EF4-FFF2-40B4-BE49-F238E27FC236}">
+                      <a16:creationId xmlns:a16="http://schemas.microsoft.com/office/drawing/2014/main" id="{B768393D-7A0A-E468-160F-31A98D871D37}"/>
+                    </a:ext>
+                  </a:extLst>
+                </p:cNvPr>
+                <p:cNvPicPr>
+                  <a:picLocks noChangeAspect="1"/>
+                </p:cNvPicPr>
+                <p:nvPr/>
+              </p:nvPicPr>
+              <p:blipFill>
+                <a:blip>
+                  <a:extLst>
+                    <a:ext uri="{96DAC541-7B7A-43D3-8B79-37D633B846F1}">
+                      <asvg:svgBlip xmlns:asvg="http://schemas.microsoft.com/office/drawing/2016/SVG/main" r:embed="rId9"/>
+                    </a:ext>
+                  </a:extLst>
+                </a:blip>
+                <a:stretch>
+                  <a:fillRect/>
+                </a:stretch>
+              </p:blipFill>
+              <p:spPr>
+                <a:xfrm rot="1268024">
+                  <a:off x="4602268" y="3289175"/>
+                  <a:ext cx="667105" cy="667105"/>
+                </a:xfrm>
+                <a:prstGeom prst="rect">
+                  <a:avLst/>
+                </a:prstGeom>
+              </p:spPr>
+            </p:pic>
+            <p:pic>
+              <p:nvPicPr>
+                <p:cNvPr id="19" name="グラフィックス 18" descr="保護の手 枠線">
+                  <a:extLst>
+                    <a:ext uri="{FF2B5EF4-FFF2-40B4-BE49-F238E27FC236}">
+                      <a16:creationId xmlns:a16="http://schemas.microsoft.com/office/drawing/2014/main" id="{7BD03947-E06F-C1AC-FF5D-6789D7713C78}"/>
+                    </a:ext>
+                  </a:extLst>
+                </p:cNvPr>
+                <p:cNvPicPr>
+                  <a:picLocks noChangeAspect="1"/>
+                </p:cNvPicPr>
+                <p:nvPr/>
+              </p:nvPicPr>
+              <p:blipFill>
+                <a:blip>
+                  <a:extLst>
+                    <a:ext uri="{96DAC541-7B7A-43D3-8B79-37D633B846F1}">
+                      <asvg:svgBlip xmlns:asvg="http://schemas.microsoft.com/office/drawing/2016/SVG/main" r:embed="rId10"/>
+                    </a:ext>
+                  </a:extLst>
+                </a:blip>
+                <a:stretch>
+                  <a:fillRect/>
+                </a:stretch>
+              </p:blipFill>
+              <p:spPr>
+                <a:xfrm rot="1268024">
+                  <a:off x="4869854" y="3181912"/>
+                  <a:ext cx="667105" cy="667105"/>
+                </a:xfrm>
+                <a:prstGeom prst="rect">
+                  <a:avLst/>
+                </a:prstGeom>
+              </p:spPr>
+            </p:pic>
+          </p:grpSp>
+          <p:grpSp>
+            <p:nvGrpSpPr>
+              <p:cNvPr id="20" name="グループ化 19">
+                <a:extLst>
+                  <a:ext uri="{FF2B5EF4-FFF2-40B4-BE49-F238E27FC236}">
+                    <a16:creationId xmlns:a16="http://schemas.microsoft.com/office/drawing/2014/main" id="{4CC48456-ECF2-9A42-0A6B-2DFA2092063A}"/>
+                  </a:ext>
+                </a:extLst>
+              </p:cNvPr>
+              <p:cNvGrpSpPr/>
+              <p:nvPr/>
+            </p:nvGrpSpPr>
+            <p:grpSpPr>
+              <a:xfrm rot="1885124" flipH="1">
+                <a:off x="7148193" y="3161867"/>
+                <a:ext cx="897769" cy="917340"/>
+                <a:chOff x="4602268" y="3181912"/>
+                <a:chExt cx="934691" cy="774368"/>
+              </a:xfrm>
+            </p:grpSpPr>
+            <p:pic>
+              <p:nvPicPr>
+                <p:cNvPr id="21" name="グラフィックス 20" descr="手のひら 枠線">
+                  <a:extLst>
+                    <a:ext uri="{FF2B5EF4-FFF2-40B4-BE49-F238E27FC236}">
+                      <a16:creationId xmlns:a16="http://schemas.microsoft.com/office/drawing/2014/main" id="{ED0954FF-6FD3-205B-0F04-AC9FFF885E41}"/>
+                    </a:ext>
+                  </a:extLst>
+                </p:cNvPr>
+                <p:cNvPicPr>
+                  <a:picLocks noChangeAspect="1"/>
+                </p:cNvPicPr>
+                <p:nvPr/>
+              </p:nvPicPr>
+              <p:blipFill>
+                <a:blip>
+                  <a:extLst>
+                    <a:ext uri="{96DAC541-7B7A-43D3-8B79-37D633B846F1}">
+                      <asvg:svgBlip xmlns:asvg="http://schemas.microsoft.com/office/drawing/2016/SVG/main" r:embed="rId9"/>
+                    </a:ext>
+                  </a:extLst>
+                </a:blip>
+                <a:stretch>
+                  <a:fillRect/>
+                </a:stretch>
+              </p:blipFill>
+              <p:spPr>
+                <a:xfrm rot="1268024">
+                  <a:off x="4602268" y="3289175"/>
+                  <a:ext cx="667105" cy="667105"/>
+                </a:xfrm>
+                <a:prstGeom prst="rect">
+                  <a:avLst/>
+                </a:prstGeom>
+              </p:spPr>
+            </p:pic>
+            <p:pic>
+              <p:nvPicPr>
+                <p:cNvPr id="22" name="グラフィックス 21" descr="保護の手 枠線">
+                  <a:extLst>
+                    <a:ext uri="{FF2B5EF4-FFF2-40B4-BE49-F238E27FC236}">
+                      <a16:creationId xmlns:a16="http://schemas.microsoft.com/office/drawing/2014/main" id="{28549914-5818-E13D-F138-E038AAFD8831}"/>
+                    </a:ext>
+                  </a:extLst>
+                </p:cNvPr>
+                <p:cNvPicPr>
+                  <a:picLocks noChangeAspect="1"/>
+                </p:cNvPicPr>
+                <p:nvPr/>
+              </p:nvPicPr>
+              <p:blipFill>
+                <a:blip>
+                  <a:extLst>
+                    <a:ext uri="{96DAC541-7B7A-43D3-8B79-37D633B846F1}">
+                      <asvg:svgBlip xmlns:asvg="http://schemas.microsoft.com/office/drawing/2016/SVG/main" r:embed="rId10"/>
+                    </a:ext>
+                  </a:extLst>
+                </a:blip>
+                <a:stretch>
+                  <a:fillRect/>
+                </a:stretch>
+              </p:blipFill>
+              <p:spPr>
+                <a:xfrm rot="1268024">
+                  <a:off x="4869854" y="3181912"/>
+                  <a:ext cx="667105" cy="667105"/>
+                </a:xfrm>
+                <a:prstGeom prst="rect">
+                  <a:avLst/>
+                </a:prstGeom>
+              </p:spPr>
+            </p:pic>
+          </p:grpSp>
+          <p:grpSp>
+            <p:nvGrpSpPr>
+              <p:cNvPr id="23" name="グループ化 22">
+                <a:extLst>
+                  <a:ext uri="{FF2B5EF4-FFF2-40B4-BE49-F238E27FC236}">
+                    <a16:creationId xmlns:a16="http://schemas.microsoft.com/office/drawing/2014/main" id="{40A02241-FE79-49F8-01BD-93A0489B1EDC}"/>
+                  </a:ext>
+                </a:extLst>
+              </p:cNvPr>
+              <p:cNvGrpSpPr/>
+              <p:nvPr/>
+            </p:nvGrpSpPr>
+            <p:grpSpPr>
+              <a:xfrm rot="728023" flipH="1">
+                <a:off x="4385854" y="1654881"/>
+                <a:ext cx="897769" cy="917340"/>
+                <a:chOff x="4602268" y="3181912"/>
+                <a:chExt cx="934691" cy="774368"/>
+              </a:xfrm>
+            </p:grpSpPr>
+            <p:pic>
+              <p:nvPicPr>
+                <p:cNvPr id="24" name="グラフィックス 23" descr="手のひら 枠線">
+                  <a:extLst>
+                    <a:ext uri="{FF2B5EF4-FFF2-40B4-BE49-F238E27FC236}">
+                      <a16:creationId xmlns:a16="http://schemas.microsoft.com/office/drawing/2014/main" id="{6812ED9D-82FC-F4E0-D2EF-AE62573C94C9}"/>
+                    </a:ext>
+                  </a:extLst>
+                </p:cNvPr>
+                <p:cNvPicPr>
+                  <a:picLocks noChangeAspect="1"/>
+                </p:cNvPicPr>
+                <p:nvPr/>
+              </p:nvPicPr>
+              <p:blipFill>
+                <a:blip>
+                  <a:extLst>
+                    <a:ext uri="{96DAC541-7B7A-43D3-8B79-37D633B846F1}">
+                      <asvg:svgBlip xmlns:asvg="http://schemas.microsoft.com/office/drawing/2016/SVG/main" r:embed="rId9"/>
+                    </a:ext>
+                  </a:extLst>
+                </a:blip>
+                <a:stretch>
+                  <a:fillRect/>
+                </a:stretch>
+              </p:blipFill>
+              <p:spPr>
+                <a:xfrm rot="1268024">
+                  <a:off x="4602268" y="3289175"/>
+                  <a:ext cx="667105" cy="667105"/>
+                </a:xfrm>
+                <a:prstGeom prst="rect">
+                  <a:avLst/>
+                </a:prstGeom>
+              </p:spPr>
+            </p:pic>
+            <p:pic>
+              <p:nvPicPr>
+                <p:cNvPr id="25" name="グラフィックス 24" descr="保護の手 枠線">
+                  <a:extLst>
+                    <a:ext uri="{FF2B5EF4-FFF2-40B4-BE49-F238E27FC236}">
+                      <a16:creationId xmlns:a16="http://schemas.microsoft.com/office/drawing/2014/main" id="{A83171FE-A318-710F-D02A-FE517D985CE6}"/>
+                    </a:ext>
+                  </a:extLst>
+                </p:cNvPr>
+                <p:cNvPicPr>
+                  <a:picLocks noChangeAspect="1"/>
+                </p:cNvPicPr>
+                <p:nvPr/>
+              </p:nvPicPr>
+              <p:blipFill>
+                <a:blip>
+                  <a:extLst>
+                    <a:ext uri="{96DAC541-7B7A-43D3-8B79-37D633B846F1}">
+                      <asvg:svgBlip xmlns:asvg="http://schemas.microsoft.com/office/drawing/2016/SVG/main" r:embed="rId10"/>
+                    </a:ext>
+                  </a:extLst>
+                </a:blip>
+                <a:stretch>
+                  <a:fillRect/>
+                </a:stretch>
+              </p:blipFill>
+              <p:spPr>
+                <a:xfrm rot="1268024">
+                  <a:off x="4869854" y="3181912"/>
+                  <a:ext cx="667105" cy="667105"/>
+                </a:xfrm>
+                <a:prstGeom prst="rect">
+                  <a:avLst/>
+                </a:prstGeom>
+              </p:spPr>
+            </p:pic>
+          </p:grpSp>
+          <p:grpSp>
+            <p:nvGrpSpPr>
+              <p:cNvPr id="26" name="グループ化 25">
+                <a:extLst>
+                  <a:ext uri="{FF2B5EF4-FFF2-40B4-BE49-F238E27FC236}">
+                    <a16:creationId xmlns:a16="http://schemas.microsoft.com/office/drawing/2014/main" id="{E30D3F02-1B4A-988B-6849-9F77E2143936}"/>
+                  </a:ext>
+                </a:extLst>
+              </p:cNvPr>
+              <p:cNvGrpSpPr/>
+              <p:nvPr/>
+            </p:nvGrpSpPr>
+            <p:grpSpPr>
+              <a:xfrm rot="20871977">
+                <a:off x="7513912" y="1649244"/>
+                <a:ext cx="897769" cy="917340"/>
+                <a:chOff x="4602268" y="3181912"/>
+                <a:chExt cx="934691" cy="774368"/>
+              </a:xfrm>
+            </p:grpSpPr>
+            <p:pic>
+              <p:nvPicPr>
+                <p:cNvPr id="27" name="グラフィックス 26" descr="手のひら 枠線">
+                  <a:extLst>
+                    <a:ext uri="{FF2B5EF4-FFF2-40B4-BE49-F238E27FC236}">
+                      <a16:creationId xmlns:a16="http://schemas.microsoft.com/office/drawing/2014/main" id="{7A75D15A-7434-019D-7303-74C4879C392F}"/>
+                    </a:ext>
+                  </a:extLst>
+                </p:cNvPr>
+                <p:cNvPicPr>
+                  <a:picLocks noChangeAspect="1"/>
+                </p:cNvPicPr>
+                <p:nvPr/>
+              </p:nvPicPr>
+              <p:blipFill>
+                <a:blip>
+                  <a:extLst>
+                    <a:ext uri="{96DAC541-7B7A-43D3-8B79-37D633B846F1}">
+                      <asvg:svgBlip xmlns:asvg="http://schemas.microsoft.com/office/drawing/2016/SVG/main" r:embed="rId9"/>
+                    </a:ext>
+                  </a:extLst>
+                </a:blip>
+                <a:stretch>
+                  <a:fillRect/>
+                </a:stretch>
+              </p:blipFill>
+              <p:spPr>
+                <a:xfrm rot="1268024">
+                  <a:off x="4602268" y="3289175"/>
+                  <a:ext cx="667105" cy="667105"/>
+                </a:xfrm>
+                <a:prstGeom prst="rect">
+                  <a:avLst/>
+                </a:prstGeom>
+              </p:spPr>
+            </p:pic>
+            <p:pic>
+              <p:nvPicPr>
+                <p:cNvPr id="28" name="グラフィックス 27" descr="保護の手 枠線">
+                  <a:extLst>
+                    <a:ext uri="{FF2B5EF4-FFF2-40B4-BE49-F238E27FC236}">
+                      <a16:creationId xmlns:a16="http://schemas.microsoft.com/office/drawing/2014/main" id="{0DF26F29-313C-AB45-A603-6895325E458F}"/>
+                    </a:ext>
+                  </a:extLst>
+                </p:cNvPr>
+                <p:cNvPicPr>
+                  <a:picLocks noChangeAspect="1"/>
+                </p:cNvPicPr>
+                <p:nvPr/>
+              </p:nvPicPr>
+              <p:blipFill>
+                <a:blip>
+                  <a:extLst>
+                    <a:ext uri="{96DAC541-7B7A-43D3-8B79-37D633B846F1}">
+                      <asvg:svgBlip xmlns:asvg="http://schemas.microsoft.com/office/drawing/2016/SVG/main" r:embed="rId10"/>
+                    </a:ext>
+                  </a:extLst>
+                </a:blip>
+                <a:stretch>
+                  <a:fillRect/>
+                </a:stretch>
+              </p:blipFill>
+              <p:spPr>
+                <a:xfrm rot="1268024">
+                  <a:off x="4869854" y="3181912"/>
+                  <a:ext cx="667105" cy="667105"/>
+                </a:xfrm>
+                <a:prstGeom prst="rect">
+                  <a:avLst/>
+                </a:prstGeom>
+              </p:spPr>
+            </p:pic>
+          </p:grpSp>
+        </p:grpSp>
+        <p:grpSp>
+          <p:nvGrpSpPr>
+            <p:cNvPr id="50" name="グループ化 49">
+              <a:extLst>
+                <a:ext uri="{FF2B5EF4-FFF2-40B4-BE49-F238E27FC236}">
+                  <a16:creationId xmlns:a16="http://schemas.microsoft.com/office/drawing/2014/main" id="{CA84DEA7-A6FF-68A1-80D8-86D79E9FD86A}"/>
+                </a:ext>
+              </a:extLst>
+            </p:cNvPr>
+            <p:cNvGrpSpPr/>
+            <p:nvPr/>
+          </p:nvGrpSpPr>
+          <p:grpSpPr>
+            <a:xfrm>
+              <a:off x="2039507" y="3358485"/>
+              <a:ext cx="1252724" cy="2015680"/>
+              <a:chOff x="1974676" y="3681372"/>
+              <a:chExt cx="1252724" cy="2015680"/>
+            </a:xfrm>
+          </p:grpSpPr>
+          <p:pic>
+            <p:nvPicPr>
+              <p:cNvPr id="30" name="グラフィックス 29" descr="挙手 単色塗りつぶし">
+                <a:extLst>
+                  <a:ext uri="{FF2B5EF4-FFF2-40B4-BE49-F238E27FC236}">
+                    <a16:creationId xmlns:a16="http://schemas.microsoft.com/office/drawing/2014/main" id="{F8AC979E-EA43-EEF4-1C59-42FE57EF2337}"/>
+                  </a:ext>
+                </a:extLst>
+              </p:cNvPr>
+              <p:cNvPicPr>
+                <a:picLocks noChangeAspect="1"/>
+              </p:cNvPicPr>
+              <p:nvPr/>
+            </p:nvPicPr>
+            <p:blipFill>
+              <a:blip>
+                <a:extLst>
+                  <a:ext uri="{96DAC541-7B7A-43D3-8B79-37D633B846F1}">
+                    <asvg:svgBlip xmlns:asvg="http://schemas.microsoft.com/office/drawing/2016/SVG/main" r:embed="rId11"/>
+                  </a:ext>
+                </a:extLst>
+              </a:blip>
+              <a:stretch>
+                <a:fillRect/>
+              </a:stretch>
+            </p:blipFill>
+            <p:spPr>
+              <a:xfrm>
+                <a:off x="1974676" y="3681372"/>
+                <a:ext cx="1252724" cy="1252724"/>
+              </a:xfrm>
+              <a:prstGeom prst="rect">
+                <a:avLst/>
+              </a:prstGeom>
+            </p:spPr>
+          </p:pic>
+          <p:sp>
+            <p:nvSpPr>
+              <p:cNvPr id="33" name="爆発 1 32">
+                <a:extLst>
+                  <a:ext uri="{FF2B5EF4-FFF2-40B4-BE49-F238E27FC236}">
+                    <a16:creationId xmlns:a16="http://schemas.microsoft.com/office/drawing/2014/main" id="{E713EA43-AD2D-EFEF-0253-9C4E0E27223F}"/>
+                  </a:ext>
+                </a:extLst>
+              </p:cNvPr>
+              <p:cNvSpPr/>
+              <p:nvPr/>
+            </p:nvSpPr>
+            <p:spPr>
+              <a:xfrm>
+                <a:off x="2200986" y="4899857"/>
+                <a:ext cx="804458" cy="797195"/>
+              </a:xfrm>
+              <a:prstGeom prst="irregularSeal1">
+                <a:avLst/>
+              </a:prstGeom>
+              <a:solidFill>
+                <a:srgbClr val="FFC000"/>
+              </a:solidFill>
+              <a:ln w="38100">
+                <a:solidFill>
+                  <a:srgbClr val="FF0000"/>
+                </a:solidFill>
+              </a:ln>
+            </p:spPr>
+            <p:style>
+              <a:lnRef idx="2">
+                <a:schemeClr val="accent1">
+                  <a:shade val="15000"/>
+                </a:schemeClr>
+              </a:lnRef>
+              <a:fillRef idx="1">
+                <a:schemeClr val="accent1"/>
+              </a:fillRef>
+              <a:effectRef idx="0">
+                <a:schemeClr val="accent1"/>
+              </a:effectRef>
+              <a:fontRef idx="minor">
+                <a:schemeClr val="lt1"/>
+              </a:fontRef>
+            </p:style>
+            <p:txBody>
+              <a:bodyPr rtlCol="0" anchor="ctr"/>
+              <a:lstStyle/>
+              <a:p>
+                <a:pPr algn="ctr"/>
+                <a:endParaRPr kumimoji="1" lang="ja-JP" altLang="en-US"/>
+              </a:p>
+            </p:txBody>
+          </p:sp>
+        </p:grpSp>
+        <p:sp>
+          <p:nvSpPr>
+            <p:cNvPr id="37" name="テキスト ボックス 36">
+              <a:extLst>
+                <a:ext uri="{FF2B5EF4-FFF2-40B4-BE49-F238E27FC236}">
+                  <a16:creationId xmlns:a16="http://schemas.microsoft.com/office/drawing/2014/main" id="{B5CF32B2-B298-22EF-FB8C-5AF9550BAC02}"/>
+                </a:ext>
+              </a:extLst>
+            </p:cNvPr>
+            <p:cNvSpPr txBox="1"/>
+            <p:nvPr/>
+          </p:nvSpPr>
+          <p:spPr>
+            <a:xfrm>
+              <a:off x="4606552" y="7166395"/>
+              <a:ext cx="3870470" cy="954107"/>
+            </a:xfrm>
+            <a:prstGeom prst="rect">
+              <a:avLst/>
+            </a:prstGeom>
+            <a:noFill/>
+            <a:ln w="28575">
+              <a:solidFill>
+                <a:schemeClr val="tx1"/>
+              </a:solidFill>
+            </a:ln>
+          </p:spPr>
+          <p:txBody>
+            <a:bodyPr wrap="square">
+              <a:spAutoFit/>
+            </a:bodyPr>
+            <a:lstStyle/>
+            <a:p>
+              <a:pPr algn="ctr"/>
+              <a:r>
+                <a:rPr kumimoji="1" lang="ja-JP" altLang="en-US" sz="3600">
+                  <a:latin typeface="Hiragino Kaku Gothic StdN W8" panose="020B0800000000000000" pitchFamily="34" charset="-128"/>
+                  <a:ea typeface="Hiragino Kaku Gothic StdN W8" panose="020B0800000000000000" pitchFamily="34" charset="-128"/>
+                </a:rPr>
+                <a:t>反システム政党</a:t>
+              </a:r>
+              <a:br>
+                <a:rPr kumimoji="1" lang="en-US" altLang="ja-JP" sz="3600" dirty="0">
+                  <a:latin typeface="Hiragino Kaku Gothic StdN W8" panose="020B0800000000000000" pitchFamily="34" charset="-128"/>
+                  <a:ea typeface="Hiragino Kaku Gothic StdN W8" panose="020B0800000000000000" pitchFamily="34" charset="-128"/>
+                </a:rPr>
+              </a:br>
+              <a:r>
+                <a:rPr kumimoji="1" lang="en-US" altLang="ja-JP" sz="2000" dirty="0">
+                  <a:latin typeface="Hiragino Kaku Gothic StdN W8" panose="020B0800000000000000" pitchFamily="34" charset="-128"/>
+                  <a:ea typeface="Hiragino Kaku Gothic StdN W8" panose="020B0800000000000000" pitchFamily="34" charset="-128"/>
+                </a:rPr>
+                <a:t>anti-system parties</a:t>
+              </a:r>
+              <a:endParaRPr lang="ja-JP" altLang="en-US" sz="3600"/>
+            </a:p>
+          </p:txBody>
+        </p:sp>
+        <p:grpSp>
+          <p:nvGrpSpPr>
+            <p:cNvPr id="51" name="グループ化 50">
+              <a:extLst>
+                <a:ext uri="{FF2B5EF4-FFF2-40B4-BE49-F238E27FC236}">
+                  <a16:creationId xmlns:a16="http://schemas.microsoft.com/office/drawing/2014/main" id="{E9CC1D99-0AD7-42E1-8275-E437E7394A7D}"/>
+                </a:ext>
+              </a:extLst>
+            </p:cNvPr>
+            <p:cNvGrpSpPr/>
+            <p:nvPr/>
+          </p:nvGrpSpPr>
+          <p:grpSpPr>
+            <a:xfrm flipH="1">
+              <a:off x="9585709" y="3229722"/>
+              <a:ext cx="1252724" cy="2015680"/>
+              <a:chOff x="1974676" y="3681372"/>
+              <a:chExt cx="1252724" cy="2015680"/>
+            </a:xfrm>
+          </p:grpSpPr>
+          <p:pic>
+            <p:nvPicPr>
+              <p:cNvPr id="52" name="グラフィックス 51" descr="挙手 単色塗りつぶし">
+                <a:extLst>
+                  <a:ext uri="{FF2B5EF4-FFF2-40B4-BE49-F238E27FC236}">
+                    <a16:creationId xmlns:a16="http://schemas.microsoft.com/office/drawing/2014/main" id="{4EBC70E3-2CF1-F576-46D9-5EBE303A3F41}"/>
+                  </a:ext>
+                </a:extLst>
+              </p:cNvPr>
+              <p:cNvPicPr>
+                <a:picLocks noChangeAspect="1"/>
+              </p:cNvPicPr>
+              <p:nvPr/>
+            </p:nvPicPr>
+            <p:blipFill>
+              <a:blip>
+                <a:extLst>
+                  <a:ext uri="{96DAC541-7B7A-43D3-8B79-37D633B846F1}">
+                    <asvg:svgBlip xmlns:asvg="http://schemas.microsoft.com/office/drawing/2016/SVG/main" r:embed="rId11"/>
+                  </a:ext>
+                </a:extLst>
+              </a:blip>
+              <a:stretch>
+                <a:fillRect/>
+              </a:stretch>
+            </p:blipFill>
+            <p:spPr>
+              <a:xfrm>
+                <a:off x="1974676" y="3681372"/>
+                <a:ext cx="1252724" cy="1252724"/>
+              </a:xfrm>
+              <a:prstGeom prst="rect">
+                <a:avLst/>
+              </a:prstGeom>
+            </p:spPr>
+          </p:pic>
+          <p:sp>
+            <p:nvSpPr>
+              <p:cNvPr id="53" name="爆発 1 52">
+                <a:extLst>
+                  <a:ext uri="{FF2B5EF4-FFF2-40B4-BE49-F238E27FC236}">
+                    <a16:creationId xmlns:a16="http://schemas.microsoft.com/office/drawing/2014/main" id="{C9D19384-CA44-0E04-6985-D5143B7E2659}"/>
+                  </a:ext>
+                </a:extLst>
+              </p:cNvPr>
+              <p:cNvSpPr/>
+              <p:nvPr/>
+            </p:nvSpPr>
+            <p:spPr>
+              <a:xfrm>
+                <a:off x="2200986" y="4899857"/>
+                <a:ext cx="804458" cy="797195"/>
+              </a:xfrm>
+              <a:prstGeom prst="irregularSeal1">
+                <a:avLst/>
+              </a:prstGeom>
+              <a:solidFill>
+                <a:srgbClr val="FFC000"/>
+              </a:solidFill>
+              <a:ln w="38100">
+                <a:solidFill>
+                  <a:srgbClr val="FF0000"/>
+                </a:solidFill>
+              </a:ln>
+            </p:spPr>
+            <p:style>
+              <a:lnRef idx="2">
+                <a:schemeClr val="accent1">
+                  <a:shade val="15000"/>
+                </a:schemeClr>
+              </a:lnRef>
+              <a:fillRef idx="1">
+                <a:schemeClr val="accent1"/>
+              </a:fillRef>
+              <a:effectRef idx="0">
+                <a:schemeClr val="accent1"/>
+              </a:effectRef>
+              <a:fontRef idx="minor">
+                <a:schemeClr val="lt1"/>
+              </a:fontRef>
+            </p:style>
+            <p:txBody>
+              <a:bodyPr rtlCol="0" anchor="ctr"/>
+              <a:lstStyle/>
+              <a:p>
+                <a:pPr algn="ctr"/>
+                <a:endParaRPr kumimoji="1" lang="ja-JP" altLang="en-US"/>
+              </a:p>
+            </p:txBody>
+          </p:sp>
+        </p:grpSp>
+        <p:cxnSp>
+          <p:nvCxnSpPr>
+            <p:cNvPr id="55" name="曲線コネクタ 54">
+              <a:extLst>
+                <a:ext uri="{FF2B5EF4-FFF2-40B4-BE49-F238E27FC236}">
+                  <a16:creationId xmlns:a16="http://schemas.microsoft.com/office/drawing/2014/main" id="{D37115D8-A875-D4D4-A78A-205E80D9F415}"/>
+                </a:ext>
+              </a:extLst>
+            </p:cNvPr>
+            <p:cNvCxnSpPr>
+              <a:stCxn id="37" idx="3"/>
+              <a:endCxn id="5" idx="2"/>
+            </p:cNvCxnSpPr>
+            <p:nvPr/>
+          </p:nvCxnSpPr>
+          <p:spPr>
+            <a:xfrm flipV="1">
+              <a:off x="8477022" y="5620005"/>
+              <a:ext cx="3432332" cy="2023443"/>
+            </a:xfrm>
+            <a:prstGeom prst="curvedConnector2">
+              <a:avLst/>
+            </a:prstGeom>
+            <a:ln w="38100">
+              <a:solidFill>
+                <a:schemeClr val="tx1"/>
+              </a:solidFill>
+              <a:tailEnd type="triangle"/>
+            </a:ln>
+          </p:spPr>
+          <p:style>
+            <a:lnRef idx="1">
+              <a:schemeClr val="accent1"/>
+            </a:lnRef>
+            <a:fillRef idx="0">
+              <a:schemeClr val="accent1"/>
+            </a:fillRef>
+            <a:effectRef idx="0">
+              <a:schemeClr val="accent1"/>
+            </a:effectRef>
+            <a:fontRef idx="minor">
+              <a:schemeClr val="tx1"/>
+            </a:fontRef>
+          </p:style>
+        </p:cxnSp>
+        <p:cxnSp>
+          <p:nvCxnSpPr>
+            <p:cNvPr id="56" name="曲線コネクタ 55">
+              <a:extLst>
+                <a:ext uri="{FF2B5EF4-FFF2-40B4-BE49-F238E27FC236}">
+                  <a16:creationId xmlns:a16="http://schemas.microsoft.com/office/drawing/2014/main" id="{1CFFDF0D-886B-4DE8-2381-0F950BA94E42}"/>
+                </a:ext>
+              </a:extLst>
+            </p:cNvPr>
+            <p:cNvCxnSpPr>
+              <a:cxnSpLocks/>
+              <a:stCxn id="37" idx="1"/>
+              <a:endCxn id="7" idx="2"/>
+            </p:cNvCxnSpPr>
+            <p:nvPr/>
+          </p:nvCxnSpPr>
+          <p:spPr>
+            <a:xfrm rot="10800000">
+              <a:off x="915252" y="5620007"/>
+              <a:ext cx="3691301" cy="2023442"/>
+            </a:xfrm>
+            <a:prstGeom prst="curvedConnector2">
+              <a:avLst/>
+            </a:prstGeom>
+            <a:ln w="38100">
+              <a:solidFill>
+                <a:schemeClr val="tx1"/>
+              </a:solidFill>
+              <a:tailEnd type="triangle"/>
+            </a:ln>
+          </p:spPr>
+          <p:style>
+            <a:lnRef idx="1">
+              <a:schemeClr val="accent1"/>
+            </a:lnRef>
+            <a:fillRef idx="0">
+              <a:schemeClr val="accent1"/>
+            </a:fillRef>
+            <a:effectRef idx="0">
+              <a:schemeClr val="accent1"/>
+            </a:effectRef>
+            <a:fontRef idx="minor">
+              <a:schemeClr val="tx1"/>
+            </a:fontRef>
+          </p:style>
+        </p:cxnSp>
+      </p:grpSp>
+    </p:spTree>
+    <p:extLst>
+      <p:ext uri="{BB962C8B-B14F-4D97-AF65-F5344CB8AC3E}">
+        <p14:creationId xmlns:p14="http://schemas.microsoft.com/office/powerpoint/2010/main" val="2986686125"/>
       </p:ext>
     </p:extLst>
   </p:cSld>
@@ -11162,6 +12222,969 @@
     <p:extLst>
       <p:ext uri="{BB962C8B-B14F-4D97-AF65-F5344CB8AC3E}">
         <p14:creationId xmlns:p14="http://schemas.microsoft.com/office/powerpoint/2010/main" val="1260619511"/>
+      </p:ext>
+    </p:extLst>
+  </p:cSld>
+  <p:clrMapOvr>
+    <a:masterClrMapping/>
+  </p:clrMapOvr>
+</p:sld>
+</file>
+
+<file path=ppt/slides/slide6.xml><?xml version="1.0" encoding="utf-8"?>
+<p:sld xmlns:a="http://schemas.openxmlformats.org/drawingml/2006/main" xmlns:r="http://schemas.openxmlformats.org/officeDocument/2006/relationships" xmlns:p="http://schemas.openxmlformats.org/presentationml/2006/main">
+  <p:cSld>
+    <p:spTree>
+      <p:nvGrpSpPr>
+        <p:cNvPr id="1" name=""/>
+        <p:cNvGrpSpPr/>
+        <p:nvPr/>
+      </p:nvGrpSpPr>
+      <p:grpSpPr>
+        <a:xfrm>
+          <a:off x="0" y="0"/>
+          <a:ext cx="0" cy="0"/>
+          <a:chOff x="0" y="0"/>
+          <a:chExt cx="0" cy="0"/>
+        </a:xfrm>
+      </p:grpSpPr>
+      <p:grpSp>
+        <p:nvGrpSpPr>
+          <p:cNvPr id="7" name="グループ化 6">
+            <a:extLst>
+              <a:ext uri="{FF2B5EF4-FFF2-40B4-BE49-F238E27FC236}">
+                <a16:creationId xmlns:a16="http://schemas.microsoft.com/office/drawing/2014/main" id="{B653FB7F-38AD-6E38-B241-7BEB63E275E7}"/>
+              </a:ext>
+            </a:extLst>
+          </p:cNvPr>
+          <p:cNvGrpSpPr/>
+          <p:nvPr/>
+        </p:nvGrpSpPr>
+        <p:grpSpPr>
+          <a:xfrm>
+            <a:off x="1101783" y="4508212"/>
+            <a:ext cx="10662689" cy="768326"/>
+            <a:chOff x="1101783" y="4508212"/>
+            <a:chExt cx="10662689" cy="768326"/>
+          </a:xfrm>
+        </p:grpSpPr>
+        <p:cxnSp>
+          <p:nvCxnSpPr>
+            <p:cNvPr id="3" name="直線矢印コネクタ 2">
+              <a:extLst>
+                <a:ext uri="{FF2B5EF4-FFF2-40B4-BE49-F238E27FC236}">
+                  <a16:creationId xmlns:a16="http://schemas.microsoft.com/office/drawing/2014/main" id="{F905C499-8AD2-07DF-9B07-E09E35DC46E2}"/>
+                </a:ext>
+              </a:extLst>
+            </p:cNvPr>
+            <p:cNvCxnSpPr/>
+            <p:nvPr/>
+          </p:nvCxnSpPr>
+          <p:spPr>
+            <a:xfrm>
+              <a:off x="1858781" y="5276538"/>
+              <a:ext cx="9308891" cy="0"/>
+            </a:xfrm>
+            <a:prstGeom prst="straightConnector1">
+              <a:avLst/>
+            </a:prstGeom>
+            <a:ln w="57150">
+              <a:solidFill>
+                <a:schemeClr val="tx1"/>
+              </a:solidFill>
+              <a:headEnd type="triangle"/>
+              <a:tailEnd type="triangle"/>
+            </a:ln>
+          </p:spPr>
+          <p:style>
+            <a:lnRef idx="1">
+              <a:schemeClr val="accent1"/>
+            </a:lnRef>
+            <a:fillRef idx="0">
+              <a:schemeClr val="accent1"/>
+            </a:fillRef>
+            <a:effectRef idx="0">
+              <a:schemeClr val="accent1"/>
+            </a:effectRef>
+            <a:fontRef idx="minor">
+              <a:schemeClr val="tx1"/>
+            </a:fontRef>
+          </p:style>
+        </p:cxnSp>
+        <p:sp>
+          <p:nvSpPr>
+            <p:cNvPr id="4" name="テキスト ボックス 3">
+              <a:extLst>
+                <a:ext uri="{FF2B5EF4-FFF2-40B4-BE49-F238E27FC236}">
+                  <a16:creationId xmlns:a16="http://schemas.microsoft.com/office/drawing/2014/main" id="{25AEA0C4-DE11-698B-4BBC-5E390162DA93}"/>
+                </a:ext>
+              </a:extLst>
+            </p:cNvPr>
+            <p:cNvSpPr txBox="1"/>
+            <p:nvPr/>
+          </p:nvSpPr>
+          <p:spPr>
+            <a:xfrm>
+              <a:off x="1101783" y="4508212"/>
+              <a:ext cx="1513996" cy="584775"/>
+            </a:xfrm>
+            <a:prstGeom prst="rect">
+              <a:avLst/>
+            </a:prstGeom>
+            <a:noFill/>
+          </p:spPr>
+          <p:txBody>
+            <a:bodyPr wrap="square">
+              <a:spAutoFit/>
+            </a:bodyPr>
+            <a:lstStyle/>
+            <a:p>
+              <a:pPr algn="ctr"/>
+              <a:r>
+                <a:rPr lang="ja-JP" altLang="en-US" sz="3200">
+                  <a:latin typeface="Hiragino Sans W4" panose="020B0400000000000000" pitchFamily="34" charset="-128"/>
+                  <a:ea typeface="Hiragino Sans W4" panose="020B0400000000000000" pitchFamily="34" charset="-128"/>
+                </a:rPr>
+                <a:t>左派</a:t>
+              </a:r>
+            </a:p>
+          </p:txBody>
+        </p:sp>
+        <p:sp>
+          <p:nvSpPr>
+            <p:cNvPr id="5" name="テキスト ボックス 4">
+              <a:extLst>
+                <a:ext uri="{FF2B5EF4-FFF2-40B4-BE49-F238E27FC236}">
+                  <a16:creationId xmlns:a16="http://schemas.microsoft.com/office/drawing/2014/main" id="{AB526EA3-0CDB-7C36-0F40-36597206FFDA}"/>
+                </a:ext>
+              </a:extLst>
+            </p:cNvPr>
+            <p:cNvSpPr txBox="1"/>
+            <p:nvPr/>
+          </p:nvSpPr>
+          <p:spPr>
+            <a:xfrm>
+              <a:off x="10250476" y="4508212"/>
+              <a:ext cx="1513996" cy="584775"/>
+            </a:xfrm>
+            <a:prstGeom prst="rect">
+              <a:avLst/>
+            </a:prstGeom>
+            <a:noFill/>
+          </p:spPr>
+          <p:txBody>
+            <a:bodyPr wrap="square">
+              <a:spAutoFit/>
+            </a:bodyPr>
+            <a:lstStyle/>
+            <a:p>
+              <a:pPr algn="ctr"/>
+              <a:r>
+                <a:rPr lang="ja-JP" altLang="en-US" sz="3200">
+                  <a:latin typeface="Hiragino Sans W4" panose="020B0400000000000000" pitchFamily="34" charset="-128"/>
+                  <a:ea typeface="Hiragino Sans W4" panose="020B0400000000000000" pitchFamily="34" charset="-128"/>
+                </a:rPr>
+                <a:t>右派</a:t>
+              </a:r>
+            </a:p>
+          </p:txBody>
+        </p:sp>
+      </p:grpSp>
+    </p:spTree>
+    <p:extLst>
+      <p:ext uri="{BB962C8B-B14F-4D97-AF65-F5344CB8AC3E}">
+        <p14:creationId xmlns:p14="http://schemas.microsoft.com/office/powerpoint/2010/main" val="158658761"/>
+      </p:ext>
+    </p:extLst>
+  </p:cSld>
+  <p:clrMapOvr>
+    <a:masterClrMapping/>
+  </p:clrMapOvr>
+</p:sld>
+</file>
+
+<file path=ppt/slides/slide7.xml><?xml version="1.0" encoding="utf-8"?>
+<p:sld xmlns:a="http://schemas.openxmlformats.org/drawingml/2006/main" xmlns:r="http://schemas.openxmlformats.org/officeDocument/2006/relationships" xmlns:p="http://schemas.openxmlformats.org/presentationml/2006/main">
+  <p:cSld>
+    <p:spTree>
+      <p:nvGrpSpPr>
+        <p:cNvPr id="1" name=""/>
+        <p:cNvGrpSpPr/>
+        <p:nvPr/>
+      </p:nvGrpSpPr>
+      <p:grpSpPr>
+        <a:xfrm>
+          <a:off x="0" y="0"/>
+          <a:ext cx="0" cy="0"/>
+          <a:chOff x="0" y="0"/>
+          <a:chExt cx="0" cy="0"/>
+        </a:xfrm>
+      </p:grpSpPr>
+      <p:grpSp>
+        <p:nvGrpSpPr>
+          <p:cNvPr id="4" name="グループ化 3">
+            <a:extLst>
+              <a:ext uri="{FF2B5EF4-FFF2-40B4-BE49-F238E27FC236}">
+                <a16:creationId xmlns:a16="http://schemas.microsoft.com/office/drawing/2014/main" id="{254E6B92-7806-F36F-3554-564653DE0127}"/>
+              </a:ext>
+            </a:extLst>
+          </p:cNvPr>
+          <p:cNvGrpSpPr/>
+          <p:nvPr/>
+        </p:nvGrpSpPr>
+        <p:grpSpPr>
+          <a:xfrm>
+            <a:off x="155905" y="2097904"/>
+            <a:ext cx="12354225" cy="5535944"/>
+            <a:chOff x="155905" y="2090409"/>
+            <a:chExt cx="12354225" cy="5535944"/>
+          </a:xfrm>
+        </p:grpSpPr>
+        <p:pic>
+          <p:nvPicPr>
+            <p:cNvPr id="3" name="グラフィックス 2">
+              <a:extLst>
+                <a:ext uri="{FF2B5EF4-FFF2-40B4-BE49-F238E27FC236}">
+                  <a16:creationId xmlns:a16="http://schemas.microsoft.com/office/drawing/2014/main" id="{AB179B89-BD97-8127-E584-FD029C7127D9}"/>
+                </a:ext>
+              </a:extLst>
+            </p:cNvPr>
+            <p:cNvPicPr>
+              <a:picLocks noChangeAspect="1"/>
+            </p:cNvPicPr>
+            <p:nvPr/>
+          </p:nvPicPr>
+          <p:blipFill>
+            <a:blip>
+              <a:extLst>
+                <a:ext uri="{96DAC541-7B7A-43D3-8B79-37D633B846F1}">
+                  <asvg:svgBlip xmlns:asvg="http://schemas.microsoft.com/office/drawing/2016/SVG/main" r:embed="rId2"/>
+                </a:ext>
+              </a:extLst>
+            </a:blip>
+            <a:stretch>
+              <a:fillRect/>
+            </a:stretch>
+          </p:blipFill>
+          <p:spPr>
+            <a:xfrm>
+              <a:off x="5761648" y="3299350"/>
+              <a:ext cx="6748482" cy="2083633"/>
+            </a:xfrm>
+            <a:prstGeom prst="rect">
+              <a:avLst/>
+            </a:prstGeom>
+          </p:spPr>
+        </p:pic>
+        <p:pic>
+          <p:nvPicPr>
+            <p:cNvPr id="5" name="グラフィックス 4">
+              <a:extLst>
+                <a:ext uri="{FF2B5EF4-FFF2-40B4-BE49-F238E27FC236}">
+                  <a16:creationId xmlns:a16="http://schemas.microsoft.com/office/drawing/2014/main" id="{59FE17E4-5F4F-DAC0-42AF-89D67A512281}"/>
+                </a:ext>
+              </a:extLst>
+            </p:cNvPr>
+            <p:cNvPicPr>
+              <a:picLocks noChangeAspect="1"/>
+            </p:cNvPicPr>
+            <p:nvPr/>
+          </p:nvPicPr>
+          <p:blipFill>
+            <a:blip>
+              <a:extLst>
+                <a:ext uri="{96DAC541-7B7A-43D3-8B79-37D633B846F1}">
+                  <asvg:svgBlip xmlns:asvg="http://schemas.microsoft.com/office/drawing/2016/SVG/main" r:embed="rId3"/>
+                </a:ext>
+              </a:extLst>
+            </a:blip>
+            <a:stretch>
+              <a:fillRect/>
+            </a:stretch>
+          </p:blipFill>
+          <p:spPr>
+            <a:xfrm>
+              <a:off x="155905" y="2090409"/>
+              <a:ext cx="4814136" cy="3638311"/>
+            </a:xfrm>
+            <a:prstGeom prst="rect">
+              <a:avLst/>
+            </a:prstGeom>
+          </p:spPr>
+        </p:pic>
+        <p:pic>
+          <p:nvPicPr>
+            <p:cNvPr id="7" name="グラフィックス 6">
+              <a:extLst>
+                <a:ext uri="{FF2B5EF4-FFF2-40B4-BE49-F238E27FC236}">
+                  <a16:creationId xmlns:a16="http://schemas.microsoft.com/office/drawing/2014/main" id="{99CC7510-A02C-38ED-F9A6-B9CF413EDBBF}"/>
+                </a:ext>
+              </a:extLst>
+            </p:cNvPr>
+            <p:cNvPicPr>
+              <a:picLocks noChangeAspect="1"/>
+            </p:cNvPicPr>
+            <p:nvPr/>
+          </p:nvPicPr>
+          <p:blipFill>
+            <a:blip>
+              <a:extLst>
+                <a:ext uri="{96DAC541-7B7A-43D3-8B79-37D633B846F1}">
+                  <asvg:svgBlip xmlns:asvg="http://schemas.microsoft.com/office/drawing/2016/SVG/main" r:embed="rId4"/>
+                </a:ext>
+              </a:extLst>
+            </a:blip>
+            <a:stretch>
+              <a:fillRect/>
+            </a:stretch>
+          </p:blipFill>
+          <p:spPr>
+            <a:xfrm>
+              <a:off x="2834948" y="6950478"/>
+              <a:ext cx="1991090" cy="675875"/>
+            </a:xfrm>
+            <a:prstGeom prst="rect">
+              <a:avLst/>
+            </a:prstGeom>
+          </p:spPr>
+        </p:pic>
+        <p:pic>
+          <p:nvPicPr>
+            <p:cNvPr id="9" name="グラフィックス 8">
+              <a:extLst>
+                <a:ext uri="{FF2B5EF4-FFF2-40B4-BE49-F238E27FC236}">
+                  <a16:creationId xmlns:a16="http://schemas.microsoft.com/office/drawing/2014/main" id="{60FA8AE1-66AB-1E6A-7445-FE005B239B55}"/>
+                </a:ext>
+              </a:extLst>
+            </p:cNvPr>
+            <p:cNvPicPr>
+              <a:picLocks noChangeAspect="1"/>
+            </p:cNvPicPr>
+            <p:nvPr/>
+          </p:nvPicPr>
+          <p:blipFill>
+            <a:blip>
+              <a:extLst>
+                <a:ext uri="{96DAC541-7B7A-43D3-8B79-37D633B846F1}">
+                  <asvg:svgBlip xmlns:asvg="http://schemas.microsoft.com/office/drawing/2016/SVG/main" r:embed="rId5"/>
+                </a:ext>
+              </a:extLst>
+            </a:blip>
+            <a:stretch>
+              <a:fillRect/>
+            </a:stretch>
+          </p:blipFill>
+          <p:spPr>
+            <a:xfrm>
+              <a:off x="409905" y="6004667"/>
+              <a:ext cx="2003095" cy="418692"/>
+            </a:xfrm>
+            <a:prstGeom prst="rect">
+              <a:avLst/>
+            </a:prstGeom>
+          </p:spPr>
+        </p:pic>
+        <p:pic>
+          <p:nvPicPr>
+            <p:cNvPr id="11" name="グラフィックス 10">
+              <a:extLst>
+                <a:ext uri="{FF2B5EF4-FFF2-40B4-BE49-F238E27FC236}">
+                  <a16:creationId xmlns:a16="http://schemas.microsoft.com/office/drawing/2014/main" id="{65D0FD1D-1562-A30D-F15C-1FE78E2D4EEE}"/>
+                </a:ext>
+              </a:extLst>
+            </p:cNvPr>
+            <p:cNvPicPr>
+              <a:picLocks noChangeAspect="1"/>
+            </p:cNvPicPr>
+            <p:nvPr/>
+          </p:nvPicPr>
+          <p:blipFill>
+            <a:blip>
+              <a:extLst>
+                <a:ext uri="{96DAC541-7B7A-43D3-8B79-37D633B846F1}">
+                  <asvg:svgBlip xmlns:asvg="http://schemas.microsoft.com/office/drawing/2016/SVG/main" r:embed="rId6"/>
+                </a:ext>
+              </a:extLst>
+            </a:blip>
+            <a:stretch>
+              <a:fillRect/>
+            </a:stretch>
+          </p:blipFill>
+          <p:spPr>
+            <a:xfrm>
+              <a:off x="3228648" y="5768085"/>
+              <a:ext cx="1419590" cy="946393"/>
+            </a:xfrm>
+            <a:prstGeom prst="rect">
+              <a:avLst/>
+            </a:prstGeom>
+          </p:spPr>
+        </p:pic>
+        <p:sp>
+          <p:nvSpPr>
+            <p:cNvPr id="2" name="爆発 1 1">
+              <a:extLst>
+                <a:ext uri="{FF2B5EF4-FFF2-40B4-BE49-F238E27FC236}">
+                  <a16:creationId xmlns:a16="http://schemas.microsoft.com/office/drawing/2014/main" id="{394A7A9F-7EF4-F90A-2525-FFBA855B2352}"/>
+                </a:ext>
+              </a:extLst>
+            </p:cNvPr>
+            <p:cNvSpPr/>
+            <p:nvPr/>
+          </p:nvSpPr>
+          <p:spPr>
+            <a:xfrm>
+              <a:off x="4527031" y="3650105"/>
+              <a:ext cx="1110138" cy="1031481"/>
+            </a:xfrm>
+            <a:prstGeom prst="irregularSeal1">
+              <a:avLst/>
+            </a:prstGeom>
+            <a:solidFill>
+              <a:srgbClr val="FFC000"/>
+            </a:solidFill>
+            <a:ln w="38100">
+              <a:solidFill>
+                <a:srgbClr val="FF0000"/>
+              </a:solidFill>
+            </a:ln>
+          </p:spPr>
+          <p:style>
+            <a:lnRef idx="2">
+              <a:schemeClr val="accent1">
+                <a:shade val="15000"/>
+              </a:schemeClr>
+            </a:lnRef>
+            <a:fillRef idx="1">
+              <a:schemeClr val="accent1"/>
+            </a:fillRef>
+            <a:effectRef idx="0">
+              <a:schemeClr val="accent1"/>
+            </a:effectRef>
+            <a:fontRef idx="minor">
+              <a:schemeClr val="lt1"/>
+            </a:fontRef>
+          </p:style>
+          <p:txBody>
+            <a:bodyPr rtlCol="0" anchor="ctr"/>
+            <a:lstStyle/>
+            <a:p>
+              <a:pPr algn="ctr"/>
+              <a:endParaRPr kumimoji="1" lang="ja-JP" altLang="en-US"/>
+            </a:p>
+          </p:txBody>
+        </p:sp>
+      </p:grpSp>
+    </p:spTree>
+    <p:extLst>
+      <p:ext uri="{BB962C8B-B14F-4D97-AF65-F5344CB8AC3E}">
+        <p14:creationId xmlns:p14="http://schemas.microsoft.com/office/powerpoint/2010/main" val="3273167403"/>
+      </p:ext>
+    </p:extLst>
+  </p:cSld>
+  <p:clrMapOvr>
+    <a:masterClrMapping/>
+  </p:clrMapOvr>
+</p:sld>
+</file>
+
+<file path=ppt/slides/slide8.xml><?xml version="1.0" encoding="utf-8"?>
+<p:sld xmlns:a="http://schemas.openxmlformats.org/drawingml/2006/main" xmlns:r="http://schemas.openxmlformats.org/officeDocument/2006/relationships" xmlns:p="http://schemas.openxmlformats.org/presentationml/2006/main">
+  <p:cSld>
+    <p:bg>
+      <p:bgPr>
+        <a:solidFill>
+          <a:schemeClr val="bg1"/>
+        </a:solidFill>
+        <a:effectLst/>
+      </p:bgPr>
+    </p:bg>
+    <p:spTree>
+      <p:nvGrpSpPr>
+        <p:cNvPr id="1" name=""/>
+        <p:cNvGrpSpPr/>
+        <p:nvPr/>
+      </p:nvGrpSpPr>
+      <p:grpSpPr>
+        <a:xfrm>
+          <a:off x="0" y="0"/>
+          <a:ext cx="0" cy="0"/>
+          <a:chOff x="0" y="0"/>
+          <a:chExt cx="0" cy="0"/>
+        </a:xfrm>
+      </p:grpSpPr>
+      <p:grpSp>
+        <p:nvGrpSpPr>
+          <p:cNvPr id="7" name="グループ化 6">
+            <a:extLst>
+              <a:ext uri="{FF2B5EF4-FFF2-40B4-BE49-F238E27FC236}">
+                <a16:creationId xmlns:a16="http://schemas.microsoft.com/office/drawing/2014/main" id="{D8EC752E-9A86-CF94-877B-1EEB4699CBAC}"/>
+              </a:ext>
+            </a:extLst>
+          </p:cNvPr>
+          <p:cNvGrpSpPr/>
+          <p:nvPr/>
+        </p:nvGrpSpPr>
+        <p:grpSpPr>
+          <a:xfrm>
+            <a:off x="901930" y="2289500"/>
+            <a:ext cx="10732539" cy="4717507"/>
+            <a:chOff x="901930" y="2289500"/>
+            <a:chExt cx="10732539" cy="4717507"/>
+          </a:xfrm>
+        </p:grpSpPr>
+        <p:pic>
+          <p:nvPicPr>
+            <p:cNvPr id="3" name="グラフィックス 2">
+              <a:extLst>
+                <a:ext uri="{FF2B5EF4-FFF2-40B4-BE49-F238E27FC236}">
+                  <a16:creationId xmlns:a16="http://schemas.microsoft.com/office/drawing/2014/main" id="{1D8D86D2-8C50-0D3B-9540-BCB2B93525E7}"/>
+                </a:ext>
+              </a:extLst>
+            </p:cNvPr>
+            <p:cNvPicPr>
+              <a:picLocks noChangeAspect="1"/>
+            </p:cNvPicPr>
+            <p:nvPr/>
+          </p:nvPicPr>
+          <p:blipFill>
+            <a:blip>
+              <a:extLst>
+                <a:ext uri="{96DAC541-7B7A-43D3-8B79-37D633B846F1}">
+                  <asvg:svgBlip xmlns:asvg="http://schemas.microsoft.com/office/drawing/2016/SVG/main" r:embed="rId2"/>
+                </a:ext>
+              </a:extLst>
+            </a:blip>
+            <a:stretch>
+              <a:fillRect/>
+            </a:stretch>
+          </p:blipFill>
+          <p:spPr>
+            <a:xfrm flipH="1">
+              <a:off x="901930" y="2289500"/>
+              <a:ext cx="4838469" cy="4717507"/>
+            </a:xfrm>
+            <a:prstGeom prst="rect">
+              <a:avLst/>
+            </a:prstGeom>
+          </p:spPr>
+        </p:pic>
+        <p:pic>
+          <p:nvPicPr>
+            <p:cNvPr id="5" name="グラフィックス 4">
+              <a:extLst>
+                <a:ext uri="{FF2B5EF4-FFF2-40B4-BE49-F238E27FC236}">
+                  <a16:creationId xmlns:a16="http://schemas.microsoft.com/office/drawing/2014/main" id="{E871B4A9-70B0-567F-6509-8D6C55C4F4E9}"/>
+                </a:ext>
+              </a:extLst>
+            </p:cNvPr>
+            <p:cNvPicPr>
+              <a:picLocks noChangeAspect="1"/>
+            </p:cNvPicPr>
+            <p:nvPr/>
+          </p:nvPicPr>
+          <p:blipFill>
+            <a:blip>
+              <a:extLst>
+                <a:ext uri="{96DAC541-7B7A-43D3-8B79-37D633B846F1}">
+                  <asvg:svgBlip xmlns:asvg="http://schemas.microsoft.com/office/drawing/2016/SVG/main" r:embed="rId3"/>
+                </a:ext>
+              </a:extLst>
+            </a:blip>
+            <a:stretch>
+              <a:fillRect/>
+            </a:stretch>
+          </p:blipFill>
+          <p:spPr>
+            <a:xfrm flipH="1">
+              <a:off x="6795999" y="2551246"/>
+              <a:ext cx="4838470" cy="4261642"/>
+            </a:xfrm>
+            <a:prstGeom prst="rect">
+              <a:avLst/>
+            </a:prstGeom>
+          </p:spPr>
+        </p:pic>
+        <p:sp>
+          <p:nvSpPr>
+            <p:cNvPr id="6" name="爆発 1 5">
+              <a:extLst>
+                <a:ext uri="{FF2B5EF4-FFF2-40B4-BE49-F238E27FC236}">
+                  <a16:creationId xmlns:a16="http://schemas.microsoft.com/office/drawing/2014/main" id="{C8B247BE-92D5-218C-EB9D-723D5675C0D5}"/>
+                </a:ext>
+              </a:extLst>
+            </p:cNvPr>
+            <p:cNvSpPr/>
+            <p:nvPr/>
+          </p:nvSpPr>
+          <p:spPr>
+            <a:xfrm>
+              <a:off x="5700883" y="4572000"/>
+              <a:ext cx="1395555" cy="1038358"/>
+            </a:xfrm>
+            <a:prstGeom prst="irregularSeal1">
+              <a:avLst/>
+            </a:prstGeom>
+            <a:solidFill>
+              <a:srgbClr val="FFC000"/>
+            </a:solidFill>
+            <a:ln w="38100">
+              <a:solidFill>
+                <a:srgbClr val="FF0000"/>
+              </a:solidFill>
+            </a:ln>
+          </p:spPr>
+          <p:style>
+            <a:lnRef idx="2">
+              <a:schemeClr val="accent1">
+                <a:shade val="15000"/>
+              </a:schemeClr>
+            </a:lnRef>
+            <a:fillRef idx="1">
+              <a:schemeClr val="accent1"/>
+            </a:fillRef>
+            <a:effectRef idx="0">
+              <a:schemeClr val="accent1"/>
+            </a:effectRef>
+            <a:fontRef idx="minor">
+              <a:schemeClr val="lt1"/>
+            </a:fontRef>
+          </p:style>
+          <p:txBody>
+            <a:bodyPr rtlCol="0" anchor="ctr"/>
+            <a:lstStyle/>
+            <a:p>
+              <a:pPr algn="ctr"/>
+              <a:endParaRPr kumimoji="1" lang="ja-JP" altLang="en-US"/>
+            </a:p>
+          </p:txBody>
+        </p:sp>
+      </p:grpSp>
+    </p:spTree>
+    <p:extLst>
+      <p:ext uri="{BB962C8B-B14F-4D97-AF65-F5344CB8AC3E}">
+        <p14:creationId xmlns:p14="http://schemas.microsoft.com/office/powerpoint/2010/main" val="3353355411"/>
+      </p:ext>
+    </p:extLst>
+  </p:cSld>
+  <p:clrMapOvr>
+    <a:masterClrMapping/>
+  </p:clrMapOvr>
+</p:sld>
+</file>
+
+<file path=ppt/slides/slide9.xml><?xml version="1.0" encoding="utf-8"?>
+<p:sld xmlns:a="http://schemas.openxmlformats.org/drawingml/2006/main" xmlns:r="http://schemas.openxmlformats.org/officeDocument/2006/relationships" xmlns:p="http://schemas.openxmlformats.org/presentationml/2006/main">
+  <p:cSld>
+    <p:spTree>
+      <p:nvGrpSpPr>
+        <p:cNvPr id="1" name=""/>
+        <p:cNvGrpSpPr/>
+        <p:nvPr/>
+      </p:nvGrpSpPr>
+      <p:grpSpPr>
+        <a:xfrm>
+          <a:off x="0" y="0"/>
+          <a:ext cx="0" cy="0"/>
+          <a:chOff x="0" y="0"/>
+          <a:chExt cx="0" cy="0"/>
+        </a:xfrm>
+      </p:grpSpPr>
+      <p:grpSp>
+        <p:nvGrpSpPr>
+          <p:cNvPr id="18" name="グループ化 17">
+            <a:extLst>
+              <a:ext uri="{FF2B5EF4-FFF2-40B4-BE49-F238E27FC236}">
+                <a16:creationId xmlns:a16="http://schemas.microsoft.com/office/drawing/2014/main" id="{B3B0EA27-4F4A-7BE6-5D5E-917326157226}"/>
+              </a:ext>
+            </a:extLst>
+          </p:cNvPr>
+          <p:cNvGrpSpPr/>
+          <p:nvPr/>
+        </p:nvGrpSpPr>
+        <p:grpSpPr>
+          <a:xfrm>
+            <a:off x="449705" y="2287730"/>
+            <a:ext cx="11889074" cy="5635130"/>
+            <a:chOff x="449705" y="2287730"/>
+            <a:chExt cx="11889074" cy="5635130"/>
+          </a:xfrm>
+        </p:grpSpPr>
+        <p:pic>
+          <p:nvPicPr>
+            <p:cNvPr id="3" name="グラフィックス 2">
+              <a:extLst>
+                <a:ext uri="{FF2B5EF4-FFF2-40B4-BE49-F238E27FC236}">
+                  <a16:creationId xmlns:a16="http://schemas.microsoft.com/office/drawing/2014/main" id="{7F7E0781-FA57-D187-5DE0-E36EB4DBC0D0}"/>
+                </a:ext>
+              </a:extLst>
+            </p:cNvPr>
+            <p:cNvPicPr>
+              <a:picLocks noChangeAspect="1"/>
+            </p:cNvPicPr>
+            <p:nvPr/>
+          </p:nvPicPr>
+          <p:blipFill>
+            <a:blip>
+              <a:extLst>
+                <a:ext uri="{96DAC541-7B7A-43D3-8B79-37D633B846F1}">
+                  <asvg:svgBlip xmlns:asvg="http://schemas.microsoft.com/office/drawing/2016/SVG/main" r:embed="rId2"/>
+                </a:ext>
+              </a:extLst>
+            </a:blip>
+            <a:stretch>
+              <a:fillRect/>
+            </a:stretch>
+          </p:blipFill>
+          <p:spPr>
+            <a:xfrm>
+              <a:off x="5803068" y="2287730"/>
+              <a:ext cx="6535711" cy="1879176"/>
+            </a:xfrm>
+            <a:prstGeom prst="rect">
+              <a:avLst/>
+            </a:prstGeom>
+          </p:spPr>
+        </p:pic>
+        <p:pic>
+          <p:nvPicPr>
+            <p:cNvPr id="5" name="グラフィックス 4">
+              <a:extLst>
+                <a:ext uri="{FF2B5EF4-FFF2-40B4-BE49-F238E27FC236}">
+                  <a16:creationId xmlns:a16="http://schemas.microsoft.com/office/drawing/2014/main" id="{D59428A4-4822-DCA4-899A-FFA8E58151C5}"/>
+                </a:ext>
+              </a:extLst>
+            </p:cNvPr>
+            <p:cNvPicPr>
+              <a:picLocks noChangeAspect="1"/>
+            </p:cNvPicPr>
+            <p:nvPr/>
+          </p:nvPicPr>
+          <p:blipFill>
+            <a:blip>
+              <a:extLst>
+                <a:ext uri="{96DAC541-7B7A-43D3-8B79-37D633B846F1}">
+                  <asvg:svgBlip xmlns:asvg="http://schemas.microsoft.com/office/drawing/2016/SVG/main" r:embed="rId3"/>
+                </a:ext>
+              </a:extLst>
+            </a:blip>
+            <a:stretch>
+              <a:fillRect/>
+            </a:stretch>
+          </p:blipFill>
+          <p:spPr>
+            <a:xfrm>
+              <a:off x="7450112" y="4044950"/>
+              <a:ext cx="4691920" cy="1141796"/>
+            </a:xfrm>
+            <a:prstGeom prst="rect">
+              <a:avLst/>
+            </a:prstGeom>
+          </p:spPr>
+        </p:pic>
+        <p:pic>
+          <p:nvPicPr>
+            <p:cNvPr id="7" name="グラフィックス 6">
+              <a:extLst>
+                <a:ext uri="{FF2B5EF4-FFF2-40B4-BE49-F238E27FC236}">
+                  <a16:creationId xmlns:a16="http://schemas.microsoft.com/office/drawing/2014/main" id="{D5A35544-6C18-D92B-1EDF-FD63CF4080CA}"/>
+                </a:ext>
+              </a:extLst>
+            </p:cNvPr>
+            <p:cNvPicPr>
+              <a:picLocks noChangeAspect="1"/>
+            </p:cNvPicPr>
+            <p:nvPr/>
+          </p:nvPicPr>
+          <p:blipFill>
+            <a:blip>
+              <a:extLst>
+                <a:ext uri="{96DAC541-7B7A-43D3-8B79-37D633B846F1}">
+                  <asvg:svgBlip xmlns:asvg="http://schemas.microsoft.com/office/drawing/2016/SVG/main" r:embed="rId4"/>
+                </a:ext>
+              </a:extLst>
+            </a:blip>
+            <a:stretch>
+              <a:fillRect/>
+            </a:stretch>
+          </p:blipFill>
+          <p:spPr>
+            <a:xfrm>
+              <a:off x="449705" y="2921424"/>
+              <a:ext cx="4635301" cy="1879176"/>
+            </a:xfrm>
+            <a:prstGeom prst="rect">
+              <a:avLst/>
+            </a:prstGeom>
+          </p:spPr>
+        </p:pic>
+        <p:pic>
+          <p:nvPicPr>
+            <p:cNvPr id="9" name="グラフィックス 8">
+              <a:extLst>
+                <a:ext uri="{FF2B5EF4-FFF2-40B4-BE49-F238E27FC236}">
+                  <a16:creationId xmlns:a16="http://schemas.microsoft.com/office/drawing/2014/main" id="{05867858-962A-CA46-8AC2-01A1C3E061F4}"/>
+                </a:ext>
+              </a:extLst>
+            </p:cNvPr>
+            <p:cNvPicPr>
+              <a:picLocks noChangeAspect="1"/>
+            </p:cNvPicPr>
+            <p:nvPr/>
+          </p:nvPicPr>
+          <p:blipFill>
+            <a:blip>
+              <a:extLst>
+                <a:ext uri="{96DAC541-7B7A-43D3-8B79-37D633B846F1}">
+                  <asvg:svgBlip xmlns:asvg="http://schemas.microsoft.com/office/drawing/2016/SVG/main" r:embed="rId5"/>
+                </a:ext>
+              </a:extLst>
+            </a:blip>
+            <a:stretch>
+              <a:fillRect/>
+            </a:stretch>
+          </p:blipFill>
+          <p:spPr>
+            <a:xfrm>
+              <a:off x="4290831" y="6208984"/>
+              <a:ext cx="3937834" cy="1713876"/>
+            </a:xfrm>
+            <a:prstGeom prst="rect">
+              <a:avLst/>
+            </a:prstGeom>
+          </p:spPr>
+        </p:pic>
+        <p:sp>
+          <p:nvSpPr>
+            <p:cNvPr id="2" name="爆発 1 1">
+              <a:extLst>
+                <a:ext uri="{FF2B5EF4-FFF2-40B4-BE49-F238E27FC236}">
+                  <a16:creationId xmlns:a16="http://schemas.microsoft.com/office/drawing/2014/main" id="{7A41B520-DCA2-EC9C-033C-0F4F0724B746}"/>
+                </a:ext>
+              </a:extLst>
+            </p:cNvPr>
+            <p:cNvSpPr/>
+            <p:nvPr/>
+          </p:nvSpPr>
+          <p:spPr>
+            <a:xfrm>
+              <a:off x="5304618" y="4103926"/>
+              <a:ext cx="1049311" cy="939588"/>
+            </a:xfrm>
+            <a:prstGeom prst="irregularSeal1">
+              <a:avLst/>
+            </a:prstGeom>
+            <a:solidFill>
+              <a:srgbClr val="FFC000"/>
+            </a:solidFill>
+            <a:ln w="38100">
+              <a:solidFill>
+                <a:srgbClr val="FF0000"/>
+              </a:solidFill>
+            </a:ln>
+          </p:spPr>
+          <p:style>
+            <a:lnRef idx="2">
+              <a:schemeClr val="accent1">
+                <a:shade val="15000"/>
+              </a:schemeClr>
+            </a:lnRef>
+            <a:fillRef idx="1">
+              <a:schemeClr val="accent1"/>
+            </a:fillRef>
+            <a:effectRef idx="0">
+              <a:schemeClr val="accent1"/>
+            </a:effectRef>
+            <a:fontRef idx="minor">
+              <a:schemeClr val="lt1"/>
+            </a:fontRef>
+          </p:style>
+          <p:txBody>
+            <a:bodyPr rtlCol="0" anchor="ctr"/>
+            <a:lstStyle/>
+            <a:p>
+              <a:pPr algn="ctr"/>
+              <a:endParaRPr kumimoji="1" lang="ja-JP" altLang="en-US"/>
+            </a:p>
+          </p:txBody>
+        </p:sp>
+        <p:pic>
+          <p:nvPicPr>
+            <p:cNvPr id="11" name="グラフィックス 10" descr="手のひら 枠線">
+              <a:extLst>
+                <a:ext uri="{FF2B5EF4-FFF2-40B4-BE49-F238E27FC236}">
+                  <a16:creationId xmlns:a16="http://schemas.microsoft.com/office/drawing/2014/main" id="{12087A20-AE75-1625-11EB-9A6563BA63E1}"/>
+                </a:ext>
+              </a:extLst>
+            </p:cNvPr>
+            <p:cNvPicPr>
+              <a:picLocks noChangeAspect="1"/>
+            </p:cNvPicPr>
+            <p:nvPr/>
+          </p:nvPicPr>
+          <p:blipFill>
+            <a:blip>
+              <a:extLst>
+                <a:ext uri="{96DAC541-7B7A-43D3-8B79-37D633B846F1}">
+                  <asvg:svgBlip xmlns:asvg="http://schemas.microsoft.com/office/drawing/2016/SVG/main" r:embed="rId6"/>
+                </a:ext>
+              </a:extLst>
+            </a:blip>
+            <a:stretch>
+              <a:fillRect/>
+            </a:stretch>
+          </p:blipFill>
+          <p:spPr>
+            <a:xfrm rot="3525238">
+              <a:off x="2917670" y="4677357"/>
+              <a:ext cx="1423582" cy="1423582"/>
+            </a:xfrm>
+            <a:prstGeom prst="rect">
+              <a:avLst/>
+            </a:prstGeom>
+          </p:spPr>
+        </p:pic>
+        <p:pic>
+          <p:nvPicPr>
+            <p:cNvPr id="17" name="グラフィックス 16" descr="手のひら 枠線">
+              <a:extLst>
+                <a:ext uri="{FF2B5EF4-FFF2-40B4-BE49-F238E27FC236}">
+                  <a16:creationId xmlns:a16="http://schemas.microsoft.com/office/drawing/2014/main" id="{D34FAD1A-22D2-1FE0-FA1A-F5B57B6426BB}"/>
+                </a:ext>
+              </a:extLst>
+            </p:cNvPr>
+            <p:cNvPicPr>
+              <a:picLocks noChangeAspect="1"/>
+            </p:cNvPicPr>
+            <p:nvPr/>
+          </p:nvPicPr>
+          <p:blipFill>
+            <a:blip>
+              <a:extLst>
+                <a:ext uri="{96DAC541-7B7A-43D3-8B79-37D633B846F1}">
+                  <asvg:svgBlip xmlns:asvg="http://schemas.microsoft.com/office/drawing/2016/SVG/main" r:embed="rId6"/>
+                </a:ext>
+              </a:extLst>
+            </a:blip>
+            <a:stretch>
+              <a:fillRect/>
+            </a:stretch>
+          </p:blipFill>
+          <p:spPr>
+            <a:xfrm rot="19201914" flipH="1">
+              <a:off x="7635297" y="5212335"/>
+              <a:ext cx="1423582" cy="1423582"/>
+            </a:xfrm>
+            <a:prstGeom prst="rect">
+              <a:avLst/>
+            </a:prstGeom>
+          </p:spPr>
+        </p:pic>
+      </p:grpSp>
+    </p:spTree>
+    <p:extLst>
+      <p:ext uri="{BB962C8B-B14F-4D97-AF65-F5344CB8AC3E}">
+        <p14:creationId xmlns:p14="http://schemas.microsoft.com/office/powerpoint/2010/main" val="2234596958"/>
       </p:ext>
     </p:extLst>
   </p:cSld>

--- a/figs/DIYfigures_pp.pptx
+++ b/figs/DIYfigures_pp.pptx
@@ -3282,7 +3282,7 @@
         </p:nvGrpSpPr>
         <p:grpSpPr>
           <a:xfrm>
-            <a:off x="228459" y="329892"/>
+            <a:off x="228459" y="657563"/>
             <a:ext cx="12344682" cy="8286074"/>
             <a:chOff x="228459" y="329892"/>
             <a:chExt cx="12344682" cy="8286074"/>
@@ -4571,7 +4571,7 @@
                 </a:rPr>
                 <a:t>と</a:t>
               </a:r>
-              <a:endParaRPr kumimoji="1" lang="en-US" altLang="ja-JP" sz="1400">
+              <a:endParaRPr kumimoji="1" lang="en-US" altLang="ja-JP" sz="1400" dirty="0">
                 <a:solidFill>
                   <a:schemeClr val="tx1"/>
                 </a:solidFill>

--- a/figs/DIYfigures_pp.pptx
+++ b/figs/DIYfigures_pp.pptx
@@ -15,6 +15,10 @@
     <p:sldId id="265" r:id="rId9"/>
     <p:sldId id="262" r:id="rId10"/>
     <p:sldId id="263" r:id="rId11"/>
+    <p:sldId id="266" r:id="rId12"/>
+    <p:sldId id="267" r:id="rId13"/>
+    <p:sldId id="268" r:id="rId14"/>
+    <p:sldId id="269" r:id="rId15"/>
   </p:sldIdLst>
   <p:sldSz cx="12801600" cy="9601200" type="A3"/>
   <p:notesSz cx="6858000" cy="9144000"/>
@@ -252,7 +256,7 @@
           <a:p>
             <a:fld id="{DBD89380-344E-284F-BE0F-D796858BF56F}" type="datetimeFigureOut">
               <a:rPr kumimoji="1" lang="ja-JP" altLang="en-US" smtClean="0"/>
-              <a:t>2026/5/23</a:t>
+              <a:t>2026/5/29</a:t>
             </a:fld>
             <a:endParaRPr kumimoji="1" lang="ja-JP" altLang="en-US"/>
           </a:p>
@@ -454,7 +458,7 @@
           <a:p>
             <a:fld id="{DBD89380-344E-284F-BE0F-D796858BF56F}" type="datetimeFigureOut">
               <a:rPr kumimoji="1" lang="ja-JP" altLang="en-US" smtClean="0"/>
-              <a:t>2026/5/23</a:t>
+              <a:t>2026/5/29</a:t>
             </a:fld>
             <a:endParaRPr kumimoji="1" lang="ja-JP" altLang="en-US"/>
           </a:p>
@@ -666,7 +670,7 @@
           <a:p>
             <a:fld id="{DBD89380-344E-284F-BE0F-D796858BF56F}" type="datetimeFigureOut">
               <a:rPr kumimoji="1" lang="ja-JP" altLang="en-US" smtClean="0"/>
-              <a:t>2026/5/23</a:t>
+              <a:t>2026/5/29</a:t>
             </a:fld>
             <a:endParaRPr kumimoji="1" lang="ja-JP" altLang="en-US"/>
           </a:p>
@@ -868,7 +872,7 @@
           <a:p>
             <a:fld id="{DBD89380-344E-284F-BE0F-D796858BF56F}" type="datetimeFigureOut">
               <a:rPr kumimoji="1" lang="ja-JP" altLang="en-US" smtClean="0"/>
-              <a:t>2026/5/23</a:t>
+              <a:t>2026/5/29</a:t>
             </a:fld>
             <a:endParaRPr kumimoji="1" lang="ja-JP" altLang="en-US"/>
           </a:p>
@@ -1112,7 +1116,7 @@
           <a:p>
             <a:fld id="{DBD89380-344E-284F-BE0F-D796858BF56F}" type="datetimeFigureOut">
               <a:rPr kumimoji="1" lang="ja-JP" altLang="en-US" smtClean="0"/>
-              <a:t>2026/5/23</a:t>
+              <a:t>2026/5/29</a:t>
             </a:fld>
             <a:endParaRPr kumimoji="1" lang="ja-JP" altLang="en-US"/>
           </a:p>
@@ -1408,7 +1412,7 @@
           <a:p>
             <a:fld id="{DBD89380-344E-284F-BE0F-D796858BF56F}" type="datetimeFigureOut">
               <a:rPr kumimoji="1" lang="ja-JP" altLang="en-US" smtClean="0"/>
-              <a:t>2026/5/23</a:t>
+              <a:t>2026/5/29</a:t>
             </a:fld>
             <a:endParaRPr kumimoji="1" lang="ja-JP" altLang="en-US"/>
           </a:p>
@@ -1839,7 +1843,7 @@
           <a:p>
             <a:fld id="{DBD89380-344E-284F-BE0F-D796858BF56F}" type="datetimeFigureOut">
               <a:rPr kumimoji="1" lang="ja-JP" altLang="en-US" smtClean="0"/>
-              <a:t>2026/5/23</a:t>
+              <a:t>2026/5/29</a:t>
             </a:fld>
             <a:endParaRPr kumimoji="1" lang="ja-JP" altLang="en-US"/>
           </a:p>
@@ -1957,7 +1961,7 @@
           <a:p>
             <a:fld id="{DBD89380-344E-284F-BE0F-D796858BF56F}" type="datetimeFigureOut">
               <a:rPr kumimoji="1" lang="ja-JP" altLang="en-US" smtClean="0"/>
-              <a:t>2026/5/23</a:t>
+              <a:t>2026/5/29</a:t>
             </a:fld>
             <a:endParaRPr kumimoji="1" lang="ja-JP" altLang="en-US"/>
           </a:p>
@@ -2052,7 +2056,7 @@
           <a:p>
             <a:fld id="{DBD89380-344E-284F-BE0F-D796858BF56F}" type="datetimeFigureOut">
               <a:rPr kumimoji="1" lang="ja-JP" altLang="en-US" smtClean="0"/>
-              <a:t>2026/5/23</a:t>
+              <a:t>2026/5/29</a:t>
             </a:fld>
             <a:endParaRPr kumimoji="1" lang="ja-JP" altLang="en-US"/>
           </a:p>
@@ -2361,7 +2365,7 @@
           <a:p>
             <a:fld id="{DBD89380-344E-284F-BE0F-D796858BF56F}" type="datetimeFigureOut">
               <a:rPr kumimoji="1" lang="ja-JP" altLang="en-US" smtClean="0"/>
-              <a:t>2026/5/23</a:t>
+              <a:t>2026/5/29</a:t>
             </a:fld>
             <a:endParaRPr kumimoji="1" lang="ja-JP" altLang="en-US"/>
           </a:p>
@@ -2618,7 +2622,7 @@
           <a:p>
             <a:fld id="{DBD89380-344E-284F-BE0F-D796858BF56F}" type="datetimeFigureOut">
               <a:rPr kumimoji="1" lang="ja-JP" altLang="en-US" smtClean="0"/>
-              <a:t>2026/5/23</a:t>
+              <a:t>2026/5/29</a:t>
             </a:fld>
             <a:endParaRPr kumimoji="1" lang="ja-JP" altLang="en-US"/>
           </a:p>
@@ -2863,7 +2867,7 @@
           <a:p>
             <a:fld id="{DBD89380-344E-284F-BE0F-D796858BF56F}" type="datetimeFigureOut">
               <a:rPr kumimoji="1" lang="ja-JP" altLang="en-US" smtClean="0"/>
-              <a:t>2026/5/23</a:t>
+              <a:t>2026/5/29</a:t>
             </a:fld>
             <a:endParaRPr kumimoji="1" lang="ja-JP" altLang="en-US"/>
           </a:p>
@@ -8685,6 +8689,2514 @@
 </p:sld>
 </file>
 
+<file path=ppt/slides/slide11.xml><?xml version="1.0" encoding="utf-8"?>
+<p:sld xmlns:a="http://schemas.openxmlformats.org/drawingml/2006/main" xmlns:r="http://schemas.openxmlformats.org/officeDocument/2006/relationships" xmlns:p="http://schemas.openxmlformats.org/presentationml/2006/main">
+  <p:cSld>
+    <p:spTree>
+      <p:nvGrpSpPr>
+        <p:cNvPr id="1" name=""/>
+        <p:cNvGrpSpPr/>
+        <p:nvPr/>
+      </p:nvGrpSpPr>
+      <p:grpSpPr>
+        <a:xfrm>
+          <a:off x="0" y="0"/>
+          <a:ext cx="0" cy="0"/>
+          <a:chOff x="0" y="0"/>
+          <a:chExt cx="0" cy="0"/>
+        </a:xfrm>
+      </p:grpSpPr>
+      <p:grpSp>
+        <p:nvGrpSpPr>
+          <p:cNvPr id="26" name="グループ化 25">
+            <a:extLst>
+              <a:ext uri="{FF2B5EF4-FFF2-40B4-BE49-F238E27FC236}">
+                <a16:creationId xmlns:a16="http://schemas.microsoft.com/office/drawing/2014/main" id="{6C19007C-4305-2626-CEF5-58E409ED8840}"/>
+              </a:ext>
+            </a:extLst>
+          </p:cNvPr>
+          <p:cNvGrpSpPr/>
+          <p:nvPr/>
+        </p:nvGrpSpPr>
+        <p:grpSpPr>
+          <a:xfrm>
+            <a:off x="157083" y="2370162"/>
+            <a:ext cx="12508199" cy="4200379"/>
+            <a:chOff x="157083" y="2370162"/>
+            <a:chExt cx="12508199" cy="4200379"/>
+          </a:xfrm>
+        </p:grpSpPr>
+        <p:sp>
+          <p:nvSpPr>
+            <p:cNvPr id="2" name="テキスト ボックス 1">
+              <a:extLst>
+                <a:ext uri="{FF2B5EF4-FFF2-40B4-BE49-F238E27FC236}">
+                  <a16:creationId xmlns:a16="http://schemas.microsoft.com/office/drawing/2014/main" id="{39068A81-4B16-F159-93AE-1A6270F08C76}"/>
+                </a:ext>
+              </a:extLst>
+            </p:cNvPr>
+            <p:cNvSpPr txBox="1"/>
+            <p:nvPr/>
+          </p:nvSpPr>
+          <p:spPr>
+            <a:xfrm>
+              <a:off x="6876581" y="2370162"/>
+              <a:ext cx="3762531" cy="892552"/>
+            </a:xfrm>
+            <a:prstGeom prst="rect">
+              <a:avLst/>
+            </a:prstGeom>
+            <a:solidFill>
+              <a:schemeClr val="bg1"/>
+            </a:solidFill>
+            <a:ln w="25400">
+              <a:solidFill>
+                <a:schemeClr val="tx1"/>
+              </a:solidFill>
+            </a:ln>
+          </p:spPr>
+          <p:txBody>
+            <a:bodyPr wrap="square">
+              <a:spAutoFit/>
+            </a:bodyPr>
+            <a:lstStyle/>
+            <a:p>
+              <a:pPr algn="ctr"/>
+              <a:r>
+                <a:rPr kumimoji="1" lang="ja-JP" altLang="en-US" sz="3200">
+                  <a:latin typeface="Hiragino Kaku Gothic StdN W8" panose="020B0800000000000000" pitchFamily="34" charset="-128"/>
+                  <a:ea typeface="Hiragino Kaku Gothic StdN W8" panose="020B0800000000000000" pitchFamily="34" charset="-128"/>
+                </a:rPr>
+                <a:t>閣内協力</a:t>
+              </a:r>
+              <a:br>
+                <a:rPr kumimoji="1" lang="en-US" altLang="ja-JP" sz="3200" dirty="0">
+                  <a:latin typeface="Hiragino Kaku Gothic StdN W8" panose="020B0800000000000000" pitchFamily="34" charset="-128"/>
+                  <a:ea typeface="Hiragino Kaku Gothic StdN W8" panose="020B0800000000000000" pitchFamily="34" charset="-128"/>
+                </a:rPr>
+              </a:br>
+              <a:r>
+                <a:rPr kumimoji="1" lang="ja-JP" altLang="en-US" sz="2000">
+                  <a:latin typeface="Hiragino Kaku Gothic StdN W8" panose="020B0800000000000000" pitchFamily="34" charset="-128"/>
+                  <a:ea typeface="Hiragino Kaku Gothic StdN W8" panose="020B0800000000000000" pitchFamily="34" charset="-128"/>
+                </a:rPr>
+                <a:t>（連立）</a:t>
+              </a:r>
+              <a:endParaRPr lang="ja-JP" altLang="en-US" sz="3200"/>
+            </a:p>
+          </p:txBody>
+        </p:sp>
+        <p:sp>
+          <p:nvSpPr>
+            <p:cNvPr id="3" name="テキスト ボックス 2">
+              <a:extLst>
+                <a:ext uri="{FF2B5EF4-FFF2-40B4-BE49-F238E27FC236}">
+                  <a16:creationId xmlns:a16="http://schemas.microsoft.com/office/drawing/2014/main" id="{4D61D920-1766-123A-1C04-CDCD26FA48FD}"/>
+                </a:ext>
+              </a:extLst>
+            </p:cNvPr>
+            <p:cNvSpPr txBox="1"/>
+            <p:nvPr/>
+          </p:nvSpPr>
+          <p:spPr>
+            <a:xfrm>
+              <a:off x="3114050" y="2370162"/>
+              <a:ext cx="3762531" cy="892552"/>
+            </a:xfrm>
+            <a:prstGeom prst="rect">
+              <a:avLst/>
+            </a:prstGeom>
+            <a:solidFill>
+              <a:schemeClr val="bg1"/>
+            </a:solidFill>
+            <a:ln w="25400">
+              <a:solidFill>
+                <a:schemeClr val="tx1"/>
+              </a:solidFill>
+            </a:ln>
+          </p:spPr>
+          <p:txBody>
+            <a:bodyPr wrap="square">
+              <a:spAutoFit/>
+            </a:bodyPr>
+            <a:lstStyle/>
+            <a:p>
+              <a:pPr algn="ctr"/>
+              <a:r>
+                <a:rPr kumimoji="1" lang="ja-JP" altLang="en-US" sz="3200">
+                  <a:latin typeface="Hiragino Kaku Gothic StdN W8" panose="020B0800000000000000" pitchFamily="34" charset="-128"/>
+                  <a:ea typeface="Hiragino Kaku Gothic StdN W8" panose="020B0800000000000000" pitchFamily="34" charset="-128"/>
+                </a:rPr>
+                <a:t>閣外協力</a:t>
+              </a:r>
+              <a:endParaRPr kumimoji="1" lang="en-US" altLang="ja-JP" sz="3200" dirty="0">
+                <a:latin typeface="Hiragino Kaku Gothic StdN W8" panose="020B0800000000000000" pitchFamily="34" charset="-128"/>
+                <a:ea typeface="Hiragino Kaku Gothic StdN W8" panose="020B0800000000000000" pitchFamily="34" charset="-128"/>
+              </a:endParaRPr>
+            </a:p>
+            <a:p>
+              <a:pPr algn="ctr"/>
+              <a:r>
+                <a:rPr kumimoji="1" lang="en-US" altLang="ja-JP" sz="2000" dirty="0">
+                  <a:latin typeface="Hiragino Kaku Gothic StdN W8" panose="020B0800000000000000" pitchFamily="34" charset="-128"/>
+                  <a:ea typeface="Hiragino Kaku Gothic StdN W8" panose="020B0800000000000000" pitchFamily="34" charset="-128"/>
+                </a:rPr>
+                <a:t>(confidence &amp; supply)</a:t>
+              </a:r>
+              <a:endParaRPr lang="ja-JP" altLang="en-US" sz="2000"/>
+            </a:p>
+          </p:txBody>
+        </p:sp>
+        <p:sp>
+          <p:nvSpPr>
+            <p:cNvPr id="4" name="テキスト ボックス 3">
+              <a:extLst>
+                <a:ext uri="{FF2B5EF4-FFF2-40B4-BE49-F238E27FC236}">
+                  <a16:creationId xmlns:a16="http://schemas.microsoft.com/office/drawing/2014/main" id="{4C81767A-A0FF-429B-DACC-085FCFE830E2}"/>
+                </a:ext>
+              </a:extLst>
+            </p:cNvPr>
+            <p:cNvSpPr txBox="1"/>
+            <p:nvPr/>
+          </p:nvSpPr>
+          <p:spPr>
+            <a:xfrm>
+              <a:off x="157083" y="2370162"/>
+              <a:ext cx="2956967" cy="892552"/>
+            </a:xfrm>
+            <a:prstGeom prst="rect">
+              <a:avLst/>
+            </a:prstGeom>
+            <a:solidFill>
+              <a:schemeClr val="bg1"/>
+            </a:solidFill>
+            <a:ln w="25400">
+              <a:solidFill>
+                <a:schemeClr val="tx1"/>
+              </a:solidFill>
+            </a:ln>
+          </p:spPr>
+          <p:txBody>
+            <a:bodyPr wrap="square">
+              <a:spAutoFit/>
+            </a:bodyPr>
+            <a:lstStyle/>
+            <a:p>
+              <a:pPr algn="ctr"/>
+              <a:r>
+                <a:rPr kumimoji="1" lang="ja-JP" altLang="en-US" sz="3200">
+                  <a:latin typeface="Hiragino Kaku Gothic StdN W8" panose="020B0800000000000000" pitchFamily="34" charset="-128"/>
+                  <a:ea typeface="Hiragino Kaku Gothic StdN W8" panose="020B0800000000000000" pitchFamily="34" charset="-128"/>
+                </a:rPr>
+                <a:t>部分連合</a:t>
+              </a:r>
+              <a:br>
+                <a:rPr kumimoji="1" lang="en-US" altLang="ja-JP" sz="3200" dirty="0">
+                  <a:latin typeface="Hiragino Kaku Gothic StdN W8" panose="020B0800000000000000" pitchFamily="34" charset="-128"/>
+                  <a:ea typeface="Hiragino Kaku Gothic StdN W8" panose="020B0800000000000000" pitchFamily="34" charset="-128"/>
+                </a:rPr>
+              </a:br>
+              <a:r>
+                <a:rPr kumimoji="1" lang="en-US" altLang="ja-JP" sz="2000" dirty="0">
+                  <a:latin typeface="Hiragino Kaku Gothic StdN W8" panose="020B0800000000000000" pitchFamily="34" charset="-128"/>
+                  <a:ea typeface="Hiragino Kaku Gothic StdN W8" panose="020B0800000000000000" pitchFamily="34" charset="-128"/>
+                </a:rPr>
+                <a:t>(</a:t>
+              </a:r>
+              <a:r>
+                <a:rPr kumimoji="1" lang="ja-JP" altLang="en-US" sz="2000">
+                  <a:latin typeface="Hiragino Kaku Gothic StdN W8" panose="020B0800000000000000" pitchFamily="34" charset="-128"/>
+                  <a:ea typeface="Hiragino Kaku Gothic StdN W8" panose="020B0800000000000000" pitchFamily="34" charset="-128"/>
+                </a:rPr>
+                <a:t>パーシャル連合</a:t>
+              </a:r>
+              <a:r>
+                <a:rPr kumimoji="1" lang="en-US" altLang="ja-JP" sz="2000" dirty="0">
+                  <a:latin typeface="Hiragino Kaku Gothic StdN W8" panose="020B0800000000000000" pitchFamily="34" charset="-128"/>
+                  <a:ea typeface="Hiragino Kaku Gothic StdN W8" panose="020B0800000000000000" pitchFamily="34" charset="-128"/>
+                </a:rPr>
+                <a:t>)</a:t>
+              </a:r>
+              <a:endParaRPr lang="ja-JP" altLang="en-US" sz="3200"/>
+            </a:p>
+          </p:txBody>
+        </p:sp>
+        <p:sp>
+          <p:nvSpPr>
+            <p:cNvPr id="5" name="テキスト ボックス 4">
+              <a:extLst>
+                <a:ext uri="{FF2B5EF4-FFF2-40B4-BE49-F238E27FC236}">
+                  <a16:creationId xmlns:a16="http://schemas.microsoft.com/office/drawing/2014/main" id="{B858506E-44DC-E300-5FB1-C096E880AB21}"/>
+                </a:ext>
+              </a:extLst>
+            </p:cNvPr>
+            <p:cNvSpPr txBox="1"/>
+            <p:nvPr/>
+          </p:nvSpPr>
+          <p:spPr>
+            <a:xfrm>
+              <a:off x="6876581" y="4231441"/>
+              <a:ext cx="3762531" cy="584775"/>
+            </a:xfrm>
+            <a:prstGeom prst="rect">
+              <a:avLst/>
+            </a:prstGeom>
+            <a:solidFill>
+              <a:schemeClr val="bg1"/>
+            </a:solidFill>
+            <a:ln w="25400">
+              <a:solidFill>
+                <a:schemeClr val="tx1"/>
+              </a:solidFill>
+            </a:ln>
+          </p:spPr>
+          <p:txBody>
+            <a:bodyPr wrap="square">
+              <a:spAutoFit/>
+            </a:bodyPr>
+            <a:lstStyle/>
+            <a:p>
+              <a:pPr algn="ctr"/>
+              <a:r>
+                <a:rPr kumimoji="1" lang="ja-JP" altLang="en-US" sz="3200">
+                  <a:latin typeface="Hiragino Sans W4" panose="020B0400000000000000" pitchFamily="34" charset="-128"/>
+                  <a:ea typeface="Hiragino Sans W4" panose="020B0400000000000000" pitchFamily="34" charset="-128"/>
+                </a:rPr>
+                <a:t>閣僚ポストの共有</a:t>
+              </a:r>
+              <a:endParaRPr lang="ja-JP" altLang="en-US" sz="3200">
+                <a:latin typeface="Hiragino Sans W4" panose="020B0400000000000000" pitchFamily="34" charset="-128"/>
+                <a:ea typeface="Hiragino Sans W4" panose="020B0400000000000000" pitchFamily="34" charset="-128"/>
+              </a:endParaRPr>
+            </a:p>
+          </p:txBody>
+        </p:sp>
+        <p:sp>
+          <p:nvSpPr>
+            <p:cNvPr id="6" name="テキスト ボックス 5">
+              <a:extLst>
+                <a:ext uri="{FF2B5EF4-FFF2-40B4-BE49-F238E27FC236}">
+                  <a16:creationId xmlns:a16="http://schemas.microsoft.com/office/drawing/2014/main" id="{F2080C2A-8884-AE3E-7310-7F94276B45E6}"/>
+                </a:ext>
+              </a:extLst>
+            </p:cNvPr>
+            <p:cNvSpPr txBox="1"/>
+            <p:nvPr/>
+          </p:nvSpPr>
+          <p:spPr>
+            <a:xfrm>
+              <a:off x="3822492" y="4816216"/>
+              <a:ext cx="6816619" cy="584775"/>
+            </a:xfrm>
+            <a:prstGeom prst="rect">
+              <a:avLst/>
+            </a:prstGeom>
+            <a:solidFill>
+              <a:schemeClr val="bg1"/>
+            </a:solidFill>
+            <a:ln w="25400">
+              <a:solidFill>
+                <a:schemeClr val="tx1"/>
+              </a:solidFill>
+            </a:ln>
+          </p:spPr>
+          <p:txBody>
+            <a:bodyPr wrap="square">
+              <a:spAutoFit/>
+            </a:bodyPr>
+            <a:lstStyle/>
+            <a:p>
+              <a:pPr algn="ctr"/>
+              <a:r>
+                <a:rPr kumimoji="1" lang="ja-JP" altLang="en-US" sz="3200">
+                  <a:latin typeface="Hiragino Sans W4" panose="020B0400000000000000" pitchFamily="34" charset="-128"/>
+                  <a:ea typeface="Hiragino Sans W4" panose="020B0400000000000000" pitchFamily="34" charset="-128"/>
+                </a:rPr>
+                <a:t>法案採決での恒常的協力</a:t>
+              </a:r>
+              <a:r>
+                <a:rPr kumimoji="1" lang="en-US" altLang="ja-JP" sz="3200" dirty="0">
+                  <a:latin typeface="Hiragino Sans W4" panose="020B0400000000000000" pitchFamily="34" charset="-128"/>
+                  <a:ea typeface="Hiragino Sans W4" panose="020B0400000000000000" pitchFamily="34" charset="-128"/>
+                </a:rPr>
+                <a:t> (</a:t>
+              </a:r>
+              <a:r>
+                <a:rPr kumimoji="1" lang="ja-JP" altLang="en-US" sz="3200">
+                  <a:latin typeface="Hiragino Sans W4" panose="020B0400000000000000" pitchFamily="34" charset="-128"/>
+                  <a:ea typeface="Hiragino Sans W4" panose="020B0400000000000000" pitchFamily="34" charset="-128"/>
+                </a:rPr>
+                <a:t>事前審査</a:t>
+              </a:r>
+              <a:r>
+                <a:rPr kumimoji="1" lang="en-US" altLang="ja-JP" sz="3200" dirty="0">
+                  <a:latin typeface="Hiragino Sans W4" panose="020B0400000000000000" pitchFamily="34" charset="-128"/>
+                  <a:ea typeface="Hiragino Sans W4" panose="020B0400000000000000" pitchFamily="34" charset="-128"/>
+                </a:rPr>
+                <a:t>)</a:t>
+              </a:r>
+              <a:endParaRPr lang="ja-JP" altLang="en-US" sz="3200">
+                <a:latin typeface="Hiragino Sans W4" panose="020B0400000000000000" pitchFamily="34" charset="-128"/>
+                <a:ea typeface="Hiragino Sans W4" panose="020B0400000000000000" pitchFamily="34" charset="-128"/>
+              </a:endParaRPr>
+            </a:p>
+          </p:txBody>
+        </p:sp>
+        <p:sp>
+          <p:nvSpPr>
+            <p:cNvPr id="7" name="テキスト ボックス 6">
+              <a:extLst>
+                <a:ext uri="{FF2B5EF4-FFF2-40B4-BE49-F238E27FC236}">
+                  <a16:creationId xmlns:a16="http://schemas.microsoft.com/office/drawing/2014/main" id="{F8F4E68D-1E61-BDCA-3629-F7723E656244}"/>
+                </a:ext>
+              </a:extLst>
+            </p:cNvPr>
+            <p:cNvSpPr txBox="1"/>
+            <p:nvPr/>
+          </p:nvSpPr>
+          <p:spPr>
+            <a:xfrm>
+              <a:off x="3114049" y="5400991"/>
+              <a:ext cx="7525061" cy="584775"/>
+            </a:xfrm>
+            <a:prstGeom prst="rect">
+              <a:avLst/>
+            </a:prstGeom>
+            <a:solidFill>
+              <a:schemeClr val="bg1"/>
+            </a:solidFill>
+            <a:ln w="25400">
+              <a:solidFill>
+                <a:schemeClr val="tx1"/>
+              </a:solidFill>
+            </a:ln>
+          </p:spPr>
+          <p:txBody>
+            <a:bodyPr wrap="square">
+              <a:spAutoFit/>
+            </a:bodyPr>
+            <a:lstStyle/>
+            <a:p>
+              <a:pPr algn="ctr"/>
+              <a:r>
+                <a:rPr kumimoji="1" lang="ja-JP" altLang="en-US" sz="3200">
+                  <a:latin typeface="Hiragino Sans W4" panose="020B0400000000000000" pitchFamily="34" charset="-128"/>
+                  <a:ea typeface="Hiragino Sans W4" panose="020B0400000000000000" pitchFamily="34" charset="-128"/>
+                </a:rPr>
+                <a:t>首相指名選挙での協力</a:t>
+              </a:r>
+              <a:endParaRPr lang="ja-JP" altLang="en-US" sz="3200">
+                <a:latin typeface="Hiragino Sans W4" panose="020B0400000000000000" pitchFamily="34" charset="-128"/>
+                <a:ea typeface="Hiragino Sans W4" panose="020B0400000000000000" pitchFamily="34" charset="-128"/>
+              </a:endParaRPr>
+            </a:p>
+          </p:txBody>
+        </p:sp>
+        <p:sp>
+          <p:nvSpPr>
+            <p:cNvPr id="8" name="テキスト ボックス 7">
+              <a:extLst>
+                <a:ext uri="{FF2B5EF4-FFF2-40B4-BE49-F238E27FC236}">
+                  <a16:creationId xmlns:a16="http://schemas.microsoft.com/office/drawing/2014/main" id="{8D4618CF-75F1-CC1E-92CF-87DD263695FC}"/>
+                </a:ext>
+              </a:extLst>
+            </p:cNvPr>
+            <p:cNvSpPr txBox="1"/>
+            <p:nvPr/>
+          </p:nvSpPr>
+          <p:spPr>
+            <a:xfrm>
+              <a:off x="157084" y="5985766"/>
+              <a:ext cx="10482026" cy="584775"/>
+            </a:xfrm>
+            <a:prstGeom prst="rect">
+              <a:avLst/>
+            </a:prstGeom>
+            <a:solidFill>
+              <a:schemeClr val="bg1"/>
+            </a:solidFill>
+            <a:ln w="25400">
+              <a:solidFill>
+                <a:schemeClr val="tx1"/>
+              </a:solidFill>
+            </a:ln>
+          </p:spPr>
+          <p:txBody>
+            <a:bodyPr wrap="square">
+              <a:spAutoFit/>
+            </a:bodyPr>
+            <a:lstStyle/>
+            <a:p>
+              <a:pPr algn="ctr"/>
+              <a:r>
+                <a:rPr kumimoji="1" lang="ja-JP" altLang="en-US" sz="3200">
+                  <a:latin typeface="Hiragino Sans W4" panose="020B0400000000000000" pitchFamily="34" charset="-128"/>
+                  <a:ea typeface="Hiragino Sans W4" panose="020B0400000000000000" pitchFamily="34" charset="-128"/>
+                </a:rPr>
+                <a:t>法案採決でのその都度の協力</a:t>
+              </a:r>
+              <a:endParaRPr lang="ja-JP" altLang="en-US" sz="3200">
+                <a:latin typeface="Hiragino Sans W4" panose="020B0400000000000000" pitchFamily="34" charset="-128"/>
+                <a:ea typeface="Hiragino Sans W4" panose="020B0400000000000000" pitchFamily="34" charset="-128"/>
+              </a:endParaRPr>
+            </a:p>
+          </p:txBody>
+        </p:sp>
+        <p:sp>
+          <p:nvSpPr>
+            <p:cNvPr id="9" name="テキスト ボックス 8">
+              <a:extLst>
+                <a:ext uri="{FF2B5EF4-FFF2-40B4-BE49-F238E27FC236}">
+                  <a16:creationId xmlns:a16="http://schemas.microsoft.com/office/drawing/2014/main" id="{B3003924-7F1D-25DA-D484-732855D6FF3B}"/>
+                </a:ext>
+              </a:extLst>
+            </p:cNvPr>
+            <p:cNvSpPr txBox="1"/>
+            <p:nvPr/>
+          </p:nvSpPr>
+          <p:spPr>
+            <a:xfrm>
+              <a:off x="11347554" y="4231441"/>
+              <a:ext cx="1317728" cy="584775"/>
+            </a:xfrm>
+            <a:prstGeom prst="rect">
+              <a:avLst/>
+            </a:prstGeom>
+            <a:solidFill>
+              <a:schemeClr val="bg1"/>
+            </a:solidFill>
+            <a:ln w="25400">
+              <a:solidFill>
+                <a:schemeClr val="tx1"/>
+              </a:solidFill>
+            </a:ln>
+          </p:spPr>
+          <p:txBody>
+            <a:bodyPr wrap="square">
+              <a:spAutoFit/>
+            </a:bodyPr>
+            <a:lstStyle/>
+            <a:p>
+              <a:pPr algn="ctr"/>
+              <a:r>
+                <a:rPr kumimoji="1" lang="ja-JP" altLang="en-US" sz="3200">
+                  <a:latin typeface="Hiragino Kaku Gothic StdN W8" panose="020B0800000000000000" pitchFamily="34" charset="-128"/>
+                  <a:ea typeface="Hiragino Kaku Gothic StdN W8" panose="020B0800000000000000" pitchFamily="34" charset="-128"/>
+                </a:rPr>
+                <a:t>政権</a:t>
+              </a:r>
+              <a:endParaRPr lang="ja-JP" altLang="en-US" sz="3200"/>
+            </a:p>
+          </p:txBody>
+        </p:sp>
+        <p:sp>
+          <p:nvSpPr>
+            <p:cNvPr id="10" name="テキスト ボックス 9">
+              <a:extLst>
+                <a:ext uri="{FF2B5EF4-FFF2-40B4-BE49-F238E27FC236}">
+                  <a16:creationId xmlns:a16="http://schemas.microsoft.com/office/drawing/2014/main" id="{6929AEA4-B99A-1F12-55ED-9F047D5FEE2E}"/>
+                </a:ext>
+              </a:extLst>
+            </p:cNvPr>
+            <p:cNvSpPr txBox="1"/>
+            <p:nvPr/>
+          </p:nvSpPr>
+          <p:spPr>
+            <a:xfrm>
+              <a:off x="11347553" y="5400991"/>
+              <a:ext cx="1317728" cy="584775"/>
+            </a:xfrm>
+            <a:prstGeom prst="rect">
+              <a:avLst/>
+            </a:prstGeom>
+            <a:solidFill>
+              <a:schemeClr val="bg1"/>
+            </a:solidFill>
+            <a:ln w="25400">
+              <a:solidFill>
+                <a:schemeClr val="tx1"/>
+              </a:solidFill>
+            </a:ln>
+          </p:spPr>
+          <p:txBody>
+            <a:bodyPr wrap="square">
+              <a:spAutoFit/>
+            </a:bodyPr>
+            <a:lstStyle/>
+            <a:p>
+              <a:pPr algn="ctr"/>
+              <a:r>
+                <a:rPr kumimoji="1" lang="ja-JP" altLang="en-US" sz="3200">
+                  <a:latin typeface="Hiragino Kaku Gothic StdN W8" panose="020B0800000000000000" pitchFamily="34" charset="-128"/>
+                  <a:ea typeface="Hiragino Kaku Gothic StdN W8" panose="020B0800000000000000" pitchFamily="34" charset="-128"/>
+                </a:rPr>
+                <a:t>国会</a:t>
+              </a:r>
+              <a:endParaRPr lang="ja-JP" altLang="en-US" sz="3200"/>
+            </a:p>
+          </p:txBody>
+        </p:sp>
+        <p:cxnSp>
+          <p:nvCxnSpPr>
+            <p:cNvPr id="12" name="直線コネクタ 11">
+              <a:extLst>
+                <a:ext uri="{FF2B5EF4-FFF2-40B4-BE49-F238E27FC236}">
+                  <a16:creationId xmlns:a16="http://schemas.microsoft.com/office/drawing/2014/main" id="{5BFBE178-C7C8-F64F-3028-BD44D4CA1FB8}"/>
+                </a:ext>
+              </a:extLst>
+            </p:cNvPr>
+            <p:cNvCxnSpPr>
+              <a:stCxn id="9" idx="1"/>
+              <a:endCxn id="5" idx="3"/>
+            </p:cNvCxnSpPr>
+            <p:nvPr/>
+          </p:nvCxnSpPr>
+          <p:spPr>
+            <a:xfrm flipH="1">
+              <a:off x="10639112" y="4523829"/>
+              <a:ext cx="708442" cy="0"/>
+            </a:xfrm>
+            <a:prstGeom prst="line">
+              <a:avLst/>
+            </a:prstGeom>
+            <a:ln w="19050">
+              <a:solidFill>
+                <a:schemeClr val="tx1"/>
+              </a:solidFill>
+            </a:ln>
+          </p:spPr>
+          <p:style>
+            <a:lnRef idx="1">
+              <a:schemeClr val="accent1"/>
+            </a:lnRef>
+            <a:fillRef idx="0">
+              <a:schemeClr val="accent1"/>
+            </a:fillRef>
+            <a:effectRef idx="0">
+              <a:schemeClr val="accent1"/>
+            </a:effectRef>
+            <a:fontRef idx="minor">
+              <a:schemeClr val="tx1"/>
+            </a:fontRef>
+          </p:style>
+        </p:cxnSp>
+        <p:cxnSp>
+          <p:nvCxnSpPr>
+            <p:cNvPr id="13" name="直線コネクタ 12">
+              <a:extLst>
+                <a:ext uri="{FF2B5EF4-FFF2-40B4-BE49-F238E27FC236}">
+                  <a16:creationId xmlns:a16="http://schemas.microsoft.com/office/drawing/2014/main" id="{13E34BF8-78D1-2D79-DD40-89C30F8085F2}"/>
+                </a:ext>
+              </a:extLst>
+            </p:cNvPr>
+            <p:cNvCxnSpPr>
+              <a:cxnSpLocks/>
+              <a:stCxn id="9" idx="1"/>
+              <a:endCxn id="7" idx="3"/>
+            </p:cNvCxnSpPr>
+            <p:nvPr/>
+          </p:nvCxnSpPr>
+          <p:spPr>
+            <a:xfrm flipH="1">
+              <a:off x="10639110" y="4523829"/>
+              <a:ext cx="708444" cy="1169550"/>
+            </a:xfrm>
+            <a:prstGeom prst="line">
+              <a:avLst/>
+            </a:prstGeom>
+            <a:ln w="19050">
+              <a:solidFill>
+                <a:schemeClr val="tx1"/>
+              </a:solidFill>
+            </a:ln>
+          </p:spPr>
+          <p:style>
+            <a:lnRef idx="1">
+              <a:schemeClr val="accent1"/>
+            </a:lnRef>
+            <a:fillRef idx="0">
+              <a:schemeClr val="accent1"/>
+            </a:fillRef>
+            <a:effectRef idx="0">
+              <a:schemeClr val="accent1"/>
+            </a:effectRef>
+            <a:fontRef idx="minor">
+              <a:schemeClr val="tx1"/>
+            </a:fontRef>
+          </p:style>
+        </p:cxnSp>
+        <p:cxnSp>
+          <p:nvCxnSpPr>
+            <p:cNvPr id="16" name="直線コネクタ 15">
+              <a:extLst>
+                <a:ext uri="{FF2B5EF4-FFF2-40B4-BE49-F238E27FC236}">
+                  <a16:creationId xmlns:a16="http://schemas.microsoft.com/office/drawing/2014/main" id="{BC45DE0E-BC62-63E8-FA86-21B5DE4731F9}"/>
+                </a:ext>
+              </a:extLst>
+            </p:cNvPr>
+            <p:cNvCxnSpPr>
+              <a:cxnSpLocks/>
+              <a:stCxn id="10" idx="1"/>
+              <a:endCxn id="6" idx="3"/>
+            </p:cNvCxnSpPr>
+            <p:nvPr/>
+          </p:nvCxnSpPr>
+          <p:spPr>
+            <a:xfrm flipH="1" flipV="1">
+              <a:off x="10639111" y="5108604"/>
+              <a:ext cx="708442" cy="584775"/>
+            </a:xfrm>
+            <a:prstGeom prst="line">
+              <a:avLst/>
+            </a:prstGeom>
+            <a:ln w="19050">
+              <a:solidFill>
+                <a:schemeClr val="tx1"/>
+              </a:solidFill>
+            </a:ln>
+          </p:spPr>
+          <p:style>
+            <a:lnRef idx="1">
+              <a:schemeClr val="accent1"/>
+            </a:lnRef>
+            <a:fillRef idx="0">
+              <a:schemeClr val="accent1"/>
+            </a:fillRef>
+            <a:effectRef idx="0">
+              <a:schemeClr val="accent1"/>
+            </a:effectRef>
+            <a:fontRef idx="minor">
+              <a:schemeClr val="tx1"/>
+            </a:fontRef>
+          </p:style>
+        </p:cxnSp>
+        <p:cxnSp>
+          <p:nvCxnSpPr>
+            <p:cNvPr id="19" name="直線コネクタ 18">
+              <a:extLst>
+                <a:ext uri="{FF2B5EF4-FFF2-40B4-BE49-F238E27FC236}">
+                  <a16:creationId xmlns:a16="http://schemas.microsoft.com/office/drawing/2014/main" id="{D61E57DA-AE9D-766C-B214-10E9B2451208}"/>
+                </a:ext>
+              </a:extLst>
+            </p:cNvPr>
+            <p:cNvCxnSpPr>
+              <a:cxnSpLocks/>
+              <a:stCxn id="10" idx="1"/>
+              <a:endCxn id="7" idx="3"/>
+            </p:cNvCxnSpPr>
+            <p:nvPr/>
+          </p:nvCxnSpPr>
+          <p:spPr>
+            <a:xfrm flipH="1">
+              <a:off x="10639110" y="5693379"/>
+              <a:ext cx="708443" cy="0"/>
+            </a:xfrm>
+            <a:prstGeom prst="line">
+              <a:avLst/>
+            </a:prstGeom>
+            <a:ln w="19050">
+              <a:solidFill>
+                <a:schemeClr val="tx1"/>
+              </a:solidFill>
+            </a:ln>
+          </p:spPr>
+          <p:style>
+            <a:lnRef idx="1">
+              <a:schemeClr val="accent1"/>
+            </a:lnRef>
+            <a:fillRef idx="0">
+              <a:schemeClr val="accent1"/>
+            </a:fillRef>
+            <a:effectRef idx="0">
+              <a:schemeClr val="accent1"/>
+            </a:effectRef>
+            <a:fontRef idx="minor">
+              <a:schemeClr val="tx1"/>
+            </a:fontRef>
+          </p:style>
+        </p:cxnSp>
+        <p:cxnSp>
+          <p:nvCxnSpPr>
+            <p:cNvPr id="23" name="直線コネクタ 22">
+              <a:extLst>
+                <a:ext uri="{FF2B5EF4-FFF2-40B4-BE49-F238E27FC236}">
+                  <a16:creationId xmlns:a16="http://schemas.microsoft.com/office/drawing/2014/main" id="{DE54C75F-C8C2-C45C-195E-8A44E8DDDEC8}"/>
+                </a:ext>
+              </a:extLst>
+            </p:cNvPr>
+            <p:cNvCxnSpPr>
+              <a:cxnSpLocks/>
+              <a:stCxn id="10" idx="1"/>
+              <a:endCxn id="8" idx="3"/>
+            </p:cNvCxnSpPr>
+            <p:nvPr/>
+          </p:nvCxnSpPr>
+          <p:spPr>
+            <a:xfrm flipH="1">
+              <a:off x="10639110" y="5693379"/>
+              <a:ext cx="708443" cy="584775"/>
+            </a:xfrm>
+            <a:prstGeom prst="line">
+              <a:avLst/>
+            </a:prstGeom>
+            <a:ln w="19050">
+              <a:solidFill>
+                <a:schemeClr val="tx1"/>
+              </a:solidFill>
+            </a:ln>
+          </p:spPr>
+          <p:style>
+            <a:lnRef idx="1">
+              <a:schemeClr val="accent1"/>
+            </a:lnRef>
+            <a:fillRef idx="0">
+              <a:schemeClr val="accent1"/>
+            </a:fillRef>
+            <a:effectRef idx="0">
+              <a:schemeClr val="accent1"/>
+            </a:effectRef>
+            <a:fontRef idx="minor">
+              <a:schemeClr val="tx1"/>
+            </a:fontRef>
+          </p:style>
+        </p:cxnSp>
+      </p:grpSp>
+    </p:spTree>
+    <p:extLst>
+      <p:ext uri="{BB962C8B-B14F-4D97-AF65-F5344CB8AC3E}">
+        <p14:creationId xmlns:p14="http://schemas.microsoft.com/office/powerpoint/2010/main" val="811957124"/>
+      </p:ext>
+    </p:extLst>
+  </p:cSld>
+  <p:clrMapOvr>
+    <a:masterClrMapping/>
+  </p:clrMapOvr>
+</p:sld>
+</file>
+
+<file path=ppt/slides/slide12.xml><?xml version="1.0" encoding="utf-8"?>
+<p:sld xmlns:a="http://schemas.openxmlformats.org/drawingml/2006/main" xmlns:r="http://schemas.openxmlformats.org/officeDocument/2006/relationships" xmlns:p="http://schemas.openxmlformats.org/presentationml/2006/main">
+  <p:cSld>
+    <p:spTree>
+      <p:nvGrpSpPr>
+        <p:cNvPr id="1" name=""/>
+        <p:cNvGrpSpPr/>
+        <p:nvPr/>
+      </p:nvGrpSpPr>
+      <p:grpSpPr>
+        <a:xfrm>
+          <a:off x="0" y="0"/>
+          <a:ext cx="0" cy="0"/>
+          <a:chOff x="0" y="0"/>
+          <a:chExt cx="0" cy="0"/>
+        </a:xfrm>
+      </p:grpSpPr>
+      <p:grpSp>
+        <p:nvGrpSpPr>
+          <p:cNvPr id="41" name="グループ化 40">
+            <a:extLst>
+              <a:ext uri="{FF2B5EF4-FFF2-40B4-BE49-F238E27FC236}">
+                <a16:creationId xmlns:a16="http://schemas.microsoft.com/office/drawing/2014/main" id="{0AC263B6-3684-6200-85D3-AED9CD034748}"/>
+              </a:ext>
+            </a:extLst>
+          </p:cNvPr>
+          <p:cNvGrpSpPr/>
+          <p:nvPr/>
+        </p:nvGrpSpPr>
+        <p:grpSpPr>
+          <a:xfrm>
+            <a:off x="479208" y="657973"/>
+            <a:ext cx="12147158" cy="7191134"/>
+            <a:chOff x="479208" y="657973"/>
+            <a:chExt cx="12147158" cy="7191134"/>
+          </a:xfrm>
+        </p:grpSpPr>
+        <p:pic>
+          <p:nvPicPr>
+            <p:cNvPr id="2050" name="Picture 2">
+              <a:extLst>
+                <a:ext uri="{FF2B5EF4-FFF2-40B4-BE49-F238E27FC236}">
+                  <a16:creationId xmlns:a16="http://schemas.microsoft.com/office/drawing/2014/main" id="{228C3C54-CC6D-F0D0-0AA1-9E4F571D1878}"/>
+                </a:ext>
+              </a:extLst>
+            </p:cNvPr>
+            <p:cNvPicPr>
+              <a:picLocks noChangeAspect="1" noChangeArrowheads="1"/>
+            </p:cNvPicPr>
+            <p:nvPr/>
+          </p:nvPicPr>
+          <p:blipFill>
+            <a:blip r:embed="rId2">
+              <a:extLst>
+                <a:ext uri="{28A0092B-C50C-407E-A947-70E740481C1C}">
+                  <a14:useLocalDpi xmlns:a14="http://schemas.microsoft.com/office/drawing/2010/main" val="0"/>
+                </a:ext>
+              </a:extLst>
+            </a:blip>
+            <a:srcRect/>
+            <a:stretch>
+              <a:fillRect/>
+            </a:stretch>
+          </p:blipFill>
+          <p:spPr bwMode="auto">
+            <a:xfrm>
+              <a:off x="3048598" y="1319135"/>
+              <a:ext cx="2208080" cy="2713219"/>
+            </a:xfrm>
+            <a:prstGeom prst="rect">
+              <a:avLst/>
+            </a:prstGeom>
+            <a:noFill/>
+            <a:extLst>
+              <a:ext uri="{909E8E84-426E-40DD-AFC4-6F175D3DCCD1}">
+                <a14:hiddenFill xmlns:a14="http://schemas.microsoft.com/office/drawing/2010/main">
+                  <a:solidFill>
+                    <a:srgbClr val="FFFFFF"/>
+                  </a:solidFill>
+                </a14:hiddenFill>
+              </a:ext>
+            </a:extLst>
+          </p:spPr>
+        </p:pic>
+        <p:pic>
+          <p:nvPicPr>
+            <p:cNvPr id="2" name="Picture 2">
+              <a:extLst>
+                <a:ext uri="{FF2B5EF4-FFF2-40B4-BE49-F238E27FC236}">
+                  <a16:creationId xmlns:a16="http://schemas.microsoft.com/office/drawing/2014/main" id="{CEB100D0-8D99-8C49-4BD9-848E6CCB751A}"/>
+                </a:ext>
+              </a:extLst>
+            </p:cNvPr>
+            <p:cNvPicPr>
+              <a:picLocks noChangeAspect="1" noChangeArrowheads="1"/>
+            </p:cNvPicPr>
+            <p:nvPr/>
+          </p:nvPicPr>
+          <p:blipFill>
+            <a:blip r:embed="rId2">
+              <a:extLst>
+                <a:ext uri="{28A0092B-C50C-407E-A947-70E740481C1C}">
+                  <a14:useLocalDpi xmlns:a14="http://schemas.microsoft.com/office/drawing/2010/main" val="0"/>
+                </a:ext>
+              </a:extLst>
+            </a:blip>
+            <a:srcRect/>
+            <a:stretch>
+              <a:fillRect/>
+            </a:stretch>
+          </p:blipFill>
+          <p:spPr bwMode="auto">
+            <a:xfrm>
+              <a:off x="7545287" y="1319135"/>
+              <a:ext cx="2208080" cy="2713219"/>
+            </a:xfrm>
+            <a:prstGeom prst="rect">
+              <a:avLst/>
+            </a:prstGeom>
+            <a:noFill/>
+            <a:extLst>
+              <a:ext uri="{909E8E84-426E-40DD-AFC4-6F175D3DCCD1}">
+                <a14:hiddenFill xmlns:a14="http://schemas.microsoft.com/office/drawing/2010/main">
+                  <a:solidFill>
+                    <a:srgbClr val="FFFFFF"/>
+                  </a:solidFill>
+                </a14:hiddenFill>
+              </a:ext>
+            </a:extLst>
+          </p:spPr>
+        </p:pic>
+        <p:pic>
+          <p:nvPicPr>
+            <p:cNvPr id="2054" name="Picture 6">
+              <a:extLst>
+                <a:ext uri="{FF2B5EF4-FFF2-40B4-BE49-F238E27FC236}">
+                  <a16:creationId xmlns:a16="http://schemas.microsoft.com/office/drawing/2014/main" id="{E1849215-7B0B-C2AA-4519-DD1B1A946E54}"/>
+                </a:ext>
+              </a:extLst>
+            </p:cNvPr>
+            <p:cNvPicPr>
+              <a:picLocks noChangeAspect="1" noChangeArrowheads="1"/>
+            </p:cNvPicPr>
+            <p:nvPr/>
+          </p:nvPicPr>
+          <p:blipFill>
+            <a:blip r:embed="rId3">
+              <a:extLst>
+                <a:ext uri="{28A0092B-C50C-407E-A947-70E740481C1C}">
+                  <a14:useLocalDpi xmlns:a14="http://schemas.microsoft.com/office/drawing/2010/main" val="0"/>
+                </a:ext>
+              </a:extLst>
+            </a:blip>
+            <a:srcRect/>
+            <a:stretch>
+              <a:fillRect/>
+            </a:stretch>
+          </p:blipFill>
+          <p:spPr bwMode="auto">
+            <a:xfrm>
+              <a:off x="479208" y="5568847"/>
+              <a:ext cx="1003887" cy="1341621"/>
+            </a:xfrm>
+            <a:prstGeom prst="rect">
+              <a:avLst/>
+            </a:prstGeom>
+            <a:noFill/>
+            <a:extLst>
+              <a:ext uri="{909E8E84-426E-40DD-AFC4-6F175D3DCCD1}">
+                <a14:hiddenFill xmlns:a14="http://schemas.microsoft.com/office/drawing/2010/main">
+                  <a:solidFill>
+                    <a:srgbClr val="FFFFFF"/>
+                  </a:solidFill>
+                </a14:hiddenFill>
+              </a:ext>
+            </a:extLst>
+          </p:spPr>
+        </p:pic>
+        <p:pic>
+          <p:nvPicPr>
+            <p:cNvPr id="3" name="Picture 6">
+              <a:extLst>
+                <a:ext uri="{FF2B5EF4-FFF2-40B4-BE49-F238E27FC236}">
+                  <a16:creationId xmlns:a16="http://schemas.microsoft.com/office/drawing/2014/main" id="{52AFC797-3A97-063C-E9A8-080C3351174B}"/>
+                </a:ext>
+              </a:extLst>
+            </p:cNvPr>
+            <p:cNvPicPr>
+              <a:picLocks noChangeAspect="1" noChangeArrowheads="1"/>
+            </p:cNvPicPr>
+            <p:nvPr/>
+          </p:nvPicPr>
+          <p:blipFill>
+            <a:blip r:embed="rId3">
+              <a:extLst>
+                <a:ext uri="{28A0092B-C50C-407E-A947-70E740481C1C}">
+                  <a14:useLocalDpi xmlns:a14="http://schemas.microsoft.com/office/drawing/2010/main" val="0"/>
+                </a:ext>
+              </a:extLst>
+            </a:blip>
+            <a:srcRect/>
+            <a:stretch>
+              <a:fillRect/>
+            </a:stretch>
+          </p:blipFill>
+          <p:spPr bwMode="auto">
+            <a:xfrm>
+              <a:off x="1718302" y="5568847"/>
+              <a:ext cx="1003887" cy="1341621"/>
+            </a:xfrm>
+            <a:prstGeom prst="rect">
+              <a:avLst/>
+            </a:prstGeom>
+            <a:noFill/>
+            <a:extLst>
+              <a:ext uri="{909E8E84-426E-40DD-AFC4-6F175D3DCCD1}">
+                <a14:hiddenFill xmlns:a14="http://schemas.microsoft.com/office/drawing/2010/main">
+                  <a:solidFill>
+                    <a:srgbClr val="FFFFFF"/>
+                  </a:solidFill>
+                </a14:hiddenFill>
+              </a:ext>
+            </a:extLst>
+          </p:spPr>
+        </p:pic>
+        <p:pic>
+          <p:nvPicPr>
+            <p:cNvPr id="4" name="Picture 6">
+              <a:extLst>
+                <a:ext uri="{FF2B5EF4-FFF2-40B4-BE49-F238E27FC236}">
+                  <a16:creationId xmlns:a16="http://schemas.microsoft.com/office/drawing/2014/main" id="{B61D0E87-851F-5D4D-E9AE-95AA97D3DAFC}"/>
+                </a:ext>
+              </a:extLst>
+            </p:cNvPr>
+            <p:cNvPicPr>
+              <a:picLocks noChangeAspect="1" noChangeArrowheads="1"/>
+            </p:cNvPicPr>
+            <p:nvPr/>
+          </p:nvPicPr>
+          <p:blipFill>
+            <a:blip r:embed="rId3">
+              <a:extLst>
+                <a:ext uri="{28A0092B-C50C-407E-A947-70E740481C1C}">
+                  <a14:useLocalDpi xmlns:a14="http://schemas.microsoft.com/office/drawing/2010/main" val="0"/>
+                </a:ext>
+              </a:extLst>
+            </a:blip>
+            <a:srcRect/>
+            <a:stretch>
+              <a:fillRect/>
+            </a:stretch>
+          </p:blipFill>
+          <p:spPr bwMode="auto">
+            <a:xfrm>
+              <a:off x="2957396" y="5568847"/>
+              <a:ext cx="1003887" cy="1341621"/>
+            </a:xfrm>
+            <a:prstGeom prst="rect">
+              <a:avLst/>
+            </a:prstGeom>
+            <a:noFill/>
+            <a:extLst>
+              <a:ext uri="{909E8E84-426E-40DD-AFC4-6F175D3DCCD1}">
+                <a14:hiddenFill xmlns:a14="http://schemas.microsoft.com/office/drawing/2010/main">
+                  <a:solidFill>
+                    <a:srgbClr val="FFFFFF"/>
+                  </a:solidFill>
+                </a14:hiddenFill>
+              </a:ext>
+            </a:extLst>
+          </p:spPr>
+        </p:pic>
+        <p:pic>
+          <p:nvPicPr>
+            <p:cNvPr id="5" name="Picture 6">
+              <a:extLst>
+                <a:ext uri="{FF2B5EF4-FFF2-40B4-BE49-F238E27FC236}">
+                  <a16:creationId xmlns:a16="http://schemas.microsoft.com/office/drawing/2014/main" id="{27C16DED-A29D-3BDC-C8DC-5048C36F84D0}"/>
+                </a:ext>
+              </a:extLst>
+            </p:cNvPr>
+            <p:cNvPicPr>
+              <a:picLocks noChangeAspect="1" noChangeArrowheads="1"/>
+            </p:cNvPicPr>
+            <p:nvPr/>
+          </p:nvPicPr>
+          <p:blipFill>
+            <a:blip r:embed="rId3">
+              <a:extLst>
+                <a:ext uri="{28A0092B-C50C-407E-A947-70E740481C1C}">
+                  <a14:useLocalDpi xmlns:a14="http://schemas.microsoft.com/office/drawing/2010/main" val="0"/>
+                </a:ext>
+              </a:extLst>
+            </a:blip>
+            <a:srcRect/>
+            <a:stretch>
+              <a:fillRect/>
+            </a:stretch>
+          </p:blipFill>
+          <p:spPr bwMode="auto">
+            <a:xfrm>
+              <a:off x="5432154" y="5568847"/>
+              <a:ext cx="1003887" cy="1341621"/>
+            </a:xfrm>
+            <a:prstGeom prst="rect">
+              <a:avLst/>
+            </a:prstGeom>
+            <a:noFill/>
+            <a:extLst>
+              <a:ext uri="{909E8E84-426E-40DD-AFC4-6F175D3DCCD1}">
+                <a14:hiddenFill xmlns:a14="http://schemas.microsoft.com/office/drawing/2010/main">
+                  <a:solidFill>
+                    <a:srgbClr val="FFFFFF"/>
+                  </a:solidFill>
+                </a14:hiddenFill>
+              </a:ext>
+            </a:extLst>
+          </p:spPr>
+        </p:pic>
+        <p:pic>
+          <p:nvPicPr>
+            <p:cNvPr id="10" name="Picture 6">
+              <a:extLst>
+                <a:ext uri="{FF2B5EF4-FFF2-40B4-BE49-F238E27FC236}">
+                  <a16:creationId xmlns:a16="http://schemas.microsoft.com/office/drawing/2014/main" id="{3E34EE4E-49F5-9AC0-A42A-00015AB709B5}"/>
+                </a:ext>
+              </a:extLst>
+            </p:cNvPr>
+            <p:cNvPicPr>
+              <a:picLocks noChangeAspect="1" noChangeArrowheads="1"/>
+            </p:cNvPicPr>
+            <p:nvPr/>
+          </p:nvPicPr>
+          <p:blipFill>
+            <a:blip r:embed="rId3">
+              <a:extLst>
+                <a:ext uri="{28A0092B-C50C-407E-A947-70E740481C1C}">
+                  <a14:useLocalDpi xmlns:a14="http://schemas.microsoft.com/office/drawing/2010/main" val="0"/>
+                </a:ext>
+              </a:extLst>
+            </a:blip>
+            <a:srcRect/>
+            <a:stretch>
+              <a:fillRect/>
+            </a:stretch>
+          </p:blipFill>
+          <p:spPr bwMode="auto">
+            <a:xfrm>
+              <a:off x="4194775" y="5568847"/>
+              <a:ext cx="1003887" cy="1341621"/>
+            </a:xfrm>
+            <a:prstGeom prst="rect">
+              <a:avLst/>
+            </a:prstGeom>
+            <a:noFill/>
+            <a:extLst>
+              <a:ext uri="{909E8E84-426E-40DD-AFC4-6F175D3DCCD1}">
+                <a14:hiddenFill xmlns:a14="http://schemas.microsoft.com/office/drawing/2010/main">
+                  <a:solidFill>
+                    <a:srgbClr val="FFFFFF"/>
+                  </a:solidFill>
+                </a14:hiddenFill>
+              </a:ext>
+            </a:extLst>
+          </p:spPr>
+        </p:pic>
+        <p:pic>
+          <p:nvPicPr>
+            <p:cNvPr id="12" name="Picture 6">
+              <a:extLst>
+                <a:ext uri="{FF2B5EF4-FFF2-40B4-BE49-F238E27FC236}">
+                  <a16:creationId xmlns:a16="http://schemas.microsoft.com/office/drawing/2014/main" id="{E5BBBF1B-F3E3-0A33-F2A7-6EA12AF08951}"/>
+                </a:ext>
+              </a:extLst>
+            </p:cNvPr>
+            <p:cNvPicPr>
+              <a:picLocks noChangeAspect="1" noChangeArrowheads="1"/>
+            </p:cNvPicPr>
+            <p:nvPr/>
+          </p:nvPicPr>
+          <p:blipFill>
+            <a:blip r:embed="rId3">
+              <a:extLst>
+                <a:ext uri="{28A0092B-C50C-407E-A947-70E740481C1C}">
+                  <a14:useLocalDpi xmlns:a14="http://schemas.microsoft.com/office/drawing/2010/main" val="0"/>
+                </a:ext>
+              </a:extLst>
+            </a:blip>
+            <a:srcRect/>
+            <a:stretch>
+              <a:fillRect/>
+            </a:stretch>
+          </p:blipFill>
+          <p:spPr bwMode="auto">
+            <a:xfrm>
+              <a:off x="6669533" y="5568847"/>
+              <a:ext cx="1003887" cy="1341621"/>
+            </a:xfrm>
+            <a:prstGeom prst="rect">
+              <a:avLst/>
+            </a:prstGeom>
+            <a:noFill/>
+            <a:extLst>
+              <a:ext uri="{909E8E84-426E-40DD-AFC4-6F175D3DCCD1}">
+                <a14:hiddenFill xmlns:a14="http://schemas.microsoft.com/office/drawing/2010/main">
+                  <a:solidFill>
+                    <a:srgbClr val="FFFFFF"/>
+                  </a:solidFill>
+                </a14:hiddenFill>
+              </a:ext>
+            </a:extLst>
+          </p:spPr>
+        </p:pic>
+        <p:pic>
+          <p:nvPicPr>
+            <p:cNvPr id="13" name="Picture 6">
+              <a:extLst>
+                <a:ext uri="{FF2B5EF4-FFF2-40B4-BE49-F238E27FC236}">
+                  <a16:creationId xmlns:a16="http://schemas.microsoft.com/office/drawing/2014/main" id="{267914E7-9638-A9DB-1D9E-8BC286EEBC6C}"/>
+                </a:ext>
+              </a:extLst>
+            </p:cNvPr>
+            <p:cNvPicPr>
+              <a:picLocks noChangeAspect="1" noChangeArrowheads="1"/>
+            </p:cNvPicPr>
+            <p:nvPr/>
+          </p:nvPicPr>
+          <p:blipFill>
+            <a:blip r:embed="rId3">
+              <a:extLst>
+                <a:ext uri="{28A0092B-C50C-407E-A947-70E740481C1C}">
+                  <a14:useLocalDpi xmlns:a14="http://schemas.microsoft.com/office/drawing/2010/main" val="0"/>
+                </a:ext>
+              </a:extLst>
+            </a:blip>
+            <a:srcRect/>
+            <a:stretch>
+              <a:fillRect/>
+            </a:stretch>
+          </p:blipFill>
+          <p:spPr bwMode="auto">
+            <a:xfrm>
+              <a:off x="7908627" y="5568847"/>
+              <a:ext cx="1003887" cy="1341621"/>
+            </a:xfrm>
+            <a:prstGeom prst="rect">
+              <a:avLst/>
+            </a:prstGeom>
+            <a:noFill/>
+            <a:extLst>
+              <a:ext uri="{909E8E84-426E-40DD-AFC4-6F175D3DCCD1}">
+                <a14:hiddenFill xmlns:a14="http://schemas.microsoft.com/office/drawing/2010/main">
+                  <a:solidFill>
+                    <a:srgbClr val="FFFFFF"/>
+                  </a:solidFill>
+                </a14:hiddenFill>
+              </a:ext>
+            </a:extLst>
+          </p:spPr>
+        </p:pic>
+        <p:pic>
+          <p:nvPicPr>
+            <p:cNvPr id="14" name="Picture 6">
+              <a:extLst>
+                <a:ext uri="{FF2B5EF4-FFF2-40B4-BE49-F238E27FC236}">
+                  <a16:creationId xmlns:a16="http://schemas.microsoft.com/office/drawing/2014/main" id="{8D879106-8945-17D0-ABC5-E0F642478CFF}"/>
+                </a:ext>
+              </a:extLst>
+            </p:cNvPr>
+            <p:cNvPicPr>
+              <a:picLocks noChangeAspect="1" noChangeArrowheads="1"/>
+            </p:cNvPicPr>
+            <p:nvPr/>
+          </p:nvPicPr>
+          <p:blipFill>
+            <a:blip r:embed="rId3">
+              <a:extLst>
+                <a:ext uri="{28A0092B-C50C-407E-A947-70E740481C1C}">
+                  <a14:useLocalDpi xmlns:a14="http://schemas.microsoft.com/office/drawing/2010/main" val="0"/>
+                </a:ext>
+              </a:extLst>
+            </a:blip>
+            <a:srcRect/>
+            <a:stretch>
+              <a:fillRect/>
+            </a:stretch>
+          </p:blipFill>
+          <p:spPr bwMode="auto">
+            <a:xfrm>
+              <a:off x="9147721" y="5568847"/>
+              <a:ext cx="1003887" cy="1341621"/>
+            </a:xfrm>
+            <a:prstGeom prst="rect">
+              <a:avLst/>
+            </a:prstGeom>
+            <a:noFill/>
+            <a:extLst>
+              <a:ext uri="{909E8E84-426E-40DD-AFC4-6F175D3DCCD1}">
+                <a14:hiddenFill xmlns:a14="http://schemas.microsoft.com/office/drawing/2010/main">
+                  <a:solidFill>
+                    <a:srgbClr val="FFFFFF"/>
+                  </a:solidFill>
+                </a14:hiddenFill>
+              </a:ext>
+            </a:extLst>
+          </p:spPr>
+        </p:pic>
+        <p:pic>
+          <p:nvPicPr>
+            <p:cNvPr id="15" name="Picture 6">
+              <a:extLst>
+                <a:ext uri="{FF2B5EF4-FFF2-40B4-BE49-F238E27FC236}">
+                  <a16:creationId xmlns:a16="http://schemas.microsoft.com/office/drawing/2014/main" id="{35808691-AA5C-0620-2867-5EDFFC0C1431}"/>
+                </a:ext>
+              </a:extLst>
+            </p:cNvPr>
+            <p:cNvPicPr>
+              <a:picLocks noChangeAspect="1" noChangeArrowheads="1"/>
+            </p:cNvPicPr>
+            <p:nvPr/>
+          </p:nvPicPr>
+          <p:blipFill>
+            <a:blip r:embed="rId3">
+              <a:extLst>
+                <a:ext uri="{28A0092B-C50C-407E-A947-70E740481C1C}">
+                  <a14:useLocalDpi xmlns:a14="http://schemas.microsoft.com/office/drawing/2010/main" val="0"/>
+                </a:ext>
+              </a:extLst>
+            </a:blip>
+            <a:srcRect/>
+            <a:stretch>
+              <a:fillRect/>
+            </a:stretch>
+          </p:blipFill>
+          <p:spPr bwMode="auto">
+            <a:xfrm>
+              <a:off x="11622479" y="5568847"/>
+              <a:ext cx="1003887" cy="1341621"/>
+            </a:xfrm>
+            <a:prstGeom prst="rect">
+              <a:avLst/>
+            </a:prstGeom>
+            <a:noFill/>
+            <a:extLst>
+              <a:ext uri="{909E8E84-426E-40DD-AFC4-6F175D3DCCD1}">
+                <a14:hiddenFill xmlns:a14="http://schemas.microsoft.com/office/drawing/2010/main">
+                  <a:solidFill>
+                    <a:srgbClr val="FFFFFF"/>
+                  </a:solidFill>
+                </a14:hiddenFill>
+              </a:ext>
+            </a:extLst>
+          </p:spPr>
+        </p:pic>
+        <p:pic>
+          <p:nvPicPr>
+            <p:cNvPr id="16" name="Picture 6">
+              <a:extLst>
+                <a:ext uri="{FF2B5EF4-FFF2-40B4-BE49-F238E27FC236}">
+                  <a16:creationId xmlns:a16="http://schemas.microsoft.com/office/drawing/2014/main" id="{508E804F-D151-03D0-6A9B-2DAEB08B6278}"/>
+                </a:ext>
+              </a:extLst>
+            </p:cNvPr>
+            <p:cNvPicPr>
+              <a:picLocks noChangeAspect="1" noChangeArrowheads="1"/>
+            </p:cNvPicPr>
+            <p:nvPr/>
+          </p:nvPicPr>
+          <p:blipFill>
+            <a:blip r:embed="rId3">
+              <a:extLst>
+                <a:ext uri="{28A0092B-C50C-407E-A947-70E740481C1C}">
+                  <a14:useLocalDpi xmlns:a14="http://schemas.microsoft.com/office/drawing/2010/main" val="0"/>
+                </a:ext>
+              </a:extLst>
+            </a:blip>
+            <a:srcRect/>
+            <a:stretch>
+              <a:fillRect/>
+            </a:stretch>
+          </p:blipFill>
+          <p:spPr bwMode="auto">
+            <a:xfrm>
+              <a:off x="10385100" y="5568847"/>
+              <a:ext cx="1003887" cy="1341621"/>
+            </a:xfrm>
+            <a:prstGeom prst="rect">
+              <a:avLst/>
+            </a:prstGeom>
+            <a:noFill/>
+            <a:extLst>
+              <a:ext uri="{909E8E84-426E-40DD-AFC4-6F175D3DCCD1}">
+                <a14:hiddenFill xmlns:a14="http://schemas.microsoft.com/office/drawing/2010/main">
+                  <a:solidFill>
+                    <a:srgbClr val="FFFFFF"/>
+                  </a:solidFill>
+                </a14:hiddenFill>
+              </a:ext>
+            </a:extLst>
+          </p:spPr>
+        </p:pic>
+        <p:sp>
+          <p:nvSpPr>
+            <p:cNvPr id="17" name="テキスト ボックス 16">
+              <a:extLst>
+                <a:ext uri="{FF2B5EF4-FFF2-40B4-BE49-F238E27FC236}">
+                  <a16:creationId xmlns:a16="http://schemas.microsoft.com/office/drawing/2014/main" id="{7CACA07B-45E4-AE05-30CD-5CD80E9EB62C}"/>
+                </a:ext>
+              </a:extLst>
+            </p:cNvPr>
+            <p:cNvSpPr txBox="1"/>
+            <p:nvPr/>
+          </p:nvSpPr>
+          <p:spPr>
+            <a:xfrm>
+              <a:off x="2488367" y="4293963"/>
+              <a:ext cx="683527" cy="646331"/>
+            </a:xfrm>
+            <a:prstGeom prst="rect">
+              <a:avLst/>
+            </a:prstGeom>
+            <a:noFill/>
+          </p:spPr>
+          <p:txBody>
+            <a:bodyPr wrap="square" rtlCol="0">
+              <a:spAutoFit/>
+            </a:bodyPr>
+            <a:lstStyle/>
+            <a:p>
+              <a:pPr algn="ctr"/>
+              <a:r>
+                <a:rPr kumimoji="1" lang="en-US" altLang="ja-JP" sz="3600" dirty="0">
+                  <a:latin typeface="Hiragino Kaku Gothic StdN W8" panose="020B0800000000000000" pitchFamily="34" charset="-128"/>
+                  <a:ea typeface="Hiragino Kaku Gothic StdN W8" panose="020B0800000000000000" pitchFamily="34" charset="-128"/>
+                </a:rPr>
+                <a:t>A</a:t>
+              </a:r>
+              <a:endParaRPr kumimoji="1" lang="ja-JP" altLang="en-US">
+                <a:latin typeface="Hiragino Kaku Gothic StdN W8" panose="020B0800000000000000" pitchFamily="34" charset="-128"/>
+                <a:ea typeface="Hiragino Kaku Gothic StdN W8" panose="020B0800000000000000" pitchFamily="34" charset="-128"/>
+              </a:endParaRPr>
+            </a:p>
+          </p:txBody>
+        </p:sp>
+        <p:sp>
+          <p:nvSpPr>
+            <p:cNvPr id="20" name="テキスト ボックス 19">
+              <a:extLst>
+                <a:ext uri="{FF2B5EF4-FFF2-40B4-BE49-F238E27FC236}">
+                  <a16:creationId xmlns:a16="http://schemas.microsoft.com/office/drawing/2014/main" id="{152C9801-B997-CABD-EE3B-647217C29EFD}"/>
+                </a:ext>
+              </a:extLst>
+            </p:cNvPr>
+            <p:cNvSpPr txBox="1"/>
+            <p:nvPr/>
+          </p:nvSpPr>
+          <p:spPr>
+            <a:xfrm>
+              <a:off x="6327769" y="4293962"/>
+              <a:ext cx="683527" cy="646331"/>
+            </a:xfrm>
+            <a:prstGeom prst="rect">
+              <a:avLst/>
+            </a:prstGeom>
+            <a:noFill/>
+          </p:spPr>
+          <p:txBody>
+            <a:bodyPr wrap="square" rtlCol="0">
+              <a:spAutoFit/>
+            </a:bodyPr>
+            <a:lstStyle/>
+            <a:p>
+              <a:pPr algn="ctr"/>
+              <a:r>
+                <a:rPr kumimoji="1" lang="en-US" altLang="ja-JP" sz="3600" dirty="0">
+                  <a:latin typeface="Hiragino Kaku Gothic StdN W8" panose="020B0800000000000000" pitchFamily="34" charset="-128"/>
+                  <a:ea typeface="Hiragino Kaku Gothic StdN W8" panose="020B0800000000000000" pitchFamily="34" charset="-128"/>
+                </a:rPr>
+                <a:t>B</a:t>
+              </a:r>
+              <a:endParaRPr kumimoji="1" lang="ja-JP" altLang="en-US">
+                <a:latin typeface="Hiragino Kaku Gothic StdN W8" panose="020B0800000000000000" pitchFamily="34" charset="-128"/>
+                <a:ea typeface="Hiragino Kaku Gothic StdN W8" panose="020B0800000000000000" pitchFamily="34" charset="-128"/>
+              </a:endParaRPr>
+            </a:p>
+          </p:txBody>
+        </p:sp>
+        <p:sp>
+          <p:nvSpPr>
+            <p:cNvPr id="21" name="テキスト ボックス 20">
+              <a:extLst>
+                <a:ext uri="{FF2B5EF4-FFF2-40B4-BE49-F238E27FC236}">
+                  <a16:creationId xmlns:a16="http://schemas.microsoft.com/office/drawing/2014/main" id="{975D02A5-9A74-C674-15CC-BE70535F865D}"/>
+                </a:ext>
+              </a:extLst>
+            </p:cNvPr>
+            <p:cNvSpPr txBox="1"/>
+            <p:nvPr/>
+          </p:nvSpPr>
+          <p:spPr>
+            <a:xfrm>
+              <a:off x="9971469" y="4293962"/>
+              <a:ext cx="683527" cy="646331"/>
+            </a:xfrm>
+            <a:prstGeom prst="rect">
+              <a:avLst/>
+            </a:prstGeom>
+            <a:noFill/>
+          </p:spPr>
+          <p:txBody>
+            <a:bodyPr wrap="square" rtlCol="0">
+              <a:spAutoFit/>
+            </a:bodyPr>
+            <a:lstStyle/>
+            <a:p>
+              <a:pPr algn="ctr"/>
+              <a:r>
+                <a:rPr kumimoji="1" lang="en-US" altLang="ja-JP" sz="3600" dirty="0">
+                  <a:latin typeface="Hiragino Kaku Gothic StdN W8" panose="020B0800000000000000" pitchFamily="34" charset="-128"/>
+                  <a:ea typeface="Hiragino Kaku Gothic StdN W8" panose="020B0800000000000000" pitchFamily="34" charset="-128"/>
+                </a:rPr>
+                <a:t>C</a:t>
+              </a:r>
+              <a:endParaRPr kumimoji="1" lang="ja-JP" altLang="en-US">
+                <a:latin typeface="Hiragino Kaku Gothic StdN W8" panose="020B0800000000000000" pitchFamily="34" charset="-128"/>
+                <a:ea typeface="Hiragino Kaku Gothic StdN W8" panose="020B0800000000000000" pitchFamily="34" charset="-128"/>
+              </a:endParaRPr>
+            </a:p>
+          </p:txBody>
+        </p:sp>
+        <p:cxnSp>
+          <p:nvCxnSpPr>
+            <p:cNvPr id="22" name="直線矢印コネクタ 21">
+              <a:extLst>
+                <a:ext uri="{FF2B5EF4-FFF2-40B4-BE49-F238E27FC236}">
+                  <a16:creationId xmlns:a16="http://schemas.microsoft.com/office/drawing/2014/main" id="{5CC6DCD8-4F15-E9EC-094D-102AEFBC1A6D}"/>
+                </a:ext>
+              </a:extLst>
+            </p:cNvPr>
+            <p:cNvCxnSpPr>
+              <a:cxnSpLocks/>
+            </p:cNvCxnSpPr>
+            <p:nvPr/>
+          </p:nvCxnSpPr>
+          <p:spPr>
+            <a:xfrm>
+              <a:off x="479208" y="5276538"/>
+              <a:ext cx="12147158" cy="0"/>
+            </a:xfrm>
+            <a:prstGeom prst="straightConnector1">
+              <a:avLst/>
+            </a:prstGeom>
+            <a:ln w="57150">
+              <a:solidFill>
+                <a:schemeClr val="tx1"/>
+              </a:solidFill>
+              <a:headEnd type="triangle"/>
+              <a:tailEnd type="triangle"/>
+            </a:ln>
+          </p:spPr>
+          <p:style>
+            <a:lnRef idx="1">
+              <a:schemeClr val="accent1"/>
+            </a:lnRef>
+            <a:fillRef idx="0">
+              <a:schemeClr val="accent1"/>
+            </a:fillRef>
+            <a:effectRef idx="0">
+              <a:schemeClr val="accent1"/>
+            </a:effectRef>
+            <a:fontRef idx="minor">
+              <a:schemeClr val="tx1"/>
+            </a:fontRef>
+          </p:style>
+        </p:cxnSp>
+        <p:sp>
+          <p:nvSpPr>
+            <p:cNvPr id="25" name="テキスト ボックス 24">
+              <a:extLst>
+                <a:ext uri="{FF2B5EF4-FFF2-40B4-BE49-F238E27FC236}">
+                  <a16:creationId xmlns:a16="http://schemas.microsoft.com/office/drawing/2014/main" id="{95B060F9-3091-39B5-BF4F-40FC7E4C49B5}"/>
+                </a:ext>
+              </a:extLst>
+            </p:cNvPr>
+            <p:cNvSpPr txBox="1"/>
+            <p:nvPr/>
+          </p:nvSpPr>
+          <p:spPr>
+            <a:xfrm>
+              <a:off x="3300194" y="734360"/>
+              <a:ext cx="1704888" cy="584775"/>
+            </a:xfrm>
+            <a:prstGeom prst="rect">
+              <a:avLst/>
+            </a:prstGeom>
+            <a:solidFill>
+              <a:schemeClr val="bg1"/>
+            </a:solidFill>
+            <a:ln w="25400">
+              <a:solidFill>
+                <a:schemeClr val="tx1"/>
+              </a:solidFill>
+            </a:ln>
+          </p:spPr>
+          <p:txBody>
+            <a:bodyPr wrap="square">
+              <a:spAutoFit/>
+            </a:bodyPr>
+            <a:lstStyle/>
+            <a:p>
+              <a:pPr algn="ctr"/>
+              <a:r>
+                <a:rPr kumimoji="1" lang="ja-JP" altLang="en-US" sz="3200">
+                  <a:latin typeface="Hiragino Kaku Gothic StdN W8" panose="020B0800000000000000" pitchFamily="34" charset="-128"/>
+                  <a:ea typeface="Hiragino Kaku Gothic StdN W8" panose="020B0800000000000000" pitchFamily="34" charset="-128"/>
+                </a:rPr>
+                <a:t>あなた</a:t>
+              </a:r>
+              <a:endParaRPr lang="ja-JP" altLang="en-US" sz="3200"/>
+            </a:p>
+          </p:txBody>
+        </p:sp>
+        <p:sp>
+          <p:nvSpPr>
+            <p:cNvPr id="26" name="テキスト ボックス 25">
+              <a:extLst>
+                <a:ext uri="{FF2B5EF4-FFF2-40B4-BE49-F238E27FC236}">
+                  <a16:creationId xmlns:a16="http://schemas.microsoft.com/office/drawing/2014/main" id="{19FD7C65-09B7-03F7-9808-B6D5E11B0A9F}"/>
+                </a:ext>
+              </a:extLst>
+            </p:cNvPr>
+            <p:cNvSpPr txBox="1"/>
+            <p:nvPr/>
+          </p:nvSpPr>
+          <p:spPr>
+            <a:xfrm>
+              <a:off x="8147745" y="657973"/>
+              <a:ext cx="1316424" cy="584775"/>
+            </a:xfrm>
+            <a:prstGeom prst="rect">
+              <a:avLst/>
+            </a:prstGeom>
+            <a:solidFill>
+              <a:schemeClr val="bg1"/>
+            </a:solidFill>
+            <a:ln w="25400">
+              <a:solidFill>
+                <a:schemeClr val="tx1"/>
+              </a:solidFill>
+            </a:ln>
+          </p:spPr>
+          <p:txBody>
+            <a:bodyPr wrap="square">
+              <a:spAutoFit/>
+            </a:bodyPr>
+            <a:lstStyle/>
+            <a:p>
+              <a:pPr algn="ctr"/>
+              <a:r>
+                <a:rPr kumimoji="1" lang="ja-JP" altLang="en-US" sz="3200">
+                  <a:latin typeface="Hiragino Kaku Gothic StdN W8" panose="020B0800000000000000" pitchFamily="34" charset="-128"/>
+                  <a:ea typeface="Hiragino Kaku Gothic StdN W8" panose="020B0800000000000000" pitchFamily="34" charset="-128"/>
+                </a:rPr>
+                <a:t>競合</a:t>
+              </a:r>
+              <a:endParaRPr lang="ja-JP" altLang="en-US" sz="3200"/>
+            </a:p>
+          </p:txBody>
+        </p:sp>
+        <p:cxnSp>
+          <p:nvCxnSpPr>
+            <p:cNvPr id="27" name="直線矢印コネクタ 26">
+              <a:extLst>
+                <a:ext uri="{FF2B5EF4-FFF2-40B4-BE49-F238E27FC236}">
+                  <a16:creationId xmlns:a16="http://schemas.microsoft.com/office/drawing/2014/main" id="{0AF6482E-F215-3675-989B-8BC3DF940C3B}"/>
+                </a:ext>
+              </a:extLst>
+            </p:cNvPr>
+            <p:cNvCxnSpPr>
+              <a:cxnSpLocks/>
+              <a:stCxn id="17" idx="2"/>
+            </p:cNvCxnSpPr>
+            <p:nvPr/>
+          </p:nvCxnSpPr>
+          <p:spPr>
+            <a:xfrm>
+              <a:off x="2830131" y="4940294"/>
+              <a:ext cx="0" cy="336244"/>
+            </a:xfrm>
+            <a:prstGeom prst="straightConnector1">
+              <a:avLst/>
+            </a:prstGeom>
+            <a:ln w="38100">
+              <a:solidFill>
+                <a:schemeClr val="tx1"/>
+              </a:solidFill>
+              <a:tailEnd type="triangle"/>
+            </a:ln>
+          </p:spPr>
+          <p:style>
+            <a:lnRef idx="1">
+              <a:schemeClr val="accent1"/>
+            </a:lnRef>
+            <a:fillRef idx="0">
+              <a:schemeClr val="accent1"/>
+            </a:fillRef>
+            <a:effectRef idx="0">
+              <a:schemeClr val="accent1"/>
+            </a:effectRef>
+            <a:fontRef idx="minor">
+              <a:schemeClr val="tx1"/>
+            </a:fontRef>
+          </p:style>
+        </p:cxnSp>
+        <p:cxnSp>
+          <p:nvCxnSpPr>
+            <p:cNvPr id="30" name="直線矢印コネクタ 29">
+              <a:extLst>
+                <a:ext uri="{FF2B5EF4-FFF2-40B4-BE49-F238E27FC236}">
+                  <a16:creationId xmlns:a16="http://schemas.microsoft.com/office/drawing/2014/main" id="{90942DFC-2376-6EF0-465A-70019976832F}"/>
+                </a:ext>
+              </a:extLst>
+            </p:cNvPr>
+            <p:cNvCxnSpPr>
+              <a:cxnSpLocks/>
+              <a:stCxn id="20" idx="2"/>
+            </p:cNvCxnSpPr>
+            <p:nvPr/>
+          </p:nvCxnSpPr>
+          <p:spPr>
+            <a:xfrm>
+              <a:off x="6669533" y="4940293"/>
+              <a:ext cx="0" cy="336245"/>
+            </a:xfrm>
+            <a:prstGeom prst="straightConnector1">
+              <a:avLst/>
+            </a:prstGeom>
+            <a:ln w="38100">
+              <a:solidFill>
+                <a:schemeClr val="tx1"/>
+              </a:solidFill>
+              <a:tailEnd type="triangle"/>
+            </a:ln>
+          </p:spPr>
+          <p:style>
+            <a:lnRef idx="1">
+              <a:schemeClr val="accent1"/>
+            </a:lnRef>
+            <a:fillRef idx="0">
+              <a:schemeClr val="accent1"/>
+            </a:fillRef>
+            <a:effectRef idx="0">
+              <a:schemeClr val="accent1"/>
+            </a:effectRef>
+            <a:fontRef idx="minor">
+              <a:schemeClr val="tx1"/>
+            </a:fontRef>
+          </p:style>
+        </p:cxnSp>
+        <p:cxnSp>
+          <p:nvCxnSpPr>
+            <p:cNvPr id="33" name="直線矢印コネクタ 32">
+              <a:extLst>
+                <a:ext uri="{FF2B5EF4-FFF2-40B4-BE49-F238E27FC236}">
+                  <a16:creationId xmlns:a16="http://schemas.microsoft.com/office/drawing/2014/main" id="{DBE3840E-DD40-2FA0-6CA1-A04A6D0A4A11}"/>
+                </a:ext>
+              </a:extLst>
+            </p:cNvPr>
+            <p:cNvCxnSpPr>
+              <a:cxnSpLocks/>
+              <a:stCxn id="21" idx="2"/>
+            </p:cNvCxnSpPr>
+            <p:nvPr/>
+          </p:nvCxnSpPr>
+          <p:spPr>
+            <a:xfrm>
+              <a:off x="10313233" y="4940293"/>
+              <a:ext cx="0" cy="336245"/>
+            </a:xfrm>
+            <a:prstGeom prst="straightConnector1">
+              <a:avLst/>
+            </a:prstGeom>
+            <a:ln w="38100">
+              <a:solidFill>
+                <a:schemeClr val="tx1"/>
+              </a:solidFill>
+              <a:tailEnd type="triangle"/>
+            </a:ln>
+          </p:spPr>
+          <p:style>
+            <a:lnRef idx="1">
+              <a:schemeClr val="accent1"/>
+            </a:lnRef>
+            <a:fillRef idx="0">
+              <a:schemeClr val="accent1"/>
+            </a:fillRef>
+            <a:effectRef idx="0">
+              <a:schemeClr val="accent1"/>
+            </a:effectRef>
+            <a:fontRef idx="minor">
+              <a:schemeClr val="tx1"/>
+            </a:fontRef>
+          </p:style>
+        </p:cxnSp>
+        <p:sp>
+          <p:nvSpPr>
+            <p:cNvPr id="40" name="テキスト ボックス 39">
+              <a:extLst>
+                <a:ext uri="{FF2B5EF4-FFF2-40B4-BE49-F238E27FC236}">
+                  <a16:creationId xmlns:a16="http://schemas.microsoft.com/office/drawing/2014/main" id="{04A42AFC-7720-6BF2-E759-8EBC99C55DD7}"/>
+                </a:ext>
+              </a:extLst>
+            </p:cNvPr>
+            <p:cNvSpPr txBox="1"/>
+            <p:nvPr/>
+          </p:nvSpPr>
+          <p:spPr>
+            <a:xfrm>
+              <a:off x="3563175" y="7202776"/>
+              <a:ext cx="6408294" cy="646331"/>
+            </a:xfrm>
+            <a:prstGeom prst="rect">
+              <a:avLst/>
+            </a:prstGeom>
+            <a:noFill/>
+          </p:spPr>
+          <p:txBody>
+            <a:bodyPr wrap="square">
+              <a:spAutoFit/>
+            </a:bodyPr>
+            <a:lstStyle/>
+            <a:p>
+              <a:pPr algn="ctr"/>
+              <a:r>
+                <a:rPr kumimoji="1" lang="en-US" altLang="ja-JP" sz="3600" dirty="0">
+                  <a:latin typeface="Hiragino Kaku Gothic StdN W8" panose="020B0800000000000000" pitchFamily="34" charset="-128"/>
+                  <a:ea typeface="Hiragino Kaku Gothic StdN W8" panose="020B0800000000000000" pitchFamily="34" charset="-128"/>
+                </a:rPr>
+                <a:t>A</a:t>
+              </a:r>
+              <a:r>
+                <a:rPr kumimoji="1" lang="ja-JP" altLang="en-US" sz="3600">
+                  <a:latin typeface="Hiragino Kaku Gothic StdN W8" panose="020B0800000000000000" pitchFamily="34" charset="-128"/>
+                  <a:ea typeface="Hiragino Kaku Gothic StdN W8" panose="020B0800000000000000" pitchFamily="34" charset="-128"/>
+                </a:rPr>
+                <a:t>・</a:t>
+              </a:r>
+              <a:r>
+                <a:rPr kumimoji="1" lang="en-US" altLang="ja-JP" sz="3600" dirty="0">
+                  <a:latin typeface="Hiragino Kaku Gothic StdN W8" panose="020B0800000000000000" pitchFamily="34" charset="-128"/>
+                  <a:ea typeface="Hiragino Kaku Gothic StdN W8" panose="020B0800000000000000" pitchFamily="34" charset="-128"/>
+                </a:rPr>
+                <a:t>B</a:t>
+              </a:r>
+              <a:r>
+                <a:rPr kumimoji="1" lang="ja-JP" altLang="en-US" sz="3600">
+                  <a:latin typeface="Hiragino Kaku Gothic StdN W8" panose="020B0800000000000000" pitchFamily="34" charset="-128"/>
+                  <a:ea typeface="Hiragino Kaku Gothic StdN W8" panose="020B0800000000000000" pitchFamily="34" charset="-128"/>
+                </a:rPr>
+                <a:t>・</a:t>
+              </a:r>
+              <a:r>
+                <a:rPr kumimoji="1" lang="en-US" altLang="ja-JP" sz="3600" dirty="0">
+                  <a:latin typeface="Hiragino Kaku Gothic StdN W8" panose="020B0800000000000000" pitchFamily="34" charset="-128"/>
+                  <a:ea typeface="Hiragino Kaku Gothic StdN W8" panose="020B0800000000000000" pitchFamily="34" charset="-128"/>
+                </a:rPr>
+                <a:t>C</a:t>
+              </a:r>
+              <a:r>
+                <a:rPr kumimoji="1" lang="ja-JP" altLang="en-US" sz="3600">
+                  <a:latin typeface="Hiragino Kaku Gothic StdN W8" panose="020B0800000000000000" pitchFamily="34" charset="-128"/>
+                  <a:ea typeface="Hiragino Kaku Gothic StdN W8" panose="020B0800000000000000" pitchFamily="34" charset="-128"/>
+                </a:rPr>
+                <a:t>どこに陣取る？</a:t>
+              </a:r>
+              <a:endParaRPr lang="ja-JP" altLang="en-US" sz="3600"/>
+            </a:p>
+          </p:txBody>
+        </p:sp>
+      </p:grpSp>
+    </p:spTree>
+    <p:extLst>
+      <p:ext uri="{BB962C8B-B14F-4D97-AF65-F5344CB8AC3E}">
+        <p14:creationId xmlns:p14="http://schemas.microsoft.com/office/powerpoint/2010/main" val="1702893411"/>
+      </p:ext>
+    </p:extLst>
+  </p:cSld>
+  <p:clrMapOvr>
+    <a:masterClrMapping/>
+  </p:clrMapOvr>
+</p:sld>
+</file>
+
+<file path=ppt/slides/slide13.xml><?xml version="1.0" encoding="utf-8"?>
+<p:sld xmlns:a="http://schemas.openxmlformats.org/drawingml/2006/main" xmlns:r="http://schemas.openxmlformats.org/officeDocument/2006/relationships" xmlns:p="http://schemas.openxmlformats.org/presentationml/2006/main">
+  <p:cSld>
+    <p:spTree>
+      <p:nvGrpSpPr>
+        <p:cNvPr id="1" name=""/>
+        <p:cNvGrpSpPr/>
+        <p:nvPr/>
+      </p:nvGrpSpPr>
+      <p:grpSpPr>
+        <a:xfrm>
+          <a:off x="0" y="0"/>
+          <a:ext cx="0" cy="0"/>
+          <a:chOff x="0" y="0"/>
+          <a:chExt cx="0" cy="0"/>
+        </a:xfrm>
+      </p:grpSpPr>
+      <p:grpSp>
+        <p:nvGrpSpPr>
+          <p:cNvPr id="20" name="グループ化 19">
+            <a:extLst>
+              <a:ext uri="{FF2B5EF4-FFF2-40B4-BE49-F238E27FC236}">
+                <a16:creationId xmlns:a16="http://schemas.microsoft.com/office/drawing/2014/main" id="{4922311C-3DFD-369F-8747-6CD998C506BE}"/>
+              </a:ext>
+            </a:extLst>
+          </p:cNvPr>
+          <p:cNvGrpSpPr/>
+          <p:nvPr/>
+        </p:nvGrpSpPr>
+        <p:grpSpPr>
+          <a:xfrm>
+            <a:off x="434237" y="1921795"/>
+            <a:ext cx="12147158" cy="6233459"/>
+            <a:chOff x="434237" y="1921795"/>
+            <a:chExt cx="12147158" cy="6233459"/>
+          </a:xfrm>
+        </p:grpSpPr>
+        <p:grpSp>
+          <p:nvGrpSpPr>
+            <p:cNvPr id="13" name="グループ化 12">
+              <a:extLst>
+                <a:ext uri="{FF2B5EF4-FFF2-40B4-BE49-F238E27FC236}">
+                  <a16:creationId xmlns:a16="http://schemas.microsoft.com/office/drawing/2014/main" id="{0134C64E-BFC1-D312-7CA3-FDC422F36642}"/>
+                </a:ext>
+              </a:extLst>
+            </p:cNvPr>
+            <p:cNvGrpSpPr/>
+            <p:nvPr/>
+          </p:nvGrpSpPr>
+          <p:grpSpPr>
+            <a:xfrm>
+              <a:off x="434237" y="1921795"/>
+              <a:ext cx="12147158" cy="5423386"/>
+              <a:chOff x="434237" y="1921795"/>
+              <a:chExt cx="12147158" cy="5423386"/>
+            </a:xfrm>
+          </p:grpSpPr>
+          <p:cxnSp>
+            <p:nvCxnSpPr>
+              <p:cNvPr id="2" name="直線矢印コネクタ 1">
+                <a:extLst>
+                  <a:ext uri="{FF2B5EF4-FFF2-40B4-BE49-F238E27FC236}">
+                    <a16:creationId xmlns:a16="http://schemas.microsoft.com/office/drawing/2014/main" id="{51800617-EADE-910C-1096-F2FEAFD62A41}"/>
+                  </a:ext>
+                </a:extLst>
+              </p:cNvPr>
+              <p:cNvCxnSpPr>
+                <a:cxnSpLocks/>
+              </p:cNvCxnSpPr>
+              <p:nvPr/>
+            </p:nvCxnSpPr>
+            <p:spPr>
+              <a:xfrm>
+                <a:off x="434237" y="7345180"/>
+                <a:ext cx="12147158" cy="0"/>
+              </a:xfrm>
+              <a:prstGeom prst="straightConnector1">
+                <a:avLst/>
+              </a:prstGeom>
+              <a:ln w="57150">
+                <a:solidFill>
+                  <a:schemeClr val="tx1"/>
+                </a:solidFill>
+                <a:headEnd type="triangle"/>
+                <a:tailEnd type="triangle"/>
+              </a:ln>
+            </p:spPr>
+            <p:style>
+              <a:lnRef idx="1">
+                <a:schemeClr val="accent1"/>
+              </a:lnRef>
+              <a:fillRef idx="0">
+                <a:schemeClr val="accent1"/>
+              </a:fillRef>
+              <a:effectRef idx="0">
+                <a:schemeClr val="accent1"/>
+              </a:effectRef>
+              <a:fontRef idx="minor">
+                <a:schemeClr val="tx1"/>
+              </a:fontRef>
+            </p:style>
+          </p:cxnSp>
+          <p:sp>
+            <p:nvSpPr>
+              <p:cNvPr id="8" name="フリーフォーム 7">
+                <a:extLst>
+                  <a:ext uri="{FF2B5EF4-FFF2-40B4-BE49-F238E27FC236}">
+                    <a16:creationId xmlns:a16="http://schemas.microsoft.com/office/drawing/2014/main" id="{A72F8354-49A4-9807-F87E-7A9461269ABA}"/>
+                  </a:ext>
+                </a:extLst>
+              </p:cNvPr>
+              <p:cNvSpPr/>
+              <p:nvPr/>
+            </p:nvSpPr>
+            <p:spPr>
+              <a:xfrm>
+                <a:off x="681925" y="1921795"/>
+                <a:ext cx="11437749" cy="5423386"/>
+              </a:xfrm>
+              <a:custGeom>
+                <a:avLst/>
+                <a:gdLst>
+                  <a:gd name="csX0" fmla="*/ 0 w 11437749"/>
+                  <a:gd name="csY0" fmla="*/ 4293030 h 4340395"/>
+                  <a:gd name="csX1" fmla="*/ 2836190 w 11437749"/>
+                  <a:gd name="csY1" fmla="*/ 3626603 h 4340395"/>
+                  <a:gd name="csX2" fmla="*/ 5718875 w 11437749"/>
+                  <a:gd name="csY2" fmla="*/ 0 h 4340395"/>
+                  <a:gd name="csX3" fmla="*/ 8632556 w 11437749"/>
+                  <a:gd name="csY3" fmla="*/ 3626603 h 4340395"/>
+                  <a:gd name="csX4" fmla="*/ 11437749 w 11437749"/>
+                  <a:gd name="csY4" fmla="*/ 4339525 h 4340395"/>
+                </a:gdLst>
+                <a:ahLst/>
+                <a:cxnLst>
+                  <a:cxn ang="0">
+                    <a:pos x="csX0" y="csY0"/>
+                  </a:cxn>
+                  <a:cxn ang="0">
+                    <a:pos x="csX1" y="csY1"/>
+                  </a:cxn>
+                  <a:cxn ang="0">
+                    <a:pos x="csX2" y="csY2"/>
+                  </a:cxn>
+                  <a:cxn ang="0">
+                    <a:pos x="csX3" y="csY3"/>
+                  </a:cxn>
+                  <a:cxn ang="0">
+                    <a:pos x="csX4" y="csY4"/>
+                  </a:cxn>
+                </a:cxnLst>
+                <a:rect l="l" t="t" r="r" b="b"/>
+                <a:pathLst>
+                  <a:path w="11437749" h="4340395">
+                    <a:moveTo>
+                      <a:pt x="0" y="4293030"/>
+                    </a:moveTo>
+                    <a:cubicBezTo>
+                      <a:pt x="941522" y="4317569"/>
+                      <a:pt x="1883044" y="4342108"/>
+                      <a:pt x="2836190" y="3626603"/>
+                    </a:cubicBezTo>
+                    <a:cubicBezTo>
+                      <a:pt x="3789336" y="2911098"/>
+                      <a:pt x="4752814" y="0"/>
+                      <a:pt x="5718875" y="0"/>
+                    </a:cubicBezTo>
+                    <a:cubicBezTo>
+                      <a:pt x="6684936" y="0"/>
+                      <a:pt x="7679410" y="2903349"/>
+                      <a:pt x="8632556" y="3626603"/>
+                    </a:cubicBezTo>
+                    <a:cubicBezTo>
+                      <a:pt x="9585702" y="4349857"/>
+                      <a:pt x="10511725" y="4344691"/>
+                      <a:pt x="11437749" y="4339525"/>
+                    </a:cubicBezTo>
+                  </a:path>
+                </a:pathLst>
+              </a:custGeom>
+              <a:noFill/>
+              <a:ln w="57150"/>
+            </p:spPr>
+            <p:style>
+              <a:lnRef idx="2">
+                <a:schemeClr val="accent1">
+                  <a:shade val="15000"/>
+                </a:schemeClr>
+              </a:lnRef>
+              <a:fillRef idx="1">
+                <a:schemeClr val="accent1"/>
+              </a:fillRef>
+              <a:effectRef idx="0">
+                <a:schemeClr val="accent1"/>
+              </a:effectRef>
+              <a:fontRef idx="minor">
+                <a:schemeClr val="lt1"/>
+              </a:fontRef>
+            </p:style>
+            <p:txBody>
+              <a:bodyPr rtlCol="0" anchor="ctr"/>
+              <a:lstStyle/>
+              <a:p>
+                <a:pPr algn="ctr"/>
+                <a:endParaRPr kumimoji="1" lang="ja-JP" altLang="en-US"/>
+              </a:p>
+            </p:txBody>
+          </p:sp>
+        </p:grpSp>
+        <p:cxnSp>
+          <p:nvCxnSpPr>
+            <p:cNvPr id="10" name="直線コネクタ 9">
+              <a:extLst>
+                <a:ext uri="{FF2B5EF4-FFF2-40B4-BE49-F238E27FC236}">
+                  <a16:creationId xmlns:a16="http://schemas.microsoft.com/office/drawing/2014/main" id="{AA185AAE-CA97-83FA-0F50-D9C4E1D194AF}"/>
+                </a:ext>
+              </a:extLst>
+            </p:cNvPr>
+            <p:cNvCxnSpPr>
+              <a:stCxn id="8" idx="2"/>
+            </p:cNvCxnSpPr>
+            <p:nvPr/>
+          </p:nvCxnSpPr>
+          <p:spPr>
+            <a:xfrm>
+              <a:off x="6400800" y="1921795"/>
+              <a:ext cx="0" cy="5423385"/>
+            </a:xfrm>
+            <a:prstGeom prst="line">
+              <a:avLst/>
+            </a:prstGeom>
+            <a:ln w="12700">
+              <a:solidFill>
+                <a:schemeClr val="tx1"/>
+              </a:solidFill>
+            </a:ln>
+          </p:spPr>
+          <p:style>
+            <a:lnRef idx="1">
+              <a:schemeClr val="accent1"/>
+            </a:lnRef>
+            <a:fillRef idx="0">
+              <a:schemeClr val="accent1"/>
+            </a:fillRef>
+            <a:effectRef idx="0">
+              <a:schemeClr val="accent1"/>
+            </a:effectRef>
+            <a:fontRef idx="minor">
+              <a:schemeClr val="tx1"/>
+            </a:fontRef>
+          </p:style>
+        </p:cxnSp>
+        <p:sp>
+          <p:nvSpPr>
+            <p:cNvPr id="11" name="テキスト ボックス 10">
+              <a:extLst>
+                <a:ext uri="{FF2B5EF4-FFF2-40B4-BE49-F238E27FC236}">
+                  <a16:creationId xmlns:a16="http://schemas.microsoft.com/office/drawing/2014/main" id="{482EC1CE-7F4A-7376-37B1-0C2ABDF60562}"/>
+                </a:ext>
+              </a:extLst>
+            </p:cNvPr>
+            <p:cNvSpPr txBox="1"/>
+            <p:nvPr/>
+          </p:nvSpPr>
+          <p:spPr>
+            <a:xfrm>
+              <a:off x="6059035" y="7508923"/>
+              <a:ext cx="683527" cy="646331"/>
+            </a:xfrm>
+            <a:prstGeom prst="rect">
+              <a:avLst/>
+            </a:prstGeom>
+            <a:noFill/>
+          </p:spPr>
+          <p:txBody>
+            <a:bodyPr wrap="square" rtlCol="0">
+              <a:spAutoFit/>
+            </a:bodyPr>
+            <a:lstStyle/>
+            <a:p>
+              <a:pPr algn="ctr"/>
+              <a:r>
+                <a:rPr kumimoji="1" lang="en-US" altLang="ja-JP" sz="3600" dirty="0">
+                  <a:latin typeface="Hiragino Kaku Gothic StdN W8" panose="020B0800000000000000" pitchFamily="34" charset="-128"/>
+                  <a:ea typeface="Hiragino Kaku Gothic StdN W8" panose="020B0800000000000000" pitchFamily="34" charset="-128"/>
+                </a:rPr>
+                <a:t>M</a:t>
+              </a:r>
+              <a:endParaRPr kumimoji="1" lang="ja-JP" altLang="en-US">
+                <a:latin typeface="Hiragino Kaku Gothic StdN W8" panose="020B0800000000000000" pitchFamily="34" charset="-128"/>
+                <a:ea typeface="Hiragino Kaku Gothic StdN W8" panose="020B0800000000000000" pitchFamily="34" charset="-128"/>
+              </a:endParaRPr>
+            </a:p>
+          </p:txBody>
+        </p:sp>
+        <p:cxnSp>
+          <p:nvCxnSpPr>
+            <p:cNvPr id="14" name="直線コネクタ 13">
+              <a:extLst>
+                <a:ext uri="{FF2B5EF4-FFF2-40B4-BE49-F238E27FC236}">
+                  <a16:creationId xmlns:a16="http://schemas.microsoft.com/office/drawing/2014/main" id="{2CCB070C-C6F0-FFD9-761D-D46D1888CB5F}"/>
+                </a:ext>
+              </a:extLst>
+            </p:cNvPr>
+            <p:cNvCxnSpPr>
+              <a:cxnSpLocks/>
+            </p:cNvCxnSpPr>
+            <p:nvPr/>
+          </p:nvCxnSpPr>
+          <p:spPr>
+            <a:xfrm>
+              <a:off x="4445430" y="5005953"/>
+              <a:ext cx="0" cy="2339227"/>
+            </a:xfrm>
+            <a:prstGeom prst="line">
+              <a:avLst/>
+            </a:prstGeom>
+            <a:ln w="12700">
+              <a:solidFill>
+                <a:schemeClr val="tx1"/>
+              </a:solidFill>
+            </a:ln>
+          </p:spPr>
+          <p:style>
+            <a:lnRef idx="1">
+              <a:schemeClr val="accent1"/>
+            </a:lnRef>
+            <a:fillRef idx="0">
+              <a:schemeClr val="accent1"/>
+            </a:fillRef>
+            <a:effectRef idx="0">
+              <a:schemeClr val="accent1"/>
+            </a:effectRef>
+            <a:fontRef idx="minor">
+              <a:schemeClr val="tx1"/>
+            </a:fontRef>
+          </p:style>
+        </p:cxnSp>
+        <p:sp>
+          <p:nvSpPr>
+            <p:cNvPr id="15" name="テキスト ボックス 14">
+              <a:extLst>
+                <a:ext uri="{FF2B5EF4-FFF2-40B4-BE49-F238E27FC236}">
+                  <a16:creationId xmlns:a16="http://schemas.microsoft.com/office/drawing/2014/main" id="{5E666F30-1982-3205-48D3-4B004F0F9660}"/>
+                </a:ext>
+              </a:extLst>
+            </p:cNvPr>
+            <p:cNvSpPr txBox="1"/>
+            <p:nvPr/>
+          </p:nvSpPr>
+          <p:spPr>
+            <a:xfrm>
+              <a:off x="4103665" y="7508923"/>
+              <a:ext cx="683527" cy="646331"/>
+            </a:xfrm>
+            <a:prstGeom prst="rect">
+              <a:avLst/>
+            </a:prstGeom>
+            <a:noFill/>
+          </p:spPr>
+          <p:txBody>
+            <a:bodyPr wrap="square" rtlCol="0">
+              <a:spAutoFit/>
+            </a:bodyPr>
+            <a:lstStyle/>
+            <a:p>
+              <a:pPr algn="ctr"/>
+              <a:r>
+                <a:rPr kumimoji="1" lang="en-US" altLang="ja-JP" sz="3600" dirty="0">
+                  <a:latin typeface="Hiragino Kaku Gothic StdN W8" panose="020B0800000000000000" pitchFamily="34" charset="-128"/>
+                  <a:ea typeface="Hiragino Kaku Gothic StdN W8" panose="020B0800000000000000" pitchFamily="34" charset="-128"/>
+                </a:rPr>
+                <a:t>A</a:t>
+              </a:r>
+              <a:endParaRPr kumimoji="1" lang="ja-JP" altLang="en-US">
+                <a:latin typeface="Hiragino Kaku Gothic StdN W8" panose="020B0800000000000000" pitchFamily="34" charset="-128"/>
+                <a:ea typeface="Hiragino Kaku Gothic StdN W8" panose="020B0800000000000000" pitchFamily="34" charset="-128"/>
+              </a:endParaRPr>
+            </a:p>
+          </p:txBody>
+        </p:sp>
+        <p:cxnSp>
+          <p:nvCxnSpPr>
+            <p:cNvPr id="17" name="直線コネクタ 16">
+              <a:extLst>
+                <a:ext uri="{FF2B5EF4-FFF2-40B4-BE49-F238E27FC236}">
+                  <a16:creationId xmlns:a16="http://schemas.microsoft.com/office/drawing/2014/main" id="{D053B2A0-86FA-AD31-DC9B-689D65A1317D}"/>
+                </a:ext>
+              </a:extLst>
+            </p:cNvPr>
+            <p:cNvCxnSpPr>
+              <a:cxnSpLocks/>
+            </p:cNvCxnSpPr>
+            <p:nvPr/>
+          </p:nvCxnSpPr>
+          <p:spPr>
+            <a:xfrm>
+              <a:off x="7672643" y="3456122"/>
+              <a:ext cx="0" cy="3889058"/>
+            </a:xfrm>
+            <a:prstGeom prst="line">
+              <a:avLst/>
+            </a:prstGeom>
+            <a:ln w="12700">
+              <a:solidFill>
+                <a:schemeClr val="tx1"/>
+              </a:solidFill>
+            </a:ln>
+          </p:spPr>
+          <p:style>
+            <a:lnRef idx="1">
+              <a:schemeClr val="accent1"/>
+            </a:lnRef>
+            <a:fillRef idx="0">
+              <a:schemeClr val="accent1"/>
+            </a:fillRef>
+            <a:effectRef idx="0">
+              <a:schemeClr val="accent1"/>
+            </a:effectRef>
+            <a:fontRef idx="minor">
+              <a:schemeClr val="tx1"/>
+            </a:fontRef>
+          </p:style>
+        </p:cxnSp>
+        <p:sp>
+          <p:nvSpPr>
+            <p:cNvPr id="18" name="テキスト ボックス 17">
+              <a:extLst>
+                <a:ext uri="{FF2B5EF4-FFF2-40B4-BE49-F238E27FC236}">
+                  <a16:creationId xmlns:a16="http://schemas.microsoft.com/office/drawing/2014/main" id="{FA9AEE42-BB5E-DBE4-287B-A8C285F3C39A}"/>
+                </a:ext>
+              </a:extLst>
+            </p:cNvPr>
+            <p:cNvSpPr txBox="1"/>
+            <p:nvPr/>
+          </p:nvSpPr>
+          <p:spPr>
+            <a:xfrm>
+              <a:off x="7330878" y="7508923"/>
+              <a:ext cx="683527" cy="646331"/>
+            </a:xfrm>
+            <a:prstGeom prst="rect">
+              <a:avLst/>
+            </a:prstGeom>
+            <a:noFill/>
+          </p:spPr>
+          <p:txBody>
+            <a:bodyPr wrap="square" rtlCol="0">
+              <a:spAutoFit/>
+            </a:bodyPr>
+            <a:lstStyle/>
+            <a:p>
+              <a:pPr algn="ctr"/>
+              <a:r>
+                <a:rPr kumimoji="1" lang="en-US" altLang="ja-JP" sz="3600" dirty="0">
+                  <a:latin typeface="Hiragino Kaku Gothic StdN W8" panose="020B0800000000000000" pitchFamily="34" charset="-128"/>
+                  <a:ea typeface="Hiragino Kaku Gothic StdN W8" panose="020B0800000000000000" pitchFamily="34" charset="-128"/>
+                </a:rPr>
+                <a:t>B</a:t>
+              </a:r>
+            </a:p>
+          </p:txBody>
+        </p:sp>
+      </p:grpSp>
+    </p:spTree>
+    <p:extLst>
+      <p:ext uri="{BB962C8B-B14F-4D97-AF65-F5344CB8AC3E}">
+        <p14:creationId xmlns:p14="http://schemas.microsoft.com/office/powerpoint/2010/main" val="3101687406"/>
+      </p:ext>
+    </p:extLst>
+  </p:cSld>
+  <p:clrMapOvr>
+    <a:masterClrMapping/>
+  </p:clrMapOvr>
+</p:sld>
+</file>
+
+<file path=ppt/slides/slide14.xml><?xml version="1.0" encoding="utf-8"?>
+<p:sld xmlns:a="http://schemas.openxmlformats.org/drawingml/2006/main" xmlns:r="http://schemas.openxmlformats.org/officeDocument/2006/relationships" xmlns:p="http://schemas.openxmlformats.org/presentationml/2006/main">
+  <p:cSld>
+    <p:spTree>
+      <p:nvGrpSpPr>
+        <p:cNvPr id="1" name=""/>
+        <p:cNvGrpSpPr/>
+        <p:nvPr/>
+      </p:nvGrpSpPr>
+      <p:grpSpPr>
+        <a:xfrm>
+          <a:off x="0" y="0"/>
+          <a:ext cx="0" cy="0"/>
+          <a:chOff x="0" y="0"/>
+          <a:chExt cx="0" cy="0"/>
+        </a:xfrm>
+      </p:grpSpPr>
+      <p:grpSp>
+        <p:nvGrpSpPr>
+          <p:cNvPr id="12" name="グループ化 11">
+            <a:extLst>
+              <a:ext uri="{FF2B5EF4-FFF2-40B4-BE49-F238E27FC236}">
+                <a16:creationId xmlns:a16="http://schemas.microsoft.com/office/drawing/2014/main" id="{FD85492D-033C-EC21-02A4-0EE566667461}"/>
+              </a:ext>
+            </a:extLst>
+          </p:cNvPr>
+          <p:cNvGrpSpPr/>
+          <p:nvPr/>
+        </p:nvGrpSpPr>
+        <p:grpSpPr>
+          <a:xfrm>
+            <a:off x="4668757" y="869454"/>
+            <a:ext cx="3464087" cy="7627598"/>
+            <a:chOff x="4668757" y="869454"/>
+            <a:chExt cx="3464087" cy="7627598"/>
+          </a:xfrm>
+        </p:grpSpPr>
+        <p:pic>
+          <p:nvPicPr>
+            <p:cNvPr id="7" name="グラフィックス 6">
+              <a:extLst>
+                <a:ext uri="{FF2B5EF4-FFF2-40B4-BE49-F238E27FC236}">
+                  <a16:creationId xmlns:a16="http://schemas.microsoft.com/office/drawing/2014/main" id="{8FA6DBF5-BDA5-3F98-BDC4-193A39893A05}"/>
+                </a:ext>
+              </a:extLst>
+            </p:cNvPr>
+            <p:cNvPicPr>
+              <a:picLocks noChangeAspect="1"/>
+            </p:cNvPicPr>
+            <p:nvPr/>
+          </p:nvPicPr>
+          <p:blipFill>
+            <a:blip>
+              <a:extLst>
+                <a:ext uri="{96DAC541-7B7A-43D3-8B79-37D633B846F1}">
+                  <asvg:svgBlip xmlns:asvg="http://schemas.microsoft.com/office/drawing/2016/SVG/main" r:embed="rId2"/>
+                </a:ext>
+              </a:extLst>
+            </a:blip>
+            <a:stretch>
+              <a:fillRect/>
+            </a:stretch>
+          </p:blipFill>
+          <p:spPr>
+            <a:xfrm>
+              <a:off x="4668757" y="4558734"/>
+              <a:ext cx="3464086" cy="1625652"/>
+            </a:xfrm>
+            <a:prstGeom prst="rect">
+              <a:avLst/>
+            </a:prstGeom>
+          </p:spPr>
+        </p:pic>
+        <p:pic>
+          <p:nvPicPr>
+            <p:cNvPr id="9" name="グラフィックス 8">
+              <a:extLst>
+                <a:ext uri="{FF2B5EF4-FFF2-40B4-BE49-F238E27FC236}">
+                  <a16:creationId xmlns:a16="http://schemas.microsoft.com/office/drawing/2014/main" id="{C5DC1682-1756-69D5-CDEF-2EAB7FDFD703}"/>
+                </a:ext>
+              </a:extLst>
+            </p:cNvPr>
+            <p:cNvPicPr>
+              <a:picLocks noChangeAspect="1"/>
+            </p:cNvPicPr>
+            <p:nvPr/>
+          </p:nvPicPr>
+          <p:blipFill>
+            <a:blip>
+              <a:extLst>
+                <a:ext uri="{96DAC541-7B7A-43D3-8B79-37D633B846F1}">
+                  <asvg:svgBlip xmlns:asvg="http://schemas.microsoft.com/office/drawing/2016/SVG/main" r:embed="rId3"/>
+                </a:ext>
+              </a:extLst>
+            </a:blip>
+            <a:stretch>
+              <a:fillRect/>
+            </a:stretch>
+          </p:blipFill>
+          <p:spPr>
+            <a:xfrm>
+              <a:off x="4668757" y="869454"/>
+              <a:ext cx="3464086" cy="3464086"/>
+            </a:xfrm>
+            <a:prstGeom prst="rect">
+              <a:avLst/>
+            </a:prstGeom>
+          </p:spPr>
+        </p:pic>
+        <p:pic>
+          <p:nvPicPr>
+            <p:cNvPr id="11" name="図 10">
+              <a:extLst>
+                <a:ext uri="{FF2B5EF4-FFF2-40B4-BE49-F238E27FC236}">
+                  <a16:creationId xmlns:a16="http://schemas.microsoft.com/office/drawing/2014/main" id="{7B3259A7-8547-96D8-EB59-A7FB21BF8A51}"/>
+                </a:ext>
+              </a:extLst>
+            </p:cNvPr>
+            <p:cNvPicPr>
+              <a:picLocks noChangeAspect="1"/>
+            </p:cNvPicPr>
+            <p:nvPr/>
+          </p:nvPicPr>
+          <p:blipFill>
+            <a:blip r:embed="rId4"/>
+            <a:stretch>
+              <a:fillRect/>
+            </a:stretch>
+          </p:blipFill>
+          <p:spPr>
+            <a:xfrm>
+              <a:off x="4668758" y="6409580"/>
+              <a:ext cx="3464086" cy="2087472"/>
+            </a:xfrm>
+            <a:prstGeom prst="rect">
+              <a:avLst/>
+            </a:prstGeom>
+          </p:spPr>
+        </p:pic>
+      </p:grpSp>
+    </p:spTree>
+    <p:extLst>
+      <p:ext uri="{BB962C8B-B14F-4D97-AF65-F5344CB8AC3E}">
+        <p14:creationId xmlns:p14="http://schemas.microsoft.com/office/powerpoint/2010/main" val="652963492"/>
+      </p:ext>
+    </p:extLst>
+  </p:cSld>
+  <p:clrMapOvr>
+    <a:masterClrMapping/>
+  </p:clrMapOvr>
+</p:sld>
+</file>
+
 <file path=ppt/slides/slide2.xml><?xml version="1.0" encoding="utf-8"?>
 <p:sld xmlns:a="http://schemas.openxmlformats.org/drawingml/2006/main" xmlns:r="http://schemas.openxmlformats.org/officeDocument/2006/relationships" xmlns:p="http://schemas.openxmlformats.org/presentationml/2006/main">
   <p:cSld>

--- a/figs/DIYfigures_pp.pptx
+++ b/figs/DIYfigures_pp.pptx
@@ -19,6 +19,8 @@
     <p:sldId id="267" r:id="rId13"/>
     <p:sldId id="268" r:id="rId14"/>
     <p:sldId id="269" r:id="rId15"/>
+    <p:sldId id="270" r:id="rId16"/>
+    <p:sldId id="271" r:id="rId17"/>
   </p:sldIdLst>
   <p:sldSz cx="12801600" cy="9601200" type="A3"/>
   <p:notesSz cx="6858000" cy="9144000"/>
@@ -256,7 +258,7 @@
           <a:p>
             <a:fld id="{DBD89380-344E-284F-BE0F-D796858BF56F}" type="datetimeFigureOut">
               <a:rPr kumimoji="1" lang="ja-JP" altLang="en-US" smtClean="0"/>
-              <a:t>2026/5/29</a:t>
+              <a:t>2026/6/9</a:t>
             </a:fld>
             <a:endParaRPr kumimoji="1" lang="ja-JP" altLang="en-US"/>
           </a:p>
@@ -458,7 +460,7 @@
           <a:p>
             <a:fld id="{DBD89380-344E-284F-BE0F-D796858BF56F}" type="datetimeFigureOut">
               <a:rPr kumimoji="1" lang="ja-JP" altLang="en-US" smtClean="0"/>
-              <a:t>2026/5/29</a:t>
+              <a:t>2026/6/9</a:t>
             </a:fld>
             <a:endParaRPr kumimoji="1" lang="ja-JP" altLang="en-US"/>
           </a:p>
@@ -670,7 +672,7 @@
           <a:p>
             <a:fld id="{DBD89380-344E-284F-BE0F-D796858BF56F}" type="datetimeFigureOut">
               <a:rPr kumimoji="1" lang="ja-JP" altLang="en-US" smtClean="0"/>
-              <a:t>2026/5/29</a:t>
+              <a:t>2026/6/9</a:t>
             </a:fld>
             <a:endParaRPr kumimoji="1" lang="ja-JP" altLang="en-US"/>
           </a:p>
@@ -872,7 +874,7 @@
           <a:p>
             <a:fld id="{DBD89380-344E-284F-BE0F-D796858BF56F}" type="datetimeFigureOut">
               <a:rPr kumimoji="1" lang="ja-JP" altLang="en-US" smtClean="0"/>
-              <a:t>2026/5/29</a:t>
+              <a:t>2026/6/9</a:t>
             </a:fld>
             <a:endParaRPr kumimoji="1" lang="ja-JP" altLang="en-US"/>
           </a:p>
@@ -1116,7 +1118,7 @@
           <a:p>
             <a:fld id="{DBD89380-344E-284F-BE0F-D796858BF56F}" type="datetimeFigureOut">
               <a:rPr kumimoji="1" lang="ja-JP" altLang="en-US" smtClean="0"/>
-              <a:t>2026/5/29</a:t>
+              <a:t>2026/6/9</a:t>
             </a:fld>
             <a:endParaRPr kumimoji="1" lang="ja-JP" altLang="en-US"/>
           </a:p>
@@ -1412,7 +1414,7 @@
           <a:p>
             <a:fld id="{DBD89380-344E-284F-BE0F-D796858BF56F}" type="datetimeFigureOut">
               <a:rPr kumimoji="1" lang="ja-JP" altLang="en-US" smtClean="0"/>
-              <a:t>2026/5/29</a:t>
+              <a:t>2026/6/9</a:t>
             </a:fld>
             <a:endParaRPr kumimoji="1" lang="ja-JP" altLang="en-US"/>
           </a:p>
@@ -1843,7 +1845,7 @@
           <a:p>
             <a:fld id="{DBD89380-344E-284F-BE0F-D796858BF56F}" type="datetimeFigureOut">
               <a:rPr kumimoji="1" lang="ja-JP" altLang="en-US" smtClean="0"/>
-              <a:t>2026/5/29</a:t>
+              <a:t>2026/6/9</a:t>
             </a:fld>
             <a:endParaRPr kumimoji="1" lang="ja-JP" altLang="en-US"/>
           </a:p>
@@ -1961,7 +1963,7 @@
           <a:p>
             <a:fld id="{DBD89380-344E-284F-BE0F-D796858BF56F}" type="datetimeFigureOut">
               <a:rPr kumimoji="1" lang="ja-JP" altLang="en-US" smtClean="0"/>
-              <a:t>2026/5/29</a:t>
+              <a:t>2026/6/9</a:t>
             </a:fld>
             <a:endParaRPr kumimoji="1" lang="ja-JP" altLang="en-US"/>
           </a:p>
@@ -2056,7 +2058,7 @@
           <a:p>
             <a:fld id="{DBD89380-344E-284F-BE0F-D796858BF56F}" type="datetimeFigureOut">
               <a:rPr kumimoji="1" lang="ja-JP" altLang="en-US" smtClean="0"/>
-              <a:t>2026/5/29</a:t>
+              <a:t>2026/6/9</a:t>
             </a:fld>
             <a:endParaRPr kumimoji="1" lang="ja-JP" altLang="en-US"/>
           </a:p>
@@ -2365,7 +2367,7 @@
           <a:p>
             <a:fld id="{DBD89380-344E-284F-BE0F-D796858BF56F}" type="datetimeFigureOut">
               <a:rPr kumimoji="1" lang="ja-JP" altLang="en-US" smtClean="0"/>
-              <a:t>2026/5/29</a:t>
+              <a:t>2026/6/9</a:t>
             </a:fld>
             <a:endParaRPr kumimoji="1" lang="ja-JP" altLang="en-US"/>
           </a:p>
@@ -2622,7 +2624,7 @@
           <a:p>
             <a:fld id="{DBD89380-344E-284F-BE0F-D796858BF56F}" type="datetimeFigureOut">
               <a:rPr kumimoji="1" lang="ja-JP" altLang="en-US" smtClean="0"/>
-              <a:t>2026/5/29</a:t>
+              <a:t>2026/6/9</a:t>
             </a:fld>
             <a:endParaRPr kumimoji="1" lang="ja-JP" altLang="en-US"/>
           </a:p>
@@ -2867,7 +2869,7 @@
           <a:p>
             <a:fld id="{DBD89380-344E-284F-BE0F-D796858BF56F}" type="datetimeFigureOut">
               <a:rPr kumimoji="1" lang="ja-JP" altLang="en-US" smtClean="0"/>
-              <a:t>2026/5/29</a:t>
+              <a:t>2026/6/9</a:t>
             </a:fld>
             <a:endParaRPr kumimoji="1" lang="ja-JP" altLang="en-US"/>
           </a:p>
@@ -4641,26 +4643,6 @@
           <p:txBody>
             <a:bodyPr rtlCol="0" anchor="ctr"/>
             <a:lstStyle/>
-            <a:p>
-              <a:pPr algn="ctr"/>
-              <a:r>
-                <a:rPr kumimoji="1" lang="ja-JP" altLang="en-US" sz="1600">
-                  <a:solidFill>
-                    <a:schemeClr val="tx1"/>
-                  </a:solidFill>
-                  <a:latin typeface="HGPGothicE" panose="020B0900000000000000" pitchFamily="34" charset="-128"/>
-                  <a:ea typeface="HGPGothicE" panose="020B0900000000000000" pitchFamily="34" charset="-128"/>
-                </a:rPr>
-                <a:t>利益集団・</a:t>
-              </a:r>
-              <a:endParaRPr kumimoji="1" lang="en-US" altLang="ja-JP" sz="1600" dirty="0">
-                <a:solidFill>
-                  <a:schemeClr val="tx1"/>
-                </a:solidFill>
-                <a:latin typeface="HGPGothicE" panose="020B0900000000000000" pitchFamily="34" charset="-128"/>
-                <a:ea typeface="HGPGothicE" panose="020B0900000000000000" pitchFamily="34" charset="-128"/>
-              </a:endParaRPr>
-            </a:p>
             <a:p>
               <a:pPr algn="ctr"/>
               <a:r>
@@ -11197,6 +11179,620 @@
 </p:sld>
 </file>
 
+<file path=ppt/slides/slide15.xml><?xml version="1.0" encoding="utf-8"?>
+<p:sld xmlns:a="http://schemas.openxmlformats.org/drawingml/2006/main" xmlns:r="http://schemas.openxmlformats.org/officeDocument/2006/relationships" xmlns:p="http://schemas.openxmlformats.org/presentationml/2006/main">
+  <p:cSld>
+    <p:spTree>
+      <p:nvGrpSpPr>
+        <p:cNvPr id="1" name=""/>
+        <p:cNvGrpSpPr/>
+        <p:nvPr/>
+      </p:nvGrpSpPr>
+      <p:grpSpPr>
+        <a:xfrm>
+          <a:off x="0" y="0"/>
+          <a:ext cx="0" cy="0"/>
+          <a:chOff x="0" y="0"/>
+          <a:chExt cx="0" cy="0"/>
+        </a:xfrm>
+      </p:grpSpPr>
+      <p:grpSp>
+        <p:nvGrpSpPr>
+          <p:cNvPr id="9" name="グループ化 8">
+            <a:extLst>
+              <a:ext uri="{FF2B5EF4-FFF2-40B4-BE49-F238E27FC236}">
+                <a16:creationId xmlns:a16="http://schemas.microsoft.com/office/drawing/2014/main" id="{D8E344A5-66AA-23F5-BB80-47D17C82CBE9}"/>
+              </a:ext>
+            </a:extLst>
+          </p:cNvPr>
+          <p:cNvGrpSpPr/>
+          <p:nvPr/>
+        </p:nvGrpSpPr>
+        <p:grpSpPr>
+          <a:xfrm>
+            <a:off x="658678" y="1013201"/>
+            <a:ext cx="11484244" cy="7574797"/>
+            <a:chOff x="658678" y="1013201"/>
+            <a:chExt cx="11484244" cy="7574797"/>
+          </a:xfrm>
+        </p:grpSpPr>
+        <p:sp>
+          <p:nvSpPr>
+            <p:cNvPr id="2" name="角丸四角形 1">
+              <a:extLst>
+                <a:ext uri="{FF2B5EF4-FFF2-40B4-BE49-F238E27FC236}">
+                  <a16:creationId xmlns:a16="http://schemas.microsoft.com/office/drawing/2014/main" id="{CA87287D-EC7F-8015-1E87-67108801A089}"/>
+                </a:ext>
+              </a:extLst>
+            </p:cNvPr>
+            <p:cNvSpPr/>
+            <p:nvPr/>
+          </p:nvSpPr>
+          <p:spPr>
+            <a:xfrm>
+              <a:off x="658678" y="1013201"/>
+              <a:ext cx="11484244" cy="7574797"/>
+            </a:xfrm>
+            <a:prstGeom prst="roundRect">
+              <a:avLst/>
+            </a:prstGeom>
+            <a:noFill/>
+            <a:ln w="28575">
+              <a:solidFill>
+                <a:schemeClr val="tx1"/>
+              </a:solidFill>
+            </a:ln>
+          </p:spPr>
+          <p:style>
+            <a:lnRef idx="2">
+              <a:schemeClr val="accent1">
+                <a:shade val="15000"/>
+              </a:schemeClr>
+            </a:lnRef>
+            <a:fillRef idx="1">
+              <a:schemeClr val="accent1"/>
+            </a:fillRef>
+            <a:effectRef idx="0">
+              <a:schemeClr val="accent1"/>
+            </a:effectRef>
+            <a:fontRef idx="minor">
+              <a:schemeClr val="lt1"/>
+            </a:fontRef>
+          </p:style>
+          <p:txBody>
+            <a:bodyPr rtlCol="0" anchor="ctr"/>
+            <a:lstStyle/>
+            <a:p>
+              <a:pPr algn="ctr"/>
+              <a:endParaRPr kumimoji="1" lang="ja-JP" altLang="en-US"/>
+            </a:p>
+          </p:txBody>
+        </p:sp>
+        <p:sp>
+          <p:nvSpPr>
+            <p:cNvPr id="4" name="テキスト ボックス 3">
+              <a:extLst>
+                <a:ext uri="{FF2B5EF4-FFF2-40B4-BE49-F238E27FC236}">
+                  <a16:creationId xmlns:a16="http://schemas.microsoft.com/office/drawing/2014/main" id="{419B0345-9895-93B6-E1A1-5C158B3CC400}"/>
+                </a:ext>
+              </a:extLst>
+            </p:cNvPr>
+            <p:cNvSpPr txBox="1"/>
+            <p:nvPr/>
+          </p:nvSpPr>
+          <p:spPr>
+            <a:xfrm>
+              <a:off x="1526581" y="1309404"/>
+              <a:ext cx="7849893" cy="1815882"/>
+            </a:xfrm>
+            <a:prstGeom prst="rect">
+              <a:avLst/>
+            </a:prstGeom>
+            <a:noFill/>
+          </p:spPr>
+          <p:txBody>
+            <a:bodyPr wrap="square">
+              <a:spAutoFit/>
+            </a:bodyPr>
+            <a:lstStyle/>
+            <a:p>
+              <a:r>
+                <a:rPr kumimoji="1" lang="ja-JP" altLang="en-US" sz="4000" u="sng">
+                  <a:latin typeface="Hiragino Kaku Gothic StdN W8" panose="020B0800000000000000" pitchFamily="34" charset="-128"/>
+                  <a:ea typeface="Hiragino Kaku Gothic StdN W8" panose="020B0800000000000000" pitchFamily="34" charset="-128"/>
+                </a:rPr>
+                <a:t>利益集団</a:t>
+              </a:r>
+              <a:r>
+                <a:rPr kumimoji="1" lang="en-US" altLang="ja-JP" sz="4000" u="sng" dirty="0">
+                  <a:latin typeface="Hiragino Sans W4" panose="020B0400000000000000" pitchFamily="34" charset="-128"/>
+                  <a:ea typeface="Hiragino Sans W4" panose="020B0400000000000000" pitchFamily="34" charset="-128"/>
+                </a:rPr>
+                <a:t> (interest group)</a:t>
+              </a:r>
+            </a:p>
+            <a:p>
+              <a:r>
+                <a:rPr lang="ja-JP" altLang="ja-JP" sz="4000">
+                  <a:latin typeface="Hiragino Sans W4" panose="020B0400000000000000" pitchFamily="34" charset="-128"/>
+                  <a:ea typeface="Hiragino Sans W4" panose="020B0400000000000000" pitchFamily="34" charset="-128"/>
+                </a:rPr>
+                <a:t>共通の利益を持つ人々の集合</a:t>
+              </a:r>
+              <a:endParaRPr lang="en-US" altLang="ja-JP" sz="4000" dirty="0">
+                <a:latin typeface="Hiragino Sans W4" panose="020B0400000000000000" pitchFamily="34" charset="-128"/>
+                <a:ea typeface="Hiragino Sans W4" panose="020B0400000000000000" pitchFamily="34" charset="-128"/>
+              </a:endParaRPr>
+            </a:p>
+            <a:p>
+              <a:r>
+                <a:rPr lang="ja-JP" altLang="en-US" sz="3200">
+                  <a:latin typeface="Hiragino Sans W4" panose="020B0400000000000000" pitchFamily="34" charset="-128"/>
+                  <a:ea typeface="Hiragino Sans W4" panose="020B0400000000000000" pitchFamily="34" charset="-128"/>
+                </a:rPr>
+                <a:t>例：農家</a:t>
+              </a:r>
+            </a:p>
+          </p:txBody>
+        </p:sp>
+        <p:sp>
+          <p:nvSpPr>
+            <p:cNvPr id="5" name="角丸四角形 4">
+              <a:extLst>
+                <a:ext uri="{FF2B5EF4-FFF2-40B4-BE49-F238E27FC236}">
+                  <a16:creationId xmlns:a16="http://schemas.microsoft.com/office/drawing/2014/main" id="{2CF03473-41A3-B639-A4F7-2729DDCF2BE9}"/>
+                </a:ext>
+              </a:extLst>
+            </p:cNvPr>
+            <p:cNvSpPr/>
+            <p:nvPr/>
+          </p:nvSpPr>
+          <p:spPr>
+            <a:xfrm>
+              <a:off x="831742" y="3265057"/>
+              <a:ext cx="11138115" cy="5024870"/>
+            </a:xfrm>
+            <a:prstGeom prst="roundRect">
+              <a:avLst/>
+            </a:prstGeom>
+            <a:noFill/>
+            <a:ln w="28575">
+              <a:solidFill>
+                <a:schemeClr val="tx1"/>
+              </a:solidFill>
+            </a:ln>
+          </p:spPr>
+          <p:style>
+            <a:lnRef idx="2">
+              <a:schemeClr val="accent1">
+                <a:shade val="15000"/>
+              </a:schemeClr>
+            </a:lnRef>
+            <a:fillRef idx="1">
+              <a:schemeClr val="accent1"/>
+            </a:fillRef>
+            <a:effectRef idx="0">
+              <a:schemeClr val="accent1"/>
+            </a:effectRef>
+            <a:fontRef idx="minor">
+              <a:schemeClr val="lt1"/>
+            </a:fontRef>
+          </p:style>
+          <p:txBody>
+            <a:bodyPr rtlCol="0" anchor="ctr"/>
+            <a:lstStyle/>
+            <a:p>
+              <a:pPr algn="ctr"/>
+              <a:endParaRPr kumimoji="1" lang="ja-JP" altLang="en-US"/>
+            </a:p>
+          </p:txBody>
+        </p:sp>
+        <p:sp>
+          <p:nvSpPr>
+            <p:cNvPr id="6" name="テキスト ボックス 5">
+              <a:extLst>
+                <a:ext uri="{FF2B5EF4-FFF2-40B4-BE49-F238E27FC236}">
+                  <a16:creationId xmlns:a16="http://schemas.microsoft.com/office/drawing/2014/main" id="{347B5695-766B-B7DC-347E-C15ACED8EB61}"/>
+                </a:ext>
+              </a:extLst>
+            </p:cNvPr>
+            <p:cNvSpPr txBox="1"/>
+            <p:nvPr/>
+          </p:nvSpPr>
+          <p:spPr>
+            <a:xfrm>
+              <a:off x="1526581" y="3404828"/>
+              <a:ext cx="8624809" cy="1815882"/>
+            </a:xfrm>
+            <a:prstGeom prst="rect">
+              <a:avLst/>
+            </a:prstGeom>
+            <a:noFill/>
+          </p:spPr>
+          <p:txBody>
+            <a:bodyPr wrap="square">
+              <a:spAutoFit/>
+            </a:bodyPr>
+            <a:lstStyle/>
+            <a:p>
+              <a:r>
+                <a:rPr kumimoji="1" lang="ja-JP" altLang="en-US" sz="4000" u="sng">
+                  <a:latin typeface="Hiragino Kaku Gothic StdN W8" panose="020B0800000000000000" pitchFamily="34" charset="-128"/>
+                  <a:ea typeface="Hiragino Kaku Gothic StdN W8" panose="020B0800000000000000" pitchFamily="34" charset="-128"/>
+                </a:rPr>
+                <a:t>利益団体</a:t>
+              </a:r>
+              <a:r>
+                <a:rPr kumimoji="1" lang="en-US" altLang="ja-JP" sz="4000" u="sng" dirty="0">
+                  <a:latin typeface="Hiragino Sans W4" panose="020B0400000000000000" pitchFamily="34" charset="-128"/>
+                  <a:ea typeface="Hiragino Sans W4" panose="020B0400000000000000" pitchFamily="34" charset="-128"/>
+                </a:rPr>
+                <a:t> (organized interest)</a:t>
+              </a:r>
+            </a:p>
+            <a:p>
+              <a:r>
+                <a:rPr lang="ja-JP" altLang="ja-JP" sz="4000">
+                  <a:latin typeface="Hiragino Sans W4" panose="020B0400000000000000" pitchFamily="34" charset="-128"/>
+                  <a:ea typeface="Hiragino Sans W4" panose="020B0400000000000000" pitchFamily="34" charset="-128"/>
+                </a:rPr>
+                <a:t>利益集団のうち、</a:t>
+              </a:r>
+              <a:r>
+                <a:rPr lang="ja-JP" altLang="ja-JP" sz="4000" b="1">
+                  <a:latin typeface="Hiragino Sans W4" panose="020B0400000000000000" pitchFamily="34" charset="-128"/>
+                  <a:ea typeface="Hiragino Sans W4" panose="020B0400000000000000" pitchFamily="34" charset="-128"/>
+                </a:rPr>
+                <a:t>組織化</a:t>
+              </a:r>
+              <a:r>
+                <a:rPr lang="ja-JP" altLang="ja-JP" sz="4000">
+                  <a:latin typeface="Hiragino Sans W4" panose="020B0400000000000000" pitchFamily="34" charset="-128"/>
+                  <a:ea typeface="Hiragino Sans W4" panose="020B0400000000000000" pitchFamily="34" charset="-128"/>
+                </a:rPr>
+                <a:t>されたもの</a:t>
+              </a:r>
+              <a:endParaRPr lang="en-US" altLang="ja-JP" sz="4000" dirty="0">
+                <a:latin typeface="Hiragino Sans W4" panose="020B0400000000000000" pitchFamily="34" charset="-128"/>
+                <a:ea typeface="Hiragino Sans W4" panose="020B0400000000000000" pitchFamily="34" charset="-128"/>
+              </a:endParaRPr>
+            </a:p>
+            <a:p>
+              <a:r>
+                <a:rPr lang="ja-JP" altLang="en-US" sz="3200">
+                  <a:latin typeface="Hiragino Sans W4" panose="020B0400000000000000" pitchFamily="34" charset="-128"/>
+                  <a:ea typeface="Hiragino Sans W4" panose="020B0400000000000000" pitchFamily="34" charset="-128"/>
+                </a:rPr>
+                <a:t>例：農協</a:t>
+              </a:r>
+              <a:endParaRPr lang="ja-JP" altLang="en-US" sz="4000">
+                <a:latin typeface="Hiragino Sans W4" panose="020B0400000000000000" pitchFamily="34" charset="-128"/>
+                <a:ea typeface="Hiragino Sans W4" panose="020B0400000000000000" pitchFamily="34" charset="-128"/>
+              </a:endParaRPr>
+            </a:p>
+          </p:txBody>
+        </p:sp>
+        <p:sp>
+          <p:nvSpPr>
+            <p:cNvPr id="7" name="角丸四角形 6">
+              <a:extLst>
+                <a:ext uri="{FF2B5EF4-FFF2-40B4-BE49-F238E27FC236}">
+                  <a16:creationId xmlns:a16="http://schemas.microsoft.com/office/drawing/2014/main" id="{8F5EB0E9-082A-C4F9-83C0-F0DC5FFBFC27}"/>
+                </a:ext>
+              </a:extLst>
+            </p:cNvPr>
+            <p:cNvSpPr/>
+            <p:nvPr/>
+          </p:nvSpPr>
+          <p:spPr>
+            <a:xfrm>
+              <a:off x="1048717" y="5360481"/>
+              <a:ext cx="10704164" cy="2676827"/>
+            </a:xfrm>
+            <a:prstGeom prst="roundRect">
+              <a:avLst/>
+            </a:prstGeom>
+            <a:noFill/>
+            <a:ln w="28575">
+              <a:solidFill>
+                <a:schemeClr val="tx1"/>
+              </a:solidFill>
+            </a:ln>
+          </p:spPr>
+          <p:style>
+            <a:lnRef idx="2">
+              <a:schemeClr val="accent1">
+                <a:shade val="15000"/>
+              </a:schemeClr>
+            </a:lnRef>
+            <a:fillRef idx="1">
+              <a:schemeClr val="accent1"/>
+            </a:fillRef>
+            <a:effectRef idx="0">
+              <a:schemeClr val="accent1"/>
+            </a:effectRef>
+            <a:fontRef idx="minor">
+              <a:schemeClr val="lt1"/>
+            </a:fontRef>
+          </p:style>
+          <p:txBody>
+            <a:bodyPr rtlCol="0" anchor="ctr"/>
+            <a:lstStyle/>
+            <a:p>
+              <a:pPr algn="ctr"/>
+              <a:endParaRPr kumimoji="1" lang="ja-JP" altLang="en-US"/>
+            </a:p>
+          </p:txBody>
+        </p:sp>
+        <p:sp>
+          <p:nvSpPr>
+            <p:cNvPr id="8" name="テキスト ボックス 7">
+              <a:extLst>
+                <a:ext uri="{FF2B5EF4-FFF2-40B4-BE49-F238E27FC236}">
+                  <a16:creationId xmlns:a16="http://schemas.microsoft.com/office/drawing/2014/main" id="{DCA55CD2-17BB-7C97-9556-C7A5AEF635AA}"/>
+                </a:ext>
+              </a:extLst>
+            </p:cNvPr>
+            <p:cNvSpPr txBox="1"/>
+            <p:nvPr/>
+          </p:nvSpPr>
+          <p:spPr>
+            <a:xfrm>
+              <a:off x="1526581" y="5483176"/>
+              <a:ext cx="9849175" cy="2431435"/>
+            </a:xfrm>
+            <a:prstGeom prst="rect">
+              <a:avLst/>
+            </a:prstGeom>
+            <a:noFill/>
+          </p:spPr>
+          <p:txBody>
+            <a:bodyPr wrap="square">
+              <a:spAutoFit/>
+            </a:bodyPr>
+            <a:lstStyle/>
+            <a:p>
+              <a:r>
+                <a:rPr kumimoji="1" lang="ja-JP" altLang="en-US" sz="4000" u="sng">
+                  <a:latin typeface="Hiragino Kaku Gothic StdN W8" panose="020B0800000000000000" pitchFamily="34" charset="-128"/>
+                  <a:ea typeface="Hiragino Kaku Gothic StdN W8" panose="020B0800000000000000" pitchFamily="34" charset="-128"/>
+                </a:rPr>
+                <a:t>圧力団体</a:t>
+              </a:r>
+              <a:r>
+                <a:rPr kumimoji="1" lang="en-US" altLang="ja-JP" sz="4000" u="sng" dirty="0">
+                  <a:latin typeface="Hiragino Sans W4" panose="020B0400000000000000" pitchFamily="34" charset="-128"/>
+                  <a:ea typeface="Hiragino Sans W4" panose="020B0400000000000000" pitchFamily="34" charset="-128"/>
+                </a:rPr>
+                <a:t>(organized interest)</a:t>
+              </a:r>
+            </a:p>
+            <a:p>
+              <a:r>
+                <a:rPr lang="ja-JP" altLang="en-US" sz="4000">
+                  <a:latin typeface="Hiragino Sans W4" panose="020B0400000000000000" pitchFamily="34" charset="-128"/>
+                  <a:ea typeface="Hiragino Sans W4" panose="020B0400000000000000" pitchFamily="34" charset="-128"/>
+                </a:rPr>
+                <a:t>利益団体のうち、実際に影響力を行使しているもの</a:t>
+              </a:r>
+              <a:br>
+                <a:rPr lang="en-US" altLang="ja-JP" sz="3200" dirty="0">
+                  <a:latin typeface="Hiragino Sans W4" panose="020B0400000000000000" pitchFamily="34" charset="-128"/>
+                  <a:ea typeface="Hiragino Sans W4" panose="020B0400000000000000" pitchFamily="34" charset="-128"/>
+                </a:rPr>
+              </a:br>
+              <a:r>
+                <a:rPr lang="en-US" altLang="ja-JP" sz="3200" dirty="0">
+                  <a:latin typeface="Hiragino Sans W4" panose="020B0400000000000000" pitchFamily="34" charset="-128"/>
+                  <a:ea typeface="Hiragino Sans W4" panose="020B0400000000000000" pitchFamily="34" charset="-128"/>
+                </a:rPr>
+                <a:t>※</a:t>
+              </a:r>
+              <a:r>
+                <a:rPr lang="ja-JP" altLang="en-US" sz="3200">
+                  <a:latin typeface="Hiragino Sans W4" panose="020B0400000000000000" pitchFamily="34" charset="-128"/>
+                  <a:ea typeface="Hiragino Sans W4" panose="020B0400000000000000" pitchFamily="34" charset="-128"/>
+                </a:rPr>
+                <a:t>ネガティブなニュアンス</a:t>
+              </a:r>
+              <a:endParaRPr lang="ja-JP" altLang="en-US" sz="4000">
+                <a:latin typeface="Hiragino Sans W4" panose="020B0400000000000000" pitchFamily="34" charset="-128"/>
+                <a:ea typeface="Hiragino Sans W4" panose="020B0400000000000000" pitchFamily="34" charset="-128"/>
+              </a:endParaRPr>
+            </a:p>
+          </p:txBody>
+        </p:sp>
+      </p:grpSp>
+    </p:spTree>
+    <p:extLst>
+      <p:ext uri="{BB962C8B-B14F-4D97-AF65-F5344CB8AC3E}">
+        <p14:creationId xmlns:p14="http://schemas.microsoft.com/office/powerpoint/2010/main" val="167030355"/>
+      </p:ext>
+    </p:extLst>
+  </p:cSld>
+  <p:clrMapOvr>
+    <a:masterClrMapping/>
+  </p:clrMapOvr>
+</p:sld>
+</file>
+
+<file path=ppt/slides/slide16.xml><?xml version="1.0" encoding="utf-8"?>
+<p:sld xmlns:a="http://schemas.openxmlformats.org/drawingml/2006/main" xmlns:r="http://schemas.openxmlformats.org/officeDocument/2006/relationships" xmlns:p="http://schemas.openxmlformats.org/presentationml/2006/main">
+  <p:cSld>
+    <p:spTree>
+      <p:nvGrpSpPr>
+        <p:cNvPr id="1" name=""/>
+        <p:cNvGrpSpPr/>
+        <p:nvPr/>
+      </p:nvGrpSpPr>
+      <p:grpSpPr>
+        <a:xfrm>
+          <a:off x="0" y="0"/>
+          <a:ext cx="0" cy="0"/>
+          <a:chOff x="0" y="0"/>
+          <a:chExt cx="0" cy="0"/>
+        </a:xfrm>
+      </p:grpSpPr>
+      <p:grpSp>
+        <p:nvGrpSpPr>
+          <p:cNvPr id="10" name="グループ化 9">
+            <a:extLst>
+              <a:ext uri="{FF2B5EF4-FFF2-40B4-BE49-F238E27FC236}">
+                <a16:creationId xmlns:a16="http://schemas.microsoft.com/office/drawing/2014/main" id="{5D8A4A37-8B26-7801-2D44-63E9D52D1832}"/>
+              </a:ext>
+            </a:extLst>
+          </p:cNvPr>
+          <p:cNvGrpSpPr/>
+          <p:nvPr/>
+        </p:nvGrpSpPr>
+        <p:grpSpPr>
+          <a:xfrm>
+            <a:off x="1223182" y="1845590"/>
+            <a:ext cx="11025562" cy="4985287"/>
+            <a:chOff x="1223182" y="1845590"/>
+            <a:chExt cx="11025562" cy="4985287"/>
+          </a:xfrm>
+        </p:grpSpPr>
+        <p:pic>
+          <p:nvPicPr>
+            <p:cNvPr id="3" name="図 2">
+              <a:extLst>
+                <a:ext uri="{FF2B5EF4-FFF2-40B4-BE49-F238E27FC236}">
+                  <a16:creationId xmlns:a16="http://schemas.microsoft.com/office/drawing/2014/main" id="{BC5AD7DC-02F5-6716-C639-7BF2A28FA50C}"/>
+                </a:ext>
+              </a:extLst>
+            </p:cNvPr>
+            <p:cNvPicPr>
+              <a:picLocks noChangeAspect="1"/>
+            </p:cNvPicPr>
+            <p:nvPr/>
+          </p:nvPicPr>
+          <p:blipFill>
+            <a:blip r:embed="rId2"/>
+            <a:stretch>
+              <a:fillRect/>
+            </a:stretch>
+          </p:blipFill>
+          <p:spPr>
+            <a:xfrm>
+              <a:off x="1662194" y="3719592"/>
+              <a:ext cx="3111285" cy="3111285"/>
+            </a:xfrm>
+            <a:prstGeom prst="rect">
+              <a:avLst/>
+            </a:prstGeom>
+          </p:spPr>
+        </p:pic>
+        <p:pic>
+          <p:nvPicPr>
+            <p:cNvPr id="5" name="図 4">
+              <a:extLst>
+                <a:ext uri="{FF2B5EF4-FFF2-40B4-BE49-F238E27FC236}">
+                  <a16:creationId xmlns:a16="http://schemas.microsoft.com/office/drawing/2014/main" id="{2124BCFA-133B-FDEA-05CB-F3E1D87E5FAF}"/>
+                </a:ext>
+              </a:extLst>
+            </p:cNvPr>
+            <p:cNvPicPr>
+              <a:picLocks noChangeAspect="1"/>
+            </p:cNvPicPr>
+            <p:nvPr/>
+          </p:nvPicPr>
+          <p:blipFill>
+            <a:blip r:embed="rId3"/>
+            <a:stretch>
+              <a:fillRect/>
+            </a:stretch>
+          </p:blipFill>
+          <p:spPr>
+            <a:xfrm>
+              <a:off x="5537092" y="4677906"/>
+              <a:ext cx="6711652" cy="1471047"/>
+            </a:xfrm>
+            <a:prstGeom prst="rect">
+              <a:avLst/>
+            </a:prstGeom>
+          </p:spPr>
+        </p:pic>
+        <p:pic>
+          <p:nvPicPr>
+            <p:cNvPr id="7" name="図 6">
+              <a:extLst>
+                <a:ext uri="{FF2B5EF4-FFF2-40B4-BE49-F238E27FC236}">
+                  <a16:creationId xmlns:a16="http://schemas.microsoft.com/office/drawing/2014/main" id="{69656FA9-E0C6-355F-DBE9-E6F76998763D}"/>
+                </a:ext>
+              </a:extLst>
+            </p:cNvPr>
+            <p:cNvPicPr>
+              <a:picLocks noChangeAspect="1"/>
+            </p:cNvPicPr>
+            <p:nvPr/>
+          </p:nvPicPr>
+          <p:blipFill>
+            <a:blip r:embed="rId4"/>
+            <a:stretch>
+              <a:fillRect/>
+            </a:stretch>
+          </p:blipFill>
+          <p:spPr>
+            <a:xfrm>
+              <a:off x="1223182" y="1845590"/>
+              <a:ext cx="5105764" cy="1587284"/>
+            </a:xfrm>
+            <a:prstGeom prst="rect">
+              <a:avLst/>
+            </a:prstGeom>
+          </p:spPr>
+        </p:pic>
+        <p:pic>
+          <p:nvPicPr>
+            <p:cNvPr id="9" name="グラフィックス 8">
+              <a:extLst>
+                <a:ext uri="{FF2B5EF4-FFF2-40B4-BE49-F238E27FC236}">
+                  <a16:creationId xmlns:a16="http://schemas.microsoft.com/office/drawing/2014/main" id="{DA2CA574-BA45-DBA4-62FD-826C5DD5C2BE}"/>
+                </a:ext>
+              </a:extLst>
+            </p:cNvPr>
+            <p:cNvPicPr>
+              <a:picLocks noChangeAspect="1"/>
+            </p:cNvPicPr>
+            <p:nvPr/>
+          </p:nvPicPr>
+          <p:blipFill>
+            <a:blip>
+              <a:extLst>
+                <a:ext uri="{96DAC541-7B7A-43D3-8B79-37D633B846F1}">
+                  <asvg:svgBlip xmlns:asvg="http://schemas.microsoft.com/office/drawing/2016/SVG/main" r:embed="rId5"/>
+                </a:ext>
+              </a:extLst>
+            </a:blip>
+            <a:stretch>
+              <a:fillRect/>
+            </a:stretch>
+          </p:blipFill>
+          <p:spPr>
+            <a:xfrm>
+              <a:off x="7352653" y="1845590"/>
+              <a:ext cx="4429627" cy="1587283"/>
+            </a:xfrm>
+            <a:prstGeom prst="rect">
+              <a:avLst/>
+            </a:prstGeom>
+          </p:spPr>
+        </p:pic>
+      </p:grpSp>
+    </p:spTree>
+    <p:extLst>
+      <p:ext uri="{BB962C8B-B14F-4D97-AF65-F5344CB8AC3E}">
+        <p14:creationId xmlns:p14="http://schemas.microsoft.com/office/powerpoint/2010/main" val="4120683135"/>
+      </p:ext>
+    </p:extLst>
+  </p:cSld>
+  <p:clrMapOvr>
+    <a:masterClrMapping/>
+  </p:clrMapOvr>
+</p:sld>
+</file>
+
 <file path=ppt/slides/slide2.xml><?xml version="1.0" encoding="utf-8"?>
 <p:sld xmlns:a="http://schemas.openxmlformats.org/drawingml/2006/main" xmlns:r="http://schemas.openxmlformats.org/officeDocument/2006/relationships" xmlns:p="http://schemas.openxmlformats.org/presentationml/2006/main">
   <p:cSld>

--- a/figs/DIYfigures_pp.pptx
+++ b/figs/DIYfigures_pp.pptx
@@ -11308,7 +11308,14 @@
                   <a:latin typeface="Hiragino Sans W4" panose="020B0400000000000000" pitchFamily="34" charset="-128"/>
                   <a:ea typeface="Hiragino Sans W4" panose="020B0400000000000000" pitchFamily="34" charset="-128"/>
                 </a:rPr>
-                <a:t> (interest group)</a:t>
+                <a:t> </a:t>
+              </a:r>
+              <a:r>
+                <a:rPr kumimoji="1" lang="en-US" altLang="ja-JP" sz="3200" u="sng" dirty="0">
+                  <a:latin typeface="Hiragino Sans W4" panose="020B0400000000000000" pitchFamily="34" charset="-128"/>
+                  <a:ea typeface="Hiragino Sans W4" panose="020B0400000000000000" pitchFamily="34" charset="-128"/>
+                </a:rPr>
+                <a:t>(interest group)</a:t>
               </a:r>
             </a:p>
             <a:p>
@@ -11427,7 +11434,14 @@
                   <a:latin typeface="Hiragino Sans W4" panose="020B0400000000000000" pitchFamily="34" charset="-128"/>
                   <a:ea typeface="Hiragino Sans W4" panose="020B0400000000000000" pitchFamily="34" charset="-128"/>
                 </a:rPr>
-                <a:t> (organized interest)</a:t>
+                <a:t> </a:t>
+              </a:r>
+              <a:r>
+                <a:rPr kumimoji="1" lang="en-US" altLang="ja-JP" sz="3200" u="sng" dirty="0">
+                  <a:latin typeface="Hiragino Sans W4" panose="020B0400000000000000" pitchFamily="34" charset="-128"/>
+                  <a:ea typeface="Hiragino Sans W4" panose="020B0400000000000000" pitchFamily="34" charset="-128"/>
+                </a:rPr>
+                <a:t>(organized interest)</a:t>
               </a:r>
             </a:p>
             <a:p>
@@ -11561,10 +11575,17 @@
               </a:r>
               <a:r>
                 <a:rPr kumimoji="1" lang="en-US" altLang="ja-JP" sz="4000" u="sng" dirty="0">
+                  <a:latin typeface="Hiragino Kaku Gothic StdN W8" panose="020B0800000000000000" pitchFamily="34" charset="-128"/>
+                  <a:ea typeface="Hiragino Kaku Gothic StdN W8" panose="020B0800000000000000" pitchFamily="34" charset="-128"/>
+                </a:rPr>
+                <a:t> </a:t>
+              </a:r>
+              <a:r>
+                <a:rPr kumimoji="1" lang="en-US" altLang="ja-JP" sz="3200" u="sng" dirty="0">
                   <a:latin typeface="Hiragino Sans W4" panose="020B0400000000000000" pitchFamily="34" charset="-128"/>
                   <a:ea typeface="Hiragino Sans W4" panose="020B0400000000000000" pitchFamily="34" charset="-128"/>
                 </a:rPr>
-                <a:t>(organized interest)</a:t>
+                <a:t>(pressure group)</a:t>
               </a:r>
             </a:p>
             <a:p>

--- a/figs/DIYfigures_pp.pptx
+++ b/figs/DIYfigures_pp.pptx
@@ -21,6 +21,7 @@
     <p:sldId id="269" r:id="rId15"/>
     <p:sldId id="270" r:id="rId16"/>
     <p:sldId id="271" r:id="rId17"/>
+    <p:sldId id="272" r:id="rId18"/>
   </p:sldIdLst>
   <p:sldSz cx="12801600" cy="9601200" type="A3"/>
   <p:notesSz cx="6858000" cy="9144000"/>
@@ -258,7 +259,7 @@
           <a:p>
             <a:fld id="{DBD89380-344E-284F-BE0F-D796858BF56F}" type="datetimeFigureOut">
               <a:rPr kumimoji="1" lang="ja-JP" altLang="en-US" smtClean="0"/>
-              <a:t>2026/6/9</a:t>
+              <a:t>2026/6/15</a:t>
             </a:fld>
             <a:endParaRPr kumimoji="1" lang="ja-JP" altLang="en-US"/>
           </a:p>
@@ -460,7 +461,7 @@
           <a:p>
             <a:fld id="{DBD89380-344E-284F-BE0F-D796858BF56F}" type="datetimeFigureOut">
               <a:rPr kumimoji="1" lang="ja-JP" altLang="en-US" smtClean="0"/>
-              <a:t>2026/6/9</a:t>
+              <a:t>2026/6/15</a:t>
             </a:fld>
             <a:endParaRPr kumimoji="1" lang="ja-JP" altLang="en-US"/>
           </a:p>
@@ -672,7 +673,7 @@
           <a:p>
             <a:fld id="{DBD89380-344E-284F-BE0F-D796858BF56F}" type="datetimeFigureOut">
               <a:rPr kumimoji="1" lang="ja-JP" altLang="en-US" smtClean="0"/>
-              <a:t>2026/6/9</a:t>
+              <a:t>2026/6/15</a:t>
             </a:fld>
             <a:endParaRPr kumimoji="1" lang="ja-JP" altLang="en-US"/>
           </a:p>
@@ -874,7 +875,7 @@
           <a:p>
             <a:fld id="{DBD89380-344E-284F-BE0F-D796858BF56F}" type="datetimeFigureOut">
               <a:rPr kumimoji="1" lang="ja-JP" altLang="en-US" smtClean="0"/>
-              <a:t>2026/6/9</a:t>
+              <a:t>2026/6/15</a:t>
             </a:fld>
             <a:endParaRPr kumimoji="1" lang="ja-JP" altLang="en-US"/>
           </a:p>
@@ -1118,7 +1119,7 @@
           <a:p>
             <a:fld id="{DBD89380-344E-284F-BE0F-D796858BF56F}" type="datetimeFigureOut">
               <a:rPr kumimoji="1" lang="ja-JP" altLang="en-US" smtClean="0"/>
-              <a:t>2026/6/9</a:t>
+              <a:t>2026/6/15</a:t>
             </a:fld>
             <a:endParaRPr kumimoji="1" lang="ja-JP" altLang="en-US"/>
           </a:p>
@@ -1414,7 +1415,7 @@
           <a:p>
             <a:fld id="{DBD89380-344E-284F-BE0F-D796858BF56F}" type="datetimeFigureOut">
               <a:rPr kumimoji="1" lang="ja-JP" altLang="en-US" smtClean="0"/>
-              <a:t>2026/6/9</a:t>
+              <a:t>2026/6/15</a:t>
             </a:fld>
             <a:endParaRPr kumimoji="1" lang="ja-JP" altLang="en-US"/>
           </a:p>
@@ -1845,7 +1846,7 @@
           <a:p>
             <a:fld id="{DBD89380-344E-284F-BE0F-D796858BF56F}" type="datetimeFigureOut">
               <a:rPr kumimoji="1" lang="ja-JP" altLang="en-US" smtClean="0"/>
-              <a:t>2026/6/9</a:t>
+              <a:t>2026/6/15</a:t>
             </a:fld>
             <a:endParaRPr kumimoji="1" lang="ja-JP" altLang="en-US"/>
           </a:p>
@@ -1963,7 +1964,7 @@
           <a:p>
             <a:fld id="{DBD89380-344E-284F-BE0F-D796858BF56F}" type="datetimeFigureOut">
               <a:rPr kumimoji="1" lang="ja-JP" altLang="en-US" smtClean="0"/>
-              <a:t>2026/6/9</a:t>
+              <a:t>2026/6/15</a:t>
             </a:fld>
             <a:endParaRPr kumimoji="1" lang="ja-JP" altLang="en-US"/>
           </a:p>
@@ -2058,7 +2059,7 @@
           <a:p>
             <a:fld id="{DBD89380-344E-284F-BE0F-D796858BF56F}" type="datetimeFigureOut">
               <a:rPr kumimoji="1" lang="ja-JP" altLang="en-US" smtClean="0"/>
-              <a:t>2026/6/9</a:t>
+              <a:t>2026/6/15</a:t>
             </a:fld>
             <a:endParaRPr kumimoji="1" lang="ja-JP" altLang="en-US"/>
           </a:p>
@@ -2367,7 +2368,7 @@
           <a:p>
             <a:fld id="{DBD89380-344E-284F-BE0F-D796858BF56F}" type="datetimeFigureOut">
               <a:rPr kumimoji="1" lang="ja-JP" altLang="en-US" smtClean="0"/>
-              <a:t>2026/6/9</a:t>
+              <a:t>2026/6/15</a:t>
             </a:fld>
             <a:endParaRPr kumimoji="1" lang="ja-JP" altLang="en-US"/>
           </a:p>
@@ -2624,7 +2625,7 @@
           <a:p>
             <a:fld id="{DBD89380-344E-284F-BE0F-D796858BF56F}" type="datetimeFigureOut">
               <a:rPr kumimoji="1" lang="ja-JP" altLang="en-US" smtClean="0"/>
-              <a:t>2026/6/9</a:t>
+              <a:t>2026/6/15</a:t>
             </a:fld>
             <a:endParaRPr kumimoji="1" lang="ja-JP" altLang="en-US"/>
           </a:p>
@@ -2869,7 +2870,7 @@
           <a:p>
             <a:fld id="{DBD89380-344E-284F-BE0F-D796858BF56F}" type="datetimeFigureOut">
               <a:rPr kumimoji="1" lang="ja-JP" altLang="en-US" smtClean="0"/>
-              <a:t>2026/6/9</a:t>
+              <a:t>2026/6/15</a:t>
             </a:fld>
             <a:endParaRPr kumimoji="1" lang="ja-JP" altLang="en-US"/>
           </a:p>
@@ -11814,6 +11815,932 @@
 </p:sld>
 </file>
 
+<file path=ppt/slides/slide17.xml><?xml version="1.0" encoding="utf-8"?>
+<p:sld xmlns:a="http://schemas.openxmlformats.org/drawingml/2006/main" xmlns:r="http://schemas.openxmlformats.org/officeDocument/2006/relationships" xmlns:p="http://schemas.openxmlformats.org/presentationml/2006/main">
+  <p:cSld>
+    <p:spTree>
+      <p:nvGrpSpPr>
+        <p:cNvPr id="1" name=""/>
+        <p:cNvGrpSpPr/>
+        <p:nvPr/>
+      </p:nvGrpSpPr>
+      <p:grpSpPr>
+        <a:xfrm>
+          <a:off x="0" y="0"/>
+          <a:ext cx="0" cy="0"/>
+          <a:chOff x="0" y="0"/>
+          <a:chExt cx="0" cy="0"/>
+        </a:xfrm>
+      </p:grpSpPr>
+      <p:grpSp>
+        <p:nvGrpSpPr>
+          <p:cNvPr id="25" name="グループ化 24">
+            <a:extLst>
+              <a:ext uri="{FF2B5EF4-FFF2-40B4-BE49-F238E27FC236}">
+                <a16:creationId xmlns:a16="http://schemas.microsoft.com/office/drawing/2014/main" id="{D0D22EA7-51CA-5C92-92CD-1F24458BDEF3}"/>
+              </a:ext>
+            </a:extLst>
+          </p:cNvPr>
+          <p:cNvGrpSpPr/>
+          <p:nvPr/>
+        </p:nvGrpSpPr>
+        <p:grpSpPr>
+          <a:xfrm>
+            <a:off x="746782" y="960895"/>
+            <a:ext cx="11358208" cy="6960139"/>
+            <a:chOff x="746782" y="960895"/>
+            <a:chExt cx="11358208" cy="6960139"/>
+          </a:xfrm>
+        </p:grpSpPr>
+        <p:sp>
+          <p:nvSpPr>
+            <p:cNvPr id="2" name="角丸四角形 1">
+              <a:extLst>
+                <a:ext uri="{FF2B5EF4-FFF2-40B4-BE49-F238E27FC236}">
+                  <a16:creationId xmlns:a16="http://schemas.microsoft.com/office/drawing/2014/main" id="{5444705F-2363-561C-64FC-2623AAD874DE}"/>
+                </a:ext>
+              </a:extLst>
+            </p:cNvPr>
+            <p:cNvSpPr/>
+            <p:nvPr/>
+          </p:nvSpPr>
+          <p:spPr>
+            <a:xfrm>
+              <a:off x="4613547" y="960895"/>
+              <a:ext cx="3574506" cy="2357679"/>
+            </a:xfrm>
+            <a:prstGeom prst="roundRect">
+              <a:avLst/>
+            </a:prstGeom>
+            <a:noFill/>
+            <a:ln w="28575">
+              <a:solidFill>
+                <a:schemeClr val="tx1"/>
+              </a:solidFill>
+            </a:ln>
+          </p:spPr>
+          <p:style>
+            <a:lnRef idx="2">
+              <a:schemeClr val="accent1">
+                <a:shade val="15000"/>
+              </a:schemeClr>
+            </a:lnRef>
+            <a:fillRef idx="1">
+              <a:schemeClr val="accent1"/>
+            </a:fillRef>
+            <a:effectRef idx="0">
+              <a:schemeClr val="accent1"/>
+            </a:effectRef>
+            <a:fontRef idx="minor">
+              <a:schemeClr val="lt1"/>
+            </a:fontRef>
+          </p:style>
+          <p:txBody>
+            <a:bodyPr rtlCol="0" anchor="ctr"/>
+            <a:lstStyle/>
+            <a:p>
+              <a:pPr algn="ctr"/>
+              <a:endParaRPr kumimoji="1" lang="ja-JP" altLang="en-US"/>
+            </a:p>
+          </p:txBody>
+        </p:sp>
+        <p:sp>
+          <p:nvSpPr>
+            <p:cNvPr id="6" name="テキスト ボックス 5">
+              <a:extLst>
+                <a:ext uri="{FF2B5EF4-FFF2-40B4-BE49-F238E27FC236}">
+                  <a16:creationId xmlns:a16="http://schemas.microsoft.com/office/drawing/2014/main" id="{A6E9DF6D-031A-1971-F3D5-77096528DA75}"/>
+                </a:ext>
+              </a:extLst>
+            </p:cNvPr>
+            <p:cNvSpPr txBox="1"/>
+            <p:nvPr/>
+          </p:nvSpPr>
+          <p:spPr>
+            <a:xfrm>
+              <a:off x="5181008" y="1755013"/>
+              <a:ext cx="2439583" cy="769441"/>
+            </a:xfrm>
+            <a:prstGeom prst="rect">
+              <a:avLst/>
+            </a:prstGeom>
+            <a:noFill/>
+          </p:spPr>
+          <p:txBody>
+            <a:bodyPr wrap="square" rtlCol="0" anchor="ctr">
+              <a:spAutoFit/>
+            </a:bodyPr>
+            <a:lstStyle/>
+            <a:p>
+              <a:pPr algn="ctr"/>
+              <a:r>
+                <a:rPr kumimoji="1" lang="ja-JP" altLang="en-US" sz="4400">
+                  <a:latin typeface="Hiragino Kaku Gothic StdN W8" panose="020B0800000000000000" pitchFamily="34" charset="-128"/>
+                  <a:ea typeface="Hiragino Kaku Gothic StdN W8" panose="020B0800000000000000" pitchFamily="34" charset="-128"/>
+                </a:rPr>
+                <a:t>利益団体</a:t>
+              </a:r>
+            </a:p>
+          </p:txBody>
+        </p:sp>
+        <p:sp>
+          <p:nvSpPr>
+            <p:cNvPr id="7" name="角丸四角形 6">
+              <a:extLst>
+                <a:ext uri="{FF2B5EF4-FFF2-40B4-BE49-F238E27FC236}">
+                  <a16:creationId xmlns:a16="http://schemas.microsoft.com/office/drawing/2014/main" id="{7FA0E5B8-2E62-B7EC-423E-E5231D1C7435}"/>
+                </a:ext>
+              </a:extLst>
+            </p:cNvPr>
+            <p:cNvSpPr/>
+            <p:nvPr/>
+          </p:nvSpPr>
+          <p:spPr>
+            <a:xfrm>
+              <a:off x="1039041" y="5406326"/>
+              <a:ext cx="3574506" cy="2357679"/>
+            </a:xfrm>
+            <a:prstGeom prst="roundRect">
+              <a:avLst/>
+            </a:prstGeom>
+            <a:noFill/>
+            <a:ln w="28575">
+              <a:solidFill>
+                <a:schemeClr val="tx1"/>
+              </a:solidFill>
+            </a:ln>
+          </p:spPr>
+          <p:style>
+            <a:lnRef idx="2">
+              <a:schemeClr val="accent1">
+                <a:shade val="15000"/>
+              </a:schemeClr>
+            </a:lnRef>
+            <a:fillRef idx="1">
+              <a:schemeClr val="accent1"/>
+            </a:fillRef>
+            <a:effectRef idx="0">
+              <a:schemeClr val="accent1"/>
+            </a:effectRef>
+            <a:fontRef idx="minor">
+              <a:schemeClr val="lt1"/>
+            </a:fontRef>
+          </p:style>
+          <p:txBody>
+            <a:bodyPr rtlCol="0" anchor="ctr"/>
+            <a:lstStyle/>
+            <a:p>
+              <a:pPr algn="ctr"/>
+              <a:endParaRPr kumimoji="1" lang="ja-JP" altLang="en-US"/>
+            </a:p>
+          </p:txBody>
+        </p:sp>
+        <p:sp>
+          <p:nvSpPr>
+            <p:cNvPr id="8" name="テキスト ボックス 7">
+              <a:extLst>
+                <a:ext uri="{FF2B5EF4-FFF2-40B4-BE49-F238E27FC236}">
+                  <a16:creationId xmlns:a16="http://schemas.microsoft.com/office/drawing/2014/main" id="{CD59E102-84B0-A110-F7BC-22468A9198B8}"/>
+                </a:ext>
+              </a:extLst>
+            </p:cNvPr>
+            <p:cNvSpPr txBox="1"/>
+            <p:nvPr/>
+          </p:nvSpPr>
+          <p:spPr>
+            <a:xfrm>
+              <a:off x="1606502" y="6200444"/>
+              <a:ext cx="2439583" cy="769441"/>
+            </a:xfrm>
+            <a:prstGeom prst="rect">
+              <a:avLst/>
+            </a:prstGeom>
+            <a:noFill/>
+          </p:spPr>
+          <p:txBody>
+            <a:bodyPr wrap="square" rtlCol="0" anchor="ctr">
+              <a:spAutoFit/>
+            </a:bodyPr>
+            <a:lstStyle/>
+            <a:p>
+              <a:pPr algn="ctr"/>
+              <a:r>
+                <a:rPr kumimoji="1" lang="ja-JP" altLang="en-US" sz="4400">
+                  <a:latin typeface="Hiragino Kaku Gothic StdN W8" panose="020B0800000000000000" pitchFamily="34" charset="-128"/>
+                  <a:ea typeface="Hiragino Kaku Gothic StdN W8" panose="020B0800000000000000" pitchFamily="34" charset="-128"/>
+                </a:rPr>
+                <a:t>政治家</a:t>
+              </a:r>
+            </a:p>
+          </p:txBody>
+        </p:sp>
+        <p:sp>
+          <p:nvSpPr>
+            <p:cNvPr id="9" name="角丸四角形 8">
+              <a:extLst>
+                <a:ext uri="{FF2B5EF4-FFF2-40B4-BE49-F238E27FC236}">
+                  <a16:creationId xmlns:a16="http://schemas.microsoft.com/office/drawing/2014/main" id="{E446D13B-6BDA-A05B-FEAB-9B905FE90026}"/>
+                </a:ext>
+              </a:extLst>
+            </p:cNvPr>
+            <p:cNvSpPr/>
+            <p:nvPr/>
+          </p:nvSpPr>
+          <p:spPr>
+            <a:xfrm>
+              <a:off x="8188053" y="5406326"/>
+              <a:ext cx="3574506" cy="2357679"/>
+            </a:xfrm>
+            <a:prstGeom prst="roundRect">
+              <a:avLst/>
+            </a:prstGeom>
+            <a:noFill/>
+            <a:ln w="28575">
+              <a:solidFill>
+                <a:schemeClr val="tx1"/>
+              </a:solidFill>
+            </a:ln>
+          </p:spPr>
+          <p:style>
+            <a:lnRef idx="2">
+              <a:schemeClr val="accent1">
+                <a:shade val="15000"/>
+              </a:schemeClr>
+            </a:lnRef>
+            <a:fillRef idx="1">
+              <a:schemeClr val="accent1"/>
+            </a:fillRef>
+            <a:effectRef idx="0">
+              <a:schemeClr val="accent1"/>
+            </a:effectRef>
+            <a:fontRef idx="minor">
+              <a:schemeClr val="lt1"/>
+            </a:fontRef>
+          </p:style>
+          <p:txBody>
+            <a:bodyPr rtlCol="0" anchor="ctr"/>
+            <a:lstStyle/>
+            <a:p>
+              <a:pPr algn="ctr"/>
+              <a:endParaRPr kumimoji="1" lang="ja-JP" altLang="en-US"/>
+            </a:p>
+          </p:txBody>
+        </p:sp>
+        <p:sp>
+          <p:nvSpPr>
+            <p:cNvPr id="10" name="テキスト ボックス 9">
+              <a:extLst>
+                <a:ext uri="{FF2B5EF4-FFF2-40B4-BE49-F238E27FC236}">
+                  <a16:creationId xmlns:a16="http://schemas.microsoft.com/office/drawing/2014/main" id="{7FB546EF-7C9E-D6B2-137C-4FBE3905C785}"/>
+                </a:ext>
+              </a:extLst>
+            </p:cNvPr>
+            <p:cNvSpPr txBox="1"/>
+            <p:nvPr/>
+          </p:nvSpPr>
+          <p:spPr>
+            <a:xfrm>
+              <a:off x="8755514" y="6200444"/>
+              <a:ext cx="2439583" cy="769441"/>
+            </a:xfrm>
+            <a:prstGeom prst="rect">
+              <a:avLst/>
+            </a:prstGeom>
+            <a:noFill/>
+          </p:spPr>
+          <p:txBody>
+            <a:bodyPr wrap="square" rtlCol="0" anchor="ctr">
+              <a:spAutoFit/>
+            </a:bodyPr>
+            <a:lstStyle/>
+            <a:p>
+              <a:pPr algn="ctr"/>
+              <a:r>
+                <a:rPr kumimoji="1" lang="ja-JP" altLang="en-US" sz="4400">
+                  <a:latin typeface="Hiragino Kaku Gothic StdN W8" panose="020B0800000000000000" pitchFamily="34" charset="-128"/>
+                  <a:ea typeface="Hiragino Kaku Gothic StdN W8" panose="020B0800000000000000" pitchFamily="34" charset="-128"/>
+                </a:rPr>
+                <a:t>官僚</a:t>
+              </a:r>
+            </a:p>
+          </p:txBody>
+        </p:sp>
+        <p:sp>
+          <p:nvSpPr>
+            <p:cNvPr id="11" name="下矢印 10">
+              <a:extLst>
+                <a:ext uri="{FF2B5EF4-FFF2-40B4-BE49-F238E27FC236}">
+                  <a16:creationId xmlns:a16="http://schemas.microsoft.com/office/drawing/2014/main" id="{1CCE5B5A-1AD2-EFF1-13E5-254A8536B666}"/>
+                </a:ext>
+              </a:extLst>
+            </p:cNvPr>
+            <p:cNvSpPr/>
+            <p:nvPr/>
+          </p:nvSpPr>
+          <p:spPr>
+            <a:xfrm rot="16200000">
+              <a:off x="6230318" y="4580870"/>
+              <a:ext cx="340964" cy="2898183"/>
+            </a:xfrm>
+            <a:prstGeom prst="downArrow">
+              <a:avLst/>
+            </a:prstGeom>
+            <a:solidFill>
+              <a:schemeClr val="tx1"/>
+            </a:solidFill>
+            <a:ln>
+              <a:noFill/>
+            </a:ln>
+          </p:spPr>
+          <p:style>
+            <a:lnRef idx="2">
+              <a:schemeClr val="accent1">
+                <a:shade val="15000"/>
+              </a:schemeClr>
+            </a:lnRef>
+            <a:fillRef idx="1">
+              <a:schemeClr val="accent1"/>
+            </a:fillRef>
+            <a:effectRef idx="0">
+              <a:schemeClr val="accent1"/>
+            </a:effectRef>
+            <a:fontRef idx="minor">
+              <a:schemeClr val="lt1"/>
+            </a:fontRef>
+          </p:style>
+          <p:txBody>
+            <a:bodyPr rtlCol="0" anchor="ctr"/>
+            <a:lstStyle/>
+            <a:p>
+              <a:pPr algn="ctr"/>
+              <a:endParaRPr kumimoji="1" lang="ja-JP" altLang="en-US"/>
+            </a:p>
+          </p:txBody>
+        </p:sp>
+        <p:sp>
+          <p:nvSpPr>
+            <p:cNvPr id="12" name="下矢印 11">
+              <a:extLst>
+                <a:ext uri="{FF2B5EF4-FFF2-40B4-BE49-F238E27FC236}">
+                  <a16:creationId xmlns:a16="http://schemas.microsoft.com/office/drawing/2014/main" id="{55CA0CD9-1DC7-3559-EFB7-C8F49DE89332}"/>
+                </a:ext>
+              </a:extLst>
+            </p:cNvPr>
+            <p:cNvSpPr/>
+            <p:nvPr/>
+          </p:nvSpPr>
+          <p:spPr>
+            <a:xfrm rot="5400000">
+              <a:off x="6230316" y="5691276"/>
+              <a:ext cx="340964" cy="2898183"/>
+            </a:xfrm>
+            <a:prstGeom prst="downArrow">
+              <a:avLst/>
+            </a:prstGeom>
+            <a:solidFill>
+              <a:schemeClr val="tx1"/>
+            </a:solidFill>
+            <a:ln>
+              <a:noFill/>
+            </a:ln>
+          </p:spPr>
+          <p:style>
+            <a:lnRef idx="2">
+              <a:schemeClr val="accent1">
+                <a:shade val="15000"/>
+              </a:schemeClr>
+            </a:lnRef>
+            <a:fillRef idx="1">
+              <a:schemeClr val="accent1"/>
+            </a:fillRef>
+            <a:effectRef idx="0">
+              <a:schemeClr val="accent1"/>
+            </a:effectRef>
+            <a:fontRef idx="minor">
+              <a:schemeClr val="lt1"/>
+            </a:fontRef>
+          </p:style>
+          <p:txBody>
+            <a:bodyPr rtlCol="0" anchor="ctr"/>
+            <a:lstStyle/>
+            <a:p>
+              <a:pPr algn="ctr"/>
+              <a:endParaRPr kumimoji="1" lang="ja-JP" altLang="en-US"/>
+            </a:p>
+          </p:txBody>
+        </p:sp>
+        <p:grpSp>
+          <p:nvGrpSpPr>
+            <p:cNvPr id="15" name="グループ化 14">
+              <a:extLst>
+                <a:ext uri="{FF2B5EF4-FFF2-40B4-BE49-F238E27FC236}">
+                  <a16:creationId xmlns:a16="http://schemas.microsoft.com/office/drawing/2014/main" id="{E99B7208-9C26-596C-840F-DE7F6601286F}"/>
+                </a:ext>
+              </a:extLst>
+            </p:cNvPr>
+            <p:cNvGrpSpPr/>
+            <p:nvPr/>
+          </p:nvGrpSpPr>
+          <p:grpSpPr>
+            <a:xfrm rot="18946011">
+              <a:off x="1789026" y="3149823"/>
+              <a:ext cx="2898185" cy="1451370"/>
+              <a:chOff x="1715361" y="2648985"/>
+              <a:chExt cx="2898185" cy="1451370"/>
+            </a:xfrm>
+          </p:grpSpPr>
+          <p:sp>
+            <p:nvSpPr>
+              <p:cNvPr id="13" name="下矢印 12">
+                <a:extLst>
+                  <a:ext uri="{FF2B5EF4-FFF2-40B4-BE49-F238E27FC236}">
+                    <a16:creationId xmlns:a16="http://schemas.microsoft.com/office/drawing/2014/main" id="{EA18E6E5-13B3-BE80-A13F-ADA4F1FDDC02}"/>
+                  </a:ext>
+                </a:extLst>
+              </p:cNvPr>
+              <p:cNvSpPr/>
+              <p:nvPr/>
+            </p:nvSpPr>
+            <p:spPr>
+              <a:xfrm rot="16200000">
+                <a:off x="2993973" y="1370375"/>
+                <a:ext cx="340964" cy="2898183"/>
+              </a:xfrm>
+              <a:prstGeom prst="downArrow">
+                <a:avLst/>
+              </a:prstGeom>
+              <a:solidFill>
+                <a:schemeClr val="tx1"/>
+              </a:solidFill>
+              <a:ln>
+                <a:noFill/>
+              </a:ln>
+            </p:spPr>
+            <p:style>
+              <a:lnRef idx="2">
+                <a:schemeClr val="accent1">
+                  <a:shade val="15000"/>
+                </a:schemeClr>
+              </a:lnRef>
+              <a:fillRef idx="1">
+                <a:schemeClr val="accent1"/>
+              </a:fillRef>
+              <a:effectRef idx="0">
+                <a:schemeClr val="accent1"/>
+              </a:effectRef>
+              <a:fontRef idx="minor">
+                <a:schemeClr val="lt1"/>
+              </a:fontRef>
+            </p:style>
+            <p:txBody>
+              <a:bodyPr rtlCol="0" anchor="ctr"/>
+              <a:lstStyle/>
+              <a:p>
+                <a:pPr algn="ctr"/>
+                <a:endParaRPr kumimoji="1" lang="ja-JP" altLang="en-US"/>
+              </a:p>
+            </p:txBody>
+          </p:sp>
+          <p:sp>
+            <p:nvSpPr>
+              <p:cNvPr id="14" name="下矢印 13">
+                <a:extLst>
+                  <a:ext uri="{FF2B5EF4-FFF2-40B4-BE49-F238E27FC236}">
+                    <a16:creationId xmlns:a16="http://schemas.microsoft.com/office/drawing/2014/main" id="{330F52D8-5313-25BD-FB15-5251A8E29851}"/>
+                  </a:ext>
+                </a:extLst>
+              </p:cNvPr>
+              <p:cNvSpPr/>
+              <p:nvPr/>
+            </p:nvSpPr>
+            <p:spPr>
+              <a:xfrm rot="5400000">
+                <a:off x="2993971" y="2480781"/>
+                <a:ext cx="340964" cy="2898183"/>
+              </a:xfrm>
+              <a:prstGeom prst="downArrow">
+                <a:avLst/>
+              </a:prstGeom>
+              <a:solidFill>
+                <a:schemeClr val="tx1"/>
+              </a:solidFill>
+              <a:ln>
+                <a:noFill/>
+              </a:ln>
+            </p:spPr>
+            <p:style>
+              <a:lnRef idx="2">
+                <a:schemeClr val="accent1">
+                  <a:shade val="15000"/>
+                </a:schemeClr>
+              </a:lnRef>
+              <a:fillRef idx="1">
+                <a:schemeClr val="accent1"/>
+              </a:fillRef>
+              <a:effectRef idx="0">
+                <a:schemeClr val="accent1"/>
+              </a:effectRef>
+              <a:fontRef idx="minor">
+                <a:schemeClr val="lt1"/>
+              </a:fontRef>
+            </p:style>
+            <p:txBody>
+              <a:bodyPr rtlCol="0" anchor="ctr"/>
+              <a:lstStyle/>
+              <a:p>
+                <a:pPr algn="ctr"/>
+                <a:endParaRPr kumimoji="1" lang="ja-JP" altLang="en-US"/>
+              </a:p>
+            </p:txBody>
+          </p:sp>
+        </p:grpSp>
+        <p:grpSp>
+          <p:nvGrpSpPr>
+            <p:cNvPr id="16" name="グループ化 15">
+              <a:extLst>
+                <a:ext uri="{FF2B5EF4-FFF2-40B4-BE49-F238E27FC236}">
+                  <a16:creationId xmlns:a16="http://schemas.microsoft.com/office/drawing/2014/main" id="{7D5E2D45-F751-8ECD-D05D-F2FC3F014C8C}"/>
+                </a:ext>
+              </a:extLst>
+            </p:cNvPr>
+            <p:cNvGrpSpPr/>
+            <p:nvPr/>
+          </p:nvGrpSpPr>
+          <p:grpSpPr>
+            <a:xfrm rot="2748835">
+              <a:off x="8128519" y="3135727"/>
+              <a:ext cx="2898185" cy="1451370"/>
+              <a:chOff x="1715361" y="2648985"/>
+              <a:chExt cx="2898185" cy="1451370"/>
+            </a:xfrm>
+          </p:grpSpPr>
+          <p:sp>
+            <p:nvSpPr>
+              <p:cNvPr id="17" name="下矢印 16">
+                <a:extLst>
+                  <a:ext uri="{FF2B5EF4-FFF2-40B4-BE49-F238E27FC236}">
+                    <a16:creationId xmlns:a16="http://schemas.microsoft.com/office/drawing/2014/main" id="{BEFCFB73-255E-966C-88CD-0C407AA17A91}"/>
+                  </a:ext>
+                </a:extLst>
+              </p:cNvPr>
+              <p:cNvSpPr/>
+              <p:nvPr/>
+            </p:nvSpPr>
+            <p:spPr>
+              <a:xfrm rot="16200000">
+                <a:off x="2993973" y="1370375"/>
+                <a:ext cx="340964" cy="2898183"/>
+              </a:xfrm>
+              <a:prstGeom prst="downArrow">
+                <a:avLst/>
+              </a:prstGeom>
+              <a:solidFill>
+                <a:schemeClr val="tx1"/>
+              </a:solidFill>
+              <a:ln>
+                <a:noFill/>
+              </a:ln>
+            </p:spPr>
+            <p:style>
+              <a:lnRef idx="2">
+                <a:schemeClr val="accent1">
+                  <a:shade val="15000"/>
+                </a:schemeClr>
+              </a:lnRef>
+              <a:fillRef idx="1">
+                <a:schemeClr val="accent1"/>
+              </a:fillRef>
+              <a:effectRef idx="0">
+                <a:schemeClr val="accent1"/>
+              </a:effectRef>
+              <a:fontRef idx="minor">
+                <a:schemeClr val="lt1"/>
+              </a:fontRef>
+            </p:style>
+            <p:txBody>
+              <a:bodyPr rtlCol="0" anchor="ctr"/>
+              <a:lstStyle/>
+              <a:p>
+                <a:pPr algn="ctr"/>
+                <a:endParaRPr kumimoji="1" lang="ja-JP" altLang="en-US"/>
+              </a:p>
+            </p:txBody>
+          </p:sp>
+          <p:sp>
+            <p:nvSpPr>
+              <p:cNvPr id="18" name="下矢印 17">
+                <a:extLst>
+                  <a:ext uri="{FF2B5EF4-FFF2-40B4-BE49-F238E27FC236}">
+                    <a16:creationId xmlns:a16="http://schemas.microsoft.com/office/drawing/2014/main" id="{C867BBAA-D320-7BE8-CE54-2E28DA1FF54F}"/>
+                  </a:ext>
+                </a:extLst>
+              </p:cNvPr>
+              <p:cNvSpPr/>
+              <p:nvPr/>
+            </p:nvSpPr>
+            <p:spPr>
+              <a:xfrm rot="5400000">
+                <a:off x="2993971" y="2480781"/>
+                <a:ext cx="340964" cy="2898183"/>
+              </a:xfrm>
+              <a:prstGeom prst="downArrow">
+                <a:avLst/>
+              </a:prstGeom>
+              <a:solidFill>
+                <a:schemeClr val="tx1"/>
+              </a:solidFill>
+              <a:ln>
+                <a:noFill/>
+              </a:ln>
+            </p:spPr>
+            <p:style>
+              <a:lnRef idx="2">
+                <a:schemeClr val="accent1">
+                  <a:shade val="15000"/>
+                </a:schemeClr>
+              </a:lnRef>
+              <a:fillRef idx="1">
+                <a:schemeClr val="accent1"/>
+              </a:fillRef>
+              <a:effectRef idx="0">
+                <a:schemeClr val="accent1"/>
+              </a:effectRef>
+              <a:fontRef idx="minor">
+                <a:schemeClr val="lt1"/>
+              </a:fontRef>
+            </p:style>
+            <p:txBody>
+              <a:bodyPr rtlCol="0" anchor="ctr"/>
+              <a:lstStyle/>
+              <a:p>
+                <a:pPr algn="ctr"/>
+                <a:endParaRPr kumimoji="1" lang="ja-JP" altLang="en-US"/>
+              </a:p>
+            </p:txBody>
+          </p:sp>
+        </p:grpSp>
+        <p:sp>
+          <p:nvSpPr>
+            <p:cNvPr id="19" name="テキスト ボックス 18">
+              <a:extLst>
+                <a:ext uri="{FF2B5EF4-FFF2-40B4-BE49-F238E27FC236}">
+                  <a16:creationId xmlns:a16="http://schemas.microsoft.com/office/drawing/2014/main" id="{14029790-E533-3F8E-89E7-8548F16BC61C}"/>
+                </a:ext>
+              </a:extLst>
+            </p:cNvPr>
+            <p:cNvSpPr txBox="1"/>
+            <p:nvPr/>
+          </p:nvSpPr>
+          <p:spPr>
+            <a:xfrm>
+              <a:off x="746782" y="2890633"/>
+              <a:ext cx="2439583" cy="584775"/>
+            </a:xfrm>
+            <a:prstGeom prst="rect">
+              <a:avLst/>
+            </a:prstGeom>
+            <a:noFill/>
+          </p:spPr>
+          <p:txBody>
+            <a:bodyPr wrap="square" rtlCol="0" anchor="ctr">
+              <a:spAutoFit/>
+            </a:bodyPr>
+            <a:lstStyle/>
+            <a:p>
+              <a:pPr algn="ctr"/>
+              <a:r>
+                <a:rPr kumimoji="1" lang="ja-JP" altLang="en-US" sz="3200">
+                  <a:latin typeface="Hiragino Sans W4" panose="020B0400000000000000" pitchFamily="34" charset="-128"/>
+                  <a:ea typeface="Hiragino Sans W4" panose="020B0400000000000000" pitchFamily="34" charset="-128"/>
+                </a:rPr>
+                <a:t>票・カネ</a:t>
+              </a:r>
+            </a:p>
+          </p:txBody>
+        </p:sp>
+        <p:sp>
+          <p:nvSpPr>
+            <p:cNvPr id="20" name="テキスト ボックス 19">
+              <a:extLst>
+                <a:ext uri="{FF2B5EF4-FFF2-40B4-BE49-F238E27FC236}">
+                  <a16:creationId xmlns:a16="http://schemas.microsoft.com/office/drawing/2014/main" id="{79380E9C-19C4-BC66-57FE-2067E6F0FC95}"/>
+                </a:ext>
+              </a:extLst>
+            </p:cNvPr>
+            <p:cNvSpPr txBox="1"/>
+            <p:nvPr/>
+          </p:nvSpPr>
+          <p:spPr>
+            <a:xfrm>
+              <a:off x="3625416" y="4215825"/>
+              <a:ext cx="2439583" cy="584775"/>
+            </a:xfrm>
+            <a:prstGeom prst="rect">
+              <a:avLst/>
+            </a:prstGeom>
+            <a:noFill/>
+          </p:spPr>
+          <p:txBody>
+            <a:bodyPr wrap="square" rtlCol="0" anchor="ctr">
+              <a:spAutoFit/>
+            </a:bodyPr>
+            <a:lstStyle/>
+            <a:p>
+              <a:pPr algn="ctr"/>
+              <a:r>
+                <a:rPr kumimoji="1" lang="ja-JP" altLang="en-US" sz="3200">
+                  <a:latin typeface="Hiragino Sans W4" panose="020B0400000000000000" pitchFamily="34" charset="-128"/>
+                  <a:ea typeface="Hiragino Sans W4" panose="020B0400000000000000" pitchFamily="34" charset="-128"/>
+                </a:rPr>
+                <a:t>有利な政策</a:t>
+              </a:r>
+            </a:p>
+          </p:txBody>
+        </p:sp>
+        <p:sp>
+          <p:nvSpPr>
+            <p:cNvPr id="21" name="テキスト ボックス 20">
+              <a:extLst>
+                <a:ext uri="{FF2B5EF4-FFF2-40B4-BE49-F238E27FC236}">
+                  <a16:creationId xmlns:a16="http://schemas.microsoft.com/office/drawing/2014/main" id="{080E85C4-3030-DCF6-3F08-ECAAE2EBDB97}"/>
+                </a:ext>
+              </a:extLst>
+            </p:cNvPr>
+            <p:cNvSpPr txBox="1"/>
+            <p:nvPr/>
+          </p:nvSpPr>
+          <p:spPr>
+            <a:xfrm>
+              <a:off x="6861250" y="4214929"/>
+              <a:ext cx="2439583" cy="584775"/>
+            </a:xfrm>
+            <a:prstGeom prst="rect">
+              <a:avLst/>
+            </a:prstGeom>
+            <a:noFill/>
+          </p:spPr>
+          <p:txBody>
+            <a:bodyPr wrap="square" rtlCol="0" anchor="ctr">
+              <a:spAutoFit/>
+            </a:bodyPr>
+            <a:lstStyle/>
+            <a:p>
+              <a:pPr algn="ctr"/>
+              <a:r>
+                <a:rPr kumimoji="1" lang="ja-JP" altLang="en-US" sz="3200">
+                  <a:latin typeface="Hiragino Sans W4" panose="020B0400000000000000" pitchFamily="34" charset="-128"/>
+                  <a:ea typeface="Hiragino Sans W4" panose="020B0400000000000000" pitchFamily="34" charset="-128"/>
+                </a:rPr>
+                <a:t>有利な政策</a:t>
+              </a:r>
+            </a:p>
+          </p:txBody>
+        </p:sp>
+        <p:sp>
+          <p:nvSpPr>
+            <p:cNvPr id="22" name="テキスト ボックス 21">
+              <a:extLst>
+                <a:ext uri="{FF2B5EF4-FFF2-40B4-BE49-F238E27FC236}">
+                  <a16:creationId xmlns:a16="http://schemas.microsoft.com/office/drawing/2014/main" id="{F4BBBE1B-0E12-E3C5-A459-EFA5642BC3E1}"/>
+                </a:ext>
+              </a:extLst>
+            </p:cNvPr>
+            <p:cNvSpPr txBox="1"/>
+            <p:nvPr/>
+          </p:nvSpPr>
+          <p:spPr>
+            <a:xfrm>
+              <a:off x="9665407" y="2379392"/>
+              <a:ext cx="2439583" cy="1077218"/>
+            </a:xfrm>
+            <a:prstGeom prst="rect">
+              <a:avLst/>
+            </a:prstGeom>
+            <a:noFill/>
+          </p:spPr>
+          <p:txBody>
+            <a:bodyPr wrap="square" rtlCol="0" anchor="ctr">
+              <a:spAutoFit/>
+            </a:bodyPr>
+            <a:lstStyle/>
+            <a:p>
+              <a:pPr algn="ctr"/>
+              <a:r>
+                <a:rPr kumimoji="1" lang="ja-JP" altLang="en-US" sz="3200">
+                  <a:latin typeface="Hiragino Sans W4" panose="020B0400000000000000" pitchFamily="34" charset="-128"/>
+                  <a:ea typeface="Hiragino Sans W4" panose="020B0400000000000000" pitchFamily="34" charset="-128"/>
+                </a:rPr>
+                <a:t>天下り先・</a:t>
+              </a:r>
+              <a:endParaRPr kumimoji="1" lang="en-US" altLang="ja-JP" sz="3200" dirty="0">
+                <a:latin typeface="Hiragino Sans W4" panose="020B0400000000000000" pitchFamily="34" charset="-128"/>
+                <a:ea typeface="Hiragino Sans W4" panose="020B0400000000000000" pitchFamily="34" charset="-128"/>
+              </a:endParaRPr>
+            </a:p>
+            <a:p>
+              <a:pPr algn="ctr"/>
+              <a:r>
+                <a:rPr kumimoji="1" lang="ja-JP" altLang="en-US" sz="3200">
+                  <a:latin typeface="Hiragino Sans W4" panose="020B0400000000000000" pitchFamily="34" charset="-128"/>
+                  <a:ea typeface="Hiragino Sans W4" panose="020B0400000000000000" pitchFamily="34" charset="-128"/>
+                </a:rPr>
+                <a:t>政策支援</a:t>
+              </a:r>
+            </a:p>
+          </p:txBody>
+        </p:sp>
+        <p:sp>
+          <p:nvSpPr>
+            <p:cNvPr id="23" name="テキスト ボックス 22">
+              <a:extLst>
+                <a:ext uri="{FF2B5EF4-FFF2-40B4-BE49-F238E27FC236}">
+                  <a16:creationId xmlns:a16="http://schemas.microsoft.com/office/drawing/2014/main" id="{4D43D604-E3CB-1680-8903-7B7D4E56D270}"/>
+                </a:ext>
+              </a:extLst>
+            </p:cNvPr>
+            <p:cNvSpPr txBox="1"/>
+            <p:nvPr/>
+          </p:nvSpPr>
+          <p:spPr>
+            <a:xfrm>
+              <a:off x="4708306" y="7336259"/>
+              <a:ext cx="3141584" cy="584775"/>
+            </a:xfrm>
+            <a:prstGeom prst="rect">
+              <a:avLst/>
+            </a:prstGeom>
+            <a:noFill/>
+          </p:spPr>
+          <p:txBody>
+            <a:bodyPr wrap="square" rtlCol="0" anchor="ctr">
+              <a:spAutoFit/>
+            </a:bodyPr>
+            <a:lstStyle/>
+            <a:p>
+              <a:pPr algn="ctr"/>
+              <a:r>
+                <a:rPr kumimoji="1" lang="ja-JP" altLang="en-US" sz="3200">
+                  <a:latin typeface="Hiragino Sans W4" panose="020B0400000000000000" pitchFamily="34" charset="-128"/>
+                  <a:ea typeface="Hiragino Sans W4" panose="020B0400000000000000" pitchFamily="34" charset="-128"/>
+                </a:rPr>
+                <a:t>専門知識・情報</a:t>
+              </a:r>
+            </a:p>
+          </p:txBody>
+        </p:sp>
+        <p:sp>
+          <p:nvSpPr>
+            <p:cNvPr id="24" name="テキスト ボックス 23">
+              <a:extLst>
+                <a:ext uri="{FF2B5EF4-FFF2-40B4-BE49-F238E27FC236}">
+                  <a16:creationId xmlns:a16="http://schemas.microsoft.com/office/drawing/2014/main" id="{8A9BD05C-8695-B7EF-B3DE-072F73488E87}"/>
+                </a:ext>
+              </a:extLst>
+            </p:cNvPr>
+            <p:cNvSpPr txBox="1"/>
+            <p:nvPr/>
+          </p:nvSpPr>
+          <p:spPr>
+            <a:xfrm>
+              <a:off x="4819803" y="5276757"/>
+              <a:ext cx="3161994" cy="584775"/>
+            </a:xfrm>
+            <a:prstGeom prst="rect">
+              <a:avLst/>
+            </a:prstGeom>
+            <a:noFill/>
+          </p:spPr>
+          <p:txBody>
+            <a:bodyPr wrap="square" rtlCol="0" anchor="ctr">
+              <a:spAutoFit/>
+            </a:bodyPr>
+            <a:lstStyle/>
+            <a:p>
+              <a:pPr algn="ctr"/>
+              <a:r>
+                <a:rPr kumimoji="1" lang="ja-JP" altLang="en-US" sz="3200">
+                  <a:latin typeface="Hiragino Sans W4" panose="020B0400000000000000" pitchFamily="34" charset="-128"/>
+                  <a:ea typeface="Hiragino Sans W4" panose="020B0400000000000000" pitchFamily="34" charset="-128"/>
+                </a:rPr>
+                <a:t>出世のチャンス</a:t>
+              </a:r>
+            </a:p>
+          </p:txBody>
+        </p:sp>
+      </p:grpSp>
+    </p:spTree>
+    <p:extLst>
+      <p:ext uri="{BB962C8B-B14F-4D97-AF65-F5344CB8AC3E}">
+        <p14:creationId xmlns:p14="http://schemas.microsoft.com/office/powerpoint/2010/main" val="1329324493"/>
+      </p:ext>
+    </p:extLst>
+  </p:cSld>
+  <p:clrMapOvr>
+    <a:masterClrMapping/>
+  </p:clrMapOvr>
+</p:sld>
+</file>
+
 <file path=ppt/slides/slide2.xml><?xml version="1.0" encoding="utf-8"?>
 <p:sld xmlns:a="http://schemas.openxmlformats.org/drawingml/2006/main" xmlns:r="http://schemas.openxmlformats.org/officeDocument/2006/relationships" xmlns:p="http://schemas.openxmlformats.org/presentationml/2006/main">
   <p:cSld>

--- a/figs/DIYfigures_pp.pptx
+++ b/figs/DIYfigures_pp.pptx
@@ -22,6 +22,9 @@
     <p:sldId id="270" r:id="rId16"/>
     <p:sldId id="271" r:id="rId17"/>
     <p:sldId id="272" r:id="rId18"/>
+    <p:sldId id="273" r:id="rId19"/>
+    <p:sldId id="274" r:id="rId20"/>
+    <p:sldId id="275" r:id="rId21"/>
   </p:sldIdLst>
   <p:sldSz cx="12801600" cy="9601200" type="A3"/>
   <p:notesSz cx="6858000" cy="9144000"/>
@@ -259,7 +262,7 @@
           <a:p>
             <a:fld id="{DBD89380-344E-284F-BE0F-D796858BF56F}" type="datetimeFigureOut">
               <a:rPr kumimoji="1" lang="ja-JP" altLang="en-US" smtClean="0"/>
-              <a:t>2026/6/15</a:t>
+              <a:t>2026/6/25</a:t>
             </a:fld>
             <a:endParaRPr kumimoji="1" lang="ja-JP" altLang="en-US"/>
           </a:p>
@@ -461,7 +464,7 @@
           <a:p>
             <a:fld id="{DBD89380-344E-284F-BE0F-D796858BF56F}" type="datetimeFigureOut">
               <a:rPr kumimoji="1" lang="ja-JP" altLang="en-US" smtClean="0"/>
-              <a:t>2026/6/15</a:t>
+              <a:t>2026/6/25</a:t>
             </a:fld>
             <a:endParaRPr kumimoji="1" lang="ja-JP" altLang="en-US"/>
           </a:p>
@@ -673,7 +676,7 @@
           <a:p>
             <a:fld id="{DBD89380-344E-284F-BE0F-D796858BF56F}" type="datetimeFigureOut">
               <a:rPr kumimoji="1" lang="ja-JP" altLang="en-US" smtClean="0"/>
-              <a:t>2026/6/15</a:t>
+              <a:t>2026/6/25</a:t>
             </a:fld>
             <a:endParaRPr kumimoji="1" lang="ja-JP" altLang="en-US"/>
           </a:p>
@@ -875,7 +878,7 @@
           <a:p>
             <a:fld id="{DBD89380-344E-284F-BE0F-D796858BF56F}" type="datetimeFigureOut">
               <a:rPr kumimoji="1" lang="ja-JP" altLang="en-US" smtClean="0"/>
-              <a:t>2026/6/15</a:t>
+              <a:t>2026/6/25</a:t>
             </a:fld>
             <a:endParaRPr kumimoji="1" lang="ja-JP" altLang="en-US"/>
           </a:p>
@@ -1119,7 +1122,7 @@
           <a:p>
             <a:fld id="{DBD89380-344E-284F-BE0F-D796858BF56F}" type="datetimeFigureOut">
               <a:rPr kumimoji="1" lang="ja-JP" altLang="en-US" smtClean="0"/>
-              <a:t>2026/6/15</a:t>
+              <a:t>2026/6/25</a:t>
             </a:fld>
             <a:endParaRPr kumimoji="1" lang="ja-JP" altLang="en-US"/>
           </a:p>
@@ -1415,7 +1418,7 @@
           <a:p>
             <a:fld id="{DBD89380-344E-284F-BE0F-D796858BF56F}" type="datetimeFigureOut">
               <a:rPr kumimoji="1" lang="ja-JP" altLang="en-US" smtClean="0"/>
-              <a:t>2026/6/15</a:t>
+              <a:t>2026/6/25</a:t>
             </a:fld>
             <a:endParaRPr kumimoji="1" lang="ja-JP" altLang="en-US"/>
           </a:p>
@@ -1846,7 +1849,7 @@
           <a:p>
             <a:fld id="{DBD89380-344E-284F-BE0F-D796858BF56F}" type="datetimeFigureOut">
               <a:rPr kumimoji="1" lang="ja-JP" altLang="en-US" smtClean="0"/>
-              <a:t>2026/6/15</a:t>
+              <a:t>2026/6/25</a:t>
             </a:fld>
             <a:endParaRPr kumimoji="1" lang="ja-JP" altLang="en-US"/>
           </a:p>
@@ -1964,7 +1967,7 @@
           <a:p>
             <a:fld id="{DBD89380-344E-284F-BE0F-D796858BF56F}" type="datetimeFigureOut">
               <a:rPr kumimoji="1" lang="ja-JP" altLang="en-US" smtClean="0"/>
-              <a:t>2026/6/15</a:t>
+              <a:t>2026/6/25</a:t>
             </a:fld>
             <a:endParaRPr kumimoji="1" lang="ja-JP" altLang="en-US"/>
           </a:p>
@@ -2059,7 +2062,7 @@
           <a:p>
             <a:fld id="{DBD89380-344E-284F-BE0F-D796858BF56F}" type="datetimeFigureOut">
               <a:rPr kumimoji="1" lang="ja-JP" altLang="en-US" smtClean="0"/>
-              <a:t>2026/6/15</a:t>
+              <a:t>2026/6/25</a:t>
             </a:fld>
             <a:endParaRPr kumimoji="1" lang="ja-JP" altLang="en-US"/>
           </a:p>
@@ -2368,7 +2371,7 @@
           <a:p>
             <a:fld id="{DBD89380-344E-284F-BE0F-D796858BF56F}" type="datetimeFigureOut">
               <a:rPr kumimoji="1" lang="ja-JP" altLang="en-US" smtClean="0"/>
-              <a:t>2026/6/15</a:t>
+              <a:t>2026/6/25</a:t>
             </a:fld>
             <a:endParaRPr kumimoji="1" lang="ja-JP" altLang="en-US"/>
           </a:p>
@@ -2625,7 +2628,7 @@
           <a:p>
             <a:fld id="{DBD89380-344E-284F-BE0F-D796858BF56F}" type="datetimeFigureOut">
               <a:rPr kumimoji="1" lang="ja-JP" altLang="en-US" smtClean="0"/>
-              <a:t>2026/6/15</a:t>
+              <a:t>2026/6/25</a:t>
             </a:fld>
             <a:endParaRPr kumimoji="1" lang="ja-JP" altLang="en-US"/>
           </a:p>
@@ -2870,7 +2873,7 @@
           <a:p>
             <a:fld id="{DBD89380-344E-284F-BE0F-D796858BF56F}" type="datetimeFigureOut">
               <a:rPr kumimoji="1" lang="ja-JP" altLang="en-US" smtClean="0"/>
-              <a:t>2026/6/15</a:t>
+              <a:t>2026/6/25</a:t>
             </a:fld>
             <a:endParaRPr kumimoji="1" lang="ja-JP" altLang="en-US"/>
           </a:p>
@@ -12741,6 +12744,4197 @@
 </p:sld>
 </file>
 
+<file path=ppt/slides/slide18.xml><?xml version="1.0" encoding="utf-8"?>
+<p:sld xmlns:a="http://schemas.openxmlformats.org/drawingml/2006/main" xmlns:r="http://schemas.openxmlformats.org/officeDocument/2006/relationships" xmlns:p="http://schemas.openxmlformats.org/presentationml/2006/main">
+  <p:cSld>
+    <p:spTree>
+      <p:nvGrpSpPr>
+        <p:cNvPr id="1" name=""/>
+        <p:cNvGrpSpPr/>
+        <p:nvPr/>
+      </p:nvGrpSpPr>
+      <p:grpSpPr>
+        <a:xfrm>
+          <a:off x="0" y="0"/>
+          <a:ext cx="0" cy="0"/>
+          <a:chOff x="0" y="0"/>
+          <a:chExt cx="0" cy="0"/>
+        </a:xfrm>
+      </p:grpSpPr>
+      <p:grpSp>
+        <p:nvGrpSpPr>
+          <p:cNvPr id="74" name="グループ化 73">
+            <a:extLst>
+              <a:ext uri="{FF2B5EF4-FFF2-40B4-BE49-F238E27FC236}">
+                <a16:creationId xmlns:a16="http://schemas.microsoft.com/office/drawing/2014/main" id="{D886DFFB-752D-DC17-E3AA-2176F4D591FE}"/>
+              </a:ext>
+            </a:extLst>
+          </p:cNvPr>
+          <p:cNvGrpSpPr/>
+          <p:nvPr/>
+        </p:nvGrpSpPr>
+        <p:grpSpPr>
+          <a:xfrm>
+            <a:off x="790413" y="382291"/>
+            <a:ext cx="11220774" cy="8073574"/>
+            <a:chOff x="790413" y="382291"/>
+            <a:chExt cx="11220774" cy="8073574"/>
+          </a:xfrm>
+        </p:grpSpPr>
+        <p:sp>
+          <p:nvSpPr>
+            <p:cNvPr id="10" name="角丸四角形 9">
+              <a:extLst>
+                <a:ext uri="{FF2B5EF4-FFF2-40B4-BE49-F238E27FC236}">
+                  <a16:creationId xmlns:a16="http://schemas.microsoft.com/office/drawing/2014/main" id="{C3E923A2-EE39-7369-77B7-883247458A0C}"/>
+                </a:ext>
+              </a:extLst>
+            </p:cNvPr>
+            <p:cNvSpPr/>
+            <p:nvPr/>
+          </p:nvSpPr>
+          <p:spPr>
+            <a:xfrm>
+              <a:off x="5262001" y="382291"/>
+              <a:ext cx="2277597" cy="836909"/>
+            </a:xfrm>
+            <a:prstGeom prst="roundRect">
+              <a:avLst/>
+            </a:prstGeom>
+            <a:noFill/>
+            <a:ln w="28575">
+              <a:solidFill>
+                <a:schemeClr val="tx1"/>
+              </a:solidFill>
+            </a:ln>
+          </p:spPr>
+          <p:style>
+            <a:lnRef idx="2">
+              <a:schemeClr val="accent1">
+                <a:shade val="15000"/>
+              </a:schemeClr>
+            </a:lnRef>
+            <a:fillRef idx="1">
+              <a:schemeClr val="accent1"/>
+            </a:fillRef>
+            <a:effectRef idx="0">
+              <a:schemeClr val="accent1"/>
+            </a:effectRef>
+            <a:fontRef idx="minor">
+              <a:schemeClr val="lt1"/>
+            </a:fontRef>
+          </p:style>
+          <p:txBody>
+            <a:bodyPr rtlCol="0" anchor="ctr"/>
+            <a:lstStyle/>
+            <a:p>
+              <a:pPr algn="ctr"/>
+              <a:r>
+                <a:rPr kumimoji="1" lang="ja-JP" altLang="en-US" sz="4400">
+                  <a:solidFill>
+                    <a:schemeClr val="tx1"/>
+                  </a:solidFill>
+                  <a:latin typeface="Hiragino Kaku Gothic StdN W8" panose="020B0800000000000000" pitchFamily="34" charset="-128"/>
+                  <a:ea typeface="Hiragino Kaku Gothic StdN W8" panose="020B0800000000000000" pitchFamily="34" charset="-128"/>
+                </a:rPr>
+                <a:t>政府</a:t>
+              </a:r>
+              <a:endParaRPr kumimoji="1" lang="ja-JP" altLang="en-US" sz="3000"/>
+            </a:p>
+          </p:txBody>
+        </p:sp>
+        <p:grpSp>
+          <p:nvGrpSpPr>
+            <p:cNvPr id="20" name="グループ化 19">
+              <a:extLst>
+                <a:ext uri="{FF2B5EF4-FFF2-40B4-BE49-F238E27FC236}">
+                  <a16:creationId xmlns:a16="http://schemas.microsoft.com/office/drawing/2014/main" id="{006AF209-8C92-4D26-0A78-686B7ED4A35A}"/>
+                </a:ext>
+              </a:extLst>
+            </p:cNvPr>
+            <p:cNvGrpSpPr/>
+            <p:nvPr/>
+          </p:nvGrpSpPr>
+          <p:grpSpPr>
+            <a:xfrm>
+              <a:off x="790413" y="2522350"/>
+              <a:ext cx="2774196" cy="3006385"/>
+              <a:chOff x="790413" y="2522350"/>
+              <a:chExt cx="2774196" cy="3006385"/>
+            </a:xfrm>
+          </p:grpSpPr>
+          <p:sp>
+            <p:nvSpPr>
+              <p:cNvPr id="14" name="三角形 13">
+                <a:extLst>
+                  <a:ext uri="{FF2B5EF4-FFF2-40B4-BE49-F238E27FC236}">
+                    <a16:creationId xmlns:a16="http://schemas.microsoft.com/office/drawing/2014/main" id="{4581BE06-BA1B-D0DA-B4D2-DA1FA0078F60}"/>
+                  </a:ext>
+                </a:extLst>
+              </p:cNvPr>
+              <p:cNvSpPr/>
+              <p:nvPr/>
+            </p:nvSpPr>
+            <p:spPr>
+              <a:xfrm>
+                <a:off x="790413" y="2522350"/>
+                <a:ext cx="2774196" cy="2421610"/>
+              </a:xfrm>
+              <a:prstGeom prst="triangle">
+                <a:avLst/>
+              </a:prstGeom>
+              <a:noFill/>
+              <a:ln w="28575">
+                <a:solidFill>
+                  <a:schemeClr val="tx1"/>
+                </a:solidFill>
+              </a:ln>
+            </p:spPr>
+            <p:style>
+              <a:lnRef idx="2">
+                <a:schemeClr val="accent1">
+                  <a:shade val="15000"/>
+                </a:schemeClr>
+              </a:lnRef>
+              <a:fillRef idx="1">
+                <a:schemeClr val="accent1"/>
+              </a:fillRef>
+              <a:effectRef idx="0">
+                <a:schemeClr val="accent1"/>
+              </a:effectRef>
+              <a:fontRef idx="minor">
+                <a:schemeClr val="lt1"/>
+              </a:fontRef>
+            </p:style>
+            <p:txBody>
+              <a:bodyPr rtlCol="0" anchor="ctr"/>
+              <a:lstStyle/>
+              <a:p>
+                <a:pPr algn="ctr"/>
+                <a:endParaRPr kumimoji="1" lang="ja-JP" altLang="en-US"/>
+              </a:p>
+            </p:txBody>
+          </p:sp>
+          <p:sp>
+            <p:nvSpPr>
+              <p:cNvPr id="15" name="円/楕円 14">
+                <a:extLst>
+                  <a:ext uri="{FF2B5EF4-FFF2-40B4-BE49-F238E27FC236}">
+                    <a16:creationId xmlns:a16="http://schemas.microsoft.com/office/drawing/2014/main" id="{25FA0376-5357-1925-E846-0C8DF11FE858}"/>
+                  </a:ext>
+                </a:extLst>
+              </p:cNvPr>
+              <p:cNvSpPr/>
+              <p:nvPr/>
+            </p:nvSpPr>
+            <p:spPr>
+              <a:xfrm>
+                <a:off x="1363028" y="4118492"/>
+                <a:ext cx="573438" cy="573438"/>
+              </a:xfrm>
+              <a:prstGeom prst="ellipse">
+                <a:avLst/>
+              </a:prstGeom>
+              <a:noFill/>
+              <a:ln w="19050">
+                <a:solidFill>
+                  <a:schemeClr val="tx1"/>
+                </a:solidFill>
+              </a:ln>
+            </p:spPr>
+            <p:style>
+              <a:lnRef idx="2">
+                <a:schemeClr val="accent1">
+                  <a:shade val="15000"/>
+                </a:schemeClr>
+              </a:lnRef>
+              <a:fillRef idx="1">
+                <a:schemeClr val="accent1"/>
+              </a:fillRef>
+              <a:effectRef idx="0">
+                <a:schemeClr val="accent1"/>
+              </a:effectRef>
+              <a:fontRef idx="minor">
+                <a:schemeClr val="lt1"/>
+              </a:fontRef>
+            </p:style>
+            <p:txBody>
+              <a:bodyPr rtlCol="0" anchor="ctr"/>
+              <a:lstStyle/>
+              <a:p>
+                <a:pPr algn="ctr"/>
+                <a:r>
+                  <a:rPr kumimoji="1" lang="ja-JP" altLang="en-US" sz="2400">
+                    <a:solidFill>
+                      <a:schemeClr val="tx1"/>
+                    </a:solidFill>
+                    <a:latin typeface="Hiragino Sans W4" panose="020B0400000000000000" pitchFamily="34" charset="-128"/>
+                    <a:ea typeface="Hiragino Sans W4" panose="020B0400000000000000" pitchFamily="34" charset="-128"/>
+                  </a:rPr>
+                  <a:t>労</a:t>
+                </a:r>
+              </a:p>
+            </p:txBody>
+          </p:sp>
+          <p:sp>
+            <p:nvSpPr>
+              <p:cNvPr id="17" name="円/楕円 16">
+                <a:extLst>
+                  <a:ext uri="{FF2B5EF4-FFF2-40B4-BE49-F238E27FC236}">
+                    <a16:creationId xmlns:a16="http://schemas.microsoft.com/office/drawing/2014/main" id="{9A420F46-B2C1-CDB5-8618-C3F0A7373B66}"/>
+                  </a:ext>
+                </a:extLst>
+              </p:cNvPr>
+              <p:cNvSpPr/>
+              <p:nvPr/>
+            </p:nvSpPr>
+            <p:spPr>
+              <a:xfrm>
+                <a:off x="2463818" y="4118492"/>
+                <a:ext cx="573438" cy="573438"/>
+              </a:xfrm>
+              <a:prstGeom prst="ellipse">
+                <a:avLst/>
+              </a:prstGeom>
+              <a:noFill/>
+              <a:ln w="19050">
+                <a:solidFill>
+                  <a:schemeClr val="tx1"/>
+                </a:solidFill>
+              </a:ln>
+            </p:spPr>
+            <p:style>
+              <a:lnRef idx="2">
+                <a:schemeClr val="accent1">
+                  <a:shade val="15000"/>
+                </a:schemeClr>
+              </a:lnRef>
+              <a:fillRef idx="1">
+                <a:schemeClr val="accent1"/>
+              </a:fillRef>
+              <a:effectRef idx="0">
+                <a:schemeClr val="accent1"/>
+              </a:effectRef>
+              <a:fontRef idx="minor">
+                <a:schemeClr val="lt1"/>
+              </a:fontRef>
+            </p:style>
+            <p:txBody>
+              <a:bodyPr rtlCol="0" anchor="ctr"/>
+              <a:lstStyle/>
+              <a:p>
+                <a:pPr algn="ctr"/>
+                <a:r>
+                  <a:rPr kumimoji="1" lang="ja-JP" altLang="en-US" sz="2400">
+                    <a:solidFill>
+                      <a:schemeClr val="tx1"/>
+                    </a:solidFill>
+                    <a:latin typeface="Hiragino Sans W4" panose="020B0400000000000000" pitchFamily="34" charset="-128"/>
+                    <a:ea typeface="Hiragino Sans W4" panose="020B0400000000000000" pitchFamily="34" charset="-128"/>
+                  </a:rPr>
+                  <a:t>労</a:t>
+                </a:r>
+              </a:p>
+            </p:txBody>
+          </p:sp>
+          <p:sp>
+            <p:nvSpPr>
+              <p:cNvPr id="18" name="円/楕円 17">
+                <a:extLst>
+                  <a:ext uri="{FF2B5EF4-FFF2-40B4-BE49-F238E27FC236}">
+                    <a16:creationId xmlns:a16="http://schemas.microsoft.com/office/drawing/2014/main" id="{C7F637D0-C1B3-B230-40F4-28E0FC9D99DF}"/>
+                  </a:ext>
+                </a:extLst>
+              </p:cNvPr>
+              <p:cNvSpPr/>
+              <p:nvPr/>
+            </p:nvSpPr>
+            <p:spPr>
+              <a:xfrm>
+                <a:off x="1890792" y="3033702"/>
+                <a:ext cx="573438" cy="573438"/>
+              </a:xfrm>
+              <a:prstGeom prst="ellipse">
+                <a:avLst/>
+              </a:prstGeom>
+              <a:noFill/>
+              <a:ln w="19050">
+                <a:solidFill>
+                  <a:schemeClr val="tx1"/>
+                </a:solidFill>
+              </a:ln>
+            </p:spPr>
+            <p:style>
+              <a:lnRef idx="2">
+                <a:schemeClr val="accent1">
+                  <a:shade val="15000"/>
+                </a:schemeClr>
+              </a:lnRef>
+              <a:fillRef idx="1">
+                <a:schemeClr val="accent1"/>
+              </a:fillRef>
+              <a:effectRef idx="0">
+                <a:schemeClr val="accent1"/>
+              </a:effectRef>
+              <a:fontRef idx="minor">
+                <a:schemeClr val="lt1"/>
+              </a:fontRef>
+            </p:style>
+            <p:txBody>
+              <a:bodyPr rtlCol="0" anchor="ctr"/>
+              <a:lstStyle/>
+              <a:p>
+                <a:pPr algn="ctr"/>
+                <a:r>
+                  <a:rPr kumimoji="1" lang="ja-JP" altLang="en-US" sz="2400">
+                    <a:solidFill>
+                      <a:schemeClr val="tx1"/>
+                    </a:solidFill>
+                    <a:latin typeface="Hiragino Sans W4" panose="020B0400000000000000" pitchFamily="34" charset="-128"/>
+                    <a:ea typeface="Hiragino Sans W4" panose="020B0400000000000000" pitchFamily="34" charset="-128"/>
+                  </a:rPr>
+                  <a:t>労</a:t>
+                </a:r>
+              </a:p>
+            </p:txBody>
+          </p:sp>
+          <p:sp>
+            <p:nvSpPr>
+              <p:cNvPr id="19" name="テキスト ボックス 18">
+                <a:extLst>
+                  <a:ext uri="{FF2B5EF4-FFF2-40B4-BE49-F238E27FC236}">
+                    <a16:creationId xmlns:a16="http://schemas.microsoft.com/office/drawing/2014/main" id="{F38CD63C-67C4-8F23-7EAF-26AB30879826}"/>
+                  </a:ext>
+                </a:extLst>
+              </p:cNvPr>
+              <p:cNvSpPr txBox="1"/>
+              <p:nvPr/>
+            </p:nvSpPr>
+            <p:spPr>
+              <a:xfrm>
+                <a:off x="1136812" y="4943960"/>
+                <a:ext cx="2081398" cy="584775"/>
+              </a:xfrm>
+              <a:prstGeom prst="rect">
+                <a:avLst/>
+              </a:prstGeom>
+              <a:noFill/>
+            </p:spPr>
+            <p:txBody>
+              <a:bodyPr wrap="square" rtlCol="0">
+                <a:spAutoFit/>
+              </a:bodyPr>
+              <a:lstStyle/>
+              <a:p>
+                <a:pPr algn="ctr"/>
+                <a:r>
+                  <a:rPr kumimoji="1" lang="ja-JP" altLang="en-US" sz="3200">
+                    <a:latin typeface="Hiragino Kaku Gothic StdN W8" panose="020B0800000000000000" pitchFamily="34" charset="-128"/>
+                    <a:ea typeface="Hiragino Kaku Gothic StdN W8" panose="020B0800000000000000" pitchFamily="34" charset="-128"/>
+                  </a:rPr>
+                  <a:t>労働組合</a:t>
+                </a:r>
+              </a:p>
+            </p:txBody>
+          </p:sp>
+        </p:grpSp>
+        <p:grpSp>
+          <p:nvGrpSpPr>
+            <p:cNvPr id="21" name="グループ化 20">
+              <a:extLst>
+                <a:ext uri="{FF2B5EF4-FFF2-40B4-BE49-F238E27FC236}">
+                  <a16:creationId xmlns:a16="http://schemas.microsoft.com/office/drawing/2014/main" id="{96EE3A86-64E8-F48A-18AC-3461D8357316}"/>
+                </a:ext>
+              </a:extLst>
+            </p:cNvPr>
+            <p:cNvGrpSpPr/>
+            <p:nvPr/>
+          </p:nvGrpSpPr>
+          <p:grpSpPr>
+            <a:xfrm>
+              <a:off x="2245436" y="5449480"/>
+              <a:ext cx="2774196" cy="3006385"/>
+              <a:chOff x="790413" y="2522350"/>
+              <a:chExt cx="2774196" cy="3006385"/>
+            </a:xfrm>
+          </p:grpSpPr>
+          <p:sp>
+            <p:nvSpPr>
+              <p:cNvPr id="22" name="三角形 21">
+                <a:extLst>
+                  <a:ext uri="{FF2B5EF4-FFF2-40B4-BE49-F238E27FC236}">
+                    <a16:creationId xmlns:a16="http://schemas.microsoft.com/office/drawing/2014/main" id="{92273071-5427-591A-5469-74DAF2B71FFE}"/>
+                  </a:ext>
+                </a:extLst>
+              </p:cNvPr>
+              <p:cNvSpPr/>
+              <p:nvPr/>
+            </p:nvSpPr>
+            <p:spPr>
+              <a:xfrm>
+                <a:off x="790413" y="2522350"/>
+                <a:ext cx="2774196" cy="2421610"/>
+              </a:xfrm>
+              <a:prstGeom prst="triangle">
+                <a:avLst/>
+              </a:prstGeom>
+              <a:noFill/>
+              <a:ln w="28575">
+                <a:solidFill>
+                  <a:schemeClr val="tx1"/>
+                </a:solidFill>
+              </a:ln>
+            </p:spPr>
+            <p:style>
+              <a:lnRef idx="2">
+                <a:schemeClr val="accent1">
+                  <a:shade val="15000"/>
+                </a:schemeClr>
+              </a:lnRef>
+              <a:fillRef idx="1">
+                <a:schemeClr val="accent1"/>
+              </a:fillRef>
+              <a:effectRef idx="0">
+                <a:schemeClr val="accent1"/>
+              </a:effectRef>
+              <a:fontRef idx="minor">
+                <a:schemeClr val="lt1"/>
+              </a:fontRef>
+            </p:style>
+            <p:txBody>
+              <a:bodyPr rtlCol="0" anchor="ctr"/>
+              <a:lstStyle/>
+              <a:p>
+                <a:pPr algn="ctr"/>
+                <a:endParaRPr kumimoji="1" lang="ja-JP" altLang="en-US"/>
+              </a:p>
+            </p:txBody>
+          </p:sp>
+          <p:sp>
+            <p:nvSpPr>
+              <p:cNvPr id="23" name="円/楕円 22">
+                <a:extLst>
+                  <a:ext uri="{FF2B5EF4-FFF2-40B4-BE49-F238E27FC236}">
+                    <a16:creationId xmlns:a16="http://schemas.microsoft.com/office/drawing/2014/main" id="{D9B168C9-3980-83D9-4173-3E7CACF154F3}"/>
+                  </a:ext>
+                </a:extLst>
+              </p:cNvPr>
+              <p:cNvSpPr/>
+              <p:nvPr/>
+            </p:nvSpPr>
+            <p:spPr>
+              <a:xfrm>
+                <a:off x="1363028" y="4118492"/>
+                <a:ext cx="573438" cy="573438"/>
+              </a:xfrm>
+              <a:prstGeom prst="ellipse">
+                <a:avLst/>
+              </a:prstGeom>
+              <a:noFill/>
+              <a:ln w="19050">
+                <a:solidFill>
+                  <a:schemeClr val="tx1"/>
+                </a:solidFill>
+              </a:ln>
+            </p:spPr>
+            <p:style>
+              <a:lnRef idx="2">
+                <a:schemeClr val="accent1">
+                  <a:shade val="15000"/>
+                </a:schemeClr>
+              </a:lnRef>
+              <a:fillRef idx="1">
+                <a:schemeClr val="accent1"/>
+              </a:fillRef>
+              <a:effectRef idx="0">
+                <a:schemeClr val="accent1"/>
+              </a:effectRef>
+              <a:fontRef idx="minor">
+                <a:schemeClr val="lt1"/>
+              </a:fontRef>
+            </p:style>
+            <p:txBody>
+              <a:bodyPr rtlCol="0" anchor="ctr"/>
+              <a:lstStyle/>
+              <a:p>
+                <a:pPr algn="ctr"/>
+                <a:r>
+                  <a:rPr kumimoji="1" lang="ja-JP" altLang="en-US" sz="2400">
+                    <a:solidFill>
+                      <a:schemeClr val="tx1"/>
+                    </a:solidFill>
+                    <a:latin typeface="Hiragino Sans W4" panose="020B0400000000000000" pitchFamily="34" charset="-128"/>
+                    <a:ea typeface="Hiragino Sans W4" panose="020B0400000000000000" pitchFamily="34" charset="-128"/>
+                  </a:rPr>
+                  <a:t>労</a:t>
+                </a:r>
+              </a:p>
+            </p:txBody>
+          </p:sp>
+          <p:sp>
+            <p:nvSpPr>
+              <p:cNvPr id="24" name="円/楕円 23">
+                <a:extLst>
+                  <a:ext uri="{FF2B5EF4-FFF2-40B4-BE49-F238E27FC236}">
+                    <a16:creationId xmlns:a16="http://schemas.microsoft.com/office/drawing/2014/main" id="{0F7B4B6D-E771-FAE3-9C01-7CE84D649394}"/>
+                  </a:ext>
+                </a:extLst>
+              </p:cNvPr>
+              <p:cNvSpPr/>
+              <p:nvPr/>
+            </p:nvSpPr>
+            <p:spPr>
+              <a:xfrm>
+                <a:off x="2463818" y="4118492"/>
+                <a:ext cx="573438" cy="573438"/>
+              </a:xfrm>
+              <a:prstGeom prst="ellipse">
+                <a:avLst/>
+              </a:prstGeom>
+              <a:noFill/>
+              <a:ln w="19050">
+                <a:solidFill>
+                  <a:schemeClr val="tx1"/>
+                </a:solidFill>
+              </a:ln>
+            </p:spPr>
+            <p:style>
+              <a:lnRef idx="2">
+                <a:schemeClr val="accent1">
+                  <a:shade val="15000"/>
+                </a:schemeClr>
+              </a:lnRef>
+              <a:fillRef idx="1">
+                <a:schemeClr val="accent1"/>
+              </a:fillRef>
+              <a:effectRef idx="0">
+                <a:schemeClr val="accent1"/>
+              </a:effectRef>
+              <a:fontRef idx="minor">
+                <a:schemeClr val="lt1"/>
+              </a:fontRef>
+            </p:style>
+            <p:txBody>
+              <a:bodyPr rtlCol="0" anchor="ctr"/>
+              <a:lstStyle/>
+              <a:p>
+                <a:pPr algn="ctr"/>
+                <a:r>
+                  <a:rPr kumimoji="1" lang="ja-JP" altLang="en-US" sz="2400">
+                    <a:solidFill>
+                      <a:schemeClr val="tx1"/>
+                    </a:solidFill>
+                    <a:latin typeface="Hiragino Sans W4" panose="020B0400000000000000" pitchFamily="34" charset="-128"/>
+                    <a:ea typeface="Hiragino Sans W4" panose="020B0400000000000000" pitchFamily="34" charset="-128"/>
+                  </a:rPr>
+                  <a:t>労</a:t>
+                </a:r>
+              </a:p>
+            </p:txBody>
+          </p:sp>
+          <p:sp>
+            <p:nvSpPr>
+              <p:cNvPr id="25" name="円/楕円 24">
+                <a:extLst>
+                  <a:ext uri="{FF2B5EF4-FFF2-40B4-BE49-F238E27FC236}">
+                    <a16:creationId xmlns:a16="http://schemas.microsoft.com/office/drawing/2014/main" id="{08086261-372F-4EEE-2452-8531904E25E0}"/>
+                  </a:ext>
+                </a:extLst>
+              </p:cNvPr>
+              <p:cNvSpPr/>
+              <p:nvPr/>
+            </p:nvSpPr>
+            <p:spPr>
+              <a:xfrm>
+                <a:off x="1890792" y="3033702"/>
+                <a:ext cx="573438" cy="573438"/>
+              </a:xfrm>
+              <a:prstGeom prst="ellipse">
+                <a:avLst/>
+              </a:prstGeom>
+              <a:noFill/>
+              <a:ln w="19050">
+                <a:solidFill>
+                  <a:schemeClr val="tx1"/>
+                </a:solidFill>
+              </a:ln>
+            </p:spPr>
+            <p:style>
+              <a:lnRef idx="2">
+                <a:schemeClr val="accent1">
+                  <a:shade val="15000"/>
+                </a:schemeClr>
+              </a:lnRef>
+              <a:fillRef idx="1">
+                <a:schemeClr val="accent1"/>
+              </a:fillRef>
+              <a:effectRef idx="0">
+                <a:schemeClr val="accent1"/>
+              </a:effectRef>
+              <a:fontRef idx="minor">
+                <a:schemeClr val="lt1"/>
+              </a:fontRef>
+            </p:style>
+            <p:txBody>
+              <a:bodyPr rtlCol="0" anchor="ctr"/>
+              <a:lstStyle/>
+              <a:p>
+                <a:pPr algn="ctr"/>
+                <a:r>
+                  <a:rPr kumimoji="1" lang="ja-JP" altLang="en-US" sz="2400">
+                    <a:solidFill>
+                      <a:schemeClr val="tx1"/>
+                    </a:solidFill>
+                    <a:latin typeface="Hiragino Sans W4" panose="020B0400000000000000" pitchFamily="34" charset="-128"/>
+                    <a:ea typeface="Hiragino Sans W4" panose="020B0400000000000000" pitchFamily="34" charset="-128"/>
+                  </a:rPr>
+                  <a:t>労</a:t>
+                </a:r>
+              </a:p>
+            </p:txBody>
+          </p:sp>
+          <p:sp>
+            <p:nvSpPr>
+              <p:cNvPr id="26" name="テキスト ボックス 25">
+                <a:extLst>
+                  <a:ext uri="{FF2B5EF4-FFF2-40B4-BE49-F238E27FC236}">
+                    <a16:creationId xmlns:a16="http://schemas.microsoft.com/office/drawing/2014/main" id="{BAD4A64B-992A-BB04-FC14-B6E83E955088}"/>
+                  </a:ext>
+                </a:extLst>
+              </p:cNvPr>
+              <p:cNvSpPr txBox="1"/>
+              <p:nvPr/>
+            </p:nvSpPr>
+            <p:spPr>
+              <a:xfrm>
+                <a:off x="1136812" y="4943960"/>
+                <a:ext cx="2081398" cy="584775"/>
+              </a:xfrm>
+              <a:prstGeom prst="rect">
+                <a:avLst/>
+              </a:prstGeom>
+              <a:noFill/>
+            </p:spPr>
+            <p:txBody>
+              <a:bodyPr wrap="square" rtlCol="0">
+                <a:spAutoFit/>
+              </a:bodyPr>
+              <a:lstStyle/>
+              <a:p>
+                <a:pPr algn="ctr"/>
+                <a:r>
+                  <a:rPr kumimoji="1" lang="ja-JP" altLang="en-US" sz="3200">
+                    <a:latin typeface="Hiragino Kaku Gothic StdN W8" panose="020B0800000000000000" pitchFamily="34" charset="-128"/>
+                    <a:ea typeface="Hiragino Kaku Gothic StdN W8" panose="020B0800000000000000" pitchFamily="34" charset="-128"/>
+                  </a:rPr>
+                  <a:t>労働組合</a:t>
+                </a:r>
+              </a:p>
+            </p:txBody>
+          </p:sp>
+        </p:grpSp>
+        <p:grpSp>
+          <p:nvGrpSpPr>
+            <p:cNvPr id="27" name="グループ化 26">
+              <a:extLst>
+                <a:ext uri="{FF2B5EF4-FFF2-40B4-BE49-F238E27FC236}">
+                  <a16:creationId xmlns:a16="http://schemas.microsoft.com/office/drawing/2014/main" id="{C96888A0-07EE-9A21-BECD-71D2E7F8B392}"/>
+                </a:ext>
+              </a:extLst>
+            </p:cNvPr>
+            <p:cNvGrpSpPr/>
+            <p:nvPr/>
+          </p:nvGrpSpPr>
+          <p:grpSpPr>
+            <a:xfrm>
+              <a:off x="7781968" y="5437816"/>
+              <a:ext cx="2774196" cy="3018049"/>
+              <a:chOff x="790413" y="2522350"/>
+              <a:chExt cx="2774196" cy="3018049"/>
+            </a:xfrm>
+          </p:grpSpPr>
+          <p:sp>
+            <p:nvSpPr>
+              <p:cNvPr id="28" name="三角形 27">
+                <a:extLst>
+                  <a:ext uri="{FF2B5EF4-FFF2-40B4-BE49-F238E27FC236}">
+                    <a16:creationId xmlns:a16="http://schemas.microsoft.com/office/drawing/2014/main" id="{8C1BE2F5-D621-F855-98D7-430D2FA7742A}"/>
+                  </a:ext>
+                </a:extLst>
+              </p:cNvPr>
+              <p:cNvSpPr/>
+              <p:nvPr/>
+            </p:nvSpPr>
+            <p:spPr>
+              <a:xfrm>
+                <a:off x="790413" y="2522350"/>
+                <a:ext cx="2774196" cy="2421610"/>
+              </a:xfrm>
+              <a:prstGeom prst="triangle">
+                <a:avLst/>
+              </a:prstGeom>
+              <a:noFill/>
+              <a:ln w="28575">
+                <a:solidFill>
+                  <a:schemeClr val="tx1"/>
+                </a:solidFill>
+              </a:ln>
+            </p:spPr>
+            <p:style>
+              <a:lnRef idx="2">
+                <a:schemeClr val="accent1">
+                  <a:shade val="15000"/>
+                </a:schemeClr>
+              </a:lnRef>
+              <a:fillRef idx="1">
+                <a:schemeClr val="accent1"/>
+              </a:fillRef>
+              <a:effectRef idx="0">
+                <a:schemeClr val="accent1"/>
+              </a:effectRef>
+              <a:fontRef idx="minor">
+                <a:schemeClr val="lt1"/>
+              </a:fontRef>
+            </p:style>
+            <p:txBody>
+              <a:bodyPr rtlCol="0" anchor="ctr"/>
+              <a:lstStyle/>
+              <a:p>
+                <a:pPr algn="ctr"/>
+                <a:endParaRPr kumimoji="1" lang="ja-JP" altLang="en-US"/>
+              </a:p>
+            </p:txBody>
+          </p:sp>
+          <p:sp>
+            <p:nvSpPr>
+              <p:cNvPr id="29" name="円/楕円 28">
+                <a:extLst>
+                  <a:ext uri="{FF2B5EF4-FFF2-40B4-BE49-F238E27FC236}">
+                    <a16:creationId xmlns:a16="http://schemas.microsoft.com/office/drawing/2014/main" id="{6B8D3128-4FF5-7749-3382-A669E04FC76F}"/>
+                  </a:ext>
+                </a:extLst>
+              </p:cNvPr>
+              <p:cNvSpPr/>
+              <p:nvPr/>
+            </p:nvSpPr>
+            <p:spPr>
+              <a:xfrm>
+                <a:off x="1363028" y="4118492"/>
+                <a:ext cx="573438" cy="573438"/>
+              </a:xfrm>
+              <a:prstGeom prst="ellipse">
+                <a:avLst/>
+              </a:prstGeom>
+              <a:noFill/>
+              <a:ln w="19050">
+                <a:solidFill>
+                  <a:schemeClr val="tx1"/>
+                </a:solidFill>
+              </a:ln>
+            </p:spPr>
+            <p:style>
+              <a:lnRef idx="2">
+                <a:schemeClr val="accent1">
+                  <a:shade val="15000"/>
+                </a:schemeClr>
+              </a:lnRef>
+              <a:fillRef idx="1">
+                <a:schemeClr val="accent1"/>
+              </a:fillRef>
+              <a:effectRef idx="0">
+                <a:schemeClr val="accent1"/>
+              </a:effectRef>
+              <a:fontRef idx="minor">
+                <a:schemeClr val="lt1"/>
+              </a:fontRef>
+            </p:style>
+            <p:txBody>
+              <a:bodyPr rtlCol="0" anchor="ctr"/>
+              <a:lstStyle/>
+              <a:p>
+                <a:pPr algn="ctr"/>
+                <a:r>
+                  <a:rPr kumimoji="1" lang="ja-JP" altLang="en-US" sz="2400">
+                    <a:solidFill>
+                      <a:schemeClr val="tx1"/>
+                    </a:solidFill>
+                    <a:latin typeface="Hiragino Sans W4" panose="020B0400000000000000" pitchFamily="34" charset="-128"/>
+                    <a:ea typeface="Hiragino Sans W4" panose="020B0400000000000000" pitchFamily="34" charset="-128"/>
+                  </a:rPr>
+                  <a:t>企</a:t>
+                </a:r>
+              </a:p>
+            </p:txBody>
+          </p:sp>
+          <p:sp>
+            <p:nvSpPr>
+              <p:cNvPr id="30" name="円/楕円 29">
+                <a:extLst>
+                  <a:ext uri="{FF2B5EF4-FFF2-40B4-BE49-F238E27FC236}">
+                    <a16:creationId xmlns:a16="http://schemas.microsoft.com/office/drawing/2014/main" id="{B50D5708-E2FB-153B-7466-E57ED57CE1AF}"/>
+                  </a:ext>
+                </a:extLst>
+              </p:cNvPr>
+              <p:cNvSpPr/>
+              <p:nvPr/>
+            </p:nvSpPr>
+            <p:spPr>
+              <a:xfrm>
+                <a:off x="2463818" y="4118492"/>
+                <a:ext cx="573438" cy="573438"/>
+              </a:xfrm>
+              <a:prstGeom prst="ellipse">
+                <a:avLst/>
+              </a:prstGeom>
+              <a:noFill/>
+              <a:ln w="19050">
+                <a:solidFill>
+                  <a:schemeClr val="tx1"/>
+                </a:solidFill>
+              </a:ln>
+            </p:spPr>
+            <p:style>
+              <a:lnRef idx="2">
+                <a:schemeClr val="accent1">
+                  <a:shade val="15000"/>
+                </a:schemeClr>
+              </a:lnRef>
+              <a:fillRef idx="1">
+                <a:schemeClr val="accent1"/>
+              </a:fillRef>
+              <a:effectRef idx="0">
+                <a:schemeClr val="accent1"/>
+              </a:effectRef>
+              <a:fontRef idx="minor">
+                <a:schemeClr val="lt1"/>
+              </a:fontRef>
+            </p:style>
+            <p:txBody>
+              <a:bodyPr rtlCol="0" anchor="ctr"/>
+              <a:lstStyle/>
+              <a:p>
+                <a:pPr algn="ctr"/>
+                <a:r>
+                  <a:rPr kumimoji="1" lang="ja-JP" altLang="en-US" sz="2400">
+                    <a:solidFill>
+                      <a:schemeClr val="tx1"/>
+                    </a:solidFill>
+                    <a:latin typeface="Hiragino Sans W4" panose="020B0400000000000000" pitchFamily="34" charset="-128"/>
+                    <a:ea typeface="Hiragino Sans W4" panose="020B0400000000000000" pitchFamily="34" charset="-128"/>
+                  </a:rPr>
+                  <a:t>企</a:t>
+                </a:r>
+              </a:p>
+            </p:txBody>
+          </p:sp>
+          <p:sp>
+            <p:nvSpPr>
+              <p:cNvPr id="31" name="円/楕円 30">
+                <a:extLst>
+                  <a:ext uri="{FF2B5EF4-FFF2-40B4-BE49-F238E27FC236}">
+                    <a16:creationId xmlns:a16="http://schemas.microsoft.com/office/drawing/2014/main" id="{8782C489-C147-04B9-40D3-16838A1F5315}"/>
+                  </a:ext>
+                </a:extLst>
+              </p:cNvPr>
+              <p:cNvSpPr/>
+              <p:nvPr/>
+            </p:nvSpPr>
+            <p:spPr>
+              <a:xfrm>
+                <a:off x="1890792" y="3033702"/>
+                <a:ext cx="573438" cy="573438"/>
+              </a:xfrm>
+              <a:prstGeom prst="ellipse">
+                <a:avLst/>
+              </a:prstGeom>
+              <a:noFill/>
+              <a:ln w="19050">
+                <a:solidFill>
+                  <a:schemeClr val="tx1"/>
+                </a:solidFill>
+              </a:ln>
+            </p:spPr>
+            <p:style>
+              <a:lnRef idx="2">
+                <a:schemeClr val="accent1">
+                  <a:shade val="15000"/>
+                </a:schemeClr>
+              </a:lnRef>
+              <a:fillRef idx="1">
+                <a:schemeClr val="accent1"/>
+              </a:fillRef>
+              <a:effectRef idx="0">
+                <a:schemeClr val="accent1"/>
+              </a:effectRef>
+              <a:fontRef idx="minor">
+                <a:schemeClr val="lt1"/>
+              </a:fontRef>
+            </p:style>
+            <p:txBody>
+              <a:bodyPr rtlCol="0" anchor="ctr"/>
+              <a:lstStyle/>
+              <a:p>
+                <a:pPr algn="ctr"/>
+                <a:r>
+                  <a:rPr kumimoji="1" lang="ja-JP" altLang="en-US" sz="2400">
+                    <a:solidFill>
+                      <a:schemeClr val="tx1"/>
+                    </a:solidFill>
+                    <a:latin typeface="Hiragino Sans W4" panose="020B0400000000000000" pitchFamily="34" charset="-128"/>
+                    <a:ea typeface="Hiragino Sans W4" panose="020B0400000000000000" pitchFamily="34" charset="-128"/>
+                  </a:rPr>
+                  <a:t>企</a:t>
+                </a:r>
+              </a:p>
+            </p:txBody>
+          </p:sp>
+          <p:sp>
+            <p:nvSpPr>
+              <p:cNvPr id="32" name="テキスト ボックス 31">
+                <a:extLst>
+                  <a:ext uri="{FF2B5EF4-FFF2-40B4-BE49-F238E27FC236}">
+                    <a16:creationId xmlns:a16="http://schemas.microsoft.com/office/drawing/2014/main" id="{9ECEC042-3289-4801-33D9-2DB0B1D712BD}"/>
+                  </a:ext>
+                </a:extLst>
+              </p:cNvPr>
+              <p:cNvSpPr txBox="1"/>
+              <p:nvPr/>
+            </p:nvSpPr>
+            <p:spPr>
+              <a:xfrm>
+                <a:off x="1033326" y="4955624"/>
+                <a:ext cx="2288369" cy="584775"/>
+              </a:xfrm>
+              <a:prstGeom prst="rect">
+                <a:avLst/>
+              </a:prstGeom>
+              <a:noFill/>
+            </p:spPr>
+            <p:txBody>
+              <a:bodyPr wrap="square" rtlCol="0">
+                <a:spAutoFit/>
+              </a:bodyPr>
+              <a:lstStyle/>
+              <a:p>
+                <a:pPr algn="ctr"/>
+                <a:r>
+                  <a:rPr kumimoji="1" lang="ja-JP" altLang="en-US" sz="3200">
+                    <a:latin typeface="Hiragino Kaku Gothic StdN W8" panose="020B0800000000000000" pitchFamily="34" charset="-128"/>
+                    <a:ea typeface="Hiragino Kaku Gothic StdN W8" panose="020B0800000000000000" pitchFamily="34" charset="-128"/>
+                  </a:rPr>
+                  <a:t>使用者団体</a:t>
+                </a:r>
+              </a:p>
+            </p:txBody>
+          </p:sp>
+        </p:grpSp>
+        <p:grpSp>
+          <p:nvGrpSpPr>
+            <p:cNvPr id="33" name="グループ化 32">
+              <a:extLst>
+                <a:ext uri="{FF2B5EF4-FFF2-40B4-BE49-F238E27FC236}">
+                  <a16:creationId xmlns:a16="http://schemas.microsoft.com/office/drawing/2014/main" id="{19EA6FE8-818B-EEE6-6CF6-47B5643EB5A0}"/>
+                </a:ext>
+              </a:extLst>
+            </p:cNvPr>
+            <p:cNvGrpSpPr/>
+            <p:nvPr/>
+          </p:nvGrpSpPr>
+          <p:grpSpPr>
+            <a:xfrm>
+              <a:off x="9236991" y="2522350"/>
+              <a:ext cx="2774196" cy="3018049"/>
+              <a:chOff x="790413" y="2522350"/>
+              <a:chExt cx="2774196" cy="3018049"/>
+            </a:xfrm>
+          </p:grpSpPr>
+          <p:sp>
+            <p:nvSpPr>
+              <p:cNvPr id="34" name="三角形 33">
+                <a:extLst>
+                  <a:ext uri="{FF2B5EF4-FFF2-40B4-BE49-F238E27FC236}">
+                    <a16:creationId xmlns:a16="http://schemas.microsoft.com/office/drawing/2014/main" id="{2D1F9528-C60D-F62C-0946-18844D00D6DE}"/>
+                  </a:ext>
+                </a:extLst>
+              </p:cNvPr>
+              <p:cNvSpPr/>
+              <p:nvPr/>
+            </p:nvSpPr>
+            <p:spPr>
+              <a:xfrm>
+                <a:off x="790413" y="2522350"/>
+                <a:ext cx="2774196" cy="2421610"/>
+              </a:xfrm>
+              <a:prstGeom prst="triangle">
+                <a:avLst/>
+              </a:prstGeom>
+              <a:noFill/>
+              <a:ln w="28575">
+                <a:solidFill>
+                  <a:schemeClr val="tx1"/>
+                </a:solidFill>
+              </a:ln>
+            </p:spPr>
+            <p:style>
+              <a:lnRef idx="2">
+                <a:schemeClr val="accent1">
+                  <a:shade val="15000"/>
+                </a:schemeClr>
+              </a:lnRef>
+              <a:fillRef idx="1">
+                <a:schemeClr val="accent1"/>
+              </a:fillRef>
+              <a:effectRef idx="0">
+                <a:schemeClr val="accent1"/>
+              </a:effectRef>
+              <a:fontRef idx="minor">
+                <a:schemeClr val="lt1"/>
+              </a:fontRef>
+            </p:style>
+            <p:txBody>
+              <a:bodyPr rtlCol="0" anchor="ctr"/>
+              <a:lstStyle/>
+              <a:p>
+                <a:pPr algn="ctr"/>
+                <a:endParaRPr kumimoji="1" lang="ja-JP" altLang="en-US"/>
+              </a:p>
+            </p:txBody>
+          </p:sp>
+          <p:sp>
+            <p:nvSpPr>
+              <p:cNvPr id="35" name="円/楕円 34">
+                <a:extLst>
+                  <a:ext uri="{FF2B5EF4-FFF2-40B4-BE49-F238E27FC236}">
+                    <a16:creationId xmlns:a16="http://schemas.microsoft.com/office/drawing/2014/main" id="{70A284DC-12BB-9746-72F0-1DBB72C7B97E}"/>
+                  </a:ext>
+                </a:extLst>
+              </p:cNvPr>
+              <p:cNvSpPr/>
+              <p:nvPr/>
+            </p:nvSpPr>
+            <p:spPr>
+              <a:xfrm>
+                <a:off x="1363028" y="4118492"/>
+                <a:ext cx="573438" cy="573438"/>
+              </a:xfrm>
+              <a:prstGeom prst="ellipse">
+                <a:avLst/>
+              </a:prstGeom>
+              <a:noFill/>
+              <a:ln w="19050">
+                <a:solidFill>
+                  <a:schemeClr val="tx1"/>
+                </a:solidFill>
+              </a:ln>
+            </p:spPr>
+            <p:style>
+              <a:lnRef idx="2">
+                <a:schemeClr val="accent1">
+                  <a:shade val="15000"/>
+                </a:schemeClr>
+              </a:lnRef>
+              <a:fillRef idx="1">
+                <a:schemeClr val="accent1"/>
+              </a:fillRef>
+              <a:effectRef idx="0">
+                <a:schemeClr val="accent1"/>
+              </a:effectRef>
+              <a:fontRef idx="minor">
+                <a:schemeClr val="lt1"/>
+              </a:fontRef>
+            </p:style>
+            <p:txBody>
+              <a:bodyPr rtlCol="0" anchor="ctr"/>
+              <a:lstStyle/>
+              <a:p>
+                <a:pPr algn="ctr"/>
+                <a:r>
+                  <a:rPr kumimoji="1" lang="ja-JP" altLang="en-US" sz="2400">
+                    <a:solidFill>
+                      <a:schemeClr val="tx1"/>
+                    </a:solidFill>
+                    <a:latin typeface="Hiragino Sans W4" panose="020B0400000000000000" pitchFamily="34" charset="-128"/>
+                    <a:ea typeface="Hiragino Sans W4" panose="020B0400000000000000" pitchFamily="34" charset="-128"/>
+                  </a:rPr>
+                  <a:t>企</a:t>
+                </a:r>
+              </a:p>
+            </p:txBody>
+          </p:sp>
+          <p:sp>
+            <p:nvSpPr>
+              <p:cNvPr id="36" name="円/楕円 35">
+                <a:extLst>
+                  <a:ext uri="{FF2B5EF4-FFF2-40B4-BE49-F238E27FC236}">
+                    <a16:creationId xmlns:a16="http://schemas.microsoft.com/office/drawing/2014/main" id="{157A1591-F809-DDDA-9730-4A2CF0D76DED}"/>
+                  </a:ext>
+                </a:extLst>
+              </p:cNvPr>
+              <p:cNvSpPr/>
+              <p:nvPr/>
+            </p:nvSpPr>
+            <p:spPr>
+              <a:xfrm>
+                <a:off x="2463818" y="4118492"/>
+                <a:ext cx="573438" cy="573438"/>
+              </a:xfrm>
+              <a:prstGeom prst="ellipse">
+                <a:avLst/>
+              </a:prstGeom>
+              <a:noFill/>
+              <a:ln w="19050">
+                <a:solidFill>
+                  <a:schemeClr val="tx1"/>
+                </a:solidFill>
+              </a:ln>
+            </p:spPr>
+            <p:style>
+              <a:lnRef idx="2">
+                <a:schemeClr val="accent1">
+                  <a:shade val="15000"/>
+                </a:schemeClr>
+              </a:lnRef>
+              <a:fillRef idx="1">
+                <a:schemeClr val="accent1"/>
+              </a:fillRef>
+              <a:effectRef idx="0">
+                <a:schemeClr val="accent1"/>
+              </a:effectRef>
+              <a:fontRef idx="minor">
+                <a:schemeClr val="lt1"/>
+              </a:fontRef>
+            </p:style>
+            <p:txBody>
+              <a:bodyPr rtlCol="0" anchor="ctr"/>
+              <a:lstStyle/>
+              <a:p>
+                <a:pPr algn="ctr"/>
+                <a:r>
+                  <a:rPr kumimoji="1" lang="ja-JP" altLang="en-US" sz="2400">
+                    <a:solidFill>
+                      <a:schemeClr val="tx1"/>
+                    </a:solidFill>
+                    <a:latin typeface="Hiragino Sans W4" panose="020B0400000000000000" pitchFamily="34" charset="-128"/>
+                    <a:ea typeface="Hiragino Sans W4" panose="020B0400000000000000" pitchFamily="34" charset="-128"/>
+                  </a:rPr>
+                  <a:t>企</a:t>
+                </a:r>
+              </a:p>
+            </p:txBody>
+          </p:sp>
+          <p:sp>
+            <p:nvSpPr>
+              <p:cNvPr id="37" name="円/楕円 36">
+                <a:extLst>
+                  <a:ext uri="{FF2B5EF4-FFF2-40B4-BE49-F238E27FC236}">
+                    <a16:creationId xmlns:a16="http://schemas.microsoft.com/office/drawing/2014/main" id="{6D6C271C-F0AD-CAB6-4932-AAC0C9E265E8}"/>
+                  </a:ext>
+                </a:extLst>
+              </p:cNvPr>
+              <p:cNvSpPr/>
+              <p:nvPr/>
+            </p:nvSpPr>
+            <p:spPr>
+              <a:xfrm>
+                <a:off x="1890792" y="3033702"/>
+                <a:ext cx="573438" cy="573438"/>
+              </a:xfrm>
+              <a:prstGeom prst="ellipse">
+                <a:avLst/>
+              </a:prstGeom>
+              <a:noFill/>
+              <a:ln w="19050">
+                <a:solidFill>
+                  <a:schemeClr val="tx1"/>
+                </a:solidFill>
+              </a:ln>
+            </p:spPr>
+            <p:style>
+              <a:lnRef idx="2">
+                <a:schemeClr val="accent1">
+                  <a:shade val="15000"/>
+                </a:schemeClr>
+              </a:lnRef>
+              <a:fillRef idx="1">
+                <a:schemeClr val="accent1"/>
+              </a:fillRef>
+              <a:effectRef idx="0">
+                <a:schemeClr val="accent1"/>
+              </a:effectRef>
+              <a:fontRef idx="minor">
+                <a:schemeClr val="lt1"/>
+              </a:fontRef>
+            </p:style>
+            <p:txBody>
+              <a:bodyPr rtlCol="0" anchor="ctr"/>
+              <a:lstStyle/>
+              <a:p>
+                <a:pPr algn="ctr"/>
+                <a:r>
+                  <a:rPr kumimoji="1" lang="ja-JP" altLang="en-US" sz="2400">
+                    <a:solidFill>
+                      <a:schemeClr val="tx1"/>
+                    </a:solidFill>
+                    <a:latin typeface="Hiragino Sans W4" panose="020B0400000000000000" pitchFamily="34" charset="-128"/>
+                    <a:ea typeface="Hiragino Sans W4" panose="020B0400000000000000" pitchFamily="34" charset="-128"/>
+                  </a:rPr>
+                  <a:t>企</a:t>
+                </a:r>
+              </a:p>
+            </p:txBody>
+          </p:sp>
+          <p:sp>
+            <p:nvSpPr>
+              <p:cNvPr id="38" name="テキスト ボックス 37">
+                <a:extLst>
+                  <a:ext uri="{FF2B5EF4-FFF2-40B4-BE49-F238E27FC236}">
+                    <a16:creationId xmlns:a16="http://schemas.microsoft.com/office/drawing/2014/main" id="{6B307519-1446-C959-28AD-BCDE98AEFA12}"/>
+                  </a:ext>
+                </a:extLst>
+              </p:cNvPr>
+              <p:cNvSpPr txBox="1"/>
+              <p:nvPr/>
+            </p:nvSpPr>
+            <p:spPr>
+              <a:xfrm>
+                <a:off x="1033326" y="4955624"/>
+                <a:ext cx="2288369" cy="584775"/>
+              </a:xfrm>
+              <a:prstGeom prst="rect">
+                <a:avLst/>
+              </a:prstGeom>
+              <a:noFill/>
+            </p:spPr>
+            <p:txBody>
+              <a:bodyPr wrap="square" rtlCol="0">
+                <a:spAutoFit/>
+              </a:bodyPr>
+              <a:lstStyle/>
+              <a:p>
+                <a:pPr algn="ctr"/>
+                <a:r>
+                  <a:rPr kumimoji="1" lang="ja-JP" altLang="en-US" sz="3200">
+                    <a:latin typeface="Hiragino Kaku Gothic StdN W8" panose="020B0800000000000000" pitchFamily="34" charset="-128"/>
+                    <a:ea typeface="Hiragino Kaku Gothic StdN W8" panose="020B0800000000000000" pitchFamily="34" charset="-128"/>
+                  </a:rPr>
+                  <a:t>使用者団体</a:t>
+                </a:r>
+              </a:p>
+            </p:txBody>
+          </p:sp>
+        </p:grpSp>
+        <p:cxnSp>
+          <p:nvCxnSpPr>
+            <p:cNvPr id="43" name="直線矢印コネクタ 42">
+              <a:extLst>
+                <a:ext uri="{FF2B5EF4-FFF2-40B4-BE49-F238E27FC236}">
+                  <a16:creationId xmlns:a16="http://schemas.microsoft.com/office/drawing/2014/main" id="{F4510149-27CF-0560-C8E7-D42022986622}"/>
+                </a:ext>
+              </a:extLst>
+            </p:cNvPr>
+            <p:cNvCxnSpPr>
+              <a:cxnSpLocks/>
+              <a:stCxn id="14" idx="0"/>
+              <a:endCxn id="10" idx="2"/>
+            </p:cNvCxnSpPr>
+            <p:nvPr/>
+          </p:nvCxnSpPr>
+          <p:spPr>
+            <a:xfrm flipV="1">
+              <a:off x="2177511" y="1219200"/>
+              <a:ext cx="4223289" cy="1303150"/>
+            </a:xfrm>
+            <a:prstGeom prst="straightConnector1">
+              <a:avLst/>
+            </a:prstGeom>
+            <a:ln w="63500" cap="sq">
+              <a:solidFill>
+                <a:srgbClr val="FF0000"/>
+              </a:solidFill>
+              <a:headEnd type="none"/>
+              <a:tailEnd type="stealth"/>
+            </a:ln>
+          </p:spPr>
+          <p:style>
+            <a:lnRef idx="1">
+              <a:schemeClr val="accent1"/>
+            </a:lnRef>
+            <a:fillRef idx="0">
+              <a:schemeClr val="accent1"/>
+            </a:fillRef>
+            <a:effectRef idx="0">
+              <a:schemeClr val="accent1"/>
+            </a:effectRef>
+            <a:fontRef idx="minor">
+              <a:schemeClr val="tx1"/>
+            </a:fontRef>
+          </p:style>
+        </p:cxnSp>
+        <p:cxnSp>
+          <p:nvCxnSpPr>
+            <p:cNvPr id="47" name="直線矢印コネクタ 46">
+              <a:extLst>
+                <a:ext uri="{FF2B5EF4-FFF2-40B4-BE49-F238E27FC236}">
+                  <a16:creationId xmlns:a16="http://schemas.microsoft.com/office/drawing/2014/main" id="{DD4DD2B8-9560-2B50-BE29-95D927A6282C}"/>
+                </a:ext>
+              </a:extLst>
+            </p:cNvPr>
+            <p:cNvCxnSpPr>
+              <a:cxnSpLocks/>
+              <a:stCxn id="22" idx="0"/>
+              <a:endCxn id="10" idx="2"/>
+            </p:cNvCxnSpPr>
+            <p:nvPr/>
+          </p:nvCxnSpPr>
+          <p:spPr>
+            <a:xfrm flipV="1">
+              <a:off x="3632534" y="1219200"/>
+              <a:ext cx="2768266" cy="4230280"/>
+            </a:xfrm>
+            <a:prstGeom prst="straightConnector1">
+              <a:avLst/>
+            </a:prstGeom>
+            <a:ln w="63500" cap="sq">
+              <a:solidFill>
+                <a:srgbClr val="FF0000"/>
+              </a:solidFill>
+              <a:headEnd type="none"/>
+              <a:tailEnd type="stealth"/>
+            </a:ln>
+          </p:spPr>
+          <p:style>
+            <a:lnRef idx="1">
+              <a:schemeClr val="accent1"/>
+            </a:lnRef>
+            <a:fillRef idx="0">
+              <a:schemeClr val="accent1"/>
+            </a:fillRef>
+            <a:effectRef idx="0">
+              <a:schemeClr val="accent1"/>
+            </a:effectRef>
+            <a:fontRef idx="minor">
+              <a:schemeClr val="tx1"/>
+            </a:fontRef>
+          </p:style>
+        </p:cxnSp>
+        <p:cxnSp>
+          <p:nvCxnSpPr>
+            <p:cNvPr id="50" name="直線矢印コネクタ 49">
+              <a:extLst>
+                <a:ext uri="{FF2B5EF4-FFF2-40B4-BE49-F238E27FC236}">
+                  <a16:creationId xmlns:a16="http://schemas.microsoft.com/office/drawing/2014/main" id="{EF9AC690-144C-0106-CC1C-1B8E7CCCBBD3}"/>
+                </a:ext>
+              </a:extLst>
+            </p:cNvPr>
+            <p:cNvCxnSpPr>
+              <a:cxnSpLocks/>
+              <a:stCxn id="28" idx="0"/>
+              <a:endCxn id="10" idx="2"/>
+            </p:cNvCxnSpPr>
+            <p:nvPr/>
+          </p:nvCxnSpPr>
+          <p:spPr>
+            <a:xfrm flipH="1" flipV="1">
+              <a:off x="6400800" y="1219200"/>
+              <a:ext cx="2768266" cy="4218616"/>
+            </a:xfrm>
+            <a:prstGeom prst="straightConnector1">
+              <a:avLst/>
+            </a:prstGeom>
+            <a:ln w="63500" cap="sq">
+              <a:solidFill>
+                <a:srgbClr val="FF0000"/>
+              </a:solidFill>
+              <a:headEnd type="none"/>
+              <a:tailEnd type="stealth"/>
+            </a:ln>
+          </p:spPr>
+          <p:style>
+            <a:lnRef idx="1">
+              <a:schemeClr val="accent1"/>
+            </a:lnRef>
+            <a:fillRef idx="0">
+              <a:schemeClr val="accent1"/>
+            </a:fillRef>
+            <a:effectRef idx="0">
+              <a:schemeClr val="accent1"/>
+            </a:effectRef>
+            <a:fontRef idx="minor">
+              <a:schemeClr val="tx1"/>
+            </a:fontRef>
+          </p:style>
+        </p:cxnSp>
+        <p:cxnSp>
+          <p:nvCxnSpPr>
+            <p:cNvPr id="55" name="直線矢印コネクタ 54">
+              <a:extLst>
+                <a:ext uri="{FF2B5EF4-FFF2-40B4-BE49-F238E27FC236}">
+                  <a16:creationId xmlns:a16="http://schemas.microsoft.com/office/drawing/2014/main" id="{3B251AB8-B8DD-C99A-2FF2-13C08E2ACDA9}"/>
+                </a:ext>
+              </a:extLst>
+            </p:cNvPr>
+            <p:cNvCxnSpPr>
+              <a:cxnSpLocks/>
+              <a:stCxn id="34" idx="0"/>
+              <a:endCxn id="10" idx="2"/>
+            </p:cNvCxnSpPr>
+            <p:nvPr/>
+          </p:nvCxnSpPr>
+          <p:spPr>
+            <a:xfrm flipH="1" flipV="1">
+              <a:off x="6400800" y="1219200"/>
+              <a:ext cx="4223289" cy="1303150"/>
+            </a:xfrm>
+            <a:prstGeom prst="straightConnector1">
+              <a:avLst/>
+            </a:prstGeom>
+            <a:ln w="63500" cap="sq">
+              <a:solidFill>
+                <a:srgbClr val="FF0000"/>
+              </a:solidFill>
+              <a:headEnd type="none"/>
+              <a:tailEnd type="stealth"/>
+            </a:ln>
+          </p:spPr>
+          <p:style>
+            <a:lnRef idx="1">
+              <a:schemeClr val="accent1"/>
+            </a:lnRef>
+            <a:fillRef idx="0">
+              <a:schemeClr val="accent1"/>
+            </a:fillRef>
+            <a:effectRef idx="0">
+              <a:schemeClr val="accent1"/>
+            </a:effectRef>
+            <a:fontRef idx="minor">
+              <a:schemeClr val="tx1"/>
+            </a:fontRef>
+          </p:style>
+        </p:cxnSp>
+        <p:cxnSp>
+          <p:nvCxnSpPr>
+            <p:cNvPr id="62" name="直線矢印コネクタ 61">
+              <a:extLst>
+                <a:ext uri="{FF2B5EF4-FFF2-40B4-BE49-F238E27FC236}">
+                  <a16:creationId xmlns:a16="http://schemas.microsoft.com/office/drawing/2014/main" id="{CDDD4E37-8783-C4D1-E2F2-9EBF0B54FD16}"/>
+                </a:ext>
+              </a:extLst>
+            </p:cNvPr>
+            <p:cNvCxnSpPr>
+              <a:cxnSpLocks/>
+              <a:stCxn id="28" idx="1"/>
+              <a:endCxn id="22" idx="5"/>
+            </p:cNvCxnSpPr>
+            <p:nvPr/>
+          </p:nvCxnSpPr>
+          <p:spPr>
+            <a:xfrm flipH="1">
+              <a:off x="4326083" y="6648621"/>
+              <a:ext cx="4149434" cy="11664"/>
+            </a:xfrm>
+            <a:prstGeom prst="straightConnector1">
+              <a:avLst/>
+            </a:prstGeom>
+            <a:ln w="63500" cap="sq" cmpd="dbl">
+              <a:solidFill>
+                <a:schemeClr val="tx1"/>
+              </a:solidFill>
+              <a:headEnd type="stealth"/>
+              <a:tailEnd type="stealth"/>
+            </a:ln>
+          </p:spPr>
+          <p:style>
+            <a:lnRef idx="1">
+              <a:schemeClr val="accent1"/>
+            </a:lnRef>
+            <a:fillRef idx="0">
+              <a:schemeClr val="accent1"/>
+            </a:fillRef>
+            <a:effectRef idx="0">
+              <a:schemeClr val="accent1"/>
+            </a:effectRef>
+            <a:fontRef idx="minor">
+              <a:schemeClr val="tx1"/>
+            </a:fontRef>
+          </p:style>
+        </p:cxnSp>
+        <p:cxnSp>
+          <p:nvCxnSpPr>
+            <p:cNvPr id="66" name="直線矢印コネクタ 65">
+              <a:extLst>
+                <a:ext uri="{FF2B5EF4-FFF2-40B4-BE49-F238E27FC236}">
+                  <a16:creationId xmlns:a16="http://schemas.microsoft.com/office/drawing/2014/main" id="{39A300DE-16E7-A5A9-B18E-39140C6F548C}"/>
+                </a:ext>
+              </a:extLst>
+            </p:cNvPr>
+            <p:cNvCxnSpPr>
+              <a:cxnSpLocks/>
+              <a:stCxn id="34" idx="1"/>
+              <a:endCxn id="14" idx="5"/>
+            </p:cNvCxnSpPr>
+            <p:nvPr/>
+          </p:nvCxnSpPr>
+          <p:spPr>
+            <a:xfrm flipH="1">
+              <a:off x="2871060" y="3733155"/>
+              <a:ext cx="7059480" cy="0"/>
+            </a:xfrm>
+            <a:prstGeom prst="straightConnector1">
+              <a:avLst/>
+            </a:prstGeom>
+            <a:ln w="63500" cap="sq" cmpd="dbl">
+              <a:solidFill>
+                <a:schemeClr val="tx1"/>
+              </a:solidFill>
+              <a:headEnd type="stealth"/>
+              <a:tailEnd type="stealth"/>
+            </a:ln>
+          </p:spPr>
+          <p:style>
+            <a:lnRef idx="1">
+              <a:schemeClr val="accent1"/>
+            </a:lnRef>
+            <a:fillRef idx="0">
+              <a:schemeClr val="accent1"/>
+            </a:fillRef>
+            <a:effectRef idx="0">
+              <a:schemeClr val="accent1"/>
+            </a:effectRef>
+            <a:fontRef idx="minor">
+              <a:schemeClr val="tx1"/>
+            </a:fontRef>
+          </p:style>
+        </p:cxnSp>
+        <p:sp>
+          <p:nvSpPr>
+            <p:cNvPr id="70" name="テキスト ボックス 69">
+              <a:extLst>
+                <a:ext uri="{FF2B5EF4-FFF2-40B4-BE49-F238E27FC236}">
+                  <a16:creationId xmlns:a16="http://schemas.microsoft.com/office/drawing/2014/main" id="{DA212AA4-0F75-CCDE-21C4-80852F5C45D1}"/>
+                </a:ext>
+              </a:extLst>
+            </p:cNvPr>
+            <p:cNvSpPr txBox="1"/>
+            <p:nvPr/>
+          </p:nvSpPr>
+          <p:spPr>
+            <a:xfrm>
+              <a:off x="8247696" y="1409110"/>
+              <a:ext cx="1415772" cy="461665"/>
+            </a:xfrm>
+            <a:prstGeom prst="rect">
+              <a:avLst/>
+            </a:prstGeom>
+            <a:noFill/>
+            <a:ln>
+              <a:noFill/>
+            </a:ln>
+          </p:spPr>
+          <p:txBody>
+            <a:bodyPr wrap="none" rtlCol="0">
+              <a:spAutoFit/>
+            </a:bodyPr>
+            <a:lstStyle/>
+            <a:p>
+              <a:pPr algn="ctr"/>
+              <a:r>
+                <a:rPr kumimoji="1" lang="ja-JP" altLang="en-US" sz="2400">
+                  <a:solidFill>
+                    <a:srgbClr val="FF0000"/>
+                  </a:solidFill>
+                  <a:latin typeface="Hiragino Sans W4" panose="020B0400000000000000" pitchFamily="34" charset="-128"/>
+                  <a:ea typeface="Hiragino Sans W4" panose="020B0400000000000000" pitchFamily="34" charset="-128"/>
+                </a:rPr>
+                <a:t>働きかけ</a:t>
+              </a:r>
+            </a:p>
+          </p:txBody>
+        </p:sp>
+        <p:sp>
+          <p:nvSpPr>
+            <p:cNvPr id="72" name="テキスト ボックス 71">
+              <a:extLst>
+                <a:ext uri="{FF2B5EF4-FFF2-40B4-BE49-F238E27FC236}">
+                  <a16:creationId xmlns:a16="http://schemas.microsoft.com/office/drawing/2014/main" id="{EE775F73-48AF-D561-0BDC-0FFB2F28BC69}"/>
+                </a:ext>
+              </a:extLst>
+            </p:cNvPr>
+            <p:cNvSpPr txBox="1"/>
+            <p:nvPr/>
+          </p:nvSpPr>
+          <p:spPr>
+            <a:xfrm>
+              <a:off x="5692913" y="3871061"/>
+              <a:ext cx="1415772" cy="461665"/>
+            </a:xfrm>
+            <a:prstGeom prst="rect">
+              <a:avLst/>
+            </a:prstGeom>
+            <a:noFill/>
+            <a:ln>
+              <a:noFill/>
+            </a:ln>
+          </p:spPr>
+          <p:txBody>
+            <a:bodyPr wrap="none" rtlCol="0">
+              <a:spAutoFit/>
+            </a:bodyPr>
+            <a:lstStyle/>
+            <a:p>
+              <a:pPr algn="ctr"/>
+              <a:r>
+                <a:rPr kumimoji="1" lang="ja-JP" altLang="en-US" sz="2400">
+                  <a:latin typeface="Hiragino Sans W4" panose="020B0400000000000000" pitchFamily="34" charset="-128"/>
+                  <a:ea typeface="Hiragino Sans W4" panose="020B0400000000000000" pitchFamily="34" charset="-128"/>
+                </a:rPr>
+                <a:t>労使交渉</a:t>
+              </a:r>
+            </a:p>
+          </p:txBody>
+        </p:sp>
+        <p:sp>
+          <p:nvSpPr>
+            <p:cNvPr id="73" name="テキスト ボックス 72">
+              <a:extLst>
+                <a:ext uri="{FF2B5EF4-FFF2-40B4-BE49-F238E27FC236}">
+                  <a16:creationId xmlns:a16="http://schemas.microsoft.com/office/drawing/2014/main" id="{D00B7ABE-612F-FF98-00AB-BBCD6EB6C86E}"/>
+                </a:ext>
+              </a:extLst>
+            </p:cNvPr>
+            <p:cNvSpPr txBox="1"/>
+            <p:nvPr/>
+          </p:nvSpPr>
+          <p:spPr>
+            <a:xfrm>
+              <a:off x="5692913" y="6798190"/>
+              <a:ext cx="1415772" cy="461665"/>
+            </a:xfrm>
+            <a:prstGeom prst="rect">
+              <a:avLst/>
+            </a:prstGeom>
+            <a:noFill/>
+            <a:ln>
+              <a:noFill/>
+            </a:ln>
+          </p:spPr>
+          <p:txBody>
+            <a:bodyPr wrap="none" rtlCol="0">
+              <a:spAutoFit/>
+            </a:bodyPr>
+            <a:lstStyle/>
+            <a:p>
+              <a:pPr algn="ctr"/>
+              <a:r>
+                <a:rPr kumimoji="1" lang="ja-JP" altLang="en-US" sz="2400">
+                  <a:latin typeface="Hiragino Sans W4" panose="020B0400000000000000" pitchFamily="34" charset="-128"/>
+                  <a:ea typeface="Hiragino Sans W4" panose="020B0400000000000000" pitchFamily="34" charset="-128"/>
+                </a:rPr>
+                <a:t>労使交渉</a:t>
+              </a:r>
+            </a:p>
+          </p:txBody>
+        </p:sp>
+      </p:grpSp>
+    </p:spTree>
+    <p:extLst>
+      <p:ext uri="{BB962C8B-B14F-4D97-AF65-F5344CB8AC3E}">
+        <p14:creationId xmlns:p14="http://schemas.microsoft.com/office/powerpoint/2010/main" val="2261260219"/>
+      </p:ext>
+    </p:extLst>
+  </p:cSld>
+  <p:clrMapOvr>
+    <a:masterClrMapping/>
+  </p:clrMapOvr>
+</p:sld>
+</file>
+
+<file path=ppt/slides/slide19.xml><?xml version="1.0" encoding="utf-8"?>
+<p:sld xmlns:a="http://schemas.openxmlformats.org/drawingml/2006/main" xmlns:r="http://schemas.openxmlformats.org/officeDocument/2006/relationships" xmlns:p="http://schemas.openxmlformats.org/presentationml/2006/main">
+  <p:cSld>
+    <p:spTree>
+      <p:nvGrpSpPr>
+        <p:cNvPr id="1" name=""/>
+        <p:cNvGrpSpPr/>
+        <p:nvPr/>
+      </p:nvGrpSpPr>
+      <p:grpSpPr>
+        <a:xfrm>
+          <a:off x="0" y="0"/>
+          <a:ext cx="0" cy="0"/>
+          <a:chOff x="0" y="0"/>
+          <a:chExt cx="0" cy="0"/>
+        </a:xfrm>
+      </p:grpSpPr>
+      <p:grpSp>
+        <p:nvGrpSpPr>
+          <p:cNvPr id="84" name="グループ化 83">
+            <a:extLst>
+              <a:ext uri="{FF2B5EF4-FFF2-40B4-BE49-F238E27FC236}">
+                <a16:creationId xmlns:a16="http://schemas.microsoft.com/office/drawing/2014/main" id="{EEFF685C-DBCB-4E87-CD92-21D93E29F6AC}"/>
+              </a:ext>
+            </a:extLst>
+          </p:cNvPr>
+          <p:cNvGrpSpPr/>
+          <p:nvPr/>
+        </p:nvGrpSpPr>
+        <p:grpSpPr>
+          <a:xfrm>
+            <a:off x="230657" y="508900"/>
+            <a:ext cx="12340286" cy="7973190"/>
+            <a:chOff x="229980" y="241614"/>
+            <a:chExt cx="12340286" cy="7973190"/>
+          </a:xfrm>
+        </p:grpSpPr>
+        <p:sp>
+          <p:nvSpPr>
+            <p:cNvPr id="2" name="角丸四角形 1">
+              <a:extLst>
+                <a:ext uri="{FF2B5EF4-FFF2-40B4-BE49-F238E27FC236}">
+                  <a16:creationId xmlns:a16="http://schemas.microsoft.com/office/drawing/2014/main" id="{02F5795D-0BF8-3A32-511E-F653846F61DD}"/>
+                </a:ext>
+              </a:extLst>
+            </p:cNvPr>
+            <p:cNvSpPr/>
+            <p:nvPr/>
+          </p:nvSpPr>
+          <p:spPr>
+            <a:xfrm>
+              <a:off x="5262001" y="241614"/>
+              <a:ext cx="2277597" cy="836909"/>
+            </a:xfrm>
+            <a:prstGeom prst="roundRect">
+              <a:avLst/>
+            </a:prstGeom>
+            <a:noFill/>
+            <a:ln w="28575">
+              <a:solidFill>
+                <a:schemeClr val="tx1"/>
+              </a:solidFill>
+            </a:ln>
+          </p:spPr>
+          <p:style>
+            <a:lnRef idx="2">
+              <a:schemeClr val="accent1">
+                <a:shade val="15000"/>
+              </a:schemeClr>
+            </a:lnRef>
+            <a:fillRef idx="1">
+              <a:schemeClr val="accent1"/>
+            </a:fillRef>
+            <a:effectRef idx="0">
+              <a:schemeClr val="accent1"/>
+            </a:effectRef>
+            <a:fontRef idx="minor">
+              <a:schemeClr val="lt1"/>
+            </a:fontRef>
+          </p:style>
+          <p:txBody>
+            <a:bodyPr rtlCol="0" anchor="ctr"/>
+            <a:lstStyle/>
+            <a:p>
+              <a:pPr algn="ctr"/>
+              <a:r>
+                <a:rPr kumimoji="1" lang="ja-JP" altLang="en-US" sz="4400">
+                  <a:solidFill>
+                    <a:schemeClr val="tx1"/>
+                  </a:solidFill>
+                  <a:latin typeface="Hiragino Kaku Gothic StdN W8" panose="020B0800000000000000" pitchFamily="34" charset="-128"/>
+                  <a:ea typeface="Hiragino Kaku Gothic StdN W8" panose="020B0800000000000000" pitchFamily="34" charset="-128"/>
+                </a:rPr>
+                <a:t>政府</a:t>
+              </a:r>
+              <a:endParaRPr kumimoji="1" lang="ja-JP" altLang="en-US" sz="3000"/>
+            </a:p>
+          </p:txBody>
+        </p:sp>
+        <p:grpSp>
+          <p:nvGrpSpPr>
+            <p:cNvPr id="9" name="グループ化 8">
+              <a:extLst>
+                <a:ext uri="{FF2B5EF4-FFF2-40B4-BE49-F238E27FC236}">
+                  <a16:creationId xmlns:a16="http://schemas.microsoft.com/office/drawing/2014/main" id="{64A915C2-413A-0C14-BD6A-AC5D03220E02}"/>
+                </a:ext>
+              </a:extLst>
+            </p:cNvPr>
+            <p:cNvGrpSpPr/>
+            <p:nvPr/>
+          </p:nvGrpSpPr>
+          <p:grpSpPr>
+            <a:xfrm>
+              <a:off x="229980" y="6125122"/>
+              <a:ext cx="1840245" cy="2089682"/>
+              <a:chOff x="579398" y="5504701"/>
+              <a:chExt cx="2774196" cy="2995075"/>
+            </a:xfrm>
+          </p:grpSpPr>
+          <p:sp>
+            <p:nvSpPr>
+              <p:cNvPr id="4" name="三角形 3">
+                <a:extLst>
+                  <a:ext uri="{FF2B5EF4-FFF2-40B4-BE49-F238E27FC236}">
+                    <a16:creationId xmlns:a16="http://schemas.microsoft.com/office/drawing/2014/main" id="{3E4D3F3A-5683-24F3-14E2-63A0B116513B}"/>
+                  </a:ext>
+                </a:extLst>
+              </p:cNvPr>
+              <p:cNvSpPr/>
+              <p:nvPr/>
+            </p:nvSpPr>
+            <p:spPr>
+              <a:xfrm>
+                <a:off x="579398" y="5504701"/>
+                <a:ext cx="2774196" cy="2421610"/>
+              </a:xfrm>
+              <a:prstGeom prst="triangle">
+                <a:avLst/>
+              </a:prstGeom>
+              <a:noFill/>
+              <a:ln w="28575">
+                <a:solidFill>
+                  <a:schemeClr val="tx1"/>
+                </a:solidFill>
+              </a:ln>
+            </p:spPr>
+            <p:style>
+              <a:lnRef idx="2">
+                <a:schemeClr val="accent1">
+                  <a:shade val="15000"/>
+                </a:schemeClr>
+              </a:lnRef>
+              <a:fillRef idx="1">
+                <a:schemeClr val="accent1"/>
+              </a:fillRef>
+              <a:effectRef idx="0">
+                <a:schemeClr val="accent1"/>
+              </a:effectRef>
+              <a:fontRef idx="minor">
+                <a:schemeClr val="lt1"/>
+              </a:fontRef>
+            </p:style>
+            <p:txBody>
+              <a:bodyPr rtlCol="0" anchor="ctr"/>
+              <a:lstStyle/>
+              <a:p>
+                <a:pPr algn="ctr"/>
+                <a:endParaRPr kumimoji="1" lang="ja-JP" altLang="en-US"/>
+              </a:p>
+            </p:txBody>
+          </p:sp>
+          <p:sp>
+            <p:nvSpPr>
+              <p:cNvPr id="5" name="円/楕円 4">
+                <a:extLst>
+                  <a:ext uri="{FF2B5EF4-FFF2-40B4-BE49-F238E27FC236}">
+                    <a16:creationId xmlns:a16="http://schemas.microsoft.com/office/drawing/2014/main" id="{522234F1-1001-207B-43A9-B187851D9CAE}"/>
+                  </a:ext>
+                </a:extLst>
+              </p:cNvPr>
+              <p:cNvSpPr/>
+              <p:nvPr/>
+            </p:nvSpPr>
+            <p:spPr>
+              <a:xfrm>
+                <a:off x="1152013" y="7100843"/>
+                <a:ext cx="573438" cy="573438"/>
+              </a:xfrm>
+              <a:prstGeom prst="ellipse">
+                <a:avLst/>
+              </a:prstGeom>
+              <a:noFill/>
+              <a:ln w="19050">
+                <a:solidFill>
+                  <a:schemeClr val="tx1"/>
+                </a:solidFill>
+              </a:ln>
+            </p:spPr>
+            <p:style>
+              <a:lnRef idx="2">
+                <a:schemeClr val="accent1">
+                  <a:shade val="15000"/>
+                </a:schemeClr>
+              </a:lnRef>
+              <a:fillRef idx="1">
+                <a:schemeClr val="accent1"/>
+              </a:fillRef>
+              <a:effectRef idx="0">
+                <a:schemeClr val="accent1"/>
+              </a:effectRef>
+              <a:fontRef idx="minor">
+                <a:schemeClr val="lt1"/>
+              </a:fontRef>
+            </p:style>
+            <p:txBody>
+              <a:bodyPr rtlCol="0" anchor="ctr"/>
+              <a:lstStyle/>
+              <a:p>
+                <a:pPr algn="ctr"/>
+                <a:r>
+                  <a:rPr kumimoji="1" lang="ja-JP" altLang="en-US" sz="2400">
+                    <a:solidFill>
+                      <a:schemeClr val="tx1"/>
+                    </a:solidFill>
+                    <a:latin typeface="Hiragino Sans W4" panose="020B0400000000000000" pitchFamily="34" charset="-128"/>
+                    <a:ea typeface="Hiragino Sans W4" panose="020B0400000000000000" pitchFamily="34" charset="-128"/>
+                  </a:rPr>
+                  <a:t>労</a:t>
+                </a:r>
+              </a:p>
+            </p:txBody>
+          </p:sp>
+          <p:sp>
+            <p:nvSpPr>
+              <p:cNvPr id="6" name="円/楕円 5">
+                <a:extLst>
+                  <a:ext uri="{FF2B5EF4-FFF2-40B4-BE49-F238E27FC236}">
+                    <a16:creationId xmlns:a16="http://schemas.microsoft.com/office/drawing/2014/main" id="{E697A7F3-D216-0366-AE9B-B92B2F609C97}"/>
+                  </a:ext>
+                </a:extLst>
+              </p:cNvPr>
+              <p:cNvSpPr/>
+              <p:nvPr/>
+            </p:nvSpPr>
+            <p:spPr>
+              <a:xfrm>
+                <a:off x="2252803" y="7100843"/>
+                <a:ext cx="573438" cy="573438"/>
+              </a:xfrm>
+              <a:prstGeom prst="ellipse">
+                <a:avLst/>
+              </a:prstGeom>
+              <a:noFill/>
+              <a:ln w="19050">
+                <a:solidFill>
+                  <a:schemeClr val="tx1"/>
+                </a:solidFill>
+              </a:ln>
+            </p:spPr>
+            <p:style>
+              <a:lnRef idx="2">
+                <a:schemeClr val="accent1">
+                  <a:shade val="15000"/>
+                </a:schemeClr>
+              </a:lnRef>
+              <a:fillRef idx="1">
+                <a:schemeClr val="accent1"/>
+              </a:fillRef>
+              <a:effectRef idx="0">
+                <a:schemeClr val="accent1"/>
+              </a:effectRef>
+              <a:fontRef idx="minor">
+                <a:schemeClr val="lt1"/>
+              </a:fontRef>
+            </p:style>
+            <p:txBody>
+              <a:bodyPr rtlCol="0" anchor="ctr"/>
+              <a:lstStyle/>
+              <a:p>
+                <a:pPr algn="ctr"/>
+                <a:r>
+                  <a:rPr kumimoji="1" lang="ja-JP" altLang="en-US" sz="2400">
+                    <a:solidFill>
+                      <a:schemeClr val="tx1"/>
+                    </a:solidFill>
+                    <a:latin typeface="Hiragino Sans W4" panose="020B0400000000000000" pitchFamily="34" charset="-128"/>
+                    <a:ea typeface="Hiragino Sans W4" panose="020B0400000000000000" pitchFamily="34" charset="-128"/>
+                  </a:rPr>
+                  <a:t>労</a:t>
+                </a:r>
+              </a:p>
+            </p:txBody>
+          </p:sp>
+          <p:sp>
+            <p:nvSpPr>
+              <p:cNvPr id="7" name="円/楕円 6">
+                <a:extLst>
+                  <a:ext uri="{FF2B5EF4-FFF2-40B4-BE49-F238E27FC236}">
+                    <a16:creationId xmlns:a16="http://schemas.microsoft.com/office/drawing/2014/main" id="{BB62F5A2-E2C8-AC27-4232-C323CD4F11AA}"/>
+                  </a:ext>
+                </a:extLst>
+              </p:cNvPr>
+              <p:cNvSpPr/>
+              <p:nvPr/>
+            </p:nvSpPr>
+            <p:spPr>
+              <a:xfrm>
+                <a:off x="1679777" y="6016053"/>
+                <a:ext cx="573438" cy="573438"/>
+              </a:xfrm>
+              <a:prstGeom prst="ellipse">
+                <a:avLst/>
+              </a:prstGeom>
+              <a:noFill/>
+              <a:ln w="19050">
+                <a:solidFill>
+                  <a:schemeClr val="tx1"/>
+                </a:solidFill>
+              </a:ln>
+            </p:spPr>
+            <p:style>
+              <a:lnRef idx="2">
+                <a:schemeClr val="accent1">
+                  <a:shade val="15000"/>
+                </a:schemeClr>
+              </a:lnRef>
+              <a:fillRef idx="1">
+                <a:schemeClr val="accent1"/>
+              </a:fillRef>
+              <a:effectRef idx="0">
+                <a:schemeClr val="accent1"/>
+              </a:effectRef>
+              <a:fontRef idx="minor">
+                <a:schemeClr val="lt1"/>
+              </a:fontRef>
+            </p:style>
+            <p:txBody>
+              <a:bodyPr rtlCol="0" anchor="ctr"/>
+              <a:lstStyle/>
+              <a:p>
+                <a:pPr algn="ctr"/>
+                <a:r>
+                  <a:rPr kumimoji="1" lang="ja-JP" altLang="en-US" sz="2400">
+                    <a:solidFill>
+                      <a:schemeClr val="tx1"/>
+                    </a:solidFill>
+                    <a:latin typeface="Hiragino Sans W4" panose="020B0400000000000000" pitchFamily="34" charset="-128"/>
+                    <a:ea typeface="Hiragino Sans W4" panose="020B0400000000000000" pitchFamily="34" charset="-128"/>
+                  </a:rPr>
+                  <a:t>労</a:t>
+                </a:r>
+              </a:p>
+            </p:txBody>
+          </p:sp>
+          <p:sp>
+            <p:nvSpPr>
+              <p:cNvPr id="8" name="テキスト ボックス 7">
+                <a:extLst>
+                  <a:ext uri="{FF2B5EF4-FFF2-40B4-BE49-F238E27FC236}">
+                    <a16:creationId xmlns:a16="http://schemas.microsoft.com/office/drawing/2014/main" id="{AB8F61F6-F738-B584-8FC7-6FCB79C73786}"/>
+                  </a:ext>
+                </a:extLst>
+              </p:cNvPr>
+              <p:cNvSpPr txBox="1"/>
+              <p:nvPr/>
+            </p:nvSpPr>
+            <p:spPr>
+              <a:xfrm>
+                <a:off x="925798" y="7926311"/>
+                <a:ext cx="2081398" cy="573465"/>
+              </a:xfrm>
+              <a:prstGeom prst="rect">
+                <a:avLst/>
+              </a:prstGeom>
+              <a:noFill/>
+            </p:spPr>
+            <p:txBody>
+              <a:bodyPr wrap="square" rtlCol="0">
+                <a:spAutoFit/>
+              </a:bodyPr>
+              <a:lstStyle/>
+              <a:p>
+                <a:pPr algn="ctr"/>
+                <a:r>
+                  <a:rPr kumimoji="1" lang="ja-JP" altLang="en-US" sz="2000">
+                    <a:latin typeface="Hiragino Kaku Gothic StdN W8" panose="020B0800000000000000" pitchFamily="34" charset="-128"/>
+                    <a:ea typeface="Hiragino Kaku Gothic StdN W8" panose="020B0800000000000000" pitchFamily="34" charset="-128"/>
+                  </a:rPr>
+                  <a:t>労働組合</a:t>
+                </a:r>
+              </a:p>
+            </p:txBody>
+          </p:sp>
+        </p:grpSp>
+        <p:grpSp>
+          <p:nvGrpSpPr>
+            <p:cNvPr id="22" name="グループ化 21">
+              <a:extLst>
+                <a:ext uri="{FF2B5EF4-FFF2-40B4-BE49-F238E27FC236}">
+                  <a16:creationId xmlns:a16="http://schemas.microsoft.com/office/drawing/2014/main" id="{BD7868CC-70B3-811A-4503-16919437EFEB}"/>
+                </a:ext>
+              </a:extLst>
+            </p:cNvPr>
+            <p:cNvGrpSpPr/>
+            <p:nvPr/>
+          </p:nvGrpSpPr>
+          <p:grpSpPr>
+            <a:xfrm>
+              <a:off x="2260008" y="6123680"/>
+              <a:ext cx="1840245" cy="2089682"/>
+              <a:chOff x="579398" y="5504701"/>
+              <a:chExt cx="2774196" cy="2995075"/>
+            </a:xfrm>
+          </p:grpSpPr>
+          <p:sp>
+            <p:nvSpPr>
+              <p:cNvPr id="23" name="三角形 22">
+                <a:extLst>
+                  <a:ext uri="{FF2B5EF4-FFF2-40B4-BE49-F238E27FC236}">
+                    <a16:creationId xmlns:a16="http://schemas.microsoft.com/office/drawing/2014/main" id="{63D1F1AE-600D-5BAA-BCC4-0E4282EF4938}"/>
+                  </a:ext>
+                </a:extLst>
+              </p:cNvPr>
+              <p:cNvSpPr/>
+              <p:nvPr/>
+            </p:nvSpPr>
+            <p:spPr>
+              <a:xfrm>
+                <a:off x="579398" y="5504701"/>
+                <a:ext cx="2774196" cy="2421610"/>
+              </a:xfrm>
+              <a:prstGeom prst="triangle">
+                <a:avLst/>
+              </a:prstGeom>
+              <a:noFill/>
+              <a:ln w="28575">
+                <a:solidFill>
+                  <a:schemeClr val="tx1"/>
+                </a:solidFill>
+              </a:ln>
+            </p:spPr>
+            <p:style>
+              <a:lnRef idx="2">
+                <a:schemeClr val="accent1">
+                  <a:shade val="15000"/>
+                </a:schemeClr>
+              </a:lnRef>
+              <a:fillRef idx="1">
+                <a:schemeClr val="accent1"/>
+              </a:fillRef>
+              <a:effectRef idx="0">
+                <a:schemeClr val="accent1"/>
+              </a:effectRef>
+              <a:fontRef idx="minor">
+                <a:schemeClr val="lt1"/>
+              </a:fontRef>
+            </p:style>
+            <p:txBody>
+              <a:bodyPr rtlCol="0" anchor="ctr"/>
+              <a:lstStyle/>
+              <a:p>
+                <a:pPr algn="ctr"/>
+                <a:endParaRPr kumimoji="1" lang="ja-JP" altLang="en-US"/>
+              </a:p>
+            </p:txBody>
+          </p:sp>
+          <p:sp>
+            <p:nvSpPr>
+              <p:cNvPr id="24" name="円/楕円 23">
+                <a:extLst>
+                  <a:ext uri="{FF2B5EF4-FFF2-40B4-BE49-F238E27FC236}">
+                    <a16:creationId xmlns:a16="http://schemas.microsoft.com/office/drawing/2014/main" id="{B682C1E8-7FE9-6820-B3DB-354D075494BF}"/>
+                  </a:ext>
+                </a:extLst>
+              </p:cNvPr>
+              <p:cNvSpPr/>
+              <p:nvPr/>
+            </p:nvSpPr>
+            <p:spPr>
+              <a:xfrm>
+                <a:off x="1152013" y="7100843"/>
+                <a:ext cx="573438" cy="573438"/>
+              </a:xfrm>
+              <a:prstGeom prst="ellipse">
+                <a:avLst/>
+              </a:prstGeom>
+              <a:noFill/>
+              <a:ln w="19050">
+                <a:solidFill>
+                  <a:schemeClr val="tx1"/>
+                </a:solidFill>
+              </a:ln>
+            </p:spPr>
+            <p:style>
+              <a:lnRef idx="2">
+                <a:schemeClr val="accent1">
+                  <a:shade val="15000"/>
+                </a:schemeClr>
+              </a:lnRef>
+              <a:fillRef idx="1">
+                <a:schemeClr val="accent1"/>
+              </a:fillRef>
+              <a:effectRef idx="0">
+                <a:schemeClr val="accent1"/>
+              </a:effectRef>
+              <a:fontRef idx="minor">
+                <a:schemeClr val="lt1"/>
+              </a:fontRef>
+            </p:style>
+            <p:txBody>
+              <a:bodyPr rtlCol="0" anchor="ctr"/>
+              <a:lstStyle/>
+              <a:p>
+                <a:pPr algn="ctr"/>
+                <a:r>
+                  <a:rPr kumimoji="1" lang="ja-JP" altLang="en-US" sz="2400">
+                    <a:solidFill>
+                      <a:schemeClr val="tx1"/>
+                    </a:solidFill>
+                    <a:latin typeface="Hiragino Sans W4" panose="020B0400000000000000" pitchFamily="34" charset="-128"/>
+                    <a:ea typeface="Hiragino Sans W4" panose="020B0400000000000000" pitchFamily="34" charset="-128"/>
+                  </a:rPr>
+                  <a:t>労</a:t>
+                </a:r>
+              </a:p>
+            </p:txBody>
+          </p:sp>
+          <p:sp>
+            <p:nvSpPr>
+              <p:cNvPr id="25" name="円/楕円 24">
+                <a:extLst>
+                  <a:ext uri="{FF2B5EF4-FFF2-40B4-BE49-F238E27FC236}">
+                    <a16:creationId xmlns:a16="http://schemas.microsoft.com/office/drawing/2014/main" id="{3688B88D-1B0B-1FFF-D7E2-656590535C46}"/>
+                  </a:ext>
+                </a:extLst>
+              </p:cNvPr>
+              <p:cNvSpPr/>
+              <p:nvPr/>
+            </p:nvSpPr>
+            <p:spPr>
+              <a:xfrm>
+                <a:off x="2252803" y="7100843"/>
+                <a:ext cx="573438" cy="573438"/>
+              </a:xfrm>
+              <a:prstGeom prst="ellipse">
+                <a:avLst/>
+              </a:prstGeom>
+              <a:noFill/>
+              <a:ln w="19050">
+                <a:solidFill>
+                  <a:schemeClr val="tx1"/>
+                </a:solidFill>
+              </a:ln>
+            </p:spPr>
+            <p:style>
+              <a:lnRef idx="2">
+                <a:schemeClr val="accent1">
+                  <a:shade val="15000"/>
+                </a:schemeClr>
+              </a:lnRef>
+              <a:fillRef idx="1">
+                <a:schemeClr val="accent1"/>
+              </a:fillRef>
+              <a:effectRef idx="0">
+                <a:schemeClr val="accent1"/>
+              </a:effectRef>
+              <a:fontRef idx="minor">
+                <a:schemeClr val="lt1"/>
+              </a:fontRef>
+            </p:style>
+            <p:txBody>
+              <a:bodyPr rtlCol="0" anchor="ctr"/>
+              <a:lstStyle/>
+              <a:p>
+                <a:pPr algn="ctr"/>
+                <a:r>
+                  <a:rPr kumimoji="1" lang="ja-JP" altLang="en-US" sz="2400">
+                    <a:solidFill>
+                      <a:schemeClr val="tx1"/>
+                    </a:solidFill>
+                    <a:latin typeface="Hiragino Sans W4" panose="020B0400000000000000" pitchFamily="34" charset="-128"/>
+                    <a:ea typeface="Hiragino Sans W4" panose="020B0400000000000000" pitchFamily="34" charset="-128"/>
+                  </a:rPr>
+                  <a:t>労</a:t>
+                </a:r>
+              </a:p>
+            </p:txBody>
+          </p:sp>
+          <p:sp>
+            <p:nvSpPr>
+              <p:cNvPr id="26" name="円/楕円 25">
+                <a:extLst>
+                  <a:ext uri="{FF2B5EF4-FFF2-40B4-BE49-F238E27FC236}">
+                    <a16:creationId xmlns:a16="http://schemas.microsoft.com/office/drawing/2014/main" id="{3FCE392C-998D-8B6C-7745-376A9A7487FB}"/>
+                  </a:ext>
+                </a:extLst>
+              </p:cNvPr>
+              <p:cNvSpPr/>
+              <p:nvPr/>
+            </p:nvSpPr>
+            <p:spPr>
+              <a:xfrm>
+                <a:off x="1679777" y="6016053"/>
+                <a:ext cx="573438" cy="573438"/>
+              </a:xfrm>
+              <a:prstGeom prst="ellipse">
+                <a:avLst/>
+              </a:prstGeom>
+              <a:noFill/>
+              <a:ln w="19050">
+                <a:solidFill>
+                  <a:schemeClr val="tx1"/>
+                </a:solidFill>
+              </a:ln>
+            </p:spPr>
+            <p:style>
+              <a:lnRef idx="2">
+                <a:schemeClr val="accent1">
+                  <a:shade val="15000"/>
+                </a:schemeClr>
+              </a:lnRef>
+              <a:fillRef idx="1">
+                <a:schemeClr val="accent1"/>
+              </a:fillRef>
+              <a:effectRef idx="0">
+                <a:schemeClr val="accent1"/>
+              </a:effectRef>
+              <a:fontRef idx="minor">
+                <a:schemeClr val="lt1"/>
+              </a:fontRef>
+            </p:style>
+            <p:txBody>
+              <a:bodyPr rtlCol="0" anchor="ctr"/>
+              <a:lstStyle/>
+              <a:p>
+                <a:pPr algn="ctr"/>
+                <a:r>
+                  <a:rPr kumimoji="1" lang="ja-JP" altLang="en-US" sz="2400">
+                    <a:solidFill>
+                      <a:schemeClr val="tx1"/>
+                    </a:solidFill>
+                    <a:latin typeface="Hiragino Sans W4" panose="020B0400000000000000" pitchFamily="34" charset="-128"/>
+                    <a:ea typeface="Hiragino Sans W4" panose="020B0400000000000000" pitchFamily="34" charset="-128"/>
+                  </a:rPr>
+                  <a:t>労</a:t>
+                </a:r>
+              </a:p>
+            </p:txBody>
+          </p:sp>
+          <p:sp>
+            <p:nvSpPr>
+              <p:cNvPr id="27" name="テキスト ボックス 26">
+                <a:extLst>
+                  <a:ext uri="{FF2B5EF4-FFF2-40B4-BE49-F238E27FC236}">
+                    <a16:creationId xmlns:a16="http://schemas.microsoft.com/office/drawing/2014/main" id="{66CF2D3E-8BD2-1B39-5A3C-40CE72ADE693}"/>
+                  </a:ext>
+                </a:extLst>
+              </p:cNvPr>
+              <p:cNvSpPr txBox="1"/>
+              <p:nvPr/>
+            </p:nvSpPr>
+            <p:spPr>
+              <a:xfrm>
+                <a:off x="925798" y="7926311"/>
+                <a:ext cx="2081398" cy="573465"/>
+              </a:xfrm>
+              <a:prstGeom prst="rect">
+                <a:avLst/>
+              </a:prstGeom>
+              <a:noFill/>
+            </p:spPr>
+            <p:txBody>
+              <a:bodyPr wrap="square" rtlCol="0">
+                <a:spAutoFit/>
+              </a:bodyPr>
+              <a:lstStyle/>
+              <a:p>
+                <a:pPr algn="ctr"/>
+                <a:r>
+                  <a:rPr kumimoji="1" lang="ja-JP" altLang="en-US" sz="2000">
+                    <a:latin typeface="Hiragino Kaku Gothic StdN W8" panose="020B0800000000000000" pitchFamily="34" charset="-128"/>
+                    <a:ea typeface="Hiragino Kaku Gothic StdN W8" panose="020B0800000000000000" pitchFamily="34" charset="-128"/>
+                  </a:rPr>
+                  <a:t>労働組合</a:t>
+                </a:r>
+              </a:p>
+            </p:txBody>
+          </p:sp>
+        </p:grpSp>
+        <p:grpSp>
+          <p:nvGrpSpPr>
+            <p:cNvPr id="28" name="グループ化 27">
+              <a:extLst>
+                <a:ext uri="{FF2B5EF4-FFF2-40B4-BE49-F238E27FC236}">
+                  <a16:creationId xmlns:a16="http://schemas.microsoft.com/office/drawing/2014/main" id="{7E8CEA0C-5994-31FB-15BD-087F55BEAC23}"/>
+                </a:ext>
+              </a:extLst>
+            </p:cNvPr>
+            <p:cNvGrpSpPr/>
+            <p:nvPr/>
+          </p:nvGrpSpPr>
+          <p:grpSpPr>
+            <a:xfrm>
+              <a:off x="4290036" y="6123680"/>
+              <a:ext cx="1840245" cy="2089682"/>
+              <a:chOff x="579398" y="5504701"/>
+              <a:chExt cx="2774196" cy="2995075"/>
+            </a:xfrm>
+          </p:grpSpPr>
+          <p:sp>
+            <p:nvSpPr>
+              <p:cNvPr id="29" name="三角形 28">
+                <a:extLst>
+                  <a:ext uri="{FF2B5EF4-FFF2-40B4-BE49-F238E27FC236}">
+                    <a16:creationId xmlns:a16="http://schemas.microsoft.com/office/drawing/2014/main" id="{A4A2A32C-4D7A-2913-27CB-5843DFD1C1CF}"/>
+                  </a:ext>
+                </a:extLst>
+              </p:cNvPr>
+              <p:cNvSpPr/>
+              <p:nvPr/>
+            </p:nvSpPr>
+            <p:spPr>
+              <a:xfrm>
+                <a:off x="579398" y="5504701"/>
+                <a:ext cx="2774196" cy="2421610"/>
+              </a:xfrm>
+              <a:prstGeom prst="triangle">
+                <a:avLst/>
+              </a:prstGeom>
+              <a:noFill/>
+              <a:ln w="28575">
+                <a:solidFill>
+                  <a:schemeClr val="tx1"/>
+                </a:solidFill>
+              </a:ln>
+            </p:spPr>
+            <p:style>
+              <a:lnRef idx="2">
+                <a:schemeClr val="accent1">
+                  <a:shade val="15000"/>
+                </a:schemeClr>
+              </a:lnRef>
+              <a:fillRef idx="1">
+                <a:schemeClr val="accent1"/>
+              </a:fillRef>
+              <a:effectRef idx="0">
+                <a:schemeClr val="accent1"/>
+              </a:effectRef>
+              <a:fontRef idx="minor">
+                <a:schemeClr val="lt1"/>
+              </a:fontRef>
+            </p:style>
+            <p:txBody>
+              <a:bodyPr rtlCol="0" anchor="ctr"/>
+              <a:lstStyle/>
+              <a:p>
+                <a:pPr algn="ctr"/>
+                <a:endParaRPr kumimoji="1" lang="ja-JP" altLang="en-US"/>
+              </a:p>
+            </p:txBody>
+          </p:sp>
+          <p:sp>
+            <p:nvSpPr>
+              <p:cNvPr id="30" name="円/楕円 29">
+                <a:extLst>
+                  <a:ext uri="{FF2B5EF4-FFF2-40B4-BE49-F238E27FC236}">
+                    <a16:creationId xmlns:a16="http://schemas.microsoft.com/office/drawing/2014/main" id="{5615956A-1D6F-EAA0-4E17-5F0A73A4BE4D}"/>
+                  </a:ext>
+                </a:extLst>
+              </p:cNvPr>
+              <p:cNvSpPr/>
+              <p:nvPr/>
+            </p:nvSpPr>
+            <p:spPr>
+              <a:xfrm>
+                <a:off x="1152013" y="7100843"/>
+                <a:ext cx="573438" cy="573438"/>
+              </a:xfrm>
+              <a:prstGeom prst="ellipse">
+                <a:avLst/>
+              </a:prstGeom>
+              <a:noFill/>
+              <a:ln w="19050">
+                <a:solidFill>
+                  <a:schemeClr val="tx1"/>
+                </a:solidFill>
+              </a:ln>
+            </p:spPr>
+            <p:style>
+              <a:lnRef idx="2">
+                <a:schemeClr val="accent1">
+                  <a:shade val="15000"/>
+                </a:schemeClr>
+              </a:lnRef>
+              <a:fillRef idx="1">
+                <a:schemeClr val="accent1"/>
+              </a:fillRef>
+              <a:effectRef idx="0">
+                <a:schemeClr val="accent1"/>
+              </a:effectRef>
+              <a:fontRef idx="minor">
+                <a:schemeClr val="lt1"/>
+              </a:fontRef>
+            </p:style>
+            <p:txBody>
+              <a:bodyPr rtlCol="0" anchor="ctr"/>
+              <a:lstStyle/>
+              <a:p>
+                <a:pPr algn="ctr"/>
+                <a:r>
+                  <a:rPr kumimoji="1" lang="ja-JP" altLang="en-US" sz="2400">
+                    <a:solidFill>
+                      <a:schemeClr val="tx1"/>
+                    </a:solidFill>
+                    <a:latin typeface="Hiragino Sans W4" panose="020B0400000000000000" pitchFamily="34" charset="-128"/>
+                    <a:ea typeface="Hiragino Sans W4" panose="020B0400000000000000" pitchFamily="34" charset="-128"/>
+                  </a:rPr>
+                  <a:t>労</a:t>
+                </a:r>
+              </a:p>
+            </p:txBody>
+          </p:sp>
+          <p:sp>
+            <p:nvSpPr>
+              <p:cNvPr id="31" name="円/楕円 30">
+                <a:extLst>
+                  <a:ext uri="{FF2B5EF4-FFF2-40B4-BE49-F238E27FC236}">
+                    <a16:creationId xmlns:a16="http://schemas.microsoft.com/office/drawing/2014/main" id="{A0C3599C-CBD3-F3F6-D447-81204880F36E}"/>
+                  </a:ext>
+                </a:extLst>
+              </p:cNvPr>
+              <p:cNvSpPr/>
+              <p:nvPr/>
+            </p:nvSpPr>
+            <p:spPr>
+              <a:xfrm>
+                <a:off x="2252803" y="7100843"/>
+                <a:ext cx="573438" cy="573438"/>
+              </a:xfrm>
+              <a:prstGeom prst="ellipse">
+                <a:avLst/>
+              </a:prstGeom>
+              <a:noFill/>
+              <a:ln w="19050">
+                <a:solidFill>
+                  <a:schemeClr val="tx1"/>
+                </a:solidFill>
+              </a:ln>
+            </p:spPr>
+            <p:style>
+              <a:lnRef idx="2">
+                <a:schemeClr val="accent1">
+                  <a:shade val="15000"/>
+                </a:schemeClr>
+              </a:lnRef>
+              <a:fillRef idx="1">
+                <a:schemeClr val="accent1"/>
+              </a:fillRef>
+              <a:effectRef idx="0">
+                <a:schemeClr val="accent1"/>
+              </a:effectRef>
+              <a:fontRef idx="minor">
+                <a:schemeClr val="lt1"/>
+              </a:fontRef>
+            </p:style>
+            <p:txBody>
+              <a:bodyPr rtlCol="0" anchor="ctr"/>
+              <a:lstStyle/>
+              <a:p>
+                <a:pPr algn="ctr"/>
+                <a:r>
+                  <a:rPr kumimoji="1" lang="ja-JP" altLang="en-US" sz="2400">
+                    <a:solidFill>
+                      <a:schemeClr val="tx1"/>
+                    </a:solidFill>
+                    <a:latin typeface="Hiragino Sans W4" panose="020B0400000000000000" pitchFamily="34" charset="-128"/>
+                    <a:ea typeface="Hiragino Sans W4" panose="020B0400000000000000" pitchFamily="34" charset="-128"/>
+                  </a:rPr>
+                  <a:t>労</a:t>
+                </a:r>
+              </a:p>
+            </p:txBody>
+          </p:sp>
+          <p:sp>
+            <p:nvSpPr>
+              <p:cNvPr id="32" name="円/楕円 31">
+                <a:extLst>
+                  <a:ext uri="{FF2B5EF4-FFF2-40B4-BE49-F238E27FC236}">
+                    <a16:creationId xmlns:a16="http://schemas.microsoft.com/office/drawing/2014/main" id="{75C14869-7E96-1CB2-6C23-404F0365ACCA}"/>
+                  </a:ext>
+                </a:extLst>
+              </p:cNvPr>
+              <p:cNvSpPr/>
+              <p:nvPr/>
+            </p:nvSpPr>
+            <p:spPr>
+              <a:xfrm>
+                <a:off x="1679777" y="6016053"/>
+                <a:ext cx="573438" cy="573438"/>
+              </a:xfrm>
+              <a:prstGeom prst="ellipse">
+                <a:avLst/>
+              </a:prstGeom>
+              <a:noFill/>
+              <a:ln w="19050">
+                <a:solidFill>
+                  <a:schemeClr val="tx1"/>
+                </a:solidFill>
+              </a:ln>
+            </p:spPr>
+            <p:style>
+              <a:lnRef idx="2">
+                <a:schemeClr val="accent1">
+                  <a:shade val="15000"/>
+                </a:schemeClr>
+              </a:lnRef>
+              <a:fillRef idx="1">
+                <a:schemeClr val="accent1"/>
+              </a:fillRef>
+              <a:effectRef idx="0">
+                <a:schemeClr val="accent1"/>
+              </a:effectRef>
+              <a:fontRef idx="minor">
+                <a:schemeClr val="lt1"/>
+              </a:fontRef>
+            </p:style>
+            <p:txBody>
+              <a:bodyPr rtlCol="0" anchor="ctr"/>
+              <a:lstStyle/>
+              <a:p>
+                <a:pPr algn="ctr"/>
+                <a:r>
+                  <a:rPr kumimoji="1" lang="ja-JP" altLang="en-US" sz="2400">
+                    <a:solidFill>
+                      <a:schemeClr val="tx1"/>
+                    </a:solidFill>
+                    <a:latin typeface="Hiragino Sans W4" panose="020B0400000000000000" pitchFamily="34" charset="-128"/>
+                    <a:ea typeface="Hiragino Sans W4" panose="020B0400000000000000" pitchFamily="34" charset="-128"/>
+                  </a:rPr>
+                  <a:t>労</a:t>
+                </a:r>
+              </a:p>
+            </p:txBody>
+          </p:sp>
+          <p:sp>
+            <p:nvSpPr>
+              <p:cNvPr id="33" name="テキスト ボックス 32">
+                <a:extLst>
+                  <a:ext uri="{FF2B5EF4-FFF2-40B4-BE49-F238E27FC236}">
+                    <a16:creationId xmlns:a16="http://schemas.microsoft.com/office/drawing/2014/main" id="{9E1B8CB7-C6B3-48C6-CB5D-F31E97C25A3A}"/>
+                  </a:ext>
+                </a:extLst>
+              </p:cNvPr>
+              <p:cNvSpPr txBox="1"/>
+              <p:nvPr/>
+            </p:nvSpPr>
+            <p:spPr>
+              <a:xfrm>
+                <a:off x="925798" y="7926311"/>
+                <a:ext cx="2081398" cy="573465"/>
+              </a:xfrm>
+              <a:prstGeom prst="rect">
+                <a:avLst/>
+              </a:prstGeom>
+              <a:noFill/>
+            </p:spPr>
+            <p:txBody>
+              <a:bodyPr wrap="square" rtlCol="0">
+                <a:spAutoFit/>
+              </a:bodyPr>
+              <a:lstStyle/>
+              <a:p>
+                <a:pPr algn="ctr"/>
+                <a:r>
+                  <a:rPr kumimoji="1" lang="ja-JP" altLang="en-US" sz="2000">
+                    <a:latin typeface="Hiragino Kaku Gothic StdN W8" panose="020B0800000000000000" pitchFamily="34" charset="-128"/>
+                    <a:ea typeface="Hiragino Kaku Gothic StdN W8" panose="020B0800000000000000" pitchFamily="34" charset="-128"/>
+                  </a:rPr>
+                  <a:t>労働組合</a:t>
+                </a:r>
+              </a:p>
+            </p:txBody>
+          </p:sp>
+        </p:grpSp>
+        <p:sp>
+          <p:nvSpPr>
+            <p:cNvPr id="34" name="角丸四角形 33">
+              <a:extLst>
+                <a:ext uri="{FF2B5EF4-FFF2-40B4-BE49-F238E27FC236}">
+                  <a16:creationId xmlns:a16="http://schemas.microsoft.com/office/drawing/2014/main" id="{E6FAE759-C9C6-05F0-11F3-6E9080C7D8F6}"/>
+                </a:ext>
+              </a:extLst>
+            </p:cNvPr>
+            <p:cNvSpPr/>
+            <p:nvPr/>
+          </p:nvSpPr>
+          <p:spPr>
+            <a:xfrm>
+              <a:off x="1920167" y="2729133"/>
+              <a:ext cx="2599651" cy="1273126"/>
+            </a:xfrm>
+            <a:prstGeom prst="roundRect">
+              <a:avLst/>
+            </a:prstGeom>
+            <a:noFill/>
+            <a:ln w="28575">
+              <a:solidFill>
+                <a:schemeClr val="tx1"/>
+              </a:solidFill>
+            </a:ln>
+          </p:spPr>
+          <p:style>
+            <a:lnRef idx="2">
+              <a:schemeClr val="accent1">
+                <a:shade val="15000"/>
+              </a:schemeClr>
+            </a:lnRef>
+            <a:fillRef idx="1">
+              <a:schemeClr val="accent1"/>
+            </a:fillRef>
+            <a:effectRef idx="0">
+              <a:schemeClr val="accent1"/>
+            </a:effectRef>
+            <a:fontRef idx="minor">
+              <a:schemeClr val="lt1"/>
+            </a:fontRef>
+          </p:style>
+          <p:txBody>
+            <a:bodyPr rtlCol="0" anchor="ctr"/>
+            <a:lstStyle/>
+            <a:p>
+              <a:pPr algn="ctr"/>
+              <a:r>
+                <a:rPr kumimoji="1" lang="ja-JP" altLang="en-US" sz="4400">
+                  <a:solidFill>
+                    <a:schemeClr val="tx1"/>
+                  </a:solidFill>
+                  <a:latin typeface="Hiragino Kaku Gothic StdN W8" panose="020B0800000000000000" pitchFamily="34" charset="-128"/>
+                  <a:ea typeface="Hiragino Kaku Gothic StdN W8" panose="020B0800000000000000" pitchFamily="34" charset="-128"/>
+                </a:rPr>
+                <a:t>頂上団体</a:t>
+              </a:r>
+              <a:endParaRPr kumimoji="1" lang="ja-JP" altLang="en-US" sz="3000"/>
+            </a:p>
+          </p:txBody>
+        </p:sp>
+        <p:grpSp>
+          <p:nvGrpSpPr>
+            <p:cNvPr id="37" name="グループ化 36">
+              <a:extLst>
+                <a:ext uri="{FF2B5EF4-FFF2-40B4-BE49-F238E27FC236}">
+                  <a16:creationId xmlns:a16="http://schemas.microsoft.com/office/drawing/2014/main" id="{A1293DB6-C347-5220-9E75-4DBDC594EEBD}"/>
+                </a:ext>
+              </a:extLst>
+            </p:cNvPr>
+            <p:cNvGrpSpPr/>
+            <p:nvPr/>
+          </p:nvGrpSpPr>
+          <p:grpSpPr>
+            <a:xfrm>
+              <a:off x="6669965" y="6125122"/>
+              <a:ext cx="1840245" cy="2088240"/>
+              <a:chOff x="579398" y="5504701"/>
+              <a:chExt cx="2774196" cy="2993008"/>
+            </a:xfrm>
+          </p:grpSpPr>
+          <p:sp>
+            <p:nvSpPr>
+              <p:cNvPr id="38" name="三角形 37">
+                <a:extLst>
+                  <a:ext uri="{FF2B5EF4-FFF2-40B4-BE49-F238E27FC236}">
+                    <a16:creationId xmlns:a16="http://schemas.microsoft.com/office/drawing/2014/main" id="{28A80CC9-D088-2F87-9F8D-1985989A09D3}"/>
+                  </a:ext>
+                </a:extLst>
+              </p:cNvPr>
+              <p:cNvSpPr/>
+              <p:nvPr/>
+            </p:nvSpPr>
+            <p:spPr>
+              <a:xfrm>
+                <a:off x="579398" y="5504701"/>
+                <a:ext cx="2774196" cy="2421610"/>
+              </a:xfrm>
+              <a:prstGeom prst="triangle">
+                <a:avLst/>
+              </a:prstGeom>
+              <a:noFill/>
+              <a:ln w="28575">
+                <a:solidFill>
+                  <a:schemeClr val="tx1"/>
+                </a:solidFill>
+              </a:ln>
+            </p:spPr>
+            <p:style>
+              <a:lnRef idx="2">
+                <a:schemeClr val="accent1">
+                  <a:shade val="15000"/>
+                </a:schemeClr>
+              </a:lnRef>
+              <a:fillRef idx="1">
+                <a:schemeClr val="accent1"/>
+              </a:fillRef>
+              <a:effectRef idx="0">
+                <a:schemeClr val="accent1"/>
+              </a:effectRef>
+              <a:fontRef idx="minor">
+                <a:schemeClr val="lt1"/>
+              </a:fontRef>
+            </p:style>
+            <p:txBody>
+              <a:bodyPr rtlCol="0" anchor="ctr"/>
+              <a:lstStyle/>
+              <a:p>
+                <a:pPr algn="ctr"/>
+                <a:endParaRPr kumimoji="1" lang="ja-JP" altLang="en-US"/>
+              </a:p>
+            </p:txBody>
+          </p:sp>
+          <p:sp>
+            <p:nvSpPr>
+              <p:cNvPr id="39" name="円/楕円 38">
+                <a:extLst>
+                  <a:ext uri="{FF2B5EF4-FFF2-40B4-BE49-F238E27FC236}">
+                    <a16:creationId xmlns:a16="http://schemas.microsoft.com/office/drawing/2014/main" id="{04D10A54-B404-DF67-E5A2-6504F6E32205}"/>
+                  </a:ext>
+                </a:extLst>
+              </p:cNvPr>
+              <p:cNvSpPr/>
+              <p:nvPr/>
+            </p:nvSpPr>
+            <p:spPr>
+              <a:xfrm>
+                <a:off x="1152013" y="7100843"/>
+                <a:ext cx="573438" cy="573438"/>
+              </a:xfrm>
+              <a:prstGeom prst="ellipse">
+                <a:avLst/>
+              </a:prstGeom>
+              <a:noFill/>
+              <a:ln w="19050">
+                <a:solidFill>
+                  <a:schemeClr val="tx1"/>
+                </a:solidFill>
+              </a:ln>
+            </p:spPr>
+            <p:style>
+              <a:lnRef idx="2">
+                <a:schemeClr val="accent1">
+                  <a:shade val="15000"/>
+                </a:schemeClr>
+              </a:lnRef>
+              <a:fillRef idx="1">
+                <a:schemeClr val="accent1"/>
+              </a:fillRef>
+              <a:effectRef idx="0">
+                <a:schemeClr val="accent1"/>
+              </a:effectRef>
+              <a:fontRef idx="minor">
+                <a:schemeClr val="lt1"/>
+              </a:fontRef>
+            </p:style>
+            <p:txBody>
+              <a:bodyPr rtlCol="0" anchor="ctr"/>
+              <a:lstStyle/>
+              <a:p>
+                <a:pPr algn="ctr"/>
+                <a:r>
+                  <a:rPr kumimoji="1" lang="ja-JP" altLang="en-US" sz="2400">
+                    <a:solidFill>
+                      <a:schemeClr val="tx1"/>
+                    </a:solidFill>
+                    <a:latin typeface="Hiragino Sans W4" panose="020B0400000000000000" pitchFamily="34" charset="-128"/>
+                    <a:ea typeface="Hiragino Sans W4" panose="020B0400000000000000" pitchFamily="34" charset="-128"/>
+                  </a:rPr>
+                  <a:t>企</a:t>
+                </a:r>
+              </a:p>
+            </p:txBody>
+          </p:sp>
+          <p:sp>
+            <p:nvSpPr>
+              <p:cNvPr id="40" name="円/楕円 39">
+                <a:extLst>
+                  <a:ext uri="{FF2B5EF4-FFF2-40B4-BE49-F238E27FC236}">
+                    <a16:creationId xmlns:a16="http://schemas.microsoft.com/office/drawing/2014/main" id="{2FF33F5E-1D9B-3D51-E934-2874899DFF04}"/>
+                  </a:ext>
+                </a:extLst>
+              </p:cNvPr>
+              <p:cNvSpPr/>
+              <p:nvPr/>
+            </p:nvSpPr>
+            <p:spPr>
+              <a:xfrm>
+                <a:off x="2252803" y="7100843"/>
+                <a:ext cx="573438" cy="573438"/>
+              </a:xfrm>
+              <a:prstGeom prst="ellipse">
+                <a:avLst/>
+              </a:prstGeom>
+              <a:noFill/>
+              <a:ln w="19050">
+                <a:solidFill>
+                  <a:schemeClr val="tx1"/>
+                </a:solidFill>
+              </a:ln>
+            </p:spPr>
+            <p:style>
+              <a:lnRef idx="2">
+                <a:schemeClr val="accent1">
+                  <a:shade val="15000"/>
+                </a:schemeClr>
+              </a:lnRef>
+              <a:fillRef idx="1">
+                <a:schemeClr val="accent1"/>
+              </a:fillRef>
+              <a:effectRef idx="0">
+                <a:schemeClr val="accent1"/>
+              </a:effectRef>
+              <a:fontRef idx="minor">
+                <a:schemeClr val="lt1"/>
+              </a:fontRef>
+            </p:style>
+            <p:txBody>
+              <a:bodyPr rtlCol="0" anchor="ctr"/>
+              <a:lstStyle/>
+              <a:p>
+                <a:pPr algn="ctr"/>
+                <a:r>
+                  <a:rPr kumimoji="1" lang="ja-JP" altLang="en-US" sz="2400">
+                    <a:solidFill>
+                      <a:schemeClr val="tx1"/>
+                    </a:solidFill>
+                    <a:latin typeface="Hiragino Sans W4" panose="020B0400000000000000" pitchFamily="34" charset="-128"/>
+                    <a:ea typeface="Hiragino Sans W4" panose="020B0400000000000000" pitchFamily="34" charset="-128"/>
+                  </a:rPr>
+                  <a:t>企</a:t>
+                </a:r>
+              </a:p>
+            </p:txBody>
+          </p:sp>
+          <p:sp>
+            <p:nvSpPr>
+              <p:cNvPr id="41" name="円/楕円 40">
+                <a:extLst>
+                  <a:ext uri="{FF2B5EF4-FFF2-40B4-BE49-F238E27FC236}">
+                    <a16:creationId xmlns:a16="http://schemas.microsoft.com/office/drawing/2014/main" id="{50355619-60A0-2823-9A49-A7A45FDC04DE}"/>
+                  </a:ext>
+                </a:extLst>
+              </p:cNvPr>
+              <p:cNvSpPr/>
+              <p:nvPr/>
+            </p:nvSpPr>
+            <p:spPr>
+              <a:xfrm>
+                <a:off x="1679777" y="6016053"/>
+                <a:ext cx="573438" cy="573438"/>
+              </a:xfrm>
+              <a:prstGeom prst="ellipse">
+                <a:avLst/>
+              </a:prstGeom>
+              <a:noFill/>
+              <a:ln w="19050">
+                <a:solidFill>
+                  <a:schemeClr val="tx1"/>
+                </a:solidFill>
+              </a:ln>
+            </p:spPr>
+            <p:style>
+              <a:lnRef idx="2">
+                <a:schemeClr val="accent1">
+                  <a:shade val="15000"/>
+                </a:schemeClr>
+              </a:lnRef>
+              <a:fillRef idx="1">
+                <a:schemeClr val="accent1"/>
+              </a:fillRef>
+              <a:effectRef idx="0">
+                <a:schemeClr val="accent1"/>
+              </a:effectRef>
+              <a:fontRef idx="minor">
+                <a:schemeClr val="lt1"/>
+              </a:fontRef>
+            </p:style>
+            <p:txBody>
+              <a:bodyPr rtlCol="0" anchor="ctr"/>
+              <a:lstStyle/>
+              <a:p>
+                <a:pPr algn="ctr"/>
+                <a:r>
+                  <a:rPr kumimoji="1" lang="ja-JP" altLang="en-US" sz="2400">
+                    <a:solidFill>
+                      <a:schemeClr val="tx1"/>
+                    </a:solidFill>
+                    <a:latin typeface="Hiragino Sans W4" panose="020B0400000000000000" pitchFamily="34" charset="-128"/>
+                    <a:ea typeface="Hiragino Sans W4" panose="020B0400000000000000" pitchFamily="34" charset="-128"/>
+                  </a:rPr>
+                  <a:t>企</a:t>
+                </a:r>
+              </a:p>
+            </p:txBody>
+          </p:sp>
+          <p:sp>
+            <p:nvSpPr>
+              <p:cNvPr id="42" name="テキスト ボックス 41">
+                <a:extLst>
+                  <a:ext uri="{FF2B5EF4-FFF2-40B4-BE49-F238E27FC236}">
+                    <a16:creationId xmlns:a16="http://schemas.microsoft.com/office/drawing/2014/main" id="{409F1D85-5108-854D-2373-2FFE64CA856D}"/>
+                  </a:ext>
+                </a:extLst>
+              </p:cNvPr>
+              <p:cNvSpPr txBox="1"/>
+              <p:nvPr/>
+            </p:nvSpPr>
+            <p:spPr>
+              <a:xfrm>
+                <a:off x="835255" y="7924244"/>
+                <a:ext cx="2262481" cy="573465"/>
+              </a:xfrm>
+              <a:prstGeom prst="rect">
+                <a:avLst/>
+              </a:prstGeom>
+              <a:noFill/>
+            </p:spPr>
+            <p:txBody>
+              <a:bodyPr wrap="square" rtlCol="0">
+                <a:spAutoFit/>
+              </a:bodyPr>
+              <a:lstStyle/>
+              <a:p>
+                <a:pPr algn="ctr"/>
+                <a:r>
+                  <a:rPr kumimoji="1" lang="ja-JP" altLang="en-US" sz="2000">
+                    <a:latin typeface="Hiragino Kaku Gothic StdN W8" panose="020B0800000000000000" pitchFamily="34" charset="-128"/>
+                    <a:ea typeface="Hiragino Kaku Gothic StdN W8" panose="020B0800000000000000" pitchFamily="34" charset="-128"/>
+                  </a:rPr>
+                  <a:t>使用者団体</a:t>
+                </a:r>
+              </a:p>
+            </p:txBody>
+          </p:sp>
+        </p:grpSp>
+        <p:grpSp>
+          <p:nvGrpSpPr>
+            <p:cNvPr id="43" name="グループ化 42">
+              <a:extLst>
+                <a:ext uri="{FF2B5EF4-FFF2-40B4-BE49-F238E27FC236}">
+                  <a16:creationId xmlns:a16="http://schemas.microsoft.com/office/drawing/2014/main" id="{BE77B804-5E76-6F04-B508-C9AFD2D37147}"/>
+                </a:ext>
+              </a:extLst>
+            </p:cNvPr>
+            <p:cNvGrpSpPr/>
+            <p:nvPr/>
+          </p:nvGrpSpPr>
+          <p:grpSpPr>
+            <a:xfrm>
+              <a:off x="8699993" y="6123680"/>
+              <a:ext cx="1840245" cy="1689572"/>
+              <a:chOff x="579398" y="5504701"/>
+              <a:chExt cx="2774196" cy="2421610"/>
+            </a:xfrm>
+          </p:grpSpPr>
+          <p:sp>
+            <p:nvSpPr>
+              <p:cNvPr id="44" name="三角形 43">
+                <a:extLst>
+                  <a:ext uri="{FF2B5EF4-FFF2-40B4-BE49-F238E27FC236}">
+                    <a16:creationId xmlns:a16="http://schemas.microsoft.com/office/drawing/2014/main" id="{22AC3AB6-5294-D115-B494-1557F59461EA}"/>
+                  </a:ext>
+                </a:extLst>
+              </p:cNvPr>
+              <p:cNvSpPr/>
+              <p:nvPr/>
+            </p:nvSpPr>
+            <p:spPr>
+              <a:xfrm>
+                <a:off x="579398" y="5504701"/>
+                <a:ext cx="2774196" cy="2421610"/>
+              </a:xfrm>
+              <a:prstGeom prst="triangle">
+                <a:avLst/>
+              </a:prstGeom>
+              <a:noFill/>
+              <a:ln w="28575">
+                <a:solidFill>
+                  <a:schemeClr val="tx1"/>
+                </a:solidFill>
+              </a:ln>
+            </p:spPr>
+            <p:style>
+              <a:lnRef idx="2">
+                <a:schemeClr val="accent1">
+                  <a:shade val="15000"/>
+                </a:schemeClr>
+              </a:lnRef>
+              <a:fillRef idx="1">
+                <a:schemeClr val="accent1"/>
+              </a:fillRef>
+              <a:effectRef idx="0">
+                <a:schemeClr val="accent1"/>
+              </a:effectRef>
+              <a:fontRef idx="minor">
+                <a:schemeClr val="lt1"/>
+              </a:fontRef>
+            </p:style>
+            <p:txBody>
+              <a:bodyPr rtlCol="0" anchor="ctr"/>
+              <a:lstStyle/>
+              <a:p>
+                <a:pPr algn="ctr"/>
+                <a:endParaRPr kumimoji="1" lang="ja-JP" altLang="en-US"/>
+              </a:p>
+            </p:txBody>
+          </p:sp>
+          <p:sp>
+            <p:nvSpPr>
+              <p:cNvPr id="45" name="円/楕円 44">
+                <a:extLst>
+                  <a:ext uri="{FF2B5EF4-FFF2-40B4-BE49-F238E27FC236}">
+                    <a16:creationId xmlns:a16="http://schemas.microsoft.com/office/drawing/2014/main" id="{04CBDD59-63E0-2C22-754E-1AD9F64C6238}"/>
+                  </a:ext>
+                </a:extLst>
+              </p:cNvPr>
+              <p:cNvSpPr/>
+              <p:nvPr/>
+            </p:nvSpPr>
+            <p:spPr>
+              <a:xfrm>
+                <a:off x="1152013" y="7100843"/>
+                <a:ext cx="573438" cy="573438"/>
+              </a:xfrm>
+              <a:prstGeom prst="ellipse">
+                <a:avLst/>
+              </a:prstGeom>
+              <a:noFill/>
+              <a:ln w="19050">
+                <a:solidFill>
+                  <a:schemeClr val="tx1"/>
+                </a:solidFill>
+              </a:ln>
+            </p:spPr>
+            <p:style>
+              <a:lnRef idx="2">
+                <a:schemeClr val="accent1">
+                  <a:shade val="15000"/>
+                </a:schemeClr>
+              </a:lnRef>
+              <a:fillRef idx="1">
+                <a:schemeClr val="accent1"/>
+              </a:fillRef>
+              <a:effectRef idx="0">
+                <a:schemeClr val="accent1"/>
+              </a:effectRef>
+              <a:fontRef idx="minor">
+                <a:schemeClr val="lt1"/>
+              </a:fontRef>
+            </p:style>
+            <p:txBody>
+              <a:bodyPr rtlCol="0" anchor="ctr"/>
+              <a:lstStyle/>
+              <a:p>
+                <a:pPr algn="ctr"/>
+                <a:r>
+                  <a:rPr kumimoji="1" lang="ja-JP" altLang="en-US" sz="2400">
+                    <a:solidFill>
+                      <a:schemeClr val="tx1"/>
+                    </a:solidFill>
+                    <a:latin typeface="Hiragino Sans W4" panose="020B0400000000000000" pitchFamily="34" charset="-128"/>
+                    <a:ea typeface="Hiragino Sans W4" panose="020B0400000000000000" pitchFamily="34" charset="-128"/>
+                  </a:rPr>
+                  <a:t>企</a:t>
+                </a:r>
+              </a:p>
+            </p:txBody>
+          </p:sp>
+          <p:sp>
+            <p:nvSpPr>
+              <p:cNvPr id="46" name="円/楕円 45">
+                <a:extLst>
+                  <a:ext uri="{FF2B5EF4-FFF2-40B4-BE49-F238E27FC236}">
+                    <a16:creationId xmlns:a16="http://schemas.microsoft.com/office/drawing/2014/main" id="{337820BD-3E14-AA73-ECB4-A075B6608C95}"/>
+                  </a:ext>
+                </a:extLst>
+              </p:cNvPr>
+              <p:cNvSpPr/>
+              <p:nvPr/>
+            </p:nvSpPr>
+            <p:spPr>
+              <a:xfrm>
+                <a:off x="2252803" y="7100843"/>
+                <a:ext cx="573438" cy="573438"/>
+              </a:xfrm>
+              <a:prstGeom prst="ellipse">
+                <a:avLst/>
+              </a:prstGeom>
+              <a:noFill/>
+              <a:ln w="19050">
+                <a:solidFill>
+                  <a:schemeClr val="tx1"/>
+                </a:solidFill>
+              </a:ln>
+            </p:spPr>
+            <p:style>
+              <a:lnRef idx="2">
+                <a:schemeClr val="accent1">
+                  <a:shade val="15000"/>
+                </a:schemeClr>
+              </a:lnRef>
+              <a:fillRef idx="1">
+                <a:schemeClr val="accent1"/>
+              </a:fillRef>
+              <a:effectRef idx="0">
+                <a:schemeClr val="accent1"/>
+              </a:effectRef>
+              <a:fontRef idx="minor">
+                <a:schemeClr val="lt1"/>
+              </a:fontRef>
+            </p:style>
+            <p:txBody>
+              <a:bodyPr rtlCol="0" anchor="ctr"/>
+              <a:lstStyle/>
+              <a:p>
+                <a:pPr algn="ctr"/>
+                <a:r>
+                  <a:rPr kumimoji="1" lang="ja-JP" altLang="en-US" sz="2400">
+                    <a:solidFill>
+                      <a:schemeClr val="tx1"/>
+                    </a:solidFill>
+                    <a:latin typeface="Hiragino Sans W4" panose="020B0400000000000000" pitchFamily="34" charset="-128"/>
+                    <a:ea typeface="Hiragino Sans W4" panose="020B0400000000000000" pitchFamily="34" charset="-128"/>
+                  </a:rPr>
+                  <a:t>企</a:t>
+                </a:r>
+              </a:p>
+            </p:txBody>
+          </p:sp>
+          <p:sp>
+            <p:nvSpPr>
+              <p:cNvPr id="47" name="円/楕円 46">
+                <a:extLst>
+                  <a:ext uri="{FF2B5EF4-FFF2-40B4-BE49-F238E27FC236}">
+                    <a16:creationId xmlns:a16="http://schemas.microsoft.com/office/drawing/2014/main" id="{F5497501-E0EE-9F0F-9B0B-0BD5D21B6675}"/>
+                  </a:ext>
+                </a:extLst>
+              </p:cNvPr>
+              <p:cNvSpPr/>
+              <p:nvPr/>
+            </p:nvSpPr>
+            <p:spPr>
+              <a:xfrm>
+                <a:off x="1679777" y="6016053"/>
+                <a:ext cx="573438" cy="573438"/>
+              </a:xfrm>
+              <a:prstGeom prst="ellipse">
+                <a:avLst/>
+              </a:prstGeom>
+              <a:noFill/>
+              <a:ln w="19050">
+                <a:solidFill>
+                  <a:schemeClr val="tx1"/>
+                </a:solidFill>
+              </a:ln>
+            </p:spPr>
+            <p:style>
+              <a:lnRef idx="2">
+                <a:schemeClr val="accent1">
+                  <a:shade val="15000"/>
+                </a:schemeClr>
+              </a:lnRef>
+              <a:fillRef idx="1">
+                <a:schemeClr val="accent1"/>
+              </a:fillRef>
+              <a:effectRef idx="0">
+                <a:schemeClr val="accent1"/>
+              </a:effectRef>
+              <a:fontRef idx="minor">
+                <a:schemeClr val="lt1"/>
+              </a:fontRef>
+            </p:style>
+            <p:txBody>
+              <a:bodyPr rtlCol="0" anchor="ctr"/>
+              <a:lstStyle/>
+              <a:p>
+                <a:pPr algn="ctr"/>
+                <a:r>
+                  <a:rPr kumimoji="1" lang="ja-JP" altLang="en-US" sz="2400">
+                    <a:solidFill>
+                      <a:schemeClr val="tx1"/>
+                    </a:solidFill>
+                    <a:latin typeface="Hiragino Sans W4" panose="020B0400000000000000" pitchFamily="34" charset="-128"/>
+                    <a:ea typeface="Hiragino Sans W4" panose="020B0400000000000000" pitchFamily="34" charset="-128"/>
+                  </a:rPr>
+                  <a:t>企</a:t>
+                </a:r>
+              </a:p>
+            </p:txBody>
+          </p:sp>
+        </p:grpSp>
+        <p:grpSp>
+          <p:nvGrpSpPr>
+            <p:cNvPr id="49" name="グループ化 48">
+              <a:extLst>
+                <a:ext uri="{FF2B5EF4-FFF2-40B4-BE49-F238E27FC236}">
+                  <a16:creationId xmlns:a16="http://schemas.microsoft.com/office/drawing/2014/main" id="{03809EC9-7C50-5C47-B46A-DDA26D0A7258}"/>
+                </a:ext>
+              </a:extLst>
+            </p:cNvPr>
+            <p:cNvGrpSpPr/>
+            <p:nvPr/>
+          </p:nvGrpSpPr>
+          <p:grpSpPr>
+            <a:xfrm>
+              <a:off x="10730021" y="6123680"/>
+              <a:ext cx="1840245" cy="1689572"/>
+              <a:chOff x="579398" y="5504701"/>
+              <a:chExt cx="2774196" cy="2421610"/>
+            </a:xfrm>
+          </p:grpSpPr>
+          <p:sp>
+            <p:nvSpPr>
+              <p:cNvPr id="50" name="三角形 49">
+                <a:extLst>
+                  <a:ext uri="{FF2B5EF4-FFF2-40B4-BE49-F238E27FC236}">
+                    <a16:creationId xmlns:a16="http://schemas.microsoft.com/office/drawing/2014/main" id="{4107C7D7-9258-1223-B0FC-779512FD8BFF}"/>
+                  </a:ext>
+                </a:extLst>
+              </p:cNvPr>
+              <p:cNvSpPr/>
+              <p:nvPr/>
+            </p:nvSpPr>
+            <p:spPr>
+              <a:xfrm>
+                <a:off x="579398" y="5504701"/>
+                <a:ext cx="2774196" cy="2421610"/>
+              </a:xfrm>
+              <a:prstGeom prst="triangle">
+                <a:avLst/>
+              </a:prstGeom>
+              <a:noFill/>
+              <a:ln w="28575">
+                <a:solidFill>
+                  <a:schemeClr val="tx1"/>
+                </a:solidFill>
+              </a:ln>
+            </p:spPr>
+            <p:style>
+              <a:lnRef idx="2">
+                <a:schemeClr val="accent1">
+                  <a:shade val="15000"/>
+                </a:schemeClr>
+              </a:lnRef>
+              <a:fillRef idx="1">
+                <a:schemeClr val="accent1"/>
+              </a:fillRef>
+              <a:effectRef idx="0">
+                <a:schemeClr val="accent1"/>
+              </a:effectRef>
+              <a:fontRef idx="minor">
+                <a:schemeClr val="lt1"/>
+              </a:fontRef>
+            </p:style>
+            <p:txBody>
+              <a:bodyPr rtlCol="0" anchor="ctr"/>
+              <a:lstStyle/>
+              <a:p>
+                <a:pPr algn="ctr"/>
+                <a:endParaRPr kumimoji="1" lang="ja-JP" altLang="en-US"/>
+              </a:p>
+            </p:txBody>
+          </p:sp>
+          <p:sp>
+            <p:nvSpPr>
+              <p:cNvPr id="51" name="円/楕円 50">
+                <a:extLst>
+                  <a:ext uri="{FF2B5EF4-FFF2-40B4-BE49-F238E27FC236}">
+                    <a16:creationId xmlns:a16="http://schemas.microsoft.com/office/drawing/2014/main" id="{BC547F53-6B55-08C1-3D8E-AC7BE66CE6B8}"/>
+                  </a:ext>
+                </a:extLst>
+              </p:cNvPr>
+              <p:cNvSpPr/>
+              <p:nvPr/>
+            </p:nvSpPr>
+            <p:spPr>
+              <a:xfrm>
+                <a:off x="1152013" y="7100843"/>
+                <a:ext cx="573438" cy="573438"/>
+              </a:xfrm>
+              <a:prstGeom prst="ellipse">
+                <a:avLst/>
+              </a:prstGeom>
+              <a:noFill/>
+              <a:ln w="19050">
+                <a:solidFill>
+                  <a:schemeClr val="tx1"/>
+                </a:solidFill>
+              </a:ln>
+            </p:spPr>
+            <p:style>
+              <a:lnRef idx="2">
+                <a:schemeClr val="accent1">
+                  <a:shade val="15000"/>
+                </a:schemeClr>
+              </a:lnRef>
+              <a:fillRef idx="1">
+                <a:schemeClr val="accent1"/>
+              </a:fillRef>
+              <a:effectRef idx="0">
+                <a:schemeClr val="accent1"/>
+              </a:effectRef>
+              <a:fontRef idx="minor">
+                <a:schemeClr val="lt1"/>
+              </a:fontRef>
+            </p:style>
+            <p:txBody>
+              <a:bodyPr rtlCol="0" anchor="ctr"/>
+              <a:lstStyle/>
+              <a:p>
+                <a:pPr algn="ctr"/>
+                <a:r>
+                  <a:rPr kumimoji="1" lang="ja-JP" altLang="en-US" sz="2400">
+                    <a:solidFill>
+                      <a:schemeClr val="tx1"/>
+                    </a:solidFill>
+                    <a:latin typeface="Hiragino Sans W4" panose="020B0400000000000000" pitchFamily="34" charset="-128"/>
+                    <a:ea typeface="Hiragino Sans W4" panose="020B0400000000000000" pitchFamily="34" charset="-128"/>
+                  </a:rPr>
+                  <a:t>企</a:t>
+                </a:r>
+              </a:p>
+            </p:txBody>
+          </p:sp>
+          <p:sp>
+            <p:nvSpPr>
+              <p:cNvPr id="52" name="円/楕円 51">
+                <a:extLst>
+                  <a:ext uri="{FF2B5EF4-FFF2-40B4-BE49-F238E27FC236}">
+                    <a16:creationId xmlns:a16="http://schemas.microsoft.com/office/drawing/2014/main" id="{2ED1EFB9-401F-C4E8-FA4E-9D3A6A684A5F}"/>
+                  </a:ext>
+                </a:extLst>
+              </p:cNvPr>
+              <p:cNvSpPr/>
+              <p:nvPr/>
+            </p:nvSpPr>
+            <p:spPr>
+              <a:xfrm>
+                <a:off x="2252803" y="7100843"/>
+                <a:ext cx="573438" cy="573438"/>
+              </a:xfrm>
+              <a:prstGeom prst="ellipse">
+                <a:avLst/>
+              </a:prstGeom>
+              <a:noFill/>
+              <a:ln w="19050">
+                <a:solidFill>
+                  <a:schemeClr val="tx1"/>
+                </a:solidFill>
+              </a:ln>
+            </p:spPr>
+            <p:style>
+              <a:lnRef idx="2">
+                <a:schemeClr val="accent1">
+                  <a:shade val="15000"/>
+                </a:schemeClr>
+              </a:lnRef>
+              <a:fillRef idx="1">
+                <a:schemeClr val="accent1"/>
+              </a:fillRef>
+              <a:effectRef idx="0">
+                <a:schemeClr val="accent1"/>
+              </a:effectRef>
+              <a:fontRef idx="minor">
+                <a:schemeClr val="lt1"/>
+              </a:fontRef>
+            </p:style>
+            <p:txBody>
+              <a:bodyPr rtlCol="0" anchor="ctr"/>
+              <a:lstStyle/>
+              <a:p>
+                <a:pPr algn="ctr"/>
+                <a:r>
+                  <a:rPr kumimoji="1" lang="ja-JP" altLang="en-US" sz="2400">
+                    <a:solidFill>
+                      <a:schemeClr val="tx1"/>
+                    </a:solidFill>
+                    <a:latin typeface="Hiragino Sans W4" panose="020B0400000000000000" pitchFamily="34" charset="-128"/>
+                    <a:ea typeface="Hiragino Sans W4" panose="020B0400000000000000" pitchFamily="34" charset="-128"/>
+                  </a:rPr>
+                  <a:t>企</a:t>
+                </a:r>
+              </a:p>
+            </p:txBody>
+          </p:sp>
+          <p:sp>
+            <p:nvSpPr>
+              <p:cNvPr id="53" name="円/楕円 52">
+                <a:extLst>
+                  <a:ext uri="{FF2B5EF4-FFF2-40B4-BE49-F238E27FC236}">
+                    <a16:creationId xmlns:a16="http://schemas.microsoft.com/office/drawing/2014/main" id="{DCC7C095-8795-FB85-5B00-E0A579ED2E0D}"/>
+                  </a:ext>
+                </a:extLst>
+              </p:cNvPr>
+              <p:cNvSpPr/>
+              <p:nvPr/>
+            </p:nvSpPr>
+            <p:spPr>
+              <a:xfrm>
+                <a:off x="1679777" y="6016053"/>
+                <a:ext cx="573438" cy="573438"/>
+              </a:xfrm>
+              <a:prstGeom prst="ellipse">
+                <a:avLst/>
+              </a:prstGeom>
+              <a:noFill/>
+              <a:ln w="19050">
+                <a:solidFill>
+                  <a:schemeClr val="tx1"/>
+                </a:solidFill>
+              </a:ln>
+            </p:spPr>
+            <p:style>
+              <a:lnRef idx="2">
+                <a:schemeClr val="accent1">
+                  <a:shade val="15000"/>
+                </a:schemeClr>
+              </a:lnRef>
+              <a:fillRef idx="1">
+                <a:schemeClr val="accent1"/>
+              </a:fillRef>
+              <a:effectRef idx="0">
+                <a:schemeClr val="accent1"/>
+              </a:effectRef>
+              <a:fontRef idx="minor">
+                <a:schemeClr val="lt1"/>
+              </a:fontRef>
+            </p:style>
+            <p:txBody>
+              <a:bodyPr rtlCol="0" anchor="ctr"/>
+              <a:lstStyle/>
+              <a:p>
+                <a:pPr algn="ctr"/>
+                <a:r>
+                  <a:rPr kumimoji="1" lang="ja-JP" altLang="en-US" sz="2400">
+                    <a:solidFill>
+                      <a:schemeClr val="tx1"/>
+                    </a:solidFill>
+                    <a:latin typeface="Hiragino Sans W4" panose="020B0400000000000000" pitchFamily="34" charset="-128"/>
+                    <a:ea typeface="Hiragino Sans W4" panose="020B0400000000000000" pitchFamily="34" charset="-128"/>
+                  </a:rPr>
+                  <a:t>企</a:t>
+                </a:r>
+              </a:p>
+            </p:txBody>
+          </p:sp>
+        </p:grpSp>
+        <p:sp>
+          <p:nvSpPr>
+            <p:cNvPr id="55" name="角丸四角形 54">
+              <a:extLst>
+                <a:ext uri="{FF2B5EF4-FFF2-40B4-BE49-F238E27FC236}">
+                  <a16:creationId xmlns:a16="http://schemas.microsoft.com/office/drawing/2014/main" id="{F482FFE0-672E-F5E1-A1B1-9818A56A1F66}"/>
+                </a:ext>
+              </a:extLst>
+            </p:cNvPr>
+            <p:cNvSpPr/>
+            <p:nvPr/>
+          </p:nvSpPr>
+          <p:spPr>
+            <a:xfrm>
+              <a:off x="8360152" y="2729133"/>
+              <a:ext cx="2599651" cy="1273126"/>
+            </a:xfrm>
+            <a:prstGeom prst="roundRect">
+              <a:avLst/>
+            </a:prstGeom>
+            <a:noFill/>
+            <a:ln w="28575">
+              <a:solidFill>
+                <a:schemeClr val="tx1"/>
+              </a:solidFill>
+            </a:ln>
+          </p:spPr>
+          <p:style>
+            <a:lnRef idx="2">
+              <a:schemeClr val="accent1">
+                <a:shade val="15000"/>
+              </a:schemeClr>
+            </a:lnRef>
+            <a:fillRef idx="1">
+              <a:schemeClr val="accent1"/>
+            </a:fillRef>
+            <a:effectRef idx="0">
+              <a:schemeClr val="accent1"/>
+            </a:effectRef>
+            <a:fontRef idx="minor">
+              <a:schemeClr val="lt1"/>
+            </a:fontRef>
+          </p:style>
+          <p:txBody>
+            <a:bodyPr rtlCol="0" anchor="ctr"/>
+            <a:lstStyle/>
+            <a:p>
+              <a:pPr algn="ctr"/>
+              <a:r>
+                <a:rPr kumimoji="1" lang="ja-JP" altLang="en-US" sz="4400">
+                  <a:solidFill>
+                    <a:schemeClr val="tx1"/>
+                  </a:solidFill>
+                  <a:latin typeface="Hiragino Kaku Gothic StdN W8" panose="020B0800000000000000" pitchFamily="34" charset="-128"/>
+                  <a:ea typeface="Hiragino Kaku Gothic StdN W8" panose="020B0800000000000000" pitchFamily="34" charset="-128"/>
+                </a:rPr>
+                <a:t>頂上団体</a:t>
+              </a:r>
+              <a:endParaRPr kumimoji="1" lang="ja-JP" altLang="en-US" sz="3000"/>
+            </a:p>
+          </p:txBody>
+        </p:sp>
+        <p:sp>
+          <p:nvSpPr>
+            <p:cNvPr id="56" name="テキスト ボックス 55">
+              <a:extLst>
+                <a:ext uri="{FF2B5EF4-FFF2-40B4-BE49-F238E27FC236}">
+                  <a16:creationId xmlns:a16="http://schemas.microsoft.com/office/drawing/2014/main" id="{C520D47E-E71B-F675-B830-82886B0E774E}"/>
+                </a:ext>
+              </a:extLst>
+            </p:cNvPr>
+            <p:cNvSpPr txBox="1"/>
+            <p:nvPr/>
+          </p:nvSpPr>
+          <p:spPr>
+            <a:xfrm>
+              <a:off x="8869714" y="7813252"/>
+              <a:ext cx="1500802" cy="400110"/>
+            </a:xfrm>
+            <a:prstGeom prst="rect">
+              <a:avLst/>
+            </a:prstGeom>
+            <a:noFill/>
+          </p:spPr>
+          <p:txBody>
+            <a:bodyPr wrap="square" rtlCol="0">
+              <a:spAutoFit/>
+            </a:bodyPr>
+            <a:lstStyle/>
+            <a:p>
+              <a:pPr algn="ctr"/>
+              <a:r>
+                <a:rPr kumimoji="1" lang="ja-JP" altLang="en-US" sz="2000">
+                  <a:latin typeface="Hiragino Kaku Gothic StdN W8" panose="020B0800000000000000" pitchFamily="34" charset="-128"/>
+                  <a:ea typeface="Hiragino Kaku Gothic StdN W8" panose="020B0800000000000000" pitchFamily="34" charset="-128"/>
+                </a:rPr>
+                <a:t>使用者団体</a:t>
+              </a:r>
+            </a:p>
+          </p:txBody>
+        </p:sp>
+        <p:sp>
+          <p:nvSpPr>
+            <p:cNvPr id="57" name="テキスト ボックス 56">
+              <a:extLst>
+                <a:ext uri="{FF2B5EF4-FFF2-40B4-BE49-F238E27FC236}">
+                  <a16:creationId xmlns:a16="http://schemas.microsoft.com/office/drawing/2014/main" id="{556A6724-2D6D-892C-2BDE-A79226F947DF}"/>
+                </a:ext>
+              </a:extLst>
+            </p:cNvPr>
+            <p:cNvSpPr txBox="1"/>
+            <p:nvPr/>
+          </p:nvSpPr>
+          <p:spPr>
+            <a:xfrm>
+              <a:off x="10899742" y="7813252"/>
+              <a:ext cx="1500802" cy="400110"/>
+            </a:xfrm>
+            <a:prstGeom prst="rect">
+              <a:avLst/>
+            </a:prstGeom>
+            <a:noFill/>
+          </p:spPr>
+          <p:txBody>
+            <a:bodyPr wrap="square" rtlCol="0">
+              <a:spAutoFit/>
+            </a:bodyPr>
+            <a:lstStyle/>
+            <a:p>
+              <a:pPr algn="ctr"/>
+              <a:r>
+                <a:rPr kumimoji="1" lang="ja-JP" altLang="en-US" sz="2000">
+                  <a:latin typeface="Hiragino Kaku Gothic StdN W8" panose="020B0800000000000000" pitchFamily="34" charset="-128"/>
+                  <a:ea typeface="Hiragino Kaku Gothic StdN W8" panose="020B0800000000000000" pitchFamily="34" charset="-128"/>
+                </a:rPr>
+                <a:t>使用者団体</a:t>
+              </a:r>
+            </a:p>
+          </p:txBody>
+        </p:sp>
+        <p:cxnSp>
+          <p:nvCxnSpPr>
+            <p:cNvPr id="59" name="直線矢印コネクタ 58">
+              <a:extLst>
+                <a:ext uri="{FF2B5EF4-FFF2-40B4-BE49-F238E27FC236}">
+                  <a16:creationId xmlns:a16="http://schemas.microsoft.com/office/drawing/2014/main" id="{A5CD41FE-974D-0335-2D83-E7BD405E0090}"/>
+                </a:ext>
+              </a:extLst>
+            </p:cNvPr>
+            <p:cNvCxnSpPr>
+              <a:stCxn id="34" idx="2"/>
+              <a:endCxn id="4" idx="0"/>
+            </p:cNvCxnSpPr>
+            <p:nvPr/>
+          </p:nvCxnSpPr>
+          <p:spPr>
+            <a:xfrm flipH="1">
+              <a:off x="1150103" y="4002259"/>
+              <a:ext cx="2069890" cy="2122863"/>
+            </a:xfrm>
+            <a:prstGeom prst="straightConnector1">
+              <a:avLst/>
+            </a:prstGeom>
+            <a:ln w="50800" cmpd="dbl">
+              <a:solidFill>
+                <a:schemeClr val="tx1"/>
+              </a:solidFill>
+              <a:tailEnd type="triangle"/>
+            </a:ln>
+          </p:spPr>
+          <p:style>
+            <a:lnRef idx="1">
+              <a:schemeClr val="accent1"/>
+            </a:lnRef>
+            <a:fillRef idx="0">
+              <a:schemeClr val="accent1"/>
+            </a:fillRef>
+            <a:effectRef idx="0">
+              <a:schemeClr val="accent1"/>
+            </a:effectRef>
+            <a:fontRef idx="minor">
+              <a:schemeClr val="tx1"/>
+            </a:fontRef>
+          </p:style>
+        </p:cxnSp>
+        <p:cxnSp>
+          <p:nvCxnSpPr>
+            <p:cNvPr id="60" name="直線矢印コネクタ 59">
+              <a:extLst>
+                <a:ext uri="{FF2B5EF4-FFF2-40B4-BE49-F238E27FC236}">
+                  <a16:creationId xmlns:a16="http://schemas.microsoft.com/office/drawing/2014/main" id="{0B0307D1-DF78-69EB-6AAE-0C37057BD99F}"/>
+                </a:ext>
+              </a:extLst>
+            </p:cNvPr>
+            <p:cNvCxnSpPr>
+              <a:cxnSpLocks/>
+              <a:stCxn id="34" idx="2"/>
+              <a:endCxn id="23" idx="0"/>
+            </p:cNvCxnSpPr>
+            <p:nvPr/>
+          </p:nvCxnSpPr>
+          <p:spPr>
+            <a:xfrm flipH="1">
+              <a:off x="3180131" y="4002259"/>
+              <a:ext cx="39862" cy="2121421"/>
+            </a:xfrm>
+            <a:prstGeom prst="straightConnector1">
+              <a:avLst/>
+            </a:prstGeom>
+            <a:ln w="50800" cmpd="dbl">
+              <a:solidFill>
+                <a:schemeClr val="tx1"/>
+              </a:solidFill>
+              <a:tailEnd type="triangle"/>
+            </a:ln>
+          </p:spPr>
+          <p:style>
+            <a:lnRef idx="1">
+              <a:schemeClr val="accent1"/>
+            </a:lnRef>
+            <a:fillRef idx="0">
+              <a:schemeClr val="accent1"/>
+            </a:fillRef>
+            <a:effectRef idx="0">
+              <a:schemeClr val="accent1"/>
+            </a:effectRef>
+            <a:fontRef idx="minor">
+              <a:schemeClr val="tx1"/>
+            </a:fontRef>
+          </p:style>
+        </p:cxnSp>
+        <p:cxnSp>
+          <p:nvCxnSpPr>
+            <p:cNvPr id="61" name="直線矢印コネクタ 60">
+              <a:extLst>
+                <a:ext uri="{FF2B5EF4-FFF2-40B4-BE49-F238E27FC236}">
+                  <a16:creationId xmlns:a16="http://schemas.microsoft.com/office/drawing/2014/main" id="{5F781E67-518F-8313-0823-DB624DB61655}"/>
+                </a:ext>
+              </a:extLst>
+            </p:cNvPr>
+            <p:cNvCxnSpPr>
+              <a:cxnSpLocks/>
+              <a:stCxn id="34" idx="2"/>
+              <a:endCxn id="29" idx="0"/>
+            </p:cNvCxnSpPr>
+            <p:nvPr/>
+          </p:nvCxnSpPr>
+          <p:spPr>
+            <a:xfrm>
+              <a:off x="3219993" y="4002259"/>
+              <a:ext cx="1990166" cy="2121421"/>
+            </a:xfrm>
+            <a:prstGeom prst="straightConnector1">
+              <a:avLst/>
+            </a:prstGeom>
+            <a:ln w="50800" cmpd="dbl">
+              <a:solidFill>
+                <a:schemeClr val="tx1"/>
+              </a:solidFill>
+              <a:tailEnd type="triangle"/>
+            </a:ln>
+          </p:spPr>
+          <p:style>
+            <a:lnRef idx="1">
+              <a:schemeClr val="accent1"/>
+            </a:lnRef>
+            <a:fillRef idx="0">
+              <a:schemeClr val="accent1"/>
+            </a:fillRef>
+            <a:effectRef idx="0">
+              <a:schemeClr val="accent1"/>
+            </a:effectRef>
+            <a:fontRef idx="minor">
+              <a:schemeClr val="tx1"/>
+            </a:fontRef>
+          </p:style>
+        </p:cxnSp>
+        <p:cxnSp>
+          <p:nvCxnSpPr>
+            <p:cNvPr id="66" name="直線矢印コネクタ 65">
+              <a:extLst>
+                <a:ext uri="{FF2B5EF4-FFF2-40B4-BE49-F238E27FC236}">
+                  <a16:creationId xmlns:a16="http://schemas.microsoft.com/office/drawing/2014/main" id="{12726559-62A0-8F26-52CF-9A11A07A80FA}"/>
+                </a:ext>
+              </a:extLst>
+            </p:cNvPr>
+            <p:cNvCxnSpPr>
+              <a:cxnSpLocks/>
+              <a:stCxn id="55" idx="2"/>
+              <a:endCxn id="38" idx="0"/>
+            </p:cNvCxnSpPr>
+            <p:nvPr/>
+          </p:nvCxnSpPr>
+          <p:spPr>
+            <a:xfrm flipH="1">
+              <a:off x="7590088" y="4002259"/>
+              <a:ext cx="2069890" cy="2122863"/>
+            </a:xfrm>
+            <a:prstGeom prst="straightConnector1">
+              <a:avLst/>
+            </a:prstGeom>
+            <a:ln w="50800" cmpd="dbl">
+              <a:solidFill>
+                <a:schemeClr val="tx1"/>
+              </a:solidFill>
+              <a:tailEnd type="triangle"/>
+            </a:ln>
+          </p:spPr>
+          <p:style>
+            <a:lnRef idx="1">
+              <a:schemeClr val="accent1"/>
+            </a:lnRef>
+            <a:fillRef idx="0">
+              <a:schemeClr val="accent1"/>
+            </a:fillRef>
+            <a:effectRef idx="0">
+              <a:schemeClr val="accent1"/>
+            </a:effectRef>
+            <a:fontRef idx="minor">
+              <a:schemeClr val="tx1"/>
+            </a:fontRef>
+          </p:style>
+        </p:cxnSp>
+        <p:cxnSp>
+          <p:nvCxnSpPr>
+            <p:cNvPr id="67" name="直線矢印コネクタ 66">
+              <a:extLst>
+                <a:ext uri="{FF2B5EF4-FFF2-40B4-BE49-F238E27FC236}">
+                  <a16:creationId xmlns:a16="http://schemas.microsoft.com/office/drawing/2014/main" id="{AE7BFCC1-1847-E40E-A9F3-62DF899AD1B3}"/>
+                </a:ext>
+              </a:extLst>
+            </p:cNvPr>
+            <p:cNvCxnSpPr>
+              <a:cxnSpLocks/>
+              <a:stCxn id="55" idx="2"/>
+              <a:endCxn id="44" idx="0"/>
+            </p:cNvCxnSpPr>
+            <p:nvPr/>
+          </p:nvCxnSpPr>
+          <p:spPr>
+            <a:xfrm flipH="1">
+              <a:off x="9620116" y="4002259"/>
+              <a:ext cx="39862" cy="2121421"/>
+            </a:xfrm>
+            <a:prstGeom prst="straightConnector1">
+              <a:avLst/>
+            </a:prstGeom>
+            <a:ln w="50800" cmpd="dbl">
+              <a:solidFill>
+                <a:schemeClr val="tx1"/>
+              </a:solidFill>
+              <a:tailEnd type="triangle"/>
+            </a:ln>
+          </p:spPr>
+          <p:style>
+            <a:lnRef idx="1">
+              <a:schemeClr val="accent1"/>
+            </a:lnRef>
+            <a:fillRef idx="0">
+              <a:schemeClr val="accent1"/>
+            </a:fillRef>
+            <a:effectRef idx="0">
+              <a:schemeClr val="accent1"/>
+            </a:effectRef>
+            <a:fontRef idx="minor">
+              <a:schemeClr val="tx1"/>
+            </a:fontRef>
+          </p:style>
+        </p:cxnSp>
+        <p:cxnSp>
+          <p:nvCxnSpPr>
+            <p:cNvPr id="68" name="直線矢印コネクタ 67">
+              <a:extLst>
+                <a:ext uri="{FF2B5EF4-FFF2-40B4-BE49-F238E27FC236}">
+                  <a16:creationId xmlns:a16="http://schemas.microsoft.com/office/drawing/2014/main" id="{E794A5E9-2B89-9A02-EA83-65C3A9AD4B18}"/>
+                </a:ext>
+              </a:extLst>
+            </p:cNvPr>
+            <p:cNvCxnSpPr>
+              <a:cxnSpLocks/>
+              <a:stCxn id="55" idx="2"/>
+            </p:cNvCxnSpPr>
+            <p:nvPr/>
+          </p:nvCxnSpPr>
+          <p:spPr>
+            <a:xfrm>
+              <a:off x="9659978" y="4002259"/>
+              <a:ext cx="1991519" cy="2121420"/>
+            </a:xfrm>
+            <a:prstGeom prst="straightConnector1">
+              <a:avLst/>
+            </a:prstGeom>
+            <a:ln w="50800" cmpd="dbl">
+              <a:solidFill>
+                <a:schemeClr val="tx1"/>
+              </a:solidFill>
+              <a:tailEnd type="triangle"/>
+            </a:ln>
+          </p:spPr>
+          <p:style>
+            <a:lnRef idx="1">
+              <a:schemeClr val="accent1"/>
+            </a:lnRef>
+            <a:fillRef idx="0">
+              <a:schemeClr val="accent1"/>
+            </a:fillRef>
+            <a:effectRef idx="0">
+              <a:schemeClr val="accent1"/>
+            </a:effectRef>
+            <a:fontRef idx="minor">
+              <a:schemeClr val="tx1"/>
+            </a:fontRef>
+          </p:style>
+        </p:cxnSp>
+        <p:cxnSp>
+          <p:nvCxnSpPr>
+            <p:cNvPr id="74" name="直線矢印コネクタ 73">
+              <a:extLst>
+                <a:ext uri="{FF2B5EF4-FFF2-40B4-BE49-F238E27FC236}">
+                  <a16:creationId xmlns:a16="http://schemas.microsoft.com/office/drawing/2014/main" id="{E41A9B02-3713-5D91-3C41-ACC19C28B2FF}"/>
+                </a:ext>
+              </a:extLst>
+            </p:cNvPr>
+            <p:cNvCxnSpPr>
+              <a:cxnSpLocks/>
+              <a:stCxn id="55" idx="1"/>
+              <a:endCxn id="34" idx="3"/>
+            </p:cNvCxnSpPr>
+            <p:nvPr/>
+          </p:nvCxnSpPr>
+          <p:spPr>
+            <a:xfrm flipH="1">
+              <a:off x="4519818" y="3365696"/>
+              <a:ext cx="3840334" cy="0"/>
+            </a:xfrm>
+            <a:prstGeom prst="straightConnector1">
+              <a:avLst/>
+            </a:prstGeom>
+            <a:ln w="63500" cap="sq">
+              <a:solidFill>
+                <a:srgbClr val="FF0000"/>
+              </a:solidFill>
+              <a:headEnd type="stealth"/>
+              <a:tailEnd type="stealth"/>
+            </a:ln>
+          </p:spPr>
+          <p:style>
+            <a:lnRef idx="1">
+              <a:schemeClr val="accent1"/>
+            </a:lnRef>
+            <a:fillRef idx="0">
+              <a:schemeClr val="accent1"/>
+            </a:fillRef>
+            <a:effectRef idx="0">
+              <a:schemeClr val="accent1"/>
+            </a:effectRef>
+            <a:fontRef idx="minor">
+              <a:schemeClr val="tx1"/>
+            </a:fontRef>
+          </p:style>
+        </p:cxnSp>
+        <p:cxnSp>
+          <p:nvCxnSpPr>
+            <p:cNvPr id="77" name="直線矢印コネクタ 76">
+              <a:extLst>
+                <a:ext uri="{FF2B5EF4-FFF2-40B4-BE49-F238E27FC236}">
+                  <a16:creationId xmlns:a16="http://schemas.microsoft.com/office/drawing/2014/main" id="{33A107A3-FD3F-2AAA-6ADE-C074E99B5D72}"/>
+                </a:ext>
+              </a:extLst>
+            </p:cNvPr>
+            <p:cNvCxnSpPr>
+              <a:cxnSpLocks/>
+              <a:stCxn id="55" idx="1"/>
+              <a:endCxn id="2" idx="2"/>
+            </p:cNvCxnSpPr>
+            <p:nvPr/>
+          </p:nvCxnSpPr>
+          <p:spPr>
+            <a:xfrm flipH="1" flipV="1">
+              <a:off x="6400800" y="1078523"/>
+              <a:ext cx="1959352" cy="2287173"/>
+            </a:xfrm>
+            <a:prstGeom prst="straightConnector1">
+              <a:avLst/>
+            </a:prstGeom>
+            <a:ln w="63500" cap="sq">
+              <a:solidFill>
+                <a:srgbClr val="FF0000"/>
+              </a:solidFill>
+              <a:headEnd type="stealth"/>
+              <a:tailEnd type="stealth"/>
+            </a:ln>
+          </p:spPr>
+          <p:style>
+            <a:lnRef idx="1">
+              <a:schemeClr val="accent1"/>
+            </a:lnRef>
+            <a:fillRef idx="0">
+              <a:schemeClr val="accent1"/>
+            </a:fillRef>
+            <a:effectRef idx="0">
+              <a:schemeClr val="accent1"/>
+            </a:effectRef>
+            <a:fontRef idx="minor">
+              <a:schemeClr val="tx1"/>
+            </a:fontRef>
+          </p:style>
+        </p:cxnSp>
+        <p:cxnSp>
+          <p:nvCxnSpPr>
+            <p:cNvPr id="80" name="直線矢印コネクタ 79">
+              <a:extLst>
+                <a:ext uri="{FF2B5EF4-FFF2-40B4-BE49-F238E27FC236}">
+                  <a16:creationId xmlns:a16="http://schemas.microsoft.com/office/drawing/2014/main" id="{10C09DCB-9675-825F-7CDA-3231AB9CDAD9}"/>
+                </a:ext>
+              </a:extLst>
+            </p:cNvPr>
+            <p:cNvCxnSpPr>
+              <a:cxnSpLocks/>
+              <a:stCxn id="34" idx="3"/>
+              <a:endCxn id="2" idx="2"/>
+            </p:cNvCxnSpPr>
+            <p:nvPr/>
+          </p:nvCxnSpPr>
+          <p:spPr>
+            <a:xfrm flipV="1">
+              <a:off x="4519818" y="1078523"/>
+              <a:ext cx="1880982" cy="2287173"/>
+            </a:xfrm>
+            <a:prstGeom prst="straightConnector1">
+              <a:avLst/>
+            </a:prstGeom>
+            <a:ln w="63500" cap="sq">
+              <a:solidFill>
+                <a:srgbClr val="FF0000"/>
+              </a:solidFill>
+              <a:headEnd type="stealth"/>
+              <a:tailEnd type="stealth"/>
+            </a:ln>
+          </p:spPr>
+          <p:style>
+            <a:lnRef idx="1">
+              <a:schemeClr val="accent1"/>
+            </a:lnRef>
+            <a:fillRef idx="0">
+              <a:schemeClr val="accent1"/>
+            </a:fillRef>
+            <a:effectRef idx="0">
+              <a:schemeClr val="accent1"/>
+            </a:effectRef>
+            <a:fontRef idx="minor">
+              <a:schemeClr val="tx1"/>
+            </a:fontRef>
+          </p:style>
+        </p:cxnSp>
+        <p:sp>
+          <p:nvSpPr>
+            <p:cNvPr id="83" name="テキスト ボックス 82">
+              <a:extLst>
+                <a:ext uri="{FF2B5EF4-FFF2-40B4-BE49-F238E27FC236}">
+                  <a16:creationId xmlns:a16="http://schemas.microsoft.com/office/drawing/2014/main" id="{9F367425-808C-944F-3AA5-76BD21D005C5}"/>
+                </a:ext>
+              </a:extLst>
+            </p:cNvPr>
+            <p:cNvSpPr txBox="1"/>
+            <p:nvPr/>
+          </p:nvSpPr>
+          <p:spPr>
+            <a:xfrm>
+              <a:off x="5667095" y="2119201"/>
+              <a:ext cx="1415772" cy="830997"/>
+            </a:xfrm>
+            <a:prstGeom prst="rect">
+              <a:avLst/>
+            </a:prstGeom>
+            <a:noFill/>
+            <a:ln>
+              <a:noFill/>
+            </a:ln>
+          </p:spPr>
+          <p:txBody>
+            <a:bodyPr wrap="none" rtlCol="0">
+              <a:spAutoFit/>
+            </a:bodyPr>
+            <a:lstStyle/>
+            <a:p>
+              <a:pPr algn="ctr"/>
+              <a:r>
+                <a:rPr kumimoji="1" lang="ja-JP" altLang="en-US" sz="2400">
+                  <a:solidFill>
+                    <a:srgbClr val="FF0000"/>
+                  </a:solidFill>
+                  <a:latin typeface="Hiragino Sans W4" panose="020B0400000000000000" pitchFamily="34" charset="-128"/>
+                  <a:ea typeface="Hiragino Sans W4" panose="020B0400000000000000" pitchFamily="34" charset="-128"/>
+                </a:rPr>
+                <a:t>労使交渉</a:t>
+              </a:r>
+              <a:endParaRPr kumimoji="1" lang="en-US" altLang="ja-JP" sz="2400" dirty="0">
+                <a:solidFill>
+                  <a:srgbClr val="FF0000"/>
+                </a:solidFill>
+                <a:latin typeface="Hiragino Sans W4" panose="020B0400000000000000" pitchFamily="34" charset="-128"/>
+                <a:ea typeface="Hiragino Sans W4" panose="020B0400000000000000" pitchFamily="34" charset="-128"/>
+              </a:endParaRPr>
+            </a:p>
+            <a:p>
+              <a:pPr algn="ctr"/>
+              <a:r>
+                <a:rPr kumimoji="1" lang="ja-JP" altLang="en-US" sz="2400">
+                  <a:solidFill>
+                    <a:srgbClr val="FF0000"/>
+                  </a:solidFill>
+                  <a:latin typeface="Hiragino Sans W4" panose="020B0400000000000000" pitchFamily="34" charset="-128"/>
+                  <a:ea typeface="Hiragino Sans W4" panose="020B0400000000000000" pitchFamily="34" charset="-128"/>
+                </a:rPr>
+                <a:t>利益代表</a:t>
+              </a:r>
+            </a:p>
+          </p:txBody>
+        </p:sp>
+      </p:grpSp>
+    </p:spTree>
+    <p:extLst>
+      <p:ext uri="{BB962C8B-B14F-4D97-AF65-F5344CB8AC3E}">
+        <p14:creationId xmlns:p14="http://schemas.microsoft.com/office/powerpoint/2010/main" val="2760232183"/>
+      </p:ext>
+    </p:extLst>
+  </p:cSld>
+  <p:clrMapOvr>
+    <a:masterClrMapping/>
+  </p:clrMapOvr>
+</p:sld>
+</file>
+
 <file path=ppt/slides/slide2.xml><?xml version="1.0" encoding="utf-8"?>
 <p:sld xmlns:a="http://schemas.openxmlformats.org/drawingml/2006/main" xmlns:r="http://schemas.openxmlformats.org/officeDocument/2006/relationships" xmlns:p="http://schemas.openxmlformats.org/presentationml/2006/main">
   <p:cSld>
@@ -13808,6 +18002,315 @@
     <p:extLst>
       <p:ext uri="{BB962C8B-B14F-4D97-AF65-F5344CB8AC3E}">
         <p14:creationId xmlns:p14="http://schemas.microsoft.com/office/powerpoint/2010/main" val="2619129905"/>
+      </p:ext>
+    </p:extLst>
+  </p:cSld>
+  <p:clrMapOvr>
+    <a:masterClrMapping/>
+  </p:clrMapOvr>
+</p:sld>
+</file>
+
+<file path=ppt/slides/slide20.xml><?xml version="1.0" encoding="utf-8"?>
+<p:sld xmlns:a="http://schemas.openxmlformats.org/drawingml/2006/main" xmlns:r="http://schemas.openxmlformats.org/officeDocument/2006/relationships" xmlns:p="http://schemas.openxmlformats.org/presentationml/2006/main">
+  <p:cSld>
+    <p:spTree>
+      <p:nvGrpSpPr>
+        <p:cNvPr id="1" name=""/>
+        <p:cNvGrpSpPr/>
+        <p:nvPr/>
+      </p:nvGrpSpPr>
+      <p:grpSpPr>
+        <a:xfrm>
+          <a:off x="0" y="0"/>
+          <a:ext cx="0" cy="0"/>
+          <a:chOff x="0" y="0"/>
+          <a:chExt cx="0" cy="0"/>
+        </a:xfrm>
+      </p:grpSpPr>
+      <p:grpSp>
+        <p:nvGrpSpPr>
+          <p:cNvPr id="10" name="グループ化 9">
+            <a:extLst>
+              <a:ext uri="{FF2B5EF4-FFF2-40B4-BE49-F238E27FC236}">
+                <a16:creationId xmlns:a16="http://schemas.microsoft.com/office/drawing/2014/main" id="{963FB9D4-2A1C-37F0-EE62-E70545AB99F7}"/>
+              </a:ext>
+            </a:extLst>
+          </p:cNvPr>
+          <p:cNvGrpSpPr/>
+          <p:nvPr/>
+        </p:nvGrpSpPr>
+        <p:grpSpPr>
+          <a:xfrm>
+            <a:off x="516784" y="872373"/>
+            <a:ext cx="11778380" cy="7409274"/>
+            <a:chOff x="516784" y="872373"/>
+            <a:chExt cx="11778380" cy="7409274"/>
+          </a:xfrm>
+        </p:grpSpPr>
+        <p:cxnSp>
+          <p:nvCxnSpPr>
+            <p:cNvPr id="2" name="直線矢印コネクタ 1">
+              <a:extLst>
+                <a:ext uri="{FF2B5EF4-FFF2-40B4-BE49-F238E27FC236}">
+                  <a16:creationId xmlns:a16="http://schemas.microsoft.com/office/drawing/2014/main" id="{8F1BEF57-F709-F27E-9A8C-CB55F58A0A24}"/>
+                </a:ext>
+              </a:extLst>
+            </p:cNvPr>
+            <p:cNvCxnSpPr>
+              <a:cxnSpLocks/>
+            </p:cNvCxnSpPr>
+            <p:nvPr/>
+          </p:nvCxnSpPr>
+          <p:spPr>
+            <a:xfrm>
+              <a:off x="1193892" y="7696872"/>
+              <a:ext cx="11101271" cy="0"/>
+            </a:xfrm>
+            <a:prstGeom prst="straightConnector1">
+              <a:avLst/>
+            </a:prstGeom>
+            <a:ln w="57150">
+              <a:solidFill>
+                <a:schemeClr val="tx1"/>
+              </a:solidFill>
+              <a:headEnd type="none"/>
+              <a:tailEnd type="triangle"/>
+            </a:ln>
+          </p:spPr>
+          <p:style>
+            <a:lnRef idx="1">
+              <a:schemeClr val="accent1"/>
+            </a:lnRef>
+            <a:fillRef idx="0">
+              <a:schemeClr val="accent1"/>
+            </a:fillRef>
+            <a:effectRef idx="0">
+              <a:schemeClr val="accent1"/>
+            </a:effectRef>
+            <a:fontRef idx="minor">
+              <a:schemeClr val="tx1"/>
+            </a:fontRef>
+          </p:style>
+        </p:cxnSp>
+        <p:cxnSp>
+          <p:nvCxnSpPr>
+            <p:cNvPr id="3" name="直線矢印コネクタ 2">
+              <a:extLst>
+                <a:ext uri="{FF2B5EF4-FFF2-40B4-BE49-F238E27FC236}">
+                  <a16:creationId xmlns:a16="http://schemas.microsoft.com/office/drawing/2014/main" id="{22CACA83-403E-B402-098A-26821FD1D13F}"/>
+                </a:ext>
+              </a:extLst>
+            </p:cNvPr>
+            <p:cNvCxnSpPr>
+              <a:cxnSpLocks/>
+            </p:cNvCxnSpPr>
+            <p:nvPr/>
+          </p:nvCxnSpPr>
+          <p:spPr>
+            <a:xfrm flipV="1">
+              <a:off x="1193892" y="973015"/>
+              <a:ext cx="0" cy="6723857"/>
+            </a:xfrm>
+            <a:prstGeom prst="straightConnector1">
+              <a:avLst/>
+            </a:prstGeom>
+            <a:ln w="57150">
+              <a:solidFill>
+                <a:schemeClr val="tx1"/>
+              </a:solidFill>
+              <a:headEnd type="none"/>
+              <a:tailEnd type="triangle"/>
+            </a:ln>
+          </p:spPr>
+          <p:style>
+            <a:lnRef idx="1">
+              <a:schemeClr val="accent1"/>
+            </a:lnRef>
+            <a:fillRef idx="0">
+              <a:schemeClr val="accent1"/>
+            </a:fillRef>
+            <a:effectRef idx="0">
+              <a:schemeClr val="accent1"/>
+            </a:effectRef>
+            <a:fontRef idx="minor">
+              <a:schemeClr val="tx1"/>
+            </a:fontRef>
+          </p:style>
+        </p:cxnSp>
+        <p:sp>
+          <p:nvSpPr>
+            <p:cNvPr id="7" name="フリーフォーム 6">
+              <a:extLst>
+                <a:ext uri="{FF2B5EF4-FFF2-40B4-BE49-F238E27FC236}">
+                  <a16:creationId xmlns:a16="http://schemas.microsoft.com/office/drawing/2014/main" id="{E2C2C75F-5871-7E08-EF54-861834D1AF29}"/>
+                </a:ext>
+              </a:extLst>
+            </p:cNvPr>
+            <p:cNvSpPr/>
+            <p:nvPr/>
+          </p:nvSpPr>
+          <p:spPr>
+            <a:xfrm>
+              <a:off x="1757531" y="1486238"/>
+              <a:ext cx="9973994" cy="5697412"/>
+            </a:xfrm>
+            <a:custGeom>
+              <a:avLst/>
+              <a:gdLst>
+                <a:gd name="csX0" fmla="*/ 0 w 9973994"/>
+                <a:gd name="csY0" fmla="*/ 5036235 h 5050303"/>
+                <a:gd name="csX1" fmla="*/ 4965896 w 9973994"/>
+                <a:gd name="csY1" fmla="*/ 1 h 5050303"/>
+                <a:gd name="csX2" fmla="*/ 9973994 w 9973994"/>
+                <a:gd name="csY2" fmla="*/ 5050303 h 5050303"/>
+              </a:gdLst>
+              <a:ahLst/>
+              <a:cxnLst>
+                <a:cxn ang="0">
+                  <a:pos x="csX0" y="csY0"/>
+                </a:cxn>
+                <a:cxn ang="0">
+                  <a:pos x="csX1" y="csY1"/>
+                </a:cxn>
+                <a:cxn ang="0">
+                  <a:pos x="csX2" y="csY2"/>
+                </a:cxn>
+              </a:cxnLst>
+              <a:rect l="l" t="t" r="r" b="b"/>
+              <a:pathLst>
+                <a:path w="9973994" h="5050303">
+                  <a:moveTo>
+                    <a:pt x="0" y="5036235"/>
+                  </a:moveTo>
+                  <a:cubicBezTo>
+                    <a:pt x="1651782" y="2516945"/>
+                    <a:pt x="3303564" y="-2344"/>
+                    <a:pt x="4965896" y="1"/>
+                  </a:cubicBezTo>
+                  <a:cubicBezTo>
+                    <a:pt x="6628228" y="2346"/>
+                    <a:pt x="8301111" y="2526324"/>
+                    <a:pt x="9973994" y="5050303"/>
+                  </a:cubicBezTo>
+                </a:path>
+              </a:pathLst>
+            </a:custGeom>
+            <a:noFill/>
+            <a:ln w="28575">
+              <a:solidFill>
+                <a:schemeClr val="tx1"/>
+              </a:solidFill>
+            </a:ln>
+          </p:spPr>
+          <p:style>
+            <a:lnRef idx="2">
+              <a:schemeClr val="accent1">
+                <a:shade val="15000"/>
+              </a:schemeClr>
+            </a:lnRef>
+            <a:fillRef idx="1">
+              <a:schemeClr val="accent1"/>
+            </a:fillRef>
+            <a:effectRef idx="0">
+              <a:schemeClr val="accent1"/>
+            </a:effectRef>
+            <a:fontRef idx="minor">
+              <a:schemeClr val="lt1"/>
+            </a:fontRef>
+          </p:style>
+          <p:txBody>
+            <a:bodyPr rtlCol="0" anchor="ctr"/>
+            <a:lstStyle/>
+            <a:p>
+              <a:pPr algn="ctr"/>
+              <a:endParaRPr kumimoji="1" lang="ja-JP" altLang="en-US"/>
+            </a:p>
+          </p:txBody>
+        </p:sp>
+        <p:sp>
+          <p:nvSpPr>
+            <p:cNvPr id="8" name="テキスト ボックス 7">
+              <a:extLst>
+                <a:ext uri="{FF2B5EF4-FFF2-40B4-BE49-F238E27FC236}">
+                  <a16:creationId xmlns:a16="http://schemas.microsoft.com/office/drawing/2014/main" id="{4A9A9CC8-98DA-14AE-7B9B-E1018BD16B46}"/>
+                </a:ext>
+              </a:extLst>
+            </p:cNvPr>
+            <p:cNvSpPr txBox="1"/>
+            <p:nvPr/>
+          </p:nvSpPr>
+          <p:spPr>
+            <a:xfrm>
+              <a:off x="8236894" y="7696872"/>
+              <a:ext cx="4058270" cy="584775"/>
+            </a:xfrm>
+            <a:prstGeom prst="rect">
+              <a:avLst/>
+            </a:prstGeom>
+            <a:noFill/>
+          </p:spPr>
+          <p:txBody>
+            <a:bodyPr wrap="square" rtlCol="0" anchor="ctr">
+              <a:spAutoFit/>
+            </a:bodyPr>
+            <a:lstStyle/>
+            <a:p>
+              <a:pPr algn="ctr"/>
+              <a:r>
+                <a:rPr kumimoji="1" lang="ja-JP" altLang="en-US" sz="3200">
+                  <a:latin typeface="Hiragino Sans W4" panose="020B0400000000000000" pitchFamily="34" charset="-128"/>
+                  <a:ea typeface="Hiragino Sans W4" panose="020B0400000000000000" pitchFamily="34" charset="-128"/>
+                </a:rPr>
+                <a:t>コーポラティズム度</a:t>
+              </a:r>
+            </a:p>
+          </p:txBody>
+        </p:sp>
+        <p:sp>
+          <p:nvSpPr>
+            <p:cNvPr id="9" name="テキスト ボックス 8">
+              <a:extLst>
+                <a:ext uri="{FF2B5EF4-FFF2-40B4-BE49-F238E27FC236}">
+                  <a16:creationId xmlns:a16="http://schemas.microsoft.com/office/drawing/2014/main" id="{F89D8454-4524-1FE3-FA57-29E5B7A8A228}"/>
+                </a:ext>
+              </a:extLst>
+            </p:cNvPr>
+            <p:cNvSpPr txBox="1"/>
+            <p:nvPr/>
+          </p:nvSpPr>
+          <p:spPr>
+            <a:xfrm>
+              <a:off x="516784" y="872373"/>
+              <a:ext cx="677108" cy="4365922"/>
+            </a:xfrm>
+            <a:prstGeom prst="rect">
+              <a:avLst/>
+            </a:prstGeom>
+            <a:noFill/>
+          </p:spPr>
+          <p:txBody>
+            <a:bodyPr vert="eaVert" wrap="square" rtlCol="0" anchor="ctr">
+              <a:spAutoFit/>
+            </a:bodyPr>
+            <a:lstStyle/>
+            <a:p>
+              <a:pPr algn="ctr"/>
+              <a:r>
+                <a:rPr kumimoji="1" lang="ja-JP" altLang="en-US" sz="3200">
+                  <a:latin typeface="Hiragino Sans W4" panose="020B0400000000000000" pitchFamily="34" charset="-128"/>
+                  <a:ea typeface="Hiragino Sans W4" panose="020B0400000000000000" pitchFamily="34" charset="-128"/>
+                </a:rPr>
+                <a:t>インフレ率・失業率</a:t>
+              </a:r>
+            </a:p>
+          </p:txBody>
+        </p:sp>
+      </p:grpSp>
+    </p:spTree>
+    <p:extLst>
+      <p:ext uri="{BB962C8B-B14F-4D97-AF65-F5344CB8AC3E}">
+        <p14:creationId xmlns:p14="http://schemas.microsoft.com/office/powerpoint/2010/main" val="2645956043"/>
       </p:ext>
     </p:extLst>
   </p:cSld>

--- a/figs/DIYfigures_pp.pptx
+++ b/figs/DIYfigures_pp.pptx
@@ -25,6 +25,10 @@
     <p:sldId id="273" r:id="rId19"/>
     <p:sldId id="274" r:id="rId20"/>
     <p:sldId id="275" r:id="rId21"/>
+    <p:sldId id="276" r:id="rId22"/>
+    <p:sldId id="277" r:id="rId23"/>
+    <p:sldId id="279" r:id="rId24"/>
+    <p:sldId id="278" r:id="rId25"/>
   </p:sldIdLst>
   <p:sldSz cx="12801600" cy="9601200" type="A3"/>
   <p:notesSz cx="6858000" cy="9144000"/>
@@ -262,7 +266,7 @@
           <a:p>
             <a:fld id="{DBD89380-344E-284F-BE0F-D796858BF56F}" type="datetimeFigureOut">
               <a:rPr kumimoji="1" lang="ja-JP" altLang="en-US" smtClean="0"/>
-              <a:t>2026/6/25</a:t>
+              <a:t>2026/8/24</a:t>
             </a:fld>
             <a:endParaRPr kumimoji="1" lang="ja-JP" altLang="en-US"/>
           </a:p>
@@ -464,7 +468,7 @@
           <a:p>
             <a:fld id="{DBD89380-344E-284F-BE0F-D796858BF56F}" type="datetimeFigureOut">
               <a:rPr kumimoji="1" lang="ja-JP" altLang="en-US" smtClean="0"/>
-              <a:t>2026/6/25</a:t>
+              <a:t>2026/8/24</a:t>
             </a:fld>
             <a:endParaRPr kumimoji="1" lang="ja-JP" altLang="en-US"/>
           </a:p>
@@ -676,7 +680,7 @@
           <a:p>
             <a:fld id="{DBD89380-344E-284F-BE0F-D796858BF56F}" type="datetimeFigureOut">
               <a:rPr kumimoji="1" lang="ja-JP" altLang="en-US" smtClean="0"/>
-              <a:t>2026/6/25</a:t>
+              <a:t>2026/8/24</a:t>
             </a:fld>
             <a:endParaRPr kumimoji="1" lang="ja-JP" altLang="en-US"/>
           </a:p>
@@ -878,7 +882,7 @@
           <a:p>
             <a:fld id="{DBD89380-344E-284F-BE0F-D796858BF56F}" type="datetimeFigureOut">
               <a:rPr kumimoji="1" lang="ja-JP" altLang="en-US" smtClean="0"/>
-              <a:t>2026/6/25</a:t>
+              <a:t>2026/8/24</a:t>
             </a:fld>
             <a:endParaRPr kumimoji="1" lang="ja-JP" altLang="en-US"/>
           </a:p>
@@ -1122,7 +1126,7 @@
           <a:p>
             <a:fld id="{DBD89380-344E-284F-BE0F-D796858BF56F}" type="datetimeFigureOut">
               <a:rPr kumimoji="1" lang="ja-JP" altLang="en-US" smtClean="0"/>
-              <a:t>2026/6/25</a:t>
+              <a:t>2026/8/24</a:t>
             </a:fld>
             <a:endParaRPr kumimoji="1" lang="ja-JP" altLang="en-US"/>
           </a:p>
@@ -1418,7 +1422,7 @@
           <a:p>
             <a:fld id="{DBD89380-344E-284F-BE0F-D796858BF56F}" type="datetimeFigureOut">
               <a:rPr kumimoji="1" lang="ja-JP" altLang="en-US" smtClean="0"/>
-              <a:t>2026/6/25</a:t>
+              <a:t>2026/8/24</a:t>
             </a:fld>
             <a:endParaRPr kumimoji="1" lang="ja-JP" altLang="en-US"/>
           </a:p>
@@ -1849,7 +1853,7 @@
           <a:p>
             <a:fld id="{DBD89380-344E-284F-BE0F-D796858BF56F}" type="datetimeFigureOut">
               <a:rPr kumimoji="1" lang="ja-JP" altLang="en-US" smtClean="0"/>
-              <a:t>2026/6/25</a:t>
+              <a:t>2026/8/24</a:t>
             </a:fld>
             <a:endParaRPr kumimoji="1" lang="ja-JP" altLang="en-US"/>
           </a:p>
@@ -1967,7 +1971,7 @@
           <a:p>
             <a:fld id="{DBD89380-344E-284F-BE0F-D796858BF56F}" type="datetimeFigureOut">
               <a:rPr kumimoji="1" lang="ja-JP" altLang="en-US" smtClean="0"/>
-              <a:t>2026/6/25</a:t>
+              <a:t>2026/8/24</a:t>
             </a:fld>
             <a:endParaRPr kumimoji="1" lang="ja-JP" altLang="en-US"/>
           </a:p>
@@ -2062,7 +2066,7 @@
           <a:p>
             <a:fld id="{DBD89380-344E-284F-BE0F-D796858BF56F}" type="datetimeFigureOut">
               <a:rPr kumimoji="1" lang="ja-JP" altLang="en-US" smtClean="0"/>
-              <a:t>2026/6/25</a:t>
+              <a:t>2026/8/24</a:t>
             </a:fld>
             <a:endParaRPr kumimoji="1" lang="ja-JP" altLang="en-US"/>
           </a:p>
@@ -2371,7 +2375,7 @@
           <a:p>
             <a:fld id="{DBD89380-344E-284F-BE0F-D796858BF56F}" type="datetimeFigureOut">
               <a:rPr kumimoji="1" lang="ja-JP" altLang="en-US" smtClean="0"/>
-              <a:t>2026/6/25</a:t>
+              <a:t>2026/8/24</a:t>
             </a:fld>
             <a:endParaRPr kumimoji="1" lang="ja-JP" altLang="en-US"/>
           </a:p>
@@ -2628,7 +2632,7 @@
           <a:p>
             <a:fld id="{DBD89380-344E-284F-BE0F-D796858BF56F}" type="datetimeFigureOut">
               <a:rPr kumimoji="1" lang="ja-JP" altLang="en-US" smtClean="0"/>
-              <a:t>2026/6/25</a:t>
+              <a:t>2026/8/24</a:t>
             </a:fld>
             <a:endParaRPr kumimoji="1" lang="ja-JP" altLang="en-US"/>
           </a:p>
@@ -2873,7 +2877,7 @@
           <a:p>
             <a:fld id="{DBD89380-344E-284F-BE0F-D796858BF56F}" type="datetimeFigureOut">
               <a:rPr kumimoji="1" lang="ja-JP" altLang="en-US" smtClean="0"/>
-              <a:t>2026/6/25</a:t>
+              <a:t>2026/8/24</a:t>
             </a:fld>
             <a:endParaRPr kumimoji="1" lang="ja-JP" altLang="en-US"/>
           </a:p>
@@ -18320,6 +18324,3279 @@
 </p:sld>
 </file>
 
+<file path=ppt/slides/slide21.xml><?xml version="1.0" encoding="utf-8"?>
+<p:sld xmlns:a="http://schemas.openxmlformats.org/drawingml/2006/main" xmlns:r="http://schemas.openxmlformats.org/officeDocument/2006/relationships" xmlns:p="http://schemas.openxmlformats.org/presentationml/2006/main">
+  <p:cSld>
+    <p:spTree>
+      <p:nvGrpSpPr>
+        <p:cNvPr id="1" name=""/>
+        <p:cNvGrpSpPr/>
+        <p:nvPr/>
+      </p:nvGrpSpPr>
+      <p:grpSpPr>
+        <a:xfrm>
+          <a:off x="0" y="0"/>
+          <a:ext cx="0" cy="0"/>
+          <a:chOff x="0" y="0"/>
+          <a:chExt cx="0" cy="0"/>
+        </a:xfrm>
+      </p:grpSpPr>
+      <p:grpSp>
+        <p:nvGrpSpPr>
+          <p:cNvPr id="22" name="グループ化 21">
+            <a:extLst>
+              <a:ext uri="{FF2B5EF4-FFF2-40B4-BE49-F238E27FC236}">
+                <a16:creationId xmlns:a16="http://schemas.microsoft.com/office/drawing/2014/main" id="{906F9372-8F2C-650B-8F2B-B6EF869361D5}"/>
+              </a:ext>
+            </a:extLst>
+          </p:cNvPr>
+          <p:cNvGrpSpPr/>
+          <p:nvPr/>
+        </p:nvGrpSpPr>
+        <p:grpSpPr>
+          <a:xfrm>
+            <a:off x="144650" y="1858505"/>
+            <a:ext cx="12532963" cy="5884190"/>
+            <a:chOff x="144650" y="1858505"/>
+            <a:chExt cx="12532963" cy="5884190"/>
+          </a:xfrm>
+        </p:grpSpPr>
+        <p:sp>
+          <p:nvSpPr>
+            <p:cNvPr id="2" name="角丸四角形 1">
+              <a:extLst>
+                <a:ext uri="{FF2B5EF4-FFF2-40B4-BE49-F238E27FC236}">
+                  <a16:creationId xmlns:a16="http://schemas.microsoft.com/office/drawing/2014/main" id="{67AD7085-D95F-F6C2-CD03-C0AD464B2921}"/>
+                </a:ext>
+              </a:extLst>
+            </p:cNvPr>
+            <p:cNvSpPr/>
+            <p:nvPr/>
+          </p:nvSpPr>
+          <p:spPr>
+            <a:xfrm>
+              <a:off x="144650" y="4134173"/>
+              <a:ext cx="2559803" cy="1332854"/>
+            </a:xfrm>
+            <a:prstGeom prst="roundRect">
+              <a:avLst/>
+            </a:prstGeom>
+            <a:solidFill>
+              <a:schemeClr val="bg1"/>
+            </a:solidFill>
+            <a:ln w="28575"/>
+          </p:spPr>
+          <p:style>
+            <a:lnRef idx="2">
+              <a:schemeClr val="accent1">
+                <a:shade val="15000"/>
+              </a:schemeClr>
+            </a:lnRef>
+            <a:fillRef idx="1">
+              <a:schemeClr val="accent1"/>
+            </a:fillRef>
+            <a:effectRef idx="0">
+              <a:schemeClr val="accent1"/>
+            </a:effectRef>
+            <a:fontRef idx="minor">
+              <a:schemeClr val="lt1"/>
+            </a:fontRef>
+          </p:style>
+          <p:txBody>
+            <a:bodyPr rtlCol="0" anchor="ctr"/>
+            <a:lstStyle/>
+            <a:p>
+              <a:pPr algn="ctr"/>
+              <a:r>
+                <a:rPr kumimoji="1" lang="ja-JP" altLang="en-US" sz="3200" b="1">
+                  <a:solidFill>
+                    <a:schemeClr val="tx1"/>
+                  </a:solidFill>
+                  <a:latin typeface="Hiragino Sans W7" panose="020B0400000000000000" pitchFamily="34" charset="-128"/>
+                  <a:ea typeface="Hiragino Sans W7" panose="020B0400000000000000" pitchFamily="34" charset="-128"/>
+                </a:rPr>
+                <a:t>課題設定</a:t>
+              </a:r>
+              <a:endParaRPr kumimoji="1" lang="ja-JP" altLang="en-US" b="1">
+                <a:solidFill>
+                  <a:schemeClr val="tx1"/>
+                </a:solidFill>
+                <a:latin typeface="Hiragino Sans W7" panose="020B0400000000000000" pitchFamily="34" charset="-128"/>
+                <a:ea typeface="Hiragino Sans W7" panose="020B0400000000000000" pitchFamily="34" charset="-128"/>
+              </a:endParaRPr>
+            </a:p>
+          </p:txBody>
+        </p:sp>
+        <p:sp>
+          <p:nvSpPr>
+            <p:cNvPr id="5" name="角丸四角形 4">
+              <a:extLst>
+                <a:ext uri="{FF2B5EF4-FFF2-40B4-BE49-F238E27FC236}">
+                  <a16:creationId xmlns:a16="http://schemas.microsoft.com/office/drawing/2014/main" id="{5CDC2010-87EA-B262-21E1-8073E6462573}"/>
+                </a:ext>
+              </a:extLst>
+            </p:cNvPr>
+            <p:cNvSpPr/>
+            <p:nvPr/>
+          </p:nvSpPr>
+          <p:spPr>
+            <a:xfrm>
+              <a:off x="3469037" y="4134173"/>
+              <a:ext cx="2559803" cy="1332854"/>
+            </a:xfrm>
+            <a:prstGeom prst="roundRect">
+              <a:avLst/>
+            </a:prstGeom>
+            <a:solidFill>
+              <a:schemeClr val="bg1"/>
+            </a:solidFill>
+            <a:ln w="28575"/>
+          </p:spPr>
+          <p:style>
+            <a:lnRef idx="2">
+              <a:schemeClr val="accent1">
+                <a:shade val="15000"/>
+              </a:schemeClr>
+            </a:lnRef>
+            <a:fillRef idx="1">
+              <a:schemeClr val="accent1"/>
+            </a:fillRef>
+            <a:effectRef idx="0">
+              <a:schemeClr val="accent1"/>
+            </a:effectRef>
+            <a:fontRef idx="minor">
+              <a:schemeClr val="lt1"/>
+            </a:fontRef>
+          </p:style>
+          <p:txBody>
+            <a:bodyPr rtlCol="0" anchor="ctr"/>
+            <a:lstStyle/>
+            <a:p>
+              <a:pPr algn="ctr"/>
+              <a:r>
+                <a:rPr kumimoji="1" lang="ja-JP" altLang="en-US" sz="3200" b="1">
+                  <a:solidFill>
+                    <a:schemeClr val="tx1"/>
+                  </a:solidFill>
+                  <a:latin typeface="Hiragino Sans W7" panose="020B0400000000000000" pitchFamily="34" charset="-128"/>
+                  <a:ea typeface="Hiragino Sans W7" panose="020B0400000000000000" pitchFamily="34" charset="-128"/>
+                </a:rPr>
+                <a:t>政策形成・決定</a:t>
+              </a:r>
+              <a:endParaRPr kumimoji="1" lang="ja-JP" altLang="en-US" b="1">
+                <a:solidFill>
+                  <a:schemeClr val="tx1"/>
+                </a:solidFill>
+                <a:latin typeface="Hiragino Sans W7" panose="020B0400000000000000" pitchFamily="34" charset="-128"/>
+                <a:ea typeface="Hiragino Sans W7" panose="020B0400000000000000" pitchFamily="34" charset="-128"/>
+              </a:endParaRPr>
+            </a:p>
+          </p:txBody>
+        </p:sp>
+        <p:sp>
+          <p:nvSpPr>
+            <p:cNvPr id="6" name="角丸四角形 5">
+              <a:extLst>
+                <a:ext uri="{FF2B5EF4-FFF2-40B4-BE49-F238E27FC236}">
+                  <a16:creationId xmlns:a16="http://schemas.microsoft.com/office/drawing/2014/main" id="{64B5114C-8E98-6EB1-AB71-A9223CCC7D17}"/>
+                </a:ext>
+              </a:extLst>
+            </p:cNvPr>
+            <p:cNvSpPr/>
+            <p:nvPr/>
+          </p:nvSpPr>
+          <p:spPr>
+            <a:xfrm>
+              <a:off x="6793423" y="4134173"/>
+              <a:ext cx="2559803" cy="1332854"/>
+            </a:xfrm>
+            <a:prstGeom prst="roundRect">
+              <a:avLst/>
+            </a:prstGeom>
+            <a:solidFill>
+              <a:schemeClr val="bg1"/>
+            </a:solidFill>
+            <a:ln w="28575"/>
+          </p:spPr>
+          <p:style>
+            <a:lnRef idx="2">
+              <a:schemeClr val="accent1">
+                <a:shade val="15000"/>
+              </a:schemeClr>
+            </a:lnRef>
+            <a:fillRef idx="1">
+              <a:schemeClr val="accent1"/>
+            </a:fillRef>
+            <a:effectRef idx="0">
+              <a:schemeClr val="accent1"/>
+            </a:effectRef>
+            <a:fontRef idx="minor">
+              <a:schemeClr val="lt1"/>
+            </a:fontRef>
+          </p:style>
+          <p:txBody>
+            <a:bodyPr rtlCol="0" anchor="ctr"/>
+            <a:lstStyle/>
+            <a:p>
+              <a:pPr algn="ctr"/>
+              <a:r>
+                <a:rPr kumimoji="1" lang="ja-JP" altLang="en-US" sz="3200" b="1">
+                  <a:solidFill>
+                    <a:schemeClr val="tx1"/>
+                  </a:solidFill>
+                  <a:latin typeface="Hiragino Sans W7" panose="020B0400000000000000" pitchFamily="34" charset="-128"/>
+                  <a:ea typeface="Hiragino Sans W7" panose="020B0400000000000000" pitchFamily="34" charset="-128"/>
+                </a:rPr>
+                <a:t>政策実施</a:t>
+              </a:r>
+              <a:endParaRPr kumimoji="1" lang="ja-JP" altLang="en-US" b="1">
+                <a:solidFill>
+                  <a:schemeClr val="tx1"/>
+                </a:solidFill>
+                <a:latin typeface="Hiragino Sans W7" panose="020B0400000000000000" pitchFamily="34" charset="-128"/>
+                <a:ea typeface="Hiragino Sans W7" panose="020B0400000000000000" pitchFamily="34" charset="-128"/>
+              </a:endParaRPr>
+            </a:p>
+          </p:txBody>
+        </p:sp>
+        <p:sp>
+          <p:nvSpPr>
+            <p:cNvPr id="7" name="角丸四角形 6">
+              <a:extLst>
+                <a:ext uri="{FF2B5EF4-FFF2-40B4-BE49-F238E27FC236}">
+                  <a16:creationId xmlns:a16="http://schemas.microsoft.com/office/drawing/2014/main" id="{538CADCE-06DB-8EFD-A363-4C60238B462D}"/>
+                </a:ext>
+              </a:extLst>
+            </p:cNvPr>
+            <p:cNvSpPr/>
+            <p:nvPr/>
+          </p:nvSpPr>
+          <p:spPr>
+            <a:xfrm>
+              <a:off x="10117810" y="4134173"/>
+              <a:ext cx="2559803" cy="1332854"/>
+            </a:xfrm>
+            <a:prstGeom prst="roundRect">
+              <a:avLst/>
+            </a:prstGeom>
+            <a:solidFill>
+              <a:schemeClr val="bg1"/>
+            </a:solidFill>
+            <a:ln w="28575"/>
+          </p:spPr>
+          <p:style>
+            <a:lnRef idx="2">
+              <a:schemeClr val="accent1">
+                <a:shade val="15000"/>
+              </a:schemeClr>
+            </a:lnRef>
+            <a:fillRef idx="1">
+              <a:schemeClr val="accent1"/>
+            </a:fillRef>
+            <a:effectRef idx="0">
+              <a:schemeClr val="accent1"/>
+            </a:effectRef>
+            <a:fontRef idx="minor">
+              <a:schemeClr val="lt1"/>
+            </a:fontRef>
+          </p:style>
+          <p:txBody>
+            <a:bodyPr rtlCol="0" anchor="ctr"/>
+            <a:lstStyle/>
+            <a:p>
+              <a:pPr algn="ctr"/>
+              <a:r>
+                <a:rPr kumimoji="1" lang="ja-JP" altLang="en-US" sz="3200" b="1">
+                  <a:solidFill>
+                    <a:schemeClr val="tx1"/>
+                  </a:solidFill>
+                  <a:latin typeface="Hiragino Sans W7" panose="020B0400000000000000" pitchFamily="34" charset="-128"/>
+                  <a:ea typeface="Hiragino Sans W7" panose="020B0400000000000000" pitchFamily="34" charset="-128"/>
+                </a:rPr>
+                <a:t>政策評価</a:t>
+              </a:r>
+              <a:endParaRPr kumimoji="1" lang="ja-JP" altLang="en-US" b="1">
+                <a:solidFill>
+                  <a:schemeClr val="tx1"/>
+                </a:solidFill>
+                <a:latin typeface="Hiragino Sans W7" panose="020B0400000000000000" pitchFamily="34" charset="-128"/>
+                <a:ea typeface="Hiragino Sans W7" panose="020B0400000000000000" pitchFamily="34" charset="-128"/>
+              </a:endParaRPr>
+            </a:p>
+          </p:txBody>
+        </p:sp>
+        <p:sp>
+          <p:nvSpPr>
+            <p:cNvPr id="8" name="角丸四角形 7">
+              <a:extLst>
+                <a:ext uri="{FF2B5EF4-FFF2-40B4-BE49-F238E27FC236}">
+                  <a16:creationId xmlns:a16="http://schemas.microsoft.com/office/drawing/2014/main" id="{BDBB2050-C8BD-2D9D-3CC7-9BA5C6A912AA}"/>
+                </a:ext>
+              </a:extLst>
+            </p:cNvPr>
+            <p:cNvSpPr/>
+            <p:nvPr/>
+          </p:nvSpPr>
+          <p:spPr>
+            <a:xfrm>
+              <a:off x="10117809" y="6409841"/>
+              <a:ext cx="2559803" cy="1332854"/>
+            </a:xfrm>
+            <a:prstGeom prst="roundRect">
+              <a:avLst/>
+            </a:prstGeom>
+            <a:solidFill>
+              <a:schemeClr val="bg1"/>
+            </a:solidFill>
+            <a:ln w="28575"/>
+          </p:spPr>
+          <p:style>
+            <a:lnRef idx="2">
+              <a:schemeClr val="accent1">
+                <a:shade val="15000"/>
+              </a:schemeClr>
+            </a:lnRef>
+            <a:fillRef idx="1">
+              <a:schemeClr val="accent1"/>
+            </a:fillRef>
+            <a:effectRef idx="0">
+              <a:schemeClr val="accent1"/>
+            </a:effectRef>
+            <a:fontRef idx="minor">
+              <a:schemeClr val="lt1"/>
+            </a:fontRef>
+          </p:style>
+          <p:txBody>
+            <a:bodyPr rtlCol="0" anchor="ctr"/>
+            <a:lstStyle/>
+            <a:p>
+              <a:pPr algn="ctr"/>
+              <a:r>
+                <a:rPr kumimoji="1" lang="ja-JP" altLang="en-US" sz="3200" b="1">
+                  <a:solidFill>
+                    <a:schemeClr val="tx1"/>
+                  </a:solidFill>
+                  <a:latin typeface="Hiragino Sans W7" panose="020B0400000000000000" pitchFamily="34" charset="-128"/>
+                  <a:ea typeface="Hiragino Sans W7" panose="020B0400000000000000" pitchFamily="34" charset="-128"/>
+                </a:rPr>
+                <a:t>政策終了</a:t>
+              </a:r>
+              <a:endParaRPr kumimoji="1" lang="ja-JP" altLang="en-US" b="1">
+                <a:solidFill>
+                  <a:schemeClr val="tx1"/>
+                </a:solidFill>
+                <a:latin typeface="Hiragino Sans W7" panose="020B0400000000000000" pitchFamily="34" charset="-128"/>
+                <a:ea typeface="Hiragino Sans W7" panose="020B0400000000000000" pitchFamily="34" charset="-128"/>
+              </a:endParaRPr>
+            </a:p>
+          </p:txBody>
+        </p:sp>
+        <p:sp>
+          <p:nvSpPr>
+            <p:cNvPr id="9" name="右矢印 8">
+              <a:extLst>
+                <a:ext uri="{FF2B5EF4-FFF2-40B4-BE49-F238E27FC236}">
+                  <a16:creationId xmlns:a16="http://schemas.microsoft.com/office/drawing/2014/main" id="{7C6AEFCC-B0FB-8850-9ED7-BD4508B15CBF}"/>
+                </a:ext>
+              </a:extLst>
+            </p:cNvPr>
+            <p:cNvSpPr/>
+            <p:nvPr/>
+          </p:nvSpPr>
+          <p:spPr>
+            <a:xfrm>
+              <a:off x="2862019" y="4199395"/>
+              <a:ext cx="449451" cy="1202410"/>
+            </a:xfrm>
+            <a:prstGeom prst="rightArrow">
+              <a:avLst/>
+            </a:prstGeom>
+            <a:solidFill>
+              <a:schemeClr val="bg1"/>
+            </a:solidFill>
+            <a:ln w="38100"/>
+          </p:spPr>
+          <p:style>
+            <a:lnRef idx="2">
+              <a:schemeClr val="accent1">
+                <a:shade val="15000"/>
+              </a:schemeClr>
+            </a:lnRef>
+            <a:fillRef idx="1">
+              <a:schemeClr val="accent1"/>
+            </a:fillRef>
+            <a:effectRef idx="0">
+              <a:schemeClr val="accent1"/>
+            </a:effectRef>
+            <a:fontRef idx="minor">
+              <a:schemeClr val="lt1"/>
+            </a:fontRef>
+          </p:style>
+          <p:txBody>
+            <a:bodyPr rtlCol="0" anchor="ctr"/>
+            <a:lstStyle/>
+            <a:p>
+              <a:pPr algn="ctr"/>
+              <a:endParaRPr kumimoji="1" lang="ja-JP" altLang="en-US"/>
+            </a:p>
+          </p:txBody>
+        </p:sp>
+        <p:sp>
+          <p:nvSpPr>
+            <p:cNvPr id="10" name="右矢印 9">
+              <a:extLst>
+                <a:ext uri="{FF2B5EF4-FFF2-40B4-BE49-F238E27FC236}">
+                  <a16:creationId xmlns:a16="http://schemas.microsoft.com/office/drawing/2014/main" id="{740BC033-D8BE-03EE-97DE-820701ACCE19}"/>
+                </a:ext>
+              </a:extLst>
+            </p:cNvPr>
+            <p:cNvSpPr/>
+            <p:nvPr/>
+          </p:nvSpPr>
+          <p:spPr>
+            <a:xfrm>
+              <a:off x="6176074" y="4229746"/>
+              <a:ext cx="449451" cy="1202410"/>
+            </a:xfrm>
+            <a:prstGeom prst="rightArrow">
+              <a:avLst/>
+            </a:prstGeom>
+            <a:solidFill>
+              <a:schemeClr val="bg1"/>
+            </a:solidFill>
+            <a:ln w="38100"/>
+          </p:spPr>
+          <p:style>
+            <a:lnRef idx="2">
+              <a:schemeClr val="accent1">
+                <a:shade val="15000"/>
+              </a:schemeClr>
+            </a:lnRef>
+            <a:fillRef idx="1">
+              <a:schemeClr val="accent1"/>
+            </a:fillRef>
+            <a:effectRef idx="0">
+              <a:schemeClr val="accent1"/>
+            </a:effectRef>
+            <a:fontRef idx="minor">
+              <a:schemeClr val="lt1"/>
+            </a:fontRef>
+          </p:style>
+          <p:txBody>
+            <a:bodyPr rtlCol="0" anchor="ctr"/>
+            <a:lstStyle/>
+            <a:p>
+              <a:pPr algn="ctr"/>
+              <a:endParaRPr kumimoji="1" lang="ja-JP" altLang="en-US"/>
+            </a:p>
+          </p:txBody>
+        </p:sp>
+        <p:sp>
+          <p:nvSpPr>
+            <p:cNvPr id="11" name="右矢印 10">
+              <a:extLst>
+                <a:ext uri="{FF2B5EF4-FFF2-40B4-BE49-F238E27FC236}">
+                  <a16:creationId xmlns:a16="http://schemas.microsoft.com/office/drawing/2014/main" id="{9F078CE1-D7FF-6161-F9D4-6B6DE23551DA}"/>
+                </a:ext>
+              </a:extLst>
+            </p:cNvPr>
+            <p:cNvSpPr/>
+            <p:nvPr/>
+          </p:nvSpPr>
+          <p:spPr>
+            <a:xfrm>
+              <a:off x="9510792" y="4264617"/>
+              <a:ext cx="449451" cy="1202410"/>
+            </a:xfrm>
+            <a:prstGeom prst="rightArrow">
+              <a:avLst/>
+            </a:prstGeom>
+            <a:solidFill>
+              <a:schemeClr val="bg1"/>
+            </a:solidFill>
+            <a:ln w="38100"/>
+          </p:spPr>
+          <p:style>
+            <a:lnRef idx="2">
+              <a:schemeClr val="accent1">
+                <a:shade val="15000"/>
+              </a:schemeClr>
+            </a:lnRef>
+            <a:fillRef idx="1">
+              <a:schemeClr val="accent1"/>
+            </a:fillRef>
+            <a:effectRef idx="0">
+              <a:schemeClr val="accent1"/>
+            </a:effectRef>
+            <a:fontRef idx="minor">
+              <a:schemeClr val="lt1"/>
+            </a:fontRef>
+          </p:style>
+          <p:txBody>
+            <a:bodyPr rtlCol="0" anchor="ctr"/>
+            <a:lstStyle/>
+            <a:p>
+              <a:pPr algn="ctr"/>
+              <a:endParaRPr kumimoji="1" lang="ja-JP" altLang="en-US"/>
+            </a:p>
+          </p:txBody>
+        </p:sp>
+        <p:sp>
+          <p:nvSpPr>
+            <p:cNvPr id="12" name="右矢印 11">
+              <a:extLst>
+                <a:ext uri="{FF2B5EF4-FFF2-40B4-BE49-F238E27FC236}">
+                  <a16:creationId xmlns:a16="http://schemas.microsoft.com/office/drawing/2014/main" id="{BF6990FB-1FCB-E49C-310E-30E7A4EC7D7E}"/>
+                </a:ext>
+              </a:extLst>
+            </p:cNvPr>
+            <p:cNvSpPr/>
+            <p:nvPr/>
+          </p:nvSpPr>
+          <p:spPr>
+            <a:xfrm rot="5400000">
+              <a:off x="11079995" y="5326900"/>
+              <a:ext cx="635430" cy="1202410"/>
+            </a:xfrm>
+            <a:prstGeom prst="rightArrow">
+              <a:avLst/>
+            </a:prstGeom>
+            <a:solidFill>
+              <a:schemeClr val="bg1"/>
+            </a:solidFill>
+            <a:ln w="38100"/>
+          </p:spPr>
+          <p:style>
+            <a:lnRef idx="2">
+              <a:schemeClr val="accent1">
+                <a:shade val="15000"/>
+              </a:schemeClr>
+            </a:lnRef>
+            <a:fillRef idx="1">
+              <a:schemeClr val="accent1"/>
+            </a:fillRef>
+            <a:effectRef idx="0">
+              <a:schemeClr val="accent1"/>
+            </a:effectRef>
+            <a:fontRef idx="minor">
+              <a:schemeClr val="lt1"/>
+            </a:fontRef>
+          </p:style>
+          <p:txBody>
+            <a:bodyPr rtlCol="0" anchor="ctr"/>
+            <a:lstStyle/>
+            <a:p>
+              <a:pPr algn="ctr"/>
+              <a:endParaRPr kumimoji="1" lang="ja-JP" altLang="en-US"/>
+            </a:p>
+          </p:txBody>
+        </p:sp>
+        <p:sp>
+          <p:nvSpPr>
+            <p:cNvPr id="13" name="曲折矢印 12">
+              <a:extLst>
+                <a:ext uri="{FF2B5EF4-FFF2-40B4-BE49-F238E27FC236}">
+                  <a16:creationId xmlns:a16="http://schemas.microsoft.com/office/drawing/2014/main" id="{B44533BF-AE98-327E-34CE-26D779865E24}"/>
+                </a:ext>
+              </a:extLst>
+            </p:cNvPr>
+            <p:cNvSpPr/>
+            <p:nvPr/>
+          </p:nvSpPr>
+          <p:spPr>
+            <a:xfrm flipH="1">
+              <a:off x="10117809" y="1858505"/>
+              <a:ext cx="1478154" cy="2111647"/>
+            </a:xfrm>
+            <a:prstGeom prst="bentArrow">
+              <a:avLst>
+                <a:gd name="adj1" fmla="val 35465"/>
+                <a:gd name="adj2" fmla="val 42442"/>
+                <a:gd name="adj3" fmla="val 25000"/>
+                <a:gd name="adj4" fmla="val 43750"/>
+              </a:avLst>
+            </a:prstGeom>
+            <a:solidFill>
+              <a:schemeClr val="bg1"/>
+            </a:solidFill>
+            <a:ln w="38100"/>
+          </p:spPr>
+          <p:style>
+            <a:lnRef idx="2">
+              <a:schemeClr val="accent1">
+                <a:shade val="15000"/>
+              </a:schemeClr>
+            </a:lnRef>
+            <a:fillRef idx="1">
+              <a:schemeClr val="accent1"/>
+            </a:fillRef>
+            <a:effectRef idx="0">
+              <a:schemeClr val="accent1"/>
+            </a:effectRef>
+            <a:fontRef idx="minor">
+              <a:schemeClr val="lt1"/>
+            </a:fontRef>
+          </p:style>
+          <p:txBody>
+            <a:bodyPr rtlCol="0" anchor="ctr"/>
+            <a:lstStyle/>
+            <a:p>
+              <a:pPr algn="ctr"/>
+              <a:endParaRPr kumimoji="1" lang="ja-JP" altLang="en-US">
+                <a:solidFill>
+                  <a:schemeClr val="tx1"/>
+                </a:solidFill>
+              </a:endParaRPr>
+            </a:p>
+          </p:txBody>
+        </p:sp>
+        <p:sp>
+          <p:nvSpPr>
+            <p:cNvPr id="18" name="フリーフォーム 17">
+              <a:extLst>
+                <a:ext uri="{FF2B5EF4-FFF2-40B4-BE49-F238E27FC236}">
+                  <a16:creationId xmlns:a16="http://schemas.microsoft.com/office/drawing/2014/main" id="{DEB13014-3997-7F94-5A7E-82CE934FD8A3}"/>
+                </a:ext>
+              </a:extLst>
+            </p:cNvPr>
+            <p:cNvSpPr/>
+            <p:nvPr/>
+          </p:nvSpPr>
+          <p:spPr>
+            <a:xfrm rot="5400000">
+              <a:off x="4278015" y="-1405339"/>
+              <a:ext cx="1876912" cy="9038093"/>
+            </a:xfrm>
+            <a:custGeom>
+              <a:avLst/>
+              <a:gdLst>
+                <a:gd name="csX0" fmla="*/ 0 w 1876912"/>
+                <a:gd name="csY0" fmla="*/ 7886799 h 9038093"/>
+                <a:gd name="csX1" fmla="*/ 0 w 1876912"/>
+                <a:gd name="csY1" fmla="*/ 0 h 9038093"/>
+                <a:gd name="csX2" fmla="*/ 636562 w 1876912"/>
+                <a:gd name="csY2" fmla="*/ 0 h 9038093"/>
+                <a:gd name="csX3" fmla="*/ 636562 w 1876912"/>
+                <a:gd name="csY3" fmla="*/ 1321230 h 9038093"/>
+                <a:gd name="csX4" fmla="*/ 1396471 w 1876912"/>
+                <a:gd name="csY4" fmla="*/ 1321230 h 9038093"/>
+                <a:gd name="csX5" fmla="*/ 1396471 w 1876912"/>
+                <a:gd name="csY5" fmla="*/ 980267 h 9038093"/>
+                <a:gd name="csX6" fmla="*/ 1876912 w 1876912"/>
+                <a:gd name="csY6" fmla="*/ 1662193 h 9038093"/>
+                <a:gd name="csX7" fmla="*/ 1396471 w 1876912"/>
+                <a:gd name="csY7" fmla="*/ 2344119 h 9038093"/>
+                <a:gd name="csX8" fmla="*/ 1396471 w 1876912"/>
+                <a:gd name="csY8" fmla="*/ 2003156 h 9038093"/>
+                <a:gd name="csX9" fmla="*/ 636562 w 1876912"/>
+                <a:gd name="csY9" fmla="*/ 2003156 h 9038093"/>
+                <a:gd name="csX10" fmla="*/ 636562 w 1876912"/>
+                <a:gd name="csY10" fmla="*/ 4645616 h 9038093"/>
+                <a:gd name="csX11" fmla="*/ 1314460 w 1876912"/>
+                <a:gd name="csY11" fmla="*/ 4645616 h 9038093"/>
+                <a:gd name="csX12" fmla="*/ 1314460 w 1876912"/>
+                <a:gd name="csY12" fmla="*/ 4304653 h 9038093"/>
+                <a:gd name="csX13" fmla="*/ 1794901 w 1876912"/>
+                <a:gd name="csY13" fmla="*/ 4986579 h 9038093"/>
+                <a:gd name="csX14" fmla="*/ 1314460 w 1876912"/>
+                <a:gd name="csY14" fmla="*/ 5668505 h 9038093"/>
+                <a:gd name="csX15" fmla="*/ 1314460 w 1876912"/>
+                <a:gd name="csY15" fmla="*/ 5327542 h 9038093"/>
+                <a:gd name="csX16" fmla="*/ 636561 w 1876912"/>
+                <a:gd name="csY16" fmla="*/ 5327542 h 9038093"/>
+                <a:gd name="csX17" fmla="*/ 636561 w 1876912"/>
+                <a:gd name="csY17" fmla="*/ 7886798 h 9038093"/>
+                <a:gd name="csX18" fmla="*/ 785269 w 1876912"/>
+                <a:gd name="csY18" fmla="*/ 8035506 h 9038093"/>
+                <a:gd name="csX19" fmla="*/ 1346176 w 1876912"/>
+                <a:gd name="csY19" fmla="*/ 8035506 h 9038093"/>
+                <a:gd name="csX20" fmla="*/ 1346176 w 1876912"/>
+                <a:gd name="csY20" fmla="*/ 7669481 h 9038093"/>
+                <a:gd name="csX21" fmla="*/ 1794901 w 1876912"/>
+                <a:gd name="csY21" fmla="*/ 8353787 h 9038093"/>
+                <a:gd name="csX22" fmla="*/ 1346176 w 1876912"/>
+                <a:gd name="csY22" fmla="*/ 9038093 h 9038093"/>
+                <a:gd name="csX23" fmla="*/ 1346176 w 1876912"/>
+                <a:gd name="csY23" fmla="*/ 8672068 h 9038093"/>
+                <a:gd name="csX24" fmla="*/ 785269 w 1876912"/>
+                <a:gd name="csY24" fmla="*/ 8672068 h 9038093"/>
+                <a:gd name="csX25" fmla="*/ 0 w 1876912"/>
+                <a:gd name="csY25" fmla="*/ 7886799 h 9038093"/>
+              </a:gdLst>
+              <a:ahLst/>
+              <a:cxnLst>
+                <a:cxn ang="0">
+                  <a:pos x="csX0" y="csY0"/>
+                </a:cxn>
+                <a:cxn ang="0">
+                  <a:pos x="csX1" y="csY1"/>
+                </a:cxn>
+                <a:cxn ang="0">
+                  <a:pos x="csX2" y="csY2"/>
+                </a:cxn>
+                <a:cxn ang="0">
+                  <a:pos x="csX3" y="csY3"/>
+                </a:cxn>
+                <a:cxn ang="0">
+                  <a:pos x="csX4" y="csY4"/>
+                </a:cxn>
+                <a:cxn ang="0">
+                  <a:pos x="csX5" y="csY5"/>
+                </a:cxn>
+                <a:cxn ang="0">
+                  <a:pos x="csX6" y="csY6"/>
+                </a:cxn>
+                <a:cxn ang="0">
+                  <a:pos x="csX7" y="csY7"/>
+                </a:cxn>
+                <a:cxn ang="0">
+                  <a:pos x="csX8" y="csY8"/>
+                </a:cxn>
+                <a:cxn ang="0">
+                  <a:pos x="csX9" y="csY9"/>
+                </a:cxn>
+                <a:cxn ang="0">
+                  <a:pos x="csX10" y="csY10"/>
+                </a:cxn>
+                <a:cxn ang="0">
+                  <a:pos x="csX11" y="csY11"/>
+                </a:cxn>
+                <a:cxn ang="0">
+                  <a:pos x="csX12" y="csY12"/>
+                </a:cxn>
+                <a:cxn ang="0">
+                  <a:pos x="csX13" y="csY13"/>
+                </a:cxn>
+                <a:cxn ang="0">
+                  <a:pos x="csX14" y="csY14"/>
+                </a:cxn>
+                <a:cxn ang="0">
+                  <a:pos x="csX15" y="csY15"/>
+                </a:cxn>
+                <a:cxn ang="0">
+                  <a:pos x="csX16" y="csY16"/>
+                </a:cxn>
+                <a:cxn ang="0">
+                  <a:pos x="csX17" y="csY17"/>
+                </a:cxn>
+                <a:cxn ang="0">
+                  <a:pos x="csX18" y="csY18"/>
+                </a:cxn>
+                <a:cxn ang="0">
+                  <a:pos x="csX19" y="csY19"/>
+                </a:cxn>
+                <a:cxn ang="0">
+                  <a:pos x="csX20" y="csY20"/>
+                </a:cxn>
+                <a:cxn ang="0">
+                  <a:pos x="csX21" y="csY21"/>
+                </a:cxn>
+                <a:cxn ang="0">
+                  <a:pos x="csX22" y="csY22"/>
+                </a:cxn>
+                <a:cxn ang="0">
+                  <a:pos x="csX23" y="csY23"/>
+                </a:cxn>
+                <a:cxn ang="0">
+                  <a:pos x="csX24" y="csY24"/>
+                </a:cxn>
+                <a:cxn ang="0">
+                  <a:pos x="csX25" y="csY25"/>
+                </a:cxn>
+              </a:cxnLst>
+              <a:rect l="l" t="t" r="r" b="b"/>
+              <a:pathLst>
+                <a:path w="1876912" h="9038093">
+                  <a:moveTo>
+                    <a:pt x="0" y="7886799"/>
+                  </a:moveTo>
+                  <a:lnTo>
+                    <a:pt x="0" y="0"/>
+                  </a:lnTo>
+                  <a:lnTo>
+                    <a:pt x="636562" y="0"/>
+                  </a:lnTo>
+                  <a:lnTo>
+                    <a:pt x="636562" y="1321230"/>
+                  </a:lnTo>
+                  <a:lnTo>
+                    <a:pt x="1396471" y="1321230"/>
+                  </a:lnTo>
+                  <a:lnTo>
+                    <a:pt x="1396471" y="980267"/>
+                  </a:lnTo>
+                  <a:lnTo>
+                    <a:pt x="1876912" y="1662193"/>
+                  </a:lnTo>
+                  <a:lnTo>
+                    <a:pt x="1396471" y="2344119"/>
+                  </a:lnTo>
+                  <a:lnTo>
+                    <a:pt x="1396471" y="2003156"/>
+                  </a:lnTo>
+                  <a:lnTo>
+                    <a:pt x="636562" y="2003156"/>
+                  </a:lnTo>
+                  <a:lnTo>
+                    <a:pt x="636562" y="4645616"/>
+                  </a:lnTo>
+                  <a:lnTo>
+                    <a:pt x="1314460" y="4645616"/>
+                  </a:lnTo>
+                  <a:lnTo>
+                    <a:pt x="1314460" y="4304653"/>
+                  </a:lnTo>
+                  <a:lnTo>
+                    <a:pt x="1794901" y="4986579"/>
+                  </a:lnTo>
+                  <a:lnTo>
+                    <a:pt x="1314460" y="5668505"/>
+                  </a:lnTo>
+                  <a:lnTo>
+                    <a:pt x="1314460" y="5327542"/>
+                  </a:lnTo>
+                  <a:lnTo>
+                    <a:pt x="636561" y="5327542"/>
+                  </a:lnTo>
+                  <a:lnTo>
+                    <a:pt x="636561" y="7886798"/>
+                  </a:lnTo>
+                  <a:cubicBezTo>
+                    <a:pt x="636561" y="7968927"/>
+                    <a:pt x="703140" y="8035506"/>
+                    <a:pt x="785269" y="8035506"/>
+                  </a:cubicBezTo>
+                  <a:lnTo>
+                    <a:pt x="1346176" y="8035506"/>
+                  </a:lnTo>
+                  <a:lnTo>
+                    <a:pt x="1346176" y="7669481"/>
+                  </a:lnTo>
+                  <a:lnTo>
+                    <a:pt x="1794901" y="8353787"/>
+                  </a:lnTo>
+                  <a:lnTo>
+                    <a:pt x="1346176" y="9038093"/>
+                  </a:lnTo>
+                  <a:lnTo>
+                    <a:pt x="1346176" y="8672068"/>
+                  </a:lnTo>
+                  <a:lnTo>
+                    <a:pt x="785269" y="8672068"/>
+                  </a:lnTo>
+                  <a:cubicBezTo>
+                    <a:pt x="351577" y="8672068"/>
+                    <a:pt x="0" y="8320491"/>
+                    <a:pt x="0" y="7886799"/>
+                  </a:cubicBezTo>
+                  <a:close/>
+                </a:path>
+              </a:pathLst>
+            </a:custGeom>
+            <a:solidFill>
+              <a:schemeClr val="bg1"/>
+            </a:solidFill>
+            <a:ln w="38100"/>
+          </p:spPr>
+          <p:style>
+            <a:lnRef idx="2">
+              <a:schemeClr val="accent1">
+                <a:shade val="15000"/>
+              </a:schemeClr>
+            </a:lnRef>
+            <a:fillRef idx="1">
+              <a:schemeClr val="accent1"/>
+            </a:fillRef>
+            <a:effectRef idx="0">
+              <a:schemeClr val="accent1"/>
+            </a:effectRef>
+            <a:fontRef idx="minor">
+              <a:schemeClr val="lt1"/>
+            </a:fontRef>
+          </p:style>
+          <p:txBody>
+            <a:bodyPr wrap="square" rtlCol="0" anchor="ctr">
+              <a:noAutofit/>
+            </a:bodyPr>
+            <a:lstStyle/>
+            <a:p>
+              <a:pPr algn="ctr"/>
+              <a:endParaRPr kumimoji="1" lang="ja-JP" altLang="en-US"/>
+            </a:p>
+          </p:txBody>
+        </p:sp>
+        <p:sp>
+          <p:nvSpPr>
+            <p:cNvPr id="21" name="正方形/長方形 20">
+              <a:extLst>
+                <a:ext uri="{FF2B5EF4-FFF2-40B4-BE49-F238E27FC236}">
+                  <a16:creationId xmlns:a16="http://schemas.microsoft.com/office/drawing/2014/main" id="{196E0A35-448B-B804-AA87-AD281138222C}"/>
+                </a:ext>
+              </a:extLst>
+            </p:cNvPr>
+            <p:cNvSpPr/>
+            <p:nvPr/>
+          </p:nvSpPr>
+          <p:spPr>
+            <a:xfrm>
+              <a:off x="3883617" y="1962798"/>
+              <a:ext cx="3602065" cy="743919"/>
+            </a:xfrm>
+            <a:prstGeom prst="rect">
+              <a:avLst/>
+            </a:prstGeom>
+            <a:solidFill>
+              <a:schemeClr val="bg1"/>
+            </a:solidFill>
+            <a:ln w="38100"/>
+          </p:spPr>
+          <p:style>
+            <a:lnRef idx="2">
+              <a:schemeClr val="accent1">
+                <a:shade val="15000"/>
+              </a:schemeClr>
+            </a:lnRef>
+            <a:fillRef idx="1">
+              <a:schemeClr val="accent1"/>
+            </a:fillRef>
+            <a:effectRef idx="0">
+              <a:schemeClr val="accent1"/>
+            </a:effectRef>
+            <a:fontRef idx="minor">
+              <a:schemeClr val="lt1"/>
+            </a:fontRef>
+          </p:style>
+          <p:txBody>
+            <a:bodyPr rtlCol="0" anchor="ctr"/>
+            <a:lstStyle/>
+            <a:p>
+              <a:pPr algn="ctr"/>
+              <a:r>
+                <a:rPr kumimoji="1" lang="ja-JP" altLang="en-US" sz="3200" b="1">
+                  <a:solidFill>
+                    <a:schemeClr val="tx1"/>
+                  </a:solidFill>
+                  <a:latin typeface="Hiragino Sans W7" panose="020B0400000000000000" pitchFamily="34" charset="-128"/>
+                  <a:ea typeface="Hiragino Sans W7" panose="020B0400000000000000" pitchFamily="34" charset="-128"/>
+                </a:rPr>
+                <a:t>フィードバック</a:t>
+              </a:r>
+            </a:p>
+          </p:txBody>
+        </p:sp>
+      </p:grpSp>
+    </p:spTree>
+    <p:extLst>
+      <p:ext uri="{BB962C8B-B14F-4D97-AF65-F5344CB8AC3E}">
+        <p14:creationId xmlns:p14="http://schemas.microsoft.com/office/powerpoint/2010/main" val="18918778"/>
+      </p:ext>
+    </p:extLst>
+  </p:cSld>
+  <p:clrMapOvr>
+    <a:masterClrMapping/>
+  </p:clrMapOvr>
+</p:sld>
+</file>
+
+<file path=ppt/slides/slide22.xml><?xml version="1.0" encoding="utf-8"?>
+<p:sld xmlns:a="http://schemas.openxmlformats.org/drawingml/2006/main" xmlns:r="http://schemas.openxmlformats.org/officeDocument/2006/relationships" xmlns:p="http://schemas.openxmlformats.org/presentationml/2006/main">
+  <p:cSld>
+    <p:spTree>
+      <p:nvGrpSpPr>
+        <p:cNvPr id="1" name=""/>
+        <p:cNvGrpSpPr/>
+        <p:nvPr/>
+      </p:nvGrpSpPr>
+      <p:grpSpPr>
+        <a:xfrm>
+          <a:off x="0" y="0"/>
+          <a:ext cx="0" cy="0"/>
+          <a:chOff x="0" y="0"/>
+          <a:chExt cx="0" cy="0"/>
+        </a:xfrm>
+      </p:grpSpPr>
+      <p:grpSp>
+        <p:nvGrpSpPr>
+          <p:cNvPr id="25" name="グループ化 24">
+            <a:extLst>
+              <a:ext uri="{FF2B5EF4-FFF2-40B4-BE49-F238E27FC236}">
+                <a16:creationId xmlns:a16="http://schemas.microsoft.com/office/drawing/2014/main" id="{DEC8912C-9A48-4245-D69A-B42073D307B2}"/>
+              </a:ext>
+            </a:extLst>
+          </p:cNvPr>
+          <p:cNvGrpSpPr/>
+          <p:nvPr/>
+        </p:nvGrpSpPr>
+        <p:grpSpPr>
+          <a:xfrm>
+            <a:off x="1003515" y="636722"/>
+            <a:ext cx="10899183" cy="7833102"/>
+            <a:chOff x="1003515" y="636722"/>
+            <a:chExt cx="10899183" cy="7833102"/>
+          </a:xfrm>
+        </p:grpSpPr>
+        <p:pic>
+          <p:nvPicPr>
+            <p:cNvPr id="3" name="グラフィックス 2" descr="堆肥 単色塗りつぶし">
+              <a:extLst>
+                <a:ext uri="{FF2B5EF4-FFF2-40B4-BE49-F238E27FC236}">
+                  <a16:creationId xmlns:a16="http://schemas.microsoft.com/office/drawing/2014/main" id="{41C41F0F-6486-6EE8-82D3-CFE41BDB2005}"/>
+                </a:ext>
+              </a:extLst>
+            </p:cNvPr>
+            <p:cNvPicPr>
+              <a:picLocks noChangeAspect="1"/>
+            </p:cNvPicPr>
+            <p:nvPr/>
+          </p:nvPicPr>
+          <p:blipFill>
+            <a:blip>
+              <a:extLst>
+                <a:ext uri="{96DAC541-7B7A-43D3-8B79-37D633B846F1}">
+                  <asvg:svgBlip xmlns:asvg="http://schemas.microsoft.com/office/drawing/2016/SVG/main" r:embed="rId2"/>
+                </a:ext>
+              </a:extLst>
+            </a:blip>
+            <a:stretch>
+              <a:fillRect/>
+            </a:stretch>
+          </p:blipFill>
+          <p:spPr>
+            <a:xfrm>
+              <a:off x="4851938" y="3251738"/>
+              <a:ext cx="3097723" cy="3097723"/>
+            </a:xfrm>
+            <a:prstGeom prst="rect">
+              <a:avLst/>
+            </a:prstGeom>
+          </p:spPr>
+        </p:pic>
+        <p:pic>
+          <p:nvPicPr>
+            <p:cNvPr id="5" name="グラフィックス 4" descr="ユーザー 単色塗りつぶし">
+              <a:extLst>
+                <a:ext uri="{FF2B5EF4-FFF2-40B4-BE49-F238E27FC236}">
+                  <a16:creationId xmlns:a16="http://schemas.microsoft.com/office/drawing/2014/main" id="{1711C8A7-958F-2EA0-3A53-4E07990FA686}"/>
+                </a:ext>
+              </a:extLst>
+            </p:cNvPr>
+            <p:cNvPicPr>
+              <a:picLocks noChangeAspect="1"/>
+            </p:cNvPicPr>
+            <p:nvPr/>
+          </p:nvPicPr>
+          <p:blipFill>
+            <a:blip>
+              <a:extLst>
+                <a:ext uri="{96DAC541-7B7A-43D3-8B79-37D633B846F1}">
+                  <asvg:svgBlip xmlns:asvg="http://schemas.microsoft.com/office/drawing/2016/SVG/main" r:embed="rId3"/>
+                </a:ext>
+              </a:extLst>
+            </a:blip>
+            <a:stretch>
+              <a:fillRect/>
+            </a:stretch>
+          </p:blipFill>
+          <p:spPr>
+            <a:xfrm>
+              <a:off x="9446216" y="5908729"/>
+              <a:ext cx="2456482" cy="2456482"/>
+            </a:xfrm>
+            <a:prstGeom prst="rect">
+              <a:avLst/>
+            </a:prstGeom>
+          </p:spPr>
+        </p:pic>
+        <p:pic>
+          <p:nvPicPr>
+            <p:cNvPr id="6" name="グラフィックス 5" descr="ユーザー 単色塗りつぶし">
+              <a:extLst>
+                <a:ext uri="{FF2B5EF4-FFF2-40B4-BE49-F238E27FC236}">
+                  <a16:creationId xmlns:a16="http://schemas.microsoft.com/office/drawing/2014/main" id="{8EFB2149-4A6C-16ED-80A3-DF4C6AB74D79}"/>
+                </a:ext>
+              </a:extLst>
+            </p:cNvPr>
+            <p:cNvPicPr>
+              <a:picLocks noChangeAspect="1"/>
+            </p:cNvPicPr>
+            <p:nvPr/>
+          </p:nvPicPr>
+          <p:blipFill>
+            <a:blip>
+              <a:extLst>
+                <a:ext uri="{96DAC541-7B7A-43D3-8B79-37D633B846F1}">
+                  <asvg:svgBlip xmlns:asvg="http://schemas.microsoft.com/office/drawing/2016/SVG/main" r:embed="rId4"/>
+                </a:ext>
+              </a:extLst>
+            </a:blip>
+            <a:stretch>
+              <a:fillRect/>
+            </a:stretch>
+          </p:blipFill>
+          <p:spPr>
+            <a:xfrm>
+              <a:off x="1003515" y="5908729"/>
+              <a:ext cx="2456482" cy="2456482"/>
+            </a:xfrm>
+            <a:prstGeom prst="rect">
+              <a:avLst/>
+            </a:prstGeom>
+          </p:spPr>
+        </p:pic>
+        <p:pic>
+          <p:nvPicPr>
+            <p:cNvPr id="7" name="グラフィックス 6" descr="ユーザー 単色塗りつぶし">
+              <a:extLst>
+                <a:ext uri="{FF2B5EF4-FFF2-40B4-BE49-F238E27FC236}">
+                  <a16:creationId xmlns:a16="http://schemas.microsoft.com/office/drawing/2014/main" id="{14BA683C-7637-E465-80F6-AB3007203CEF}"/>
+                </a:ext>
+              </a:extLst>
+            </p:cNvPr>
+            <p:cNvPicPr>
+              <a:picLocks noChangeAspect="1"/>
+            </p:cNvPicPr>
+            <p:nvPr/>
+          </p:nvPicPr>
+          <p:blipFill>
+            <a:blip>
+              <a:extLst>
+                <a:ext uri="{96DAC541-7B7A-43D3-8B79-37D633B846F1}">
+                  <asvg:svgBlip xmlns:asvg="http://schemas.microsoft.com/office/drawing/2016/SVG/main" r:embed="rId4"/>
+                </a:ext>
+              </a:extLst>
+            </a:blip>
+            <a:stretch>
+              <a:fillRect/>
+            </a:stretch>
+          </p:blipFill>
+          <p:spPr>
+            <a:xfrm>
+              <a:off x="1003515" y="636722"/>
+              <a:ext cx="2456482" cy="2456482"/>
+            </a:xfrm>
+            <a:prstGeom prst="rect">
+              <a:avLst/>
+            </a:prstGeom>
+          </p:spPr>
+        </p:pic>
+        <p:pic>
+          <p:nvPicPr>
+            <p:cNvPr id="8" name="グラフィックス 7" descr="ユーザー 単色塗りつぶし">
+              <a:extLst>
+                <a:ext uri="{FF2B5EF4-FFF2-40B4-BE49-F238E27FC236}">
+                  <a16:creationId xmlns:a16="http://schemas.microsoft.com/office/drawing/2014/main" id="{D6FC85D1-EFCB-77CA-9C55-0A58F8A14904}"/>
+                </a:ext>
+              </a:extLst>
+            </p:cNvPr>
+            <p:cNvPicPr>
+              <a:picLocks noChangeAspect="1"/>
+            </p:cNvPicPr>
+            <p:nvPr/>
+          </p:nvPicPr>
+          <p:blipFill>
+            <a:blip>
+              <a:extLst>
+                <a:ext uri="{96DAC541-7B7A-43D3-8B79-37D633B846F1}">
+                  <asvg:svgBlip xmlns:asvg="http://schemas.microsoft.com/office/drawing/2016/SVG/main" r:embed="rId4"/>
+                </a:ext>
+              </a:extLst>
+            </a:blip>
+            <a:stretch>
+              <a:fillRect/>
+            </a:stretch>
+          </p:blipFill>
+          <p:spPr>
+            <a:xfrm>
+              <a:off x="9341605" y="636722"/>
+              <a:ext cx="2456482" cy="2456482"/>
+            </a:xfrm>
+            <a:prstGeom prst="rect">
+              <a:avLst/>
+            </a:prstGeom>
+          </p:spPr>
+        </p:pic>
+        <p:sp>
+          <p:nvSpPr>
+            <p:cNvPr id="13" name="環状矢印 12">
+              <a:extLst>
+                <a:ext uri="{FF2B5EF4-FFF2-40B4-BE49-F238E27FC236}">
+                  <a16:creationId xmlns:a16="http://schemas.microsoft.com/office/drawing/2014/main" id="{FA34D09D-16EC-2DF3-CDFA-BCE20F75370B}"/>
+                </a:ext>
+              </a:extLst>
+            </p:cNvPr>
+            <p:cNvSpPr/>
+            <p:nvPr/>
+          </p:nvSpPr>
+          <p:spPr>
+            <a:xfrm rot="1500429">
+              <a:off x="2527085" y="1318313"/>
+              <a:ext cx="3718617" cy="2227254"/>
+            </a:xfrm>
+            <a:prstGeom prst="circularArrow">
+              <a:avLst>
+                <a:gd name="adj1" fmla="val 6792"/>
+                <a:gd name="adj2" fmla="val 915030"/>
+                <a:gd name="adj3" fmla="val 20606191"/>
+                <a:gd name="adj4" fmla="val 10966240"/>
+                <a:gd name="adj5" fmla="val 12500"/>
+              </a:avLst>
+            </a:prstGeom>
+            <a:solidFill>
+              <a:schemeClr val="tx1"/>
+            </a:solidFill>
+          </p:spPr>
+          <p:style>
+            <a:lnRef idx="2">
+              <a:schemeClr val="accent1">
+                <a:shade val="15000"/>
+              </a:schemeClr>
+            </a:lnRef>
+            <a:fillRef idx="1">
+              <a:schemeClr val="accent1"/>
+            </a:fillRef>
+            <a:effectRef idx="0">
+              <a:schemeClr val="accent1"/>
+            </a:effectRef>
+            <a:fontRef idx="minor">
+              <a:schemeClr val="lt1"/>
+            </a:fontRef>
+          </p:style>
+          <p:txBody>
+            <a:bodyPr rtlCol="0" anchor="ctr"/>
+            <a:lstStyle/>
+            <a:p>
+              <a:pPr algn="ctr"/>
+              <a:endParaRPr kumimoji="1" lang="ja-JP" altLang="en-US">
+                <a:solidFill>
+                  <a:schemeClr val="tx1"/>
+                </a:solidFill>
+              </a:endParaRPr>
+            </a:p>
+          </p:txBody>
+        </p:sp>
+        <p:sp>
+          <p:nvSpPr>
+            <p:cNvPr id="14" name="環状矢印 13">
+              <a:extLst>
+                <a:ext uri="{FF2B5EF4-FFF2-40B4-BE49-F238E27FC236}">
+                  <a16:creationId xmlns:a16="http://schemas.microsoft.com/office/drawing/2014/main" id="{4B74CDFB-23FA-2984-164C-BAA88EAF617C}"/>
+                </a:ext>
+              </a:extLst>
+            </p:cNvPr>
+            <p:cNvSpPr/>
+            <p:nvPr/>
+          </p:nvSpPr>
+          <p:spPr>
+            <a:xfrm rot="19295330">
+              <a:off x="2452031" y="4795624"/>
+              <a:ext cx="3407873" cy="2226211"/>
+            </a:xfrm>
+            <a:prstGeom prst="circularArrow">
+              <a:avLst>
+                <a:gd name="adj1" fmla="val 6792"/>
+                <a:gd name="adj2" fmla="val 915030"/>
+                <a:gd name="adj3" fmla="val 20606191"/>
+                <a:gd name="adj4" fmla="val 10966240"/>
+                <a:gd name="adj5" fmla="val 12500"/>
+              </a:avLst>
+            </a:prstGeom>
+            <a:solidFill>
+              <a:schemeClr val="tx1"/>
+            </a:solidFill>
+          </p:spPr>
+          <p:style>
+            <a:lnRef idx="2">
+              <a:schemeClr val="accent1">
+                <a:shade val="15000"/>
+              </a:schemeClr>
+            </a:lnRef>
+            <a:fillRef idx="1">
+              <a:schemeClr val="accent1"/>
+            </a:fillRef>
+            <a:effectRef idx="0">
+              <a:schemeClr val="accent1"/>
+            </a:effectRef>
+            <a:fontRef idx="minor">
+              <a:schemeClr val="lt1"/>
+            </a:fontRef>
+          </p:style>
+          <p:txBody>
+            <a:bodyPr rtlCol="0" anchor="ctr"/>
+            <a:lstStyle/>
+            <a:p>
+              <a:pPr algn="ctr"/>
+              <a:endParaRPr kumimoji="1" lang="ja-JP" altLang="en-US">
+                <a:solidFill>
+                  <a:schemeClr val="tx1"/>
+                </a:solidFill>
+              </a:endParaRPr>
+            </a:p>
+          </p:txBody>
+        </p:sp>
+        <p:sp>
+          <p:nvSpPr>
+            <p:cNvPr id="16" name="環状矢印 15">
+              <a:extLst>
+                <a:ext uri="{FF2B5EF4-FFF2-40B4-BE49-F238E27FC236}">
+                  <a16:creationId xmlns:a16="http://schemas.microsoft.com/office/drawing/2014/main" id="{1A970D52-5F2B-5338-FEFF-A7963DF9C69F}"/>
+                </a:ext>
+              </a:extLst>
+            </p:cNvPr>
+            <p:cNvSpPr/>
+            <p:nvPr/>
+          </p:nvSpPr>
+          <p:spPr>
+            <a:xfrm rot="19922963" flipH="1">
+              <a:off x="6500346" y="1252354"/>
+              <a:ext cx="3675277" cy="2227254"/>
+            </a:xfrm>
+            <a:prstGeom prst="circularArrow">
+              <a:avLst>
+                <a:gd name="adj1" fmla="val 6792"/>
+                <a:gd name="adj2" fmla="val 915030"/>
+                <a:gd name="adj3" fmla="val 20606191"/>
+                <a:gd name="adj4" fmla="val 10966240"/>
+                <a:gd name="adj5" fmla="val 12500"/>
+              </a:avLst>
+            </a:prstGeom>
+            <a:solidFill>
+              <a:schemeClr val="tx1"/>
+            </a:solidFill>
+          </p:spPr>
+          <p:style>
+            <a:lnRef idx="2">
+              <a:schemeClr val="accent1">
+                <a:shade val="15000"/>
+              </a:schemeClr>
+            </a:lnRef>
+            <a:fillRef idx="1">
+              <a:schemeClr val="accent1"/>
+            </a:fillRef>
+            <a:effectRef idx="0">
+              <a:schemeClr val="accent1"/>
+            </a:effectRef>
+            <a:fontRef idx="minor">
+              <a:schemeClr val="lt1"/>
+            </a:fontRef>
+          </p:style>
+          <p:txBody>
+            <a:bodyPr rtlCol="0" anchor="ctr"/>
+            <a:lstStyle/>
+            <a:p>
+              <a:pPr algn="ctr"/>
+              <a:endParaRPr kumimoji="1" lang="ja-JP" altLang="en-US">
+                <a:solidFill>
+                  <a:schemeClr val="tx1"/>
+                </a:solidFill>
+              </a:endParaRPr>
+            </a:p>
+          </p:txBody>
+        </p:sp>
+        <p:sp>
+          <p:nvSpPr>
+            <p:cNvPr id="17" name="環状矢印 16">
+              <a:extLst>
+                <a:ext uri="{FF2B5EF4-FFF2-40B4-BE49-F238E27FC236}">
+                  <a16:creationId xmlns:a16="http://schemas.microsoft.com/office/drawing/2014/main" id="{5DB0072D-CFCA-D361-4C1D-D04AD66CFCF8}"/>
+                </a:ext>
+              </a:extLst>
+            </p:cNvPr>
+            <p:cNvSpPr/>
+            <p:nvPr/>
+          </p:nvSpPr>
+          <p:spPr>
+            <a:xfrm rot="12786546" flipV="1">
+              <a:off x="6824237" y="4697389"/>
+              <a:ext cx="3538717" cy="2534143"/>
+            </a:xfrm>
+            <a:prstGeom prst="circularArrow">
+              <a:avLst>
+                <a:gd name="adj1" fmla="val 6792"/>
+                <a:gd name="adj2" fmla="val 915030"/>
+                <a:gd name="adj3" fmla="val 20606191"/>
+                <a:gd name="adj4" fmla="val 10966240"/>
+                <a:gd name="adj5" fmla="val 12500"/>
+              </a:avLst>
+            </a:prstGeom>
+            <a:solidFill>
+              <a:schemeClr val="tx1"/>
+            </a:solidFill>
+          </p:spPr>
+          <p:style>
+            <a:lnRef idx="2">
+              <a:schemeClr val="accent1">
+                <a:shade val="15000"/>
+              </a:schemeClr>
+            </a:lnRef>
+            <a:fillRef idx="1">
+              <a:schemeClr val="accent1"/>
+            </a:fillRef>
+            <a:effectRef idx="0">
+              <a:schemeClr val="accent1"/>
+            </a:effectRef>
+            <a:fontRef idx="minor">
+              <a:schemeClr val="lt1"/>
+            </a:fontRef>
+          </p:style>
+          <p:txBody>
+            <a:bodyPr rtlCol="0" anchor="ctr"/>
+            <a:lstStyle/>
+            <a:p>
+              <a:pPr algn="ctr"/>
+              <a:endParaRPr kumimoji="1" lang="ja-JP" altLang="en-US">
+                <a:solidFill>
+                  <a:schemeClr val="tx1"/>
+                </a:solidFill>
+              </a:endParaRPr>
+            </a:p>
+          </p:txBody>
+        </p:sp>
+        <p:sp>
+          <p:nvSpPr>
+            <p:cNvPr id="19" name="テキスト ボックス 18">
+              <a:extLst>
+                <a:ext uri="{FF2B5EF4-FFF2-40B4-BE49-F238E27FC236}">
+                  <a16:creationId xmlns:a16="http://schemas.microsoft.com/office/drawing/2014/main" id="{F10FB768-D8C7-51C7-82A6-38E3CD3916FF}"/>
+                </a:ext>
+              </a:extLst>
+            </p:cNvPr>
+            <p:cNvSpPr txBox="1"/>
+            <p:nvPr/>
+          </p:nvSpPr>
+          <p:spPr>
+            <a:xfrm>
+              <a:off x="3835831" y="703999"/>
+              <a:ext cx="1414832" cy="584775"/>
+            </a:xfrm>
+            <a:prstGeom prst="rect">
+              <a:avLst/>
+            </a:prstGeom>
+            <a:noFill/>
+          </p:spPr>
+          <p:txBody>
+            <a:bodyPr wrap="square">
+              <a:spAutoFit/>
+            </a:bodyPr>
+            <a:lstStyle/>
+            <a:p>
+              <a:pPr algn="ctr"/>
+              <a:r>
+                <a:rPr kumimoji="1" lang="ja-JP" altLang="en-US" sz="3200" b="1">
+                  <a:solidFill>
+                    <a:schemeClr val="tx1"/>
+                  </a:solidFill>
+                  <a:latin typeface="Hiragino Sans W7" panose="020B0400000000000000" pitchFamily="34" charset="-128"/>
+                  <a:ea typeface="Hiragino Sans W7" panose="020B0400000000000000" pitchFamily="34" charset="-128"/>
+                </a:rPr>
+                <a:t>問題</a:t>
+              </a:r>
+            </a:p>
+          </p:txBody>
+        </p:sp>
+        <p:sp>
+          <p:nvSpPr>
+            <p:cNvPr id="20" name="テキスト ボックス 19">
+              <a:extLst>
+                <a:ext uri="{FF2B5EF4-FFF2-40B4-BE49-F238E27FC236}">
+                  <a16:creationId xmlns:a16="http://schemas.microsoft.com/office/drawing/2014/main" id="{130283CD-288A-ADC3-7672-02A56F1C6DC5}"/>
+                </a:ext>
+              </a:extLst>
+            </p:cNvPr>
+            <p:cNvSpPr txBox="1"/>
+            <p:nvPr/>
+          </p:nvSpPr>
+          <p:spPr>
+            <a:xfrm>
+              <a:off x="8593595" y="4374450"/>
+              <a:ext cx="1414832" cy="584775"/>
+            </a:xfrm>
+            <a:prstGeom prst="rect">
+              <a:avLst/>
+            </a:prstGeom>
+            <a:noFill/>
+          </p:spPr>
+          <p:txBody>
+            <a:bodyPr wrap="square">
+              <a:spAutoFit/>
+            </a:bodyPr>
+            <a:lstStyle/>
+            <a:p>
+              <a:pPr algn="ctr"/>
+              <a:r>
+                <a:rPr kumimoji="1" lang="ja-JP" altLang="en-US" sz="3200" b="1">
+                  <a:solidFill>
+                    <a:schemeClr val="tx1"/>
+                  </a:solidFill>
+                  <a:latin typeface="Hiragino Sans W7" panose="020B0400000000000000" pitchFamily="34" charset="-128"/>
+                  <a:ea typeface="Hiragino Sans W7" panose="020B0400000000000000" pitchFamily="34" charset="-128"/>
+                </a:rPr>
+                <a:t>問題</a:t>
+              </a:r>
+            </a:p>
+          </p:txBody>
+        </p:sp>
+        <p:sp>
+          <p:nvSpPr>
+            <p:cNvPr id="21" name="テキスト ボックス 20">
+              <a:extLst>
+                <a:ext uri="{FF2B5EF4-FFF2-40B4-BE49-F238E27FC236}">
+                  <a16:creationId xmlns:a16="http://schemas.microsoft.com/office/drawing/2014/main" id="{1CA4CDBF-64AE-D762-06AE-4279436BE230}"/>
+                </a:ext>
+              </a:extLst>
+            </p:cNvPr>
+            <p:cNvSpPr txBox="1"/>
+            <p:nvPr/>
+          </p:nvSpPr>
+          <p:spPr>
+            <a:xfrm>
+              <a:off x="2923375" y="4322085"/>
+              <a:ext cx="1414832" cy="584775"/>
+            </a:xfrm>
+            <a:prstGeom prst="rect">
+              <a:avLst/>
+            </a:prstGeom>
+            <a:noFill/>
+          </p:spPr>
+          <p:txBody>
+            <a:bodyPr wrap="square">
+              <a:spAutoFit/>
+            </a:bodyPr>
+            <a:lstStyle/>
+            <a:p>
+              <a:pPr algn="ctr"/>
+              <a:r>
+                <a:rPr kumimoji="1" lang="ja-JP" altLang="en-US" sz="3200" b="1">
+                  <a:solidFill>
+                    <a:schemeClr val="tx1"/>
+                  </a:solidFill>
+                  <a:latin typeface="Hiragino Sans W7" panose="020B0400000000000000" pitchFamily="34" charset="-128"/>
+                  <a:ea typeface="Hiragino Sans W7" panose="020B0400000000000000" pitchFamily="34" charset="-128"/>
+                </a:rPr>
+                <a:t>解決策</a:t>
+              </a:r>
+            </a:p>
+          </p:txBody>
+        </p:sp>
+        <p:sp>
+          <p:nvSpPr>
+            <p:cNvPr id="22" name="テキスト ボックス 21">
+              <a:extLst>
+                <a:ext uri="{FF2B5EF4-FFF2-40B4-BE49-F238E27FC236}">
+                  <a16:creationId xmlns:a16="http://schemas.microsoft.com/office/drawing/2014/main" id="{192475EC-B637-6D73-028A-0B526232AD2C}"/>
+                </a:ext>
+              </a:extLst>
+            </p:cNvPr>
+            <p:cNvSpPr txBox="1"/>
+            <p:nvPr/>
+          </p:nvSpPr>
+          <p:spPr>
+            <a:xfrm>
+              <a:off x="7797945" y="679578"/>
+              <a:ext cx="1414832" cy="584775"/>
+            </a:xfrm>
+            <a:prstGeom prst="rect">
+              <a:avLst/>
+            </a:prstGeom>
+            <a:noFill/>
+          </p:spPr>
+          <p:txBody>
+            <a:bodyPr wrap="square">
+              <a:spAutoFit/>
+            </a:bodyPr>
+            <a:lstStyle/>
+            <a:p>
+              <a:pPr algn="ctr"/>
+              <a:r>
+                <a:rPr kumimoji="1" lang="ja-JP" altLang="en-US" sz="3200" b="1">
+                  <a:solidFill>
+                    <a:schemeClr val="tx1"/>
+                  </a:solidFill>
+                  <a:latin typeface="Hiragino Sans W7" panose="020B0400000000000000" pitchFamily="34" charset="-128"/>
+                  <a:ea typeface="Hiragino Sans W7" panose="020B0400000000000000" pitchFamily="34" charset="-128"/>
+                </a:rPr>
+                <a:t>解決策</a:t>
+              </a:r>
+            </a:p>
+          </p:txBody>
+        </p:sp>
+        <p:sp>
+          <p:nvSpPr>
+            <p:cNvPr id="23" name="角丸四角形 22">
+              <a:extLst>
+                <a:ext uri="{FF2B5EF4-FFF2-40B4-BE49-F238E27FC236}">
+                  <a16:creationId xmlns:a16="http://schemas.microsoft.com/office/drawing/2014/main" id="{D2E5FF43-D59C-05A6-5F5F-A6F99D319FEB}"/>
+                </a:ext>
+              </a:extLst>
+            </p:cNvPr>
+            <p:cNvSpPr/>
+            <p:nvPr/>
+          </p:nvSpPr>
+          <p:spPr>
+            <a:xfrm>
+              <a:off x="5119451" y="7136970"/>
+              <a:ext cx="2559803" cy="1332854"/>
+            </a:xfrm>
+            <a:prstGeom prst="roundRect">
+              <a:avLst/>
+            </a:prstGeom>
+            <a:solidFill>
+              <a:schemeClr val="bg1"/>
+            </a:solidFill>
+            <a:ln w="28575"/>
+          </p:spPr>
+          <p:style>
+            <a:lnRef idx="2">
+              <a:schemeClr val="accent1">
+                <a:shade val="15000"/>
+              </a:schemeClr>
+            </a:lnRef>
+            <a:fillRef idx="1">
+              <a:schemeClr val="accent1"/>
+            </a:fillRef>
+            <a:effectRef idx="0">
+              <a:schemeClr val="accent1"/>
+            </a:effectRef>
+            <a:fontRef idx="minor">
+              <a:schemeClr val="lt1"/>
+            </a:fontRef>
+          </p:style>
+          <p:txBody>
+            <a:bodyPr rtlCol="0" anchor="ctr"/>
+            <a:lstStyle/>
+            <a:p>
+              <a:pPr algn="ctr"/>
+              <a:r>
+                <a:rPr kumimoji="1" lang="ja-JP" altLang="en-US" sz="4800" b="1">
+                  <a:solidFill>
+                    <a:schemeClr val="tx1"/>
+                  </a:solidFill>
+                  <a:latin typeface="Hiragino Sans W7" panose="020B0400000000000000" pitchFamily="34" charset="-128"/>
+                  <a:ea typeface="Hiragino Sans W7" panose="020B0400000000000000" pitchFamily="34" charset="-128"/>
+                </a:rPr>
+                <a:t>決定</a:t>
+              </a:r>
+              <a:endParaRPr kumimoji="1" lang="ja-JP" altLang="en-US" sz="3200" b="1">
+                <a:solidFill>
+                  <a:schemeClr val="tx1"/>
+                </a:solidFill>
+                <a:latin typeface="Hiragino Sans W7" panose="020B0400000000000000" pitchFamily="34" charset="-128"/>
+                <a:ea typeface="Hiragino Sans W7" panose="020B0400000000000000" pitchFamily="34" charset="-128"/>
+              </a:endParaRPr>
+            </a:p>
+          </p:txBody>
+        </p:sp>
+        <p:sp>
+          <p:nvSpPr>
+            <p:cNvPr id="24" name="右矢印 23">
+              <a:extLst>
+                <a:ext uri="{FF2B5EF4-FFF2-40B4-BE49-F238E27FC236}">
+                  <a16:creationId xmlns:a16="http://schemas.microsoft.com/office/drawing/2014/main" id="{D2E7073D-891D-B33B-6269-E81B47D6B753}"/>
+                </a:ext>
+              </a:extLst>
+            </p:cNvPr>
+            <p:cNvSpPr/>
+            <p:nvPr/>
+          </p:nvSpPr>
+          <p:spPr>
+            <a:xfrm rot="5400000">
+              <a:off x="6091655" y="5964388"/>
+              <a:ext cx="635430" cy="1202410"/>
+            </a:xfrm>
+            <a:prstGeom prst="rightArrow">
+              <a:avLst/>
+            </a:prstGeom>
+            <a:solidFill>
+              <a:schemeClr val="bg1"/>
+            </a:solidFill>
+            <a:ln w="38100"/>
+          </p:spPr>
+          <p:style>
+            <a:lnRef idx="2">
+              <a:schemeClr val="accent1">
+                <a:shade val="15000"/>
+              </a:schemeClr>
+            </a:lnRef>
+            <a:fillRef idx="1">
+              <a:schemeClr val="accent1"/>
+            </a:fillRef>
+            <a:effectRef idx="0">
+              <a:schemeClr val="accent1"/>
+            </a:effectRef>
+            <a:fontRef idx="minor">
+              <a:schemeClr val="lt1"/>
+            </a:fontRef>
+          </p:style>
+          <p:txBody>
+            <a:bodyPr rtlCol="0" anchor="ctr"/>
+            <a:lstStyle/>
+            <a:p>
+              <a:pPr algn="ctr"/>
+              <a:endParaRPr kumimoji="1" lang="ja-JP" altLang="en-US"/>
+            </a:p>
+          </p:txBody>
+        </p:sp>
+      </p:grpSp>
+    </p:spTree>
+    <p:extLst>
+      <p:ext uri="{BB962C8B-B14F-4D97-AF65-F5344CB8AC3E}">
+        <p14:creationId xmlns:p14="http://schemas.microsoft.com/office/powerpoint/2010/main" val="4209565034"/>
+      </p:ext>
+    </p:extLst>
+  </p:cSld>
+  <p:clrMapOvr>
+    <a:masterClrMapping/>
+  </p:clrMapOvr>
+</p:sld>
+</file>
+
+<file path=ppt/slides/slide23.xml><?xml version="1.0" encoding="utf-8"?>
+<p:sld xmlns:a="http://schemas.openxmlformats.org/drawingml/2006/main" xmlns:r="http://schemas.openxmlformats.org/officeDocument/2006/relationships" xmlns:p="http://schemas.openxmlformats.org/presentationml/2006/main">
+  <p:cSld>
+    <p:spTree>
+      <p:nvGrpSpPr>
+        <p:cNvPr id="1" name=""/>
+        <p:cNvGrpSpPr/>
+        <p:nvPr/>
+      </p:nvGrpSpPr>
+      <p:grpSpPr>
+        <a:xfrm>
+          <a:off x="0" y="0"/>
+          <a:ext cx="0" cy="0"/>
+          <a:chOff x="0" y="0"/>
+          <a:chExt cx="0" cy="0"/>
+        </a:xfrm>
+      </p:grpSpPr>
+      <p:grpSp>
+        <p:nvGrpSpPr>
+          <p:cNvPr id="11" name="グループ化 10">
+            <a:extLst>
+              <a:ext uri="{FF2B5EF4-FFF2-40B4-BE49-F238E27FC236}">
+                <a16:creationId xmlns:a16="http://schemas.microsoft.com/office/drawing/2014/main" id="{D8587C31-1537-7005-3048-F4C716965333}"/>
+              </a:ext>
+            </a:extLst>
+          </p:cNvPr>
+          <p:cNvGrpSpPr/>
+          <p:nvPr/>
+        </p:nvGrpSpPr>
+        <p:grpSpPr>
+          <a:xfrm>
+            <a:off x="1500752" y="1315273"/>
+            <a:ext cx="9800096" cy="6970654"/>
+            <a:chOff x="1963118" y="627682"/>
+            <a:chExt cx="9800096" cy="6970654"/>
+          </a:xfrm>
+        </p:grpSpPr>
+        <p:sp>
+          <p:nvSpPr>
+            <p:cNvPr id="2" name="正方形/長方形 1">
+              <a:extLst>
+                <a:ext uri="{FF2B5EF4-FFF2-40B4-BE49-F238E27FC236}">
+                  <a16:creationId xmlns:a16="http://schemas.microsoft.com/office/drawing/2014/main" id="{F4339365-20C7-B7C3-E1EE-62202B448C19}"/>
+                </a:ext>
+              </a:extLst>
+            </p:cNvPr>
+            <p:cNvSpPr/>
+            <p:nvPr/>
+          </p:nvSpPr>
+          <p:spPr>
+            <a:xfrm>
+              <a:off x="1963118" y="2871058"/>
+              <a:ext cx="2559803" cy="468820"/>
+            </a:xfrm>
+            <a:prstGeom prst="rect">
+              <a:avLst/>
+            </a:prstGeom>
+            <a:solidFill>
+              <a:schemeClr val="bg1"/>
+            </a:solidFill>
+            <a:ln w="28575"/>
+          </p:spPr>
+          <p:style>
+            <a:lnRef idx="2">
+              <a:schemeClr val="accent1">
+                <a:shade val="15000"/>
+              </a:schemeClr>
+            </a:lnRef>
+            <a:fillRef idx="1">
+              <a:schemeClr val="accent1"/>
+            </a:fillRef>
+            <a:effectRef idx="0">
+              <a:schemeClr val="accent1"/>
+            </a:effectRef>
+            <a:fontRef idx="minor">
+              <a:schemeClr val="lt1"/>
+            </a:fontRef>
+          </p:style>
+          <p:txBody>
+            <a:bodyPr rtlCol="0" anchor="ctr"/>
+            <a:lstStyle/>
+            <a:p>
+              <a:pPr algn="ctr"/>
+              <a:r>
+                <a:rPr kumimoji="1" lang="ja-JP" altLang="en-US" sz="3200" b="1">
+                  <a:solidFill>
+                    <a:schemeClr val="tx1"/>
+                  </a:solidFill>
+                  <a:latin typeface="Hiragino Sans W7" panose="020B0400000000000000" pitchFamily="34" charset="-128"/>
+                  <a:ea typeface="Hiragino Sans W7" panose="020B0400000000000000" pitchFamily="34" charset="-128"/>
+                </a:rPr>
+                <a:t>政策</a:t>
+              </a:r>
+              <a:r>
+                <a:rPr kumimoji="1" lang="ja-JP" altLang="en-US" sz="3200">
+                  <a:solidFill>
+                    <a:schemeClr val="tx1"/>
+                  </a:solidFill>
+                  <a:latin typeface="Hiragino Sans W4" panose="020B0400000000000000" pitchFamily="34" charset="-128"/>
+                  <a:ea typeface="Hiragino Sans W4" panose="020B0400000000000000" pitchFamily="34" charset="-128"/>
+                </a:rPr>
+                <a:t>の流れ</a:t>
+              </a:r>
+              <a:endParaRPr kumimoji="1" lang="ja-JP" altLang="en-US">
+                <a:solidFill>
+                  <a:schemeClr val="tx1"/>
+                </a:solidFill>
+                <a:latin typeface="Hiragino Sans W4" panose="020B0400000000000000" pitchFamily="34" charset="-128"/>
+                <a:ea typeface="Hiragino Sans W4" panose="020B0400000000000000" pitchFamily="34" charset="-128"/>
+              </a:endParaRPr>
+            </a:p>
+          </p:txBody>
+        </p:sp>
+        <p:sp>
+          <p:nvSpPr>
+            <p:cNvPr id="3" name="下矢印 2">
+              <a:extLst>
+                <a:ext uri="{FF2B5EF4-FFF2-40B4-BE49-F238E27FC236}">
+                  <a16:creationId xmlns:a16="http://schemas.microsoft.com/office/drawing/2014/main" id="{E993E939-6860-2745-D03B-377FB1DC68AB}"/>
+                </a:ext>
+              </a:extLst>
+            </p:cNvPr>
+            <p:cNvSpPr/>
+            <p:nvPr/>
+          </p:nvSpPr>
+          <p:spPr>
+            <a:xfrm rot="16200000">
+              <a:off x="6423111" y="-213753"/>
+              <a:ext cx="880109" cy="9800094"/>
+            </a:xfrm>
+            <a:prstGeom prst="downArrow">
+              <a:avLst/>
+            </a:prstGeom>
+            <a:solidFill>
+              <a:schemeClr val="bg1"/>
+            </a:solidFill>
+            <a:ln w="38100">
+              <a:solidFill>
+                <a:schemeClr val="tx1"/>
+              </a:solidFill>
+            </a:ln>
+          </p:spPr>
+          <p:style>
+            <a:lnRef idx="2">
+              <a:schemeClr val="accent1">
+                <a:shade val="15000"/>
+              </a:schemeClr>
+            </a:lnRef>
+            <a:fillRef idx="1">
+              <a:schemeClr val="accent1"/>
+            </a:fillRef>
+            <a:effectRef idx="0">
+              <a:schemeClr val="accent1"/>
+            </a:effectRef>
+            <a:fontRef idx="minor">
+              <a:schemeClr val="lt1"/>
+            </a:fontRef>
+          </p:style>
+          <p:txBody>
+            <a:bodyPr rtlCol="0" anchor="ctr"/>
+            <a:lstStyle/>
+            <a:p>
+              <a:pPr algn="ctr"/>
+              <a:endParaRPr kumimoji="1" lang="ja-JP" altLang="en-US"/>
+            </a:p>
+          </p:txBody>
+        </p:sp>
+        <p:sp>
+          <p:nvSpPr>
+            <p:cNvPr id="4" name="正方形/長方形 3">
+              <a:extLst>
+                <a:ext uri="{FF2B5EF4-FFF2-40B4-BE49-F238E27FC236}">
+                  <a16:creationId xmlns:a16="http://schemas.microsoft.com/office/drawing/2014/main" id="{AF7A2250-DE8F-02DD-1CCC-666FD1FCBB3C}"/>
+                </a:ext>
+              </a:extLst>
+            </p:cNvPr>
+            <p:cNvSpPr/>
+            <p:nvPr/>
+          </p:nvSpPr>
+          <p:spPr>
+            <a:xfrm>
+              <a:off x="1963118" y="627682"/>
+              <a:ext cx="2559803" cy="468820"/>
+            </a:xfrm>
+            <a:prstGeom prst="rect">
+              <a:avLst/>
+            </a:prstGeom>
+            <a:solidFill>
+              <a:schemeClr val="bg1"/>
+            </a:solidFill>
+            <a:ln w="28575"/>
+          </p:spPr>
+          <p:style>
+            <a:lnRef idx="2">
+              <a:schemeClr val="accent1">
+                <a:shade val="15000"/>
+              </a:schemeClr>
+            </a:lnRef>
+            <a:fillRef idx="1">
+              <a:schemeClr val="accent1"/>
+            </a:fillRef>
+            <a:effectRef idx="0">
+              <a:schemeClr val="accent1"/>
+            </a:effectRef>
+            <a:fontRef idx="minor">
+              <a:schemeClr val="lt1"/>
+            </a:fontRef>
+          </p:style>
+          <p:txBody>
+            <a:bodyPr rtlCol="0" anchor="ctr"/>
+            <a:lstStyle/>
+            <a:p>
+              <a:pPr algn="ctr"/>
+              <a:r>
+                <a:rPr kumimoji="1" lang="ja-JP" altLang="en-US" sz="3200" b="1">
+                  <a:solidFill>
+                    <a:schemeClr val="tx1"/>
+                  </a:solidFill>
+                  <a:latin typeface="Hiragino Sans W7" panose="020B0400000000000000" pitchFamily="34" charset="-128"/>
+                  <a:ea typeface="Hiragino Sans W7" panose="020B0400000000000000" pitchFamily="34" charset="-128"/>
+                </a:rPr>
+                <a:t>問題</a:t>
+              </a:r>
+              <a:r>
+                <a:rPr kumimoji="1" lang="ja-JP" altLang="en-US" sz="3200">
+                  <a:solidFill>
+                    <a:schemeClr val="tx1"/>
+                  </a:solidFill>
+                  <a:latin typeface="Hiragino Sans W4" panose="020B0400000000000000" pitchFamily="34" charset="-128"/>
+                  <a:ea typeface="Hiragino Sans W4" panose="020B0400000000000000" pitchFamily="34" charset="-128"/>
+                </a:rPr>
+                <a:t>の流れ</a:t>
+              </a:r>
+              <a:endParaRPr kumimoji="1" lang="ja-JP" altLang="en-US">
+                <a:solidFill>
+                  <a:schemeClr val="tx1"/>
+                </a:solidFill>
+                <a:latin typeface="Hiragino Sans W4" panose="020B0400000000000000" pitchFamily="34" charset="-128"/>
+                <a:ea typeface="Hiragino Sans W4" panose="020B0400000000000000" pitchFamily="34" charset="-128"/>
+              </a:endParaRPr>
+            </a:p>
+          </p:txBody>
+        </p:sp>
+        <p:sp>
+          <p:nvSpPr>
+            <p:cNvPr id="5" name="下矢印 4">
+              <a:extLst>
+                <a:ext uri="{FF2B5EF4-FFF2-40B4-BE49-F238E27FC236}">
+                  <a16:creationId xmlns:a16="http://schemas.microsoft.com/office/drawing/2014/main" id="{6B1BF680-757E-8971-6958-83197F9747D8}"/>
+                </a:ext>
+              </a:extLst>
+            </p:cNvPr>
+            <p:cNvSpPr/>
+            <p:nvPr/>
+          </p:nvSpPr>
+          <p:spPr>
+            <a:xfrm rot="16200000">
+              <a:off x="6423112" y="-2457130"/>
+              <a:ext cx="880109" cy="9800095"/>
+            </a:xfrm>
+            <a:prstGeom prst="downArrow">
+              <a:avLst/>
+            </a:prstGeom>
+            <a:solidFill>
+              <a:schemeClr val="bg1"/>
+            </a:solidFill>
+            <a:ln w="38100">
+              <a:solidFill>
+                <a:schemeClr val="tx1"/>
+              </a:solidFill>
+            </a:ln>
+          </p:spPr>
+          <p:style>
+            <a:lnRef idx="2">
+              <a:schemeClr val="accent1">
+                <a:shade val="15000"/>
+              </a:schemeClr>
+            </a:lnRef>
+            <a:fillRef idx="1">
+              <a:schemeClr val="accent1"/>
+            </a:fillRef>
+            <a:effectRef idx="0">
+              <a:schemeClr val="accent1"/>
+            </a:effectRef>
+            <a:fontRef idx="minor">
+              <a:schemeClr val="lt1"/>
+            </a:fontRef>
+          </p:style>
+          <p:txBody>
+            <a:bodyPr rtlCol="0" anchor="ctr"/>
+            <a:lstStyle/>
+            <a:p>
+              <a:pPr algn="ctr"/>
+              <a:endParaRPr kumimoji="1" lang="ja-JP" altLang="en-US"/>
+            </a:p>
+          </p:txBody>
+        </p:sp>
+        <p:sp>
+          <p:nvSpPr>
+            <p:cNvPr id="6" name="正方形/長方形 5">
+              <a:extLst>
+                <a:ext uri="{FF2B5EF4-FFF2-40B4-BE49-F238E27FC236}">
+                  <a16:creationId xmlns:a16="http://schemas.microsoft.com/office/drawing/2014/main" id="{F221C96C-AC2D-72FE-6628-F0A37F6722D3}"/>
+                </a:ext>
+              </a:extLst>
+            </p:cNvPr>
+            <p:cNvSpPr/>
+            <p:nvPr/>
+          </p:nvSpPr>
+          <p:spPr>
+            <a:xfrm>
+              <a:off x="1963118" y="5343046"/>
+              <a:ext cx="2559803" cy="468820"/>
+            </a:xfrm>
+            <a:prstGeom prst="rect">
+              <a:avLst/>
+            </a:prstGeom>
+            <a:solidFill>
+              <a:schemeClr val="bg1"/>
+            </a:solidFill>
+            <a:ln w="28575"/>
+          </p:spPr>
+          <p:style>
+            <a:lnRef idx="2">
+              <a:schemeClr val="accent1">
+                <a:shade val="15000"/>
+              </a:schemeClr>
+            </a:lnRef>
+            <a:fillRef idx="1">
+              <a:schemeClr val="accent1"/>
+            </a:fillRef>
+            <a:effectRef idx="0">
+              <a:schemeClr val="accent1"/>
+            </a:effectRef>
+            <a:fontRef idx="minor">
+              <a:schemeClr val="lt1"/>
+            </a:fontRef>
+          </p:style>
+          <p:txBody>
+            <a:bodyPr rtlCol="0" anchor="ctr"/>
+            <a:lstStyle/>
+            <a:p>
+              <a:pPr algn="ctr"/>
+              <a:r>
+                <a:rPr kumimoji="1" lang="ja-JP" altLang="en-US" sz="3200" b="1">
+                  <a:solidFill>
+                    <a:schemeClr val="tx1"/>
+                  </a:solidFill>
+                  <a:latin typeface="Hiragino Sans W7" panose="020B0400000000000000" pitchFamily="34" charset="-128"/>
+                  <a:ea typeface="Hiragino Sans W7" panose="020B0400000000000000" pitchFamily="34" charset="-128"/>
+                </a:rPr>
+                <a:t>政治</a:t>
+              </a:r>
+              <a:r>
+                <a:rPr kumimoji="1" lang="ja-JP" altLang="en-US" sz="3200">
+                  <a:solidFill>
+                    <a:schemeClr val="tx1"/>
+                  </a:solidFill>
+                  <a:latin typeface="Hiragino Sans W4" panose="020B0400000000000000" pitchFamily="34" charset="-128"/>
+                  <a:ea typeface="Hiragino Sans W4" panose="020B0400000000000000" pitchFamily="34" charset="-128"/>
+                </a:rPr>
+                <a:t>の流れ</a:t>
+              </a:r>
+              <a:endParaRPr kumimoji="1" lang="ja-JP" altLang="en-US">
+                <a:solidFill>
+                  <a:schemeClr val="tx1"/>
+                </a:solidFill>
+                <a:latin typeface="Hiragino Sans W4" panose="020B0400000000000000" pitchFamily="34" charset="-128"/>
+                <a:ea typeface="Hiragino Sans W4" panose="020B0400000000000000" pitchFamily="34" charset="-128"/>
+              </a:endParaRPr>
+            </a:p>
+          </p:txBody>
+        </p:sp>
+        <p:sp>
+          <p:nvSpPr>
+            <p:cNvPr id="7" name="下矢印 6">
+              <a:extLst>
+                <a:ext uri="{FF2B5EF4-FFF2-40B4-BE49-F238E27FC236}">
+                  <a16:creationId xmlns:a16="http://schemas.microsoft.com/office/drawing/2014/main" id="{BADD6EE2-9178-46BE-20A4-D85B29D6A957}"/>
+                </a:ext>
+              </a:extLst>
+            </p:cNvPr>
+            <p:cNvSpPr/>
+            <p:nvPr/>
+          </p:nvSpPr>
+          <p:spPr>
+            <a:xfrm rot="16200000">
+              <a:off x="6423111" y="2258235"/>
+              <a:ext cx="880109" cy="9800094"/>
+            </a:xfrm>
+            <a:prstGeom prst="downArrow">
+              <a:avLst/>
+            </a:prstGeom>
+            <a:solidFill>
+              <a:schemeClr val="bg1"/>
+            </a:solidFill>
+            <a:ln w="38100">
+              <a:solidFill>
+                <a:schemeClr val="tx1"/>
+              </a:solidFill>
+            </a:ln>
+          </p:spPr>
+          <p:style>
+            <a:lnRef idx="2">
+              <a:schemeClr val="accent1">
+                <a:shade val="15000"/>
+              </a:schemeClr>
+            </a:lnRef>
+            <a:fillRef idx="1">
+              <a:schemeClr val="accent1"/>
+            </a:fillRef>
+            <a:effectRef idx="0">
+              <a:schemeClr val="accent1"/>
+            </a:effectRef>
+            <a:fontRef idx="minor">
+              <a:schemeClr val="lt1"/>
+            </a:fontRef>
+          </p:style>
+          <p:txBody>
+            <a:bodyPr rtlCol="0" anchor="ctr"/>
+            <a:lstStyle/>
+            <a:p>
+              <a:pPr algn="ctr"/>
+              <a:endParaRPr kumimoji="1" lang="ja-JP" altLang="en-US"/>
+            </a:p>
+          </p:txBody>
+        </p:sp>
+        <p:sp>
+          <p:nvSpPr>
+            <p:cNvPr id="8" name="テキスト ボックス 7">
+              <a:extLst>
+                <a:ext uri="{FF2B5EF4-FFF2-40B4-BE49-F238E27FC236}">
+                  <a16:creationId xmlns:a16="http://schemas.microsoft.com/office/drawing/2014/main" id="{B8B3C4E1-C907-3542-E6E6-EC01A9BC4904}"/>
+                </a:ext>
+              </a:extLst>
+            </p:cNvPr>
+            <p:cNvSpPr txBox="1"/>
+            <p:nvPr/>
+          </p:nvSpPr>
+          <p:spPr>
+            <a:xfrm>
+              <a:off x="2464230" y="1198950"/>
+              <a:ext cx="7366119" cy="892552"/>
+            </a:xfrm>
+            <a:prstGeom prst="rect">
+              <a:avLst/>
+            </a:prstGeom>
+            <a:noFill/>
+          </p:spPr>
+          <p:txBody>
+            <a:bodyPr wrap="none" rtlCol="0">
+              <a:spAutoFit/>
+            </a:bodyPr>
+            <a:lstStyle/>
+            <a:p>
+              <a:r>
+                <a:rPr kumimoji="1" lang="ja-JP" altLang="en-US" sz="2800">
+                  <a:latin typeface="Hiragino Sans W4" panose="020B0400000000000000" pitchFamily="34" charset="-128"/>
+                  <a:ea typeface="Hiragino Sans W4" panose="020B0400000000000000" pitchFamily="34" charset="-128"/>
+                </a:rPr>
+                <a:t>特定の社会問題が政府周辺に着目される過程</a:t>
+              </a:r>
+              <a:endParaRPr kumimoji="1" lang="en-US" altLang="ja-JP" sz="2800" dirty="0">
+                <a:latin typeface="Hiragino Sans W4" panose="020B0400000000000000" pitchFamily="34" charset="-128"/>
+                <a:ea typeface="Hiragino Sans W4" panose="020B0400000000000000" pitchFamily="34" charset="-128"/>
+              </a:endParaRPr>
+            </a:p>
+            <a:p>
+              <a:r>
+                <a:rPr kumimoji="1" lang="ja-JP" altLang="en-US" sz="2400">
+                  <a:latin typeface="Hiragino Sans W4" panose="020B0400000000000000" pitchFamily="34" charset="-128"/>
+                  <a:ea typeface="Hiragino Sans W4" panose="020B0400000000000000" pitchFamily="34" charset="-128"/>
+                </a:rPr>
+                <a:t>例：事件や災害、指標の変化、政策評価</a:t>
+              </a:r>
+            </a:p>
+          </p:txBody>
+        </p:sp>
+        <p:sp>
+          <p:nvSpPr>
+            <p:cNvPr id="9" name="テキスト ボックス 8">
+              <a:extLst>
+                <a:ext uri="{FF2B5EF4-FFF2-40B4-BE49-F238E27FC236}">
+                  <a16:creationId xmlns:a16="http://schemas.microsoft.com/office/drawing/2014/main" id="{36B00BE5-2D81-ABED-A70A-235C47B90317}"/>
+                </a:ext>
+              </a:extLst>
+            </p:cNvPr>
+            <p:cNvSpPr txBox="1"/>
+            <p:nvPr/>
+          </p:nvSpPr>
+          <p:spPr>
+            <a:xfrm>
+              <a:off x="2464230" y="3419782"/>
+              <a:ext cx="8443337" cy="892552"/>
+            </a:xfrm>
+            <a:prstGeom prst="rect">
+              <a:avLst/>
+            </a:prstGeom>
+            <a:noFill/>
+          </p:spPr>
+          <p:txBody>
+            <a:bodyPr wrap="none" rtlCol="0">
+              <a:spAutoFit/>
+            </a:bodyPr>
+            <a:lstStyle/>
+            <a:p>
+              <a:r>
+                <a:rPr kumimoji="1" lang="ja-JP" altLang="en-US" sz="2800">
+                  <a:latin typeface="Hiragino Sans W4" panose="020B0400000000000000" pitchFamily="34" charset="-128"/>
+                  <a:ea typeface="Hiragino Sans W4" panose="020B0400000000000000" pitchFamily="34" charset="-128"/>
+                </a:rPr>
+                <a:t>無数のアイデアが少数の政策案に絞り込まれる過程</a:t>
+              </a:r>
+              <a:endParaRPr kumimoji="1" lang="en-US" altLang="ja-JP" sz="2800" dirty="0">
+                <a:latin typeface="Hiragino Sans W4" panose="020B0400000000000000" pitchFamily="34" charset="-128"/>
+                <a:ea typeface="Hiragino Sans W4" panose="020B0400000000000000" pitchFamily="34" charset="-128"/>
+              </a:endParaRPr>
+            </a:p>
+            <a:p>
+              <a:r>
+                <a:rPr kumimoji="1" lang="ja-JP" altLang="en-US" sz="2400">
+                  <a:latin typeface="Hiragino Sans W4" panose="020B0400000000000000" pitchFamily="34" charset="-128"/>
+                  <a:ea typeface="Hiragino Sans W4" panose="020B0400000000000000" pitchFamily="34" charset="-128"/>
+                </a:rPr>
+                <a:t>→専門家からなる</a:t>
+              </a:r>
+              <a:r>
+                <a:rPr kumimoji="1" lang="ja-JP" altLang="en-US" sz="2400" b="1">
+                  <a:latin typeface="Hiragino Sans W4" panose="020B0400000000000000" pitchFamily="34" charset="-128"/>
+                  <a:ea typeface="Hiragino Sans W4" panose="020B0400000000000000" pitchFamily="34" charset="-128"/>
+                </a:rPr>
+                <a:t>政策共同体</a:t>
+              </a:r>
+              <a:r>
+                <a:rPr kumimoji="1" lang="ja-JP" altLang="en-US" sz="2400">
+                  <a:latin typeface="Hiragino Sans W4" panose="020B0400000000000000" pitchFamily="34" charset="-128"/>
+                  <a:ea typeface="Hiragino Sans W4" panose="020B0400000000000000" pitchFamily="34" charset="-128"/>
+                </a:rPr>
+                <a:t>の役割</a:t>
+              </a:r>
+            </a:p>
+          </p:txBody>
+        </p:sp>
+        <p:sp>
+          <p:nvSpPr>
+            <p:cNvPr id="10" name="テキスト ボックス 9">
+              <a:extLst>
+                <a:ext uri="{FF2B5EF4-FFF2-40B4-BE49-F238E27FC236}">
+                  <a16:creationId xmlns:a16="http://schemas.microsoft.com/office/drawing/2014/main" id="{4A5DB910-EE0D-0F36-F60F-7F7C59E38C4F}"/>
+                </a:ext>
+              </a:extLst>
+            </p:cNvPr>
+            <p:cNvSpPr txBox="1"/>
+            <p:nvPr/>
+          </p:nvSpPr>
+          <p:spPr>
+            <a:xfrm>
+              <a:off x="2464229" y="5904212"/>
+              <a:ext cx="5929828" cy="892552"/>
+            </a:xfrm>
+            <a:prstGeom prst="rect">
+              <a:avLst/>
+            </a:prstGeom>
+            <a:noFill/>
+          </p:spPr>
+          <p:txBody>
+            <a:bodyPr wrap="none" rtlCol="0">
+              <a:spAutoFit/>
+            </a:bodyPr>
+            <a:lstStyle/>
+            <a:p>
+              <a:r>
+                <a:rPr kumimoji="1" lang="ja-JP" altLang="en-US" sz="2800">
+                  <a:latin typeface="Hiragino Sans W4" panose="020B0400000000000000" pitchFamily="34" charset="-128"/>
+                  <a:ea typeface="Hiragino Sans W4" panose="020B0400000000000000" pitchFamily="34" charset="-128"/>
+                </a:rPr>
+                <a:t>政党や利益団体など政府周辺の動き</a:t>
+              </a:r>
+              <a:endParaRPr kumimoji="1" lang="en-US" altLang="ja-JP" sz="2800" dirty="0">
+                <a:latin typeface="Hiragino Sans W4" panose="020B0400000000000000" pitchFamily="34" charset="-128"/>
+                <a:ea typeface="Hiragino Sans W4" panose="020B0400000000000000" pitchFamily="34" charset="-128"/>
+              </a:endParaRPr>
+            </a:p>
+            <a:p>
+              <a:r>
+                <a:rPr kumimoji="1" lang="ja-JP" altLang="en-US" sz="2400">
+                  <a:latin typeface="Hiragino Sans W4" panose="020B0400000000000000" pitchFamily="34" charset="-128"/>
+                  <a:ea typeface="Hiragino Sans W4" panose="020B0400000000000000" pitchFamily="34" charset="-128"/>
+                </a:rPr>
+                <a:t>例：選挙や政権交代、世論</a:t>
+              </a:r>
+            </a:p>
+          </p:txBody>
+        </p:sp>
+      </p:grpSp>
+    </p:spTree>
+    <p:extLst>
+      <p:ext uri="{BB962C8B-B14F-4D97-AF65-F5344CB8AC3E}">
+        <p14:creationId xmlns:p14="http://schemas.microsoft.com/office/powerpoint/2010/main" val="2405045872"/>
+      </p:ext>
+    </p:extLst>
+  </p:cSld>
+  <p:clrMapOvr>
+    <a:masterClrMapping/>
+  </p:clrMapOvr>
+</p:sld>
+</file>
+
+<file path=ppt/slides/slide24.xml><?xml version="1.0" encoding="utf-8"?>
+<p:sld xmlns:a="http://schemas.openxmlformats.org/drawingml/2006/main" xmlns:r="http://schemas.openxmlformats.org/officeDocument/2006/relationships" xmlns:p="http://schemas.openxmlformats.org/presentationml/2006/main">
+  <p:cSld>
+    <p:spTree>
+      <p:nvGrpSpPr>
+        <p:cNvPr id="1" name=""/>
+        <p:cNvGrpSpPr/>
+        <p:nvPr/>
+      </p:nvGrpSpPr>
+      <p:grpSpPr>
+        <a:xfrm>
+          <a:off x="0" y="0"/>
+          <a:ext cx="0" cy="0"/>
+          <a:chOff x="0" y="0"/>
+          <a:chExt cx="0" cy="0"/>
+        </a:xfrm>
+      </p:grpSpPr>
+      <p:grpSp>
+        <p:nvGrpSpPr>
+          <p:cNvPr id="33" name="グループ化 32">
+            <a:extLst>
+              <a:ext uri="{FF2B5EF4-FFF2-40B4-BE49-F238E27FC236}">
+                <a16:creationId xmlns:a16="http://schemas.microsoft.com/office/drawing/2014/main" id="{7A552A6E-1033-DFC9-20E1-CF78E37F7D46}"/>
+              </a:ext>
+            </a:extLst>
+          </p:cNvPr>
+          <p:cNvGrpSpPr/>
+          <p:nvPr/>
+        </p:nvGrpSpPr>
+        <p:grpSpPr>
+          <a:xfrm>
+            <a:off x="434598" y="1885658"/>
+            <a:ext cx="11932403" cy="5829884"/>
+            <a:chOff x="537274" y="1882758"/>
+            <a:chExt cx="11932403" cy="5829884"/>
+          </a:xfrm>
+        </p:grpSpPr>
+        <p:sp>
+          <p:nvSpPr>
+            <p:cNvPr id="3" name="正方形/長方形 2">
+              <a:extLst>
+                <a:ext uri="{FF2B5EF4-FFF2-40B4-BE49-F238E27FC236}">
+                  <a16:creationId xmlns:a16="http://schemas.microsoft.com/office/drawing/2014/main" id="{372AC888-B90E-2C9B-7AFC-E8E36C40320A}"/>
+                </a:ext>
+              </a:extLst>
+            </p:cNvPr>
+            <p:cNvSpPr/>
+            <p:nvPr/>
+          </p:nvSpPr>
+          <p:spPr>
+            <a:xfrm>
+              <a:off x="537274" y="4126134"/>
+              <a:ext cx="2559803" cy="468820"/>
+            </a:xfrm>
+            <a:prstGeom prst="rect">
+              <a:avLst/>
+            </a:prstGeom>
+            <a:solidFill>
+              <a:schemeClr val="bg1"/>
+            </a:solidFill>
+            <a:ln w="28575"/>
+          </p:spPr>
+          <p:style>
+            <a:lnRef idx="2">
+              <a:schemeClr val="accent1">
+                <a:shade val="15000"/>
+              </a:schemeClr>
+            </a:lnRef>
+            <a:fillRef idx="1">
+              <a:schemeClr val="accent1"/>
+            </a:fillRef>
+            <a:effectRef idx="0">
+              <a:schemeClr val="accent1"/>
+            </a:effectRef>
+            <a:fontRef idx="minor">
+              <a:schemeClr val="lt1"/>
+            </a:fontRef>
+          </p:style>
+          <p:txBody>
+            <a:bodyPr rtlCol="0" anchor="ctr"/>
+            <a:lstStyle/>
+            <a:p>
+              <a:pPr algn="ctr"/>
+              <a:r>
+                <a:rPr kumimoji="1" lang="ja-JP" altLang="en-US" sz="3200" b="1">
+                  <a:solidFill>
+                    <a:schemeClr val="tx1"/>
+                  </a:solidFill>
+                  <a:latin typeface="Hiragino Sans W7" panose="020B0400000000000000" pitchFamily="34" charset="-128"/>
+                  <a:ea typeface="Hiragino Sans W7" panose="020B0400000000000000" pitchFamily="34" charset="-128"/>
+                </a:rPr>
+                <a:t>政策</a:t>
+              </a:r>
+              <a:r>
+                <a:rPr kumimoji="1" lang="ja-JP" altLang="en-US" sz="3200">
+                  <a:solidFill>
+                    <a:schemeClr val="tx1"/>
+                  </a:solidFill>
+                  <a:latin typeface="Hiragino Sans W4" panose="020B0400000000000000" pitchFamily="34" charset="-128"/>
+                  <a:ea typeface="Hiragino Sans W4" panose="020B0400000000000000" pitchFamily="34" charset="-128"/>
+                </a:rPr>
+                <a:t>の流れ</a:t>
+              </a:r>
+              <a:endParaRPr kumimoji="1" lang="ja-JP" altLang="en-US">
+                <a:solidFill>
+                  <a:schemeClr val="tx1"/>
+                </a:solidFill>
+                <a:latin typeface="Hiragino Sans W4" panose="020B0400000000000000" pitchFamily="34" charset="-128"/>
+                <a:ea typeface="Hiragino Sans W4" panose="020B0400000000000000" pitchFamily="34" charset="-128"/>
+              </a:endParaRPr>
+            </a:p>
+          </p:txBody>
+        </p:sp>
+        <p:sp>
+          <p:nvSpPr>
+            <p:cNvPr id="9" name="角丸四角形 8">
+              <a:extLst>
+                <a:ext uri="{FF2B5EF4-FFF2-40B4-BE49-F238E27FC236}">
+                  <a16:creationId xmlns:a16="http://schemas.microsoft.com/office/drawing/2014/main" id="{2E698394-9083-488D-E9FD-DE82948315B4}"/>
+                </a:ext>
+              </a:extLst>
+            </p:cNvPr>
+            <p:cNvSpPr/>
+            <p:nvPr/>
+          </p:nvSpPr>
+          <p:spPr>
+            <a:xfrm>
+              <a:off x="7237706" y="4134173"/>
+              <a:ext cx="2309247" cy="1332854"/>
+            </a:xfrm>
+            <a:prstGeom prst="roundRect">
+              <a:avLst/>
+            </a:prstGeom>
+            <a:solidFill>
+              <a:schemeClr val="bg1"/>
+            </a:solidFill>
+            <a:ln w="28575"/>
+          </p:spPr>
+          <p:style>
+            <a:lnRef idx="2">
+              <a:schemeClr val="accent1">
+                <a:shade val="15000"/>
+              </a:schemeClr>
+            </a:lnRef>
+            <a:fillRef idx="1">
+              <a:schemeClr val="accent1"/>
+            </a:fillRef>
+            <a:effectRef idx="0">
+              <a:schemeClr val="accent1"/>
+            </a:effectRef>
+            <a:fontRef idx="minor">
+              <a:schemeClr val="lt1"/>
+            </a:fontRef>
+          </p:style>
+          <p:txBody>
+            <a:bodyPr rtlCol="0" anchor="ctr"/>
+            <a:lstStyle/>
+            <a:p>
+              <a:pPr algn="ctr"/>
+              <a:r>
+                <a:rPr kumimoji="1" lang="ja-JP" altLang="en-US" sz="3200" b="1">
+                  <a:solidFill>
+                    <a:schemeClr val="tx1"/>
+                  </a:solidFill>
+                  <a:latin typeface="Hiragino Sans W7" panose="020B0400000000000000" pitchFamily="34" charset="-128"/>
+                  <a:ea typeface="Hiragino Sans W7" panose="020B0400000000000000" pitchFamily="34" charset="-128"/>
+                </a:rPr>
+                <a:t>政策の窓</a:t>
+              </a:r>
+              <a:br>
+                <a:rPr kumimoji="1" lang="en-US" altLang="ja-JP" sz="3200" b="1" dirty="0">
+                  <a:solidFill>
+                    <a:schemeClr val="tx1"/>
+                  </a:solidFill>
+                  <a:latin typeface="Hiragino Sans W7" panose="020B0400000000000000" pitchFamily="34" charset="-128"/>
+                  <a:ea typeface="Hiragino Sans W7" panose="020B0400000000000000" pitchFamily="34" charset="-128"/>
+                </a:rPr>
+              </a:br>
+              <a:r>
+                <a:rPr kumimoji="1" lang="en-US" altLang="ja-JP" dirty="0">
+                  <a:solidFill>
+                    <a:schemeClr val="tx1"/>
+                  </a:solidFill>
+                  <a:latin typeface="Hiragino Sans W4" panose="020B0400000000000000" pitchFamily="34" charset="-128"/>
+                  <a:ea typeface="Hiragino Sans W4" panose="020B0400000000000000" pitchFamily="34" charset="-128"/>
+                </a:rPr>
+                <a:t>(policy window)</a:t>
+              </a:r>
+              <a:endParaRPr kumimoji="1" lang="ja-JP" altLang="en-US">
+                <a:solidFill>
+                  <a:schemeClr val="tx1"/>
+                </a:solidFill>
+                <a:latin typeface="Hiragino Sans W4" panose="020B0400000000000000" pitchFamily="34" charset="-128"/>
+                <a:ea typeface="Hiragino Sans W4" panose="020B0400000000000000" pitchFamily="34" charset="-128"/>
+              </a:endParaRPr>
+            </a:p>
+          </p:txBody>
+        </p:sp>
+        <p:sp>
+          <p:nvSpPr>
+            <p:cNvPr id="10" name="角丸四角形 9">
+              <a:extLst>
+                <a:ext uri="{FF2B5EF4-FFF2-40B4-BE49-F238E27FC236}">
+                  <a16:creationId xmlns:a16="http://schemas.microsoft.com/office/drawing/2014/main" id="{CC0294C4-1AD9-A440-7762-823D959E7E73}"/>
+                </a:ext>
+              </a:extLst>
+            </p:cNvPr>
+            <p:cNvSpPr/>
+            <p:nvPr/>
+          </p:nvSpPr>
+          <p:spPr>
+            <a:xfrm>
+              <a:off x="11021877" y="4134173"/>
+              <a:ext cx="1447800" cy="1332854"/>
+            </a:xfrm>
+            <a:prstGeom prst="roundRect">
+              <a:avLst/>
+            </a:prstGeom>
+            <a:solidFill>
+              <a:schemeClr val="bg1"/>
+            </a:solidFill>
+            <a:ln w="28575"/>
+          </p:spPr>
+          <p:style>
+            <a:lnRef idx="2">
+              <a:schemeClr val="accent1">
+                <a:shade val="15000"/>
+              </a:schemeClr>
+            </a:lnRef>
+            <a:fillRef idx="1">
+              <a:schemeClr val="accent1"/>
+            </a:fillRef>
+            <a:effectRef idx="0">
+              <a:schemeClr val="accent1"/>
+            </a:effectRef>
+            <a:fontRef idx="minor">
+              <a:schemeClr val="lt1"/>
+            </a:fontRef>
+          </p:style>
+          <p:txBody>
+            <a:bodyPr rtlCol="0" anchor="ctr"/>
+            <a:lstStyle/>
+            <a:p>
+              <a:pPr algn="ctr"/>
+              <a:r>
+                <a:rPr kumimoji="1" lang="ja-JP" altLang="en-US" sz="3200" b="1">
+                  <a:solidFill>
+                    <a:schemeClr val="tx1"/>
+                  </a:solidFill>
+                  <a:latin typeface="Hiragino Sans W7" panose="020B0400000000000000" pitchFamily="34" charset="-128"/>
+                  <a:ea typeface="Hiragino Sans W7" panose="020B0400000000000000" pitchFamily="34" charset="-128"/>
+                </a:rPr>
+                <a:t>決定</a:t>
+              </a:r>
+              <a:endParaRPr kumimoji="1" lang="ja-JP" altLang="en-US">
+                <a:solidFill>
+                  <a:schemeClr val="tx1"/>
+                </a:solidFill>
+                <a:latin typeface="Hiragino Sans W4" panose="020B0400000000000000" pitchFamily="34" charset="-128"/>
+                <a:ea typeface="Hiragino Sans W4" panose="020B0400000000000000" pitchFamily="34" charset="-128"/>
+              </a:endParaRPr>
+            </a:p>
+          </p:txBody>
+        </p:sp>
+        <p:sp>
+          <p:nvSpPr>
+            <p:cNvPr id="17" name="下矢印 16">
+              <a:extLst>
+                <a:ext uri="{FF2B5EF4-FFF2-40B4-BE49-F238E27FC236}">
+                  <a16:creationId xmlns:a16="http://schemas.microsoft.com/office/drawing/2014/main" id="{C8344A69-8EB4-8CC8-5026-CFE945034FD3}"/>
+                </a:ext>
+              </a:extLst>
+            </p:cNvPr>
+            <p:cNvSpPr/>
+            <p:nvPr/>
+          </p:nvSpPr>
+          <p:spPr>
+            <a:xfrm rot="16200000">
+              <a:off x="2459421" y="2438398"/>
+              <a:ext cx="880109" cy="4724403"/>
+            </a:xfrm>
+            <a:prstGeom prst="downArrow">
+              <a:avLst/>
+            </a:prstGeom>
+            <a:solidFill>
+              <a:schemeClr val="bg1"/>
+            </a:solidFill>
+            <a:ln w="38100">
+              <a:solidFill>
+                <a:schemeClr val="tx1"/>
+              </a:solidFill>
+            </a:ln>
+          </p:spPr>
+          <p:style>
+            <a:lnRef idx="2">
+              <a:schemeClr val="accent1">
+                <a:shade val="15000"/>
+              </a:schemeClr>
+            </a:lnRef>
+            <a:fillRef idx="1">
+              <a:schemeClr val="accent1"/>
+            </a:fillRef>
+            <a:effectRef idx="0">
+              <a:schemeClr val="accent1"/>
+            </a:effectRef>
+            <a:fontRef idx="minor">
+              <a:schemeClr val="lt1"/>
+            </a:fontRef>
+          </p:style>
+          <p:txBody>
+            <a:bodyPr rtlCol="0" anchor="ctr"/>
+            <a:lstStyle/>
+            <a:p>
+              <a:pPr algn="ctr"/>
+              <a:endParaRPr kumimoji="1" lang="ja-JP" altLang="en-US"/>
+            </a:p>
+          </p:txBody>
+        </p:sp>
+        <p:sp>
+          <p:nvSpPr>
+            <p:cNvPr id="18" name="正方形/長方形 17">
+              <a:extLst>
+                <a:ext uri="{FF2B5EF4-FFF2-40B4-BE49-F238E27FC236}">
+                  <a16:creationId xmlns:a16="http://schemas.microsoft.com/office/drawing/2014/main" id="{2E85282E-F87D-5DE8-CF5B-0F8F1119D527}"/>
+                </a:ext>
+              </a:extLst>
+            </p:cNvPr>
+            <p:cNvSpPr/>
+            <p:nvPr/>
+          </p:nvSpPr>
+          <p:spPr>
+            <a:xfrm>
+              <a:off x="537274" y="1882758"/>
+              <a:ext cx="2559803" cy="468820"/>
+            </a:xfrm>
+            <a:prstGeom prst="rect">
+              <a:avLst/>
+            </a:prstGeom>
+            <a:solidFill>
+              <a:schemeClr val="bg1"/>
+            </a:solidFill>
+            <a:ln w="28575"/>
+          </p:spPr>
+          <p:style>
+            <a:lnRef idx="2">
+              <a:schemeClr val="accent1">
+                <a:shade val="15000"/>
+              </a:schemeClr>
+            </a:lnRef>
+            <a:fillRef idx="1">
+              <a:schemeClr val="accent1"/>
+            </a:fillRef>
+            <a:effectRef idx="0">
+              <a:schemeClr val="accent1"/>
+            </a:effectRef>
+            <a:fontRef idx="minor">
+              <a:schemeClr val="lt1"/>
+            </a:fontRef>
+          </p:style>
+          <p:txBody>
+            <a:bodyPr rtlCol="0" anchor="ctr"/>
+            <a:lstStyle/>
+            <a:p>
+              <a:pPr algn="ctr"/>
+              <a:r>
+                <a:rPr kumimoji="1" lang="ja-JP" altLang="en-US" sz="3200" b="1">
+                  <a:solidFill>
+                    <a:schemeClr val="tx1"/>
+                  </a:solidFill>
+                  <a:latin typeface="Hiragino Sans W7" panose="020B0400000000000000" pitchFamily="34" charset="-128"/>
+                  <a:ea typeface="Hiragino Sans W7" panose="020B0400000000000000" pitchFamily="34" charset="-128"/>
+                </a:rPr>
+                <a:t>問題</a:t>
+              </a:r>
+              <a:r>
+                <a:rPr kumimoji="1" lang="ja-JP" altLang="en-US" sz="3200">
+                  <a:solidFill>
+                    <a:schemeClr val="tx1"/>
+                  </a:solidFill>
+                  <a:latin typeface="Hiragino Sans W4" panose="020B0400000000000000" pitchFamily="34" charset="-128"/>
+                  <a:ea typeface="Hiragino Sans W4" panose="020B0400000000000000" pitchFamily="34" charset="-128"/>
+                </a:rPr>
+                <a:t>の流れ</a:t>
+              </a:r>
+              <a:endParaRPr kumimoji="1" lang="ja-JP" altLang="en-US">
+                <a:solidFill>
+                  <a:schemeClr val="tx1"/>
+                </a:solidFill>
+                <a:latin typeface="Hiragino Sans W4" panose="020B0400000000000000" pitchFamily="34" charset="-128"/>
+                <a:ea typeface="Hiragino Sans W4" panose="020B0400000000000000" pitchFamily="34" charset="-128"/>
+              </a:endParaRPr>
+            </a:p>
+          </p:txBody>
+        </p:sp>
+        <p:sp>
+          <p:nvSpPr>
+            <p:cNvPr id="19" name="下矢印 18">
+              <a:extLst>
+                <a:ext uri="{FF2B5EF4-FFF2-40B4-BE49-F238E27FC236}">
+                  <a16:creationId xmlns:a16="http://schemas.microsoft.com/office/drawing/2014/main" id="{BA46AD9B-8A2A-76B3-17C4-CB56AB8F5FD0}"/>
+                </a:ext>
+              </a:extLst>
+            </p:cNvPr>
+            <p:cNvSpPr/>
+            <p:nvPr/>
+          </p:nvSpPr>
+          <p:spPr>
+            <a:xfrm rot="16200000">
+              <a:off x="2459421" y="195022"/>
+              <a:ext cx="880109" cy="4724403"/>
+            </a:xfrm>
+            <a:prstGeom prst="downArrow">
+              <a:avLst/>
+            </a:prstGeom>
+            <a:solidFill>
+              <a:schemeClr val="bg1"/>
+            </a:solidFill>
+            <a:ln w="38100">
+              <a:solidFill>
+                <a:schemeClr val="tx1"/>
+              </a:solidFill>
+            </a:ln>
+          </p:spPr>
+          <p:style>
+            <a:lnRef idx="2">
+              <a:schemeClr val="accent1">
+                <a:shade val="15000"/>
+              </a:schemeClr>
+            </a:lnRef>
+            <a:fillRef idx="1">
+              <a:schemeClr val="accent1"/>
+            </a:fillRef>
+            <a:effectRef idx="0">
+              <a:schemeClr val="accent1"/>
+            </a:effectRef>
+            <a:fontRef idx="minor">
+              <a:schemeClr val="lt1"/>
+            </a:fontRef>
+          </p:style>
+          <p:txBody>
+            <a:bodyPr rtlCol="0" anchor="ctr"/>
+            <a:lstStyle/>
+            <a:p>
+              <a:pPr algn="ctr"/>
+              <a:endParaRPr kumimoji="1" lang="ja-JP" altLang="en-US"/>
+            </a:p>
+          </p:txBody>
+        </p:sp>
+        <p:sp>
+          <p:nvSpPr>
+            <p:cNvPr id="20" name="正方形/長方形 19">
+              <a:extLst>
+                <a:ext uri="{FF2B5EF4-FFF2-40B4-BE49-F238E27FC236}">
+                  <a16:creationId xmlns:a16="http://schemas.microsoft.com/office/drawing/2014/main" id="{4EBE2C35-4C98-7B28-2F1F-664915C7F50B}"/>
+                </a:ext>
+              </a:extLst>
+            </p:cNvPr>
+            <p:cNvSpPr/>
+            <p:nvPr/>
+          </p:nvSpPr>
+          <p:spPr>
+            <a:xfrm>
+              <a:off x="537274" y="6598122"/>
+              <a:ext cx="2559803" cy="468820"/>
+            </a:xfrm>
+            <a:prstGeom prst="rect">
+              <a:avLst/>
+            </a:prstGeom>
+            <a:solidFill>
+              <a:schemeClr val="bg1"/>
+            </a:solidFill>
+            <a:ln w="28575"/>
+          </p:spPr>
+          <p:style>
+            <a:lnRef idx="2">
+              <a:schemeClr val="accent1">
+                <a:shade val="15000"/>
+              </a:schemeClr>
+            </a:lnRef>
+            <a:fillRef idx="1">
+              <a:schemeClr val="accent1"/>
+            </a:fillRef>
+            <a:effectRef idx="0">
+              <a:schemeClr val="accent1"/>
+            </a:effectRef>
+            <a:fontRef idx="minor">
+              <a:schemeClr val="lt1"/>
+            </a:fontRef>
+          </p:style>
+          <p:txBody>
+            <a:bodyPr rtlCol="0" anchor="ctr"/>
+            <a:lstStyle/>
+            <a:p>
+              <a:pPr algn="ctr"/>
+              <a:r>
+                <a:rPr kumimoji="1" lang="ja-JP" altLang="en-US" sz="3200" b="1">
+                  <a:solidFill>
+                    <a:schemeClr val="tx1"/>
+                  </a:solidFill>
+                  <a:latin typeface="Hiragino Sans W7" panose="020B0400000000000000" pitchFamily="34" charset="-128"/>
+                  <a:ea typeface="Hiragino Sans W7" panose="020B0400000000000000" pitchFamily="34" charset="-128"/>
+                </a:rPr>
+                <a:t>政治</a:t>
+              </a:r>
+              <a:r>
+                <a:rPr kumimoji="1" lang="ja-JP" altLang="en-US" sz="3200">
+                  <a:solidFill>
+                    <a:schemeClr val="tx1"/>
+                  </a:solidFill>
+                  <a:latin typeface="Hiragino Sans W4" panose="020B0400000000000000" pitchFamily="34" charset="-128"/>
+                  <a:ea typeface="Hiragino Sans W4" panose="020B0400000000000000" pitchFamily="34" charset="-128"/>
+                </a:rPr>
+                <a:t>の流れ</a:t>
+              </a:r>
+              <a:endParaRPr kumimoji="1" lang="ja-JP" altLang="en-US">
+                <a:solidFill>
+                  <a:schemeClr val="tx1"/>
+                </a:solidFill>
+                <a:latin typeface="Hiragino Sans W4" panose="020B0400000000000000" pitchFamily="34" charset="-128"/>
+                <a:ea typeface="Hiragino Sans W4" panose="020B0400000000000000" pitchFamily="34" charset="-128"/>
+              </a:endParaRPr>
+            </a:p>
+          </p:txBody>
+        </p:sp>
+        <p:sp>
+          <p:nvSpPr>
+            <p:cNvPr id="21" name="下矢印 20">
+              <a:extLst>
+                <a:ext uri="{FF2B5EF4-FFF2-40B4-BE49-F238E27FC236}">
+                  <a16:creationId xmlns:a16="http://schemas.microsoft.com/office/drawing/2014/main" id="{4C658729-3AA9-CA97-E798-53B5E5FD0684}"/>
+                </a:ext>
+              </a:extLst>
+            </p:cNvPr>
+            <p:cNvSpPr/>
+            <p:nvPr/>
+          </p:nvSpPr>
+          <p:spPr>
+            <a:xfrm rot="16200000">
+              <a:off x="2459421" y="4910386"/>
+              <a:ext cx="880109" cy="4724403"/>
+            </a:xfrm>
+            <a:prstGeom prst="downArrow">
+              <a:avLst/>
+            </a:prstGeom>
+            <a:solidFill>
+              <a:schemeClr val="bg1"/>
+            </a:solidFill>
+            <a:ln w="38100">
+              <a:solidFill>
+                <a:schemeClr val="tx1"/>
+              </a:solidFill>
+            </a:ln>
+          </p:spPr>
+          <p:style>
+            <a:lnRef idx="2">
+              <a:schemeClr val="accent1">
+                <a:shade val="15000"/>
+              </a:schemeClr>
+            </a:lnRef>
+            <a:fillRef idx="1">
+              <a:schemeClr val="accent1"/>
+            </a:fillRef>
+            <a:effectRef idx="0">
+              <a:schemeClr val="accent1"/>
+            </a:effectRef>
+            <a:fontRef idx="minor">
+              <a:schemeClr val="lt1"/>
+            </a:fontRef>
+          </p:style>
+          <p:txBody>
+            <a:bodyPr rtlCol="0" anchor="ctr"/>
+            <a:lstStyle/>
+            <a:p>
+              <a:pPr algn="ctr"/>
+              <a:endParaRPr kumimoji="1" lang="ja-JP" altLang="en-US"/>
+            </a:p>
+          </p:txBody>
+        </p:sp>
+        <p:cxnSp>
+          <p:nvCxnSpPr>
+            <p:cNvPr id="23" name="直線矢印コネクタ 22">
+              <a:extLst>
+                <a:ext uri="{FF2B5EF4-FFF2-40B4-BE49-F238E27FC236}">
+                  <a16:creationId xmlns:a16="http://schemas.microsoft.com/office/drawing/2014/main" id="{717AC6E2-22BB-6F67-793D-9970AB4C3FD2}"/>
+                </a:ext>
+              </a:extLst>
+            </p:cNvPr>
+            <p:cNvCxnSpPr>
+              <a:cxnSpLocks/>
+              <a:stCxn id="19" idx="2"/>
+              <a:endCxn id="9" idx="1"/>
+            </p:cNvCxnSpPr>
+            <p:nvPr/>
+          </p:nvCxnSpPr>
+          <p:spPr>
+            <a:xfrm>
+              <a:off x="5261677" y="2557223"/>
+              <a:ext cx="1976029" cy="2243377"/>
+            </a:xfrm>
+            <a:prstGeom prst="straightConnector1">
+              <a:avLst/>
+            </a:prstGeom>
+            <a:ln w="76200">
+              <a:solidFill>
+                <a:schemeClr val="tx1"/>
+              </a:solidFill>
+              <a:round/>
+              <a:headEnd type="none" w="med" len="med"/>
+              <a:tailEnd type="stealth" w="med" len="med"/>
+            </a:ln>
+          </p:spPr>
+          <p:style>
+            <a:lnRef idx="1">
+              <a:schemeClr val="accent1"/>
+            </a:lnRef>
+            <a:fillRef idx="0">
+              <a:schemeClr val="accent1"/>
+            </a:fillRef>
+            <a:effectRef idx="0">
+              <a:schemeClr val="accent1"/>
+            </a:effectRef>
+            <a:fontRef idx="minor">
+              <a:schemeClr val="tx1"/>
+            </a:fontRef>
+          </p:style>
+        </p:cxnSp>
+        <p:cxnSp>
+          <p:nvCxnSpPr>
+            <p:cNvPr id="24" name="直線矢印コネクタ 23">
+              <a:extLst>
+                <a:ext uri="{FF2B5EF4-FFF2-40B4-BE49-F238E27FC236}">
+                  <a16:creationId xmlns:a16="http://schemas.microsoft.com/office/drawing/2014/main" id="{6F9389FD-F0C9-E883-5806-24F0382A9273}"/>
+                </a:ext>
+              </a:extLst>
+            </p:cNvPr>
+            <p:cNvCxnSpPr>
+              <a:cxnSpLocks/>
+              <a:stCxn id="17" idx="2"/>
+              <a:endCxn id="9" idx="1"/>
+            </p:cNvCxnSpPr>
+            <p:nvPr/>
+          </p:nvCxnSpPr>
+          <p:spPr>
+            <a:xfrm>
+              <a:off x="5261677" y="4800599"/>
+              <a:ext cx="1976029" cy="1"/>
+            </a:xfrm>
+            <a:prstGeom prst="straightConnector1">
+              <a:avLst/>
+            </a:prstGeom>
+            <a:ln w="76200">
+              <a:solidFill>
+                <a:schemeClr val="tx1"/>
+              </a:solidFill>
+              <a:round/>
+              <a:headEnd type="none" w="med" len="med"/>
+              <a:tailEnd type="stealth" w="med" len="med"/>
+            </a:ln>
+          </p:spPr>
+          <p:style>
+            <a:lnRef idx="1">
+              <a:schemeClr val="accent1"/>
+            </a:lnRef>
+            <a:fillRef idx="0">
+              <a:schemeClr val="accent1"/>
+            </a:fillRef>
+            <a:effectRef idx="0">
+              <a:schemeClr val="accent1"/>
+            </a:effectRef>
+            <a:fontRef idx="minor">
+              <a:schemeClr val="tx1"/>
+            </a:fontRef>
+          </p:style>
+        </p:cxnSp>
+        <p:cxnSp>
+          <p:nvCxnSpPr>
+            <p:cNvPr id="27" name="直線矢印コネクタ 26">
+              <a:extLst>
+                <a:ext uri="{FF2B5EF4-FFF2-40B4-BE49-F238E27FC236}">
+                  <a16:creationId xmlns:a16="http://schemas.microsoft.com/office/drawing/2014/main" id="{8029D2FC-F467-9BF0-3867-EDF1910559AB}"/>
+                </a:ext>
+              </a:extLst>
+            </p:cNvPr>
+            <p:cNvCxnSpPr>
+              <a:cxnSpLocks/>
+              <a:stCxn id="21" idx="2"/>
+              <a:endCxn id="9" idx="1"/>
+            </p:cNvCxnSpPr>
+            <p:nvPr/>
+          </p:nvCxnSpPr>
+          <p:spPr>
+            <a:xfrm flipV="1">
+              <a:off x="5261677" y="4800600"/>
+              <a:ext cx="1976029" cy="2471987"/>
+            </a:xfrm>
+            <a:prstGeom prst="straightConnector1">
+              <a:avLst/>
+            </a:prstGeom>
+            <a:ln w="76200">
+              <a:solidFill>
+                <a:schemeClr val="tx1"/>
+              </a:solidFill>
+              <a:round/>
+              <a:headEnd type="none" w="med" len="med"/>
+              <a:tailEnd type="stealth" w="med" len="med"/>
+            </a:ln>
+          </p:spPr>
+          <p:style>
+            <a:lnRef idx="1">
+              <a:schemeClr val="accent1"/>
+            </a:lnRef>
+            <a:fillRef idx="0">
+              <a:schemeClr val="accent1"/>
+            </a:fillRef>
+            <a:effectRef idx="0">
+              <a:schemeClr val="accent1"/>
+            </a:effectRef>
+            <a:fontRef idx="minor">
+              <a:schemeClr val="tx1"/>
+            </a:fontRef>
+          </p:style>
+        </p:cxnSp>
+        <p:sp>
+          <p:nvSpPr>
+            <p:cNvPr id="30" name="下矢印 29">
+              <a:extLst>
+                <a:ext uri="{FF2B5EF4-FFF2-40B4-BE49-F238E27FC236}">
+                  <a16:creationId xmlns:a16="http://schemas.microsoft.com/office/drawing/2014/main" id="{0B9AE945-F070-6372-1844-033C5F193269}"/>
+                </a:ext>
+              </a:extLst>
+            </p:cNvPr>
+            <p:cNvSpPr/>
+            <p:nvPr/>
+          </p:nvSpPr>
+          <p:spPr>
+            <a:xfrm rot="16200000">
+              <a:off x="9850819" y="4269780"/>
+              <a:ext cx="880109" cy="1084882"/>
+            </a:xfrm>
+            <a:prstGeom prst="downArrow">
+              <a:avLst/>
+            </a:prstGeom>
+            <a:solidFill>
+              <a:schemeClr val="bg1"/>
+            </a:solidFill>
+            <a:ln w="38100">
+              <a:solidFill>
+                <a:schemeClr val="tx1"/>
+              </a:solidFill>
+            </a:ln>
+          </p:spPr>
+          <p:style>
+            <a:lnRef idx="2">
+              <a:schemeClr val="accent1">
+                <a:shade val="15000"/>
+              </a:schemeClr>
+            </a:lnRef>
+            <a:fillRef idx="1">
+              <a:schemeClr val="accent1"/>
+            </a:fillRef>
+            <a:effectRef idx="0">
+              <a:schemeClr val="accent1"/>
+            </a:effectRef>
+            <a:fontRef idx="minor">
+              <a:schemeClr val="lt1"/>
+            </a:fontRef>
+          </p:style>
+          <p:txBody>
+            <a:bodyPr rtlCol="0" anchor="ctr"/>
+            <a:lstStyle/>
+            <a:p>
+              <a:pPr algn="ctr"/>
+              <a:endParaRPr kumimoji="1" lang="ja-JP" altLang="en-US"/>
+            </a:p>
+          </p:txBody>
+        </p:sp>
+        <p:sp>
+          <p:nvSpPr>
+            <p:cNvPr id="31" name="正方形/長方形 30">
+              <a:extLst>
+                <a:ext uri="{FF2B5EF4-FFF2-40B4-BE49-F238E27FC236}">
+                  <a16:creationId xmlns:a16="http://schemas.microsoft.com/office/drawing/2014/main" id="{619F8B9D-B854-8B2D-6D69-F1CA308A6A81}"/>
+                </a:ext>
+              </a:extLst>
+            </p:cNvPr>
+            <p:cNvSpPr/>
+            <p:nvPr/>
+          </p:nvSpPr>
+          <p:spPr>
+            <a:xfrm>
+              <a:off x="6492496" y="6619426"/>
+              <a:ext cx="3799668" cy="891731"/>
+            </a:xfrm>
+            <a:prstGeom prst="rect">
+              <a:avLst/>
+            </a:prstGeom>
+            <a:solidFill>
+              <a:schemeClr val="bg1"/>
+            </a:solidFill>
+            <a:ln w="28575"/>
+          </p:spPr>
+          <p:style>
+            <a:lnRef idx="2">
+              <a:schemeClr val="accent1">
+                <a:shade val="15000"/>
+              </a:schemeClr>
+            </a:lnRef>
+            <a:fillRef idx="1">
+              <a:schemeClr val="accent1"/>
+            </a:fillRef>
+            <a:effectRef idx="0">
+              <a:schemeClr val="accent1"/>
+            </a:effectRef>
+            <a:fontRef idx="minor">
+              <a:schemeClr val="lt1"/>
+            </a:fontRef>
+          </p:style>
+          <p:txBody>
+            <a:bodyPr rtlCol="0" anchor="ctr"/>
+            <a:lstStyle/>
+            <a:p>
+              <a:pPr algn="ctr"/>
+              <a:r>
+                <a:rPr kumimoji="1" lang="ja-JP" altLang="en-US" sz="3200" b="1">
+                  <a:solidFill>
+                    <a:schemeClr val="tx1"/>
+                  </a:solidFill>
+                  <a:latin typeface="Hiragino Sans W7" panose="020B0400000000000000" pitchFamily="34" charset="-128"/>
+                  <a:ea typeface="Hiragino Sans W7" panose="020B0400000000000000" pitchFamily="34" charset="-128"/>
+                </a:rPr>
+                <a:t>政策企業家</a:t>
+              </a:r>
+              <a:endParaRPr kumimoji="1" lang="en-US" altLang="ja-JP" sz="3200" b="1" dirty="0">
+                <a:solidFill>
+                  <a:schemeClr val="tx1"/>
+                </a:solidFill>
+                <a:latin typeface="Hiragino Sans W7" panose="020B0400000000000000" pitchFamily="34" charset="-128"/>
+                <a:ea typeface="Hiragino Sans W7" panose="020B0400000000000000" pitchFamily="34" charset="-128"/>
+              </a:endParaRPr>
+            </a:p>
+            <a:p>
+              <a:pPr algn="ctr"/>
+              <a:r>
+                <a:rPr kumimoji="1" lang="en-US" altLang="ja-JP" sz="2400" dirty="0">
+                  <a:solidFill>
+                    <a:schemeClr val="tx1"/>
+                  </a:solidFill>
+                  <a:latin typeface="Hiragino Sans W4" panose="020B0400000000000000" pitchFamily="34" charset="-128"/>
+                  <a:ea typeface="Hiragino Sans W4" panose="020B0400000000000000" pitchFamily="34" charset="-128"/>
+                </a:rPr>
+                <a:t>(policy entrepreneur</a:t>
+              </a:r>
+              <a:r>
+                <a:rPr kumimoji="1" lang="ja-JP" altLang="en-US" sz="2400">
+                  <a:solidFill>
+                    <a:schemeClr val="tx1"/>
+                  </a:solidFill>
+                  <a:latin typeface="Hiragino Sans W4" panose="020B0400000000000000" pitchFamily="34" charset="-128"/>
+                  <a:ea typeface="Hiragino Sans W4" panose="020B0400000000000000" pitchFamily="34" charset="-128"/>
+                </a:rPr>
+                <a:t>）</a:t>
+              </a:r>
+              <a:endParaRPr kumimoji="1" lang="ja-JP" altLang="en-US" sz="1400">
+                <a:solidFill>
+                  <a:schemeClr val="tx1"/>
+                </a:solidFill>
+                <a:latin typeface="Hiragino Sans W4" panose="020B0400000000000000" pitchFamily="34" charset="-128"/>
+                <a:ea typeface="Hiragino Sans W4" panose="020B0400000000000000" pitchFamily="34" charset="-128"/>
+              </a:endParaRPr>
+            </a:p>
+          </p:txBody>
+        </p:sp>
+        <p:sp>
+          <p:nvSpPr>
+            <p:cNvPr id="32" name="下矢印 31">
+              <a:extLst>
+                <a:ext uri="{FF2B5EF4-FFF2-40B4-BE49-F238E27FC236}">
+                  <a16:creationId xmlns:a16="http://schemas.microsoft.com/office/drawing/2014/main" id="{DCDED3ED-6502-0F0C-A47C-F827D363694E}"/>
+                </a:ext>
+              </a:extLst>
+            </p:cNvPr>
+            <p:cNvSpPr/>
+            <p:nvPr/>
+          </p:nvSpPr>
+          <p:spPr>
+            <a:xfrm rot="10800000">
+              <a:off x="7952275" y="5597361"/>
+              <a:ext cx="880109" cy="891730"/>
+            </a:xfrm>
+            <a:prstGeom prst="downArrow">
+              <a:avLst/>
+            </a:prstGeom>
+            <a:solidFill>
+              <a:schemeClr val="bg1"/>
+            </a:solidFill>
+            <a:ln w="38100">
+              <a:solidFill>
+                <a:schemeClr val="tx1"/>
+              </a:solidFill>
+            </a:ln>
+          </p:spPr>
+          <p:style>
+            <a:lnRef idx="2">
+              <a:schemeClr val="accent1">
+                <a:shade val="15000"/>
+              </a:schemeClr>
+            </a:lnRef>
+            <a:fillRef idx="1">
+              <a:schemeClr val="accent1"/>
+            </a:fillRef>
+            <a:effectRef idx="0">
+              <a:schemeClr val="accent1"/>
+            </a:effectRef>
+            <a:fontRef idx="minor">
+              <a:schemeClr val="lt1"/>
+            </a:fontRef>
+          </p:style>
+          <p:txBody>
+            <a:bodyPr rtlCol="0" anchor="ctr"/>
+            <a:lstStyle/>
+            <a:p>
+              <a:pPr algn="ctr"/>
+              <a:endParaRPr kumimoji="1" lang="ja-JP" altLang="en-US"/>
+            </a:p>
+          </p:txBody>
+        </p:sp>
+      </p:grpSp>
+    </p:spTree>
+    <p:extLst>
+      <p:ext uri="{BB962C8B-B14F-4D97-AF65-F5344CB8AC3E}">
+        <p14:creationId xmlns:p14="http://schemas.microsoft.com/office/powerpoint/2010/main" val="1959176590"/>
+      </p:ext>
+    </p:extLst>
+  </p:cSld>
+  <p:clrMapOvr>
+    <a:masterClrMapping/>
+  </p:clrMapOvr>
+</p:sld>
+</file>
+
 <file path=ppt/slides/slide3.xml><?xml version="1.0" encoding="utf-8"?>
 <p:sld xmlns:a="http://schemas.openxmlformats.org/drawingml/2006/main" xmlns:r="http://schemas.openxmlformats.org/officeDocument/2006/relationships" xmlns:p="http://schemas.openxmlformats.org/presentationml/2006/main">
   <p:cSld>
